--- a/docs/從HTML到SaaS_AI開發技巧回顧.pptx
+++ b/docs/從HTML到SaaS_AI開發技巧回顧.pptx
@@ -23,6 +23,16 @@
     <p:sldId id="271" r:id="rId22"/>
     <p:sldId id="272" r:id="rId23"/>
     <p:sldId id="273" r:id="rId24"/>
+    <p:sldId id="274" r:id="rId25"/>
+    <p:sldId id="275" r:id="rId26"/>
+    <p:sldId id="276" r:id="rId27"/>
+    <p:sldId id="277" r:id="rId28"/>
+    <p:sldId id="278" r:id="rId29"/>
+    <p:sldId id="279" r:id="rId30"/>
+    <p:sldId id="280" r:id="rId31"/>
+    <p:sldId id="281" r:id="rId32"/>
+    <p:sldId id="282" r:id="rId33"/>
+    <p:sldId id="283" r:id="rId34"/>
   </p:sldIdLst>
   <p:sldSz cx="12191695" cy="6858000" type="screen4x3"/>
   <p:notesSz cx="6858000" cy="9144000"/>
@@ -3121,7 +3131,7 @@
         </p:nvSpPr>
         <p:spPr>
           <a:xfrm>
-            <a:off x="822960" y="2103120"/>
+            <a:off x="822960" y="1920240"/>
             <a:ext cx="10515600" cy="2377440"/>
           </a:xfrm>
           <a:prstGeom prst="rect">
@@ -3131,12 +3141,12 @@
         </p:spPr>
         <p:txBody>
           <a:bodyPr wrap="square">
-            <a:spAutoFit/>
-          </a:bodyPr>
-          <a:lstStyle/>
-          <a:p>
-            <a:r>
-              <a:rPr sz="5200" b="1">
+            <a:normAutofit/>
+          </a:bodyPr>
+          <a:lstStyle/>
+          <a:p>
+            <a:r>
+              <a:rPr sz="5000" b="1">
                 <a:solidFill>
                   <a:srgbClr val="1C1F26"/>
                 </a:solidFill>
@@ -3156,7 +3166,7 @@
         </p:nvSpPr>
         <p:spPr>
           <a:xfrm>
-            <a:off x="822960" y="4114800"/>
+            <a:off x="822960" y="3886200"/>
             <a:ext cx="10058400" cy="1097280"/>
           </a:xfrm>
           <a:prstGeom prst="rect">
@@ -3166,7 +3176,7 @@
         </p:spPr>
         <p:txBody>
           <a:bodyPr wrap="square">
-            <a:spAutoFit/>
+            <a:normAutofit/>
           </a:bodyPr>
           <a:lstStyle/>
           <a:p>
@@ -3175,9 +3185,9 @@
                 <a:solidFill>
                   <a:srgbClr val="55596A"/>
                 </a:solidFill>
-                <a:latin typeface="Avenir Next"/>
-              </a:rPr>
-              <a:t>兩個月・四個世代・241 個 commit 的 AI 開發技巧回顧</a:t>
+                <a:latin typeface="Arial"/>
+              </a:rPr>
+              <a:t>一個銀行 AP 工程師，用 AI 摸索出來的兩個月開發旅程</a:t>
             </a:r>
           </a:p>
         </p:txBody>
@@ -3209,7 +3219,7 @@
                 <a:solidFill>
                   <a:srgbClr val="55596A"/>
                 </a:solidFill>
-                <a:latin typeface="Menlo"/>
+                <a:latin typeface="Courier New"/>
               </a:rPr>
               <a:t>2026-06-08 → 2026-08-10   ·   Spring-MissionBoard 及其前身專案</a:t>
             </a:r>
@@ -3269,9 +3279,9 @@
                 <a:solidFill>
                   <a:srgbClr val="1F6F6B"/>
                 </a:solidFill>
-                <a:latin typeface="Menlo"/>
-              </a:rPr>
-              <a:t>AI TECHNIQUE</a:t>
+                <a:latin typeface="Courier New"/>
+              </a:rPr>
+              <a:t>PHASE 3   ·   2026-07-03 → 07-08</a:t>
             </a:r>
           </a:p>
         </p:txBody>
@@ -3299,13 +3309,13 @@
           <a:lstStyle/>
           <a:p>
             <a:r>
-              <a:rPr sz="3000" b="1">
+              <a:rPr sz="3600" b="1">
                 <a:solidFill>
                   <a:srgbClr val="1C1F26"/>
                 </a:solidFill>
                 <a:latin typeface="Georgia"/>
               </a:rPr>
-              <a:t>動手寫規格之前，先派兩個 agent 去讀舊專案</a:t>
+              <a:t>Spring-TaskFlow：拆出獨立的看板系統</a:t>
             </a:r>
           </a:p>
         </p:txBody>
@@ -3319,7 +3329,41 @@
         <p:spPr>
           <a:xfrm>
             <a:off x="685800" y="1691640"/>
-            <a:ext cx="10607040" cy="1371600"/>
+            <a:ext cx="10058400" cy="365760"/>
+          </a:xfrm>
+          <a:prstGeom prst="rect">
+            <a:avLst/>
+          </a:prstGeom>
+          <a:noFill/>
+        </p:spPr>
+        <p:txBody>
+          <a:bodyPr wrap="none">
+            <a:spAutoFit/>
+          </a:bodyPr>
+          <a:lstStyle/>
+          <a:p>
+            <a:r>
+              <a:rPr sz="1400">
+                <a:solidFill>
+                  <a:srgbClr val="55596A"/>
+                </a:solidFill>
+                <a:latin typeface="Courier New"/>
+              </a:rPr>
+              <a:t>32 commits  ·  主體一天內完成</a:t>
+            </a:r>
+          </a:p>
+        </p:txBody>
+      </p:sp>
+      <p:sp>
+        <p:nvSpPr>
+          <p:cNvPr id="5" name="TextBox 4"/>
+          <p:cNvSpPr txBox="1"/>
+          <p:nvPr/>
+        </p:nvSpPr>
+        <p:spPr>
+          <a:xfrm>
+            <a:off x="685800" y="2148840"/>
+            <a:ext cx="10607040" cy="4206240"/>
           </a:xfrm>
           <a:prstGeom prst="rect">
             <a:avLst/>
@@ -3328,7 +3372,7 @@
         </p:spPr>
         <p:txBody>
           <a:bodyPr wrap="square">
-            <a:spAutoFit/>
+            <a:normAutofit/>
           </a:bodyPr>
           <a:lstStyle/>
           <a:p>
@@ -3338,13 +3382,13 @@
               </a:spcAft>
             </a:pPr>
             <a:r>
-              <a:rPr sz="1800">
-                <a:solidFill>
-                  <a:srgbClr val="1C1F26"/>
-                </a:solidFill>
-                <a:latin typeface="Avenir Next"/>
-              </a:rPr>
-              <a:t>—  brainstorming 前平行派 2 個 Explore agent，各自分析 WbsScaff 與 TaskFlow 架構</a:t>
+              <a:rPr sz="2000">
+                <a:solidFill>
+                  <a:srgbClr val="1C1F26"/>
+                </a:solidFill>
+                <a:latin typeface="Arial"/>
+              </a:rPr>
+              <a:t>—  策略很簡單：把 WbsScaff 的架構跟畫面風格整套搬過來，只換掉核心功能</a:t>
             </a:r>
           </a:p>
           <a:p>
@@ -3354,284 +3398,45 @@
               </a:spcAft>
             </a:pPr>
             <a:r>
-              <a:rPr sz="1800">
-                <a:solidFill>
-                  <a:srgbClr val="1C1F26"/>
-                </a:solidFill>
-                <a:latin typeface="Avenir Next"/>
-              </a:rPr>
-              <a:t>—  4 個子專案、24 個任務全走 TDD：先寫會失敗的測試，跑過確認真的失敗，才開始實作</a:t>
-            </a:r>
-          </a:p>
-        </p:txBody>
-      </p:sp>
-      <p:sp>
-        <p:nvSpPr>
-          <p:cNvPr id="5" name="Rectangle 4"/>
-          <p:cNvSpPr/>
-          <p:nvPr/>
-        </p:nvSpPr>
-        <p:spPr>
-          <a:xfrm>
-            <a:off x="594360" y="3108960"/>
-            <a:ext cx="30000" cy="1280160"/>
-          </a:xfrm>
-          <a:prstGeom prst="rect">
-            <a:avLst/>
-          </a:prstGeom>
-          <a:solidFill>
-            <a:srgbClr val="B3791F"/>
-          </a:solidFill>
-          <a:ln>
-            <a:noFill/>
-          </a:ln>
-        </p:spPr>
-        <p:style>
-          <a:lnRef idx="1">
-            <a:schemeClr val="accent1"/>
-          </a:lnRef>
-          <a:fillRef idx="3">
-            <a:schemeClr val="accent1"/>
-          </a:fillRef>
-          <a:effectRef idx="2">
-            <a:schemeClr val="accent1"/>
-          </a:effectRef>
-          <a:fontRef idx="minor">
-            <a:schemeClr val="lt1"/>
-          </a:fontRef>
-        </p:style>
-        <p:txBody>
-          <a:bodyPr rtlCol="0" anchor="ctr"/>
-          <a:lstStyle/>
-          <a:p>
-            <a:pPr algn="ctr"/>
-          </a:p>
-        </p:txBody>
-      </p:sp>
-      <p:sp>
-        <p:nvSpPr>
-          <p:cNvPr id="6" name="TextBox 5"/>
-          <p:cNvSpPr txBox="1"/>
-          <p:nvPr/>
-        </p:nvSpPr>
-        <p:spPr>
-          <a:xfrm>
-            <a:off x="822960" y="3108960"/>
-            <a:ext cx="10515600" cy="1371600"/>
-          </a:xfrm>
-          <a:prstGeom prst="rect">
-            <a:avLst/>
-          </a:prstGeom>
-          <a:noFill/>
-        </p:spPr>
-        <p:txBody>
-          <a:bodyPr wrap="square">
-            <a:spAutoFit/>
-          </a:bodyPr>
-          <a:lstStyle/>
-          <a:p>
-            <a:r>
-              <a:rPr i="1" sz="1700">
-                <a:solidFill>
-                  <a:srgbClr val="1C1F26"/>
-                </a:solidFill>
-                <a:latin typeface="Georgia"/>
-              </a:rPr>
-              <a:t>“兩個舊專案技術棧同構，等於已經幫你驗證過八成的基礎設施；真正的新東西只有「節點即任務」的三層資料模型和四檢視前端。”</a:t>
+              <a:rPr sz="2000">
+                <a:solidFill>
+                  <a:srgbClr val="1C1F26"/>
+                </a:solidFill>
+                <a:latin typeface="Arial"/>
+              </a:rPr>
+              <a:t>—  核心功能從「樹狀編輯」換成「看板拖曳卡片」</a:t>
             </a:r>
           </a:p>
           <a:p>
             <a:pPr>
-              <a:spcBef>
-                <a:spcPts val="600"/>
-              </a:spcBef>
+              <a:spcAft>
+                <a:spcPts val="1400"/>
+              </a:spcAft>
             </a:pPr>
             <a:r>
-              <a:rPr sz="1100">
-                <a:solidFill>
-                  <a:srgbClr val="55596A"/>
-                </a:solidFill>
-                <a:latin typeface="Menlo"/>
-              </a:rPr>
-              <a:t>— brainstorming session, 2026-07-17</a:t>
-            </a:r>
-          </a:p>
-        </p:txBody>
-      </p:sp>
-      <p:sp>
-        <p:nvSpPr>
-          <p:cNvPr id="7" name="Rounded Rectangle 6"/>
-          <p:cNvSpPr/>
-          <p:nvPr/>
-        </p:nvSpPr>
-        <p:spPr>
-          <a:xfrm>
-            <a:off x="685800" y="4754880"/>
-            <a:ext cx="5120640" cy="1737360"/>
-          </a:xfrm>
-          <a:prstGeom prst="roundRect">
-            <a:avLst>
-              <a:gd name="adj" fmla="val 4000"/>
-            </a:avLst>
-          </a:prstGeom>
-          <a:solidFill>
-            <a:srgbClr val="FFFFFF"/>
-          </a:solidFill>
-          <a:ln w="12700">
-            <a:solidFill>
-              <a:srgbClr val="D9D7CB"/>
-            </a:solidFill>
-          </a:ln>
-          <a:effectLst/>
-        </p:spPr>
-        <p:style>
-          <a:lnRef idx="1">
-            <a:schemeClr val="accent1"/>
-          </a:lnRef>
-          <a:fillRef idx="3">
-            <a:schemeClr val="accent1"/>
-          </a:fillRef>
-          <a:effectRef idx="2">
-            <a:schemeClr val="accent1"/>
-          </a:effectRef>
-          <a:fontRef idx="minor">
-            <a:schemeClr val="lt1"/>
-          </a:fontRef>
-        </p:style>
-        <p:txBody>
-          <a:bodyPr rtlCol="0" anchor="ctr" wrap="square" lIns="228600" rIns="228600" tIns="182880" bIns="182880"/>
-          <a:lstStyle/>
-          <a:p>
-            <a:pPr algn="ctr"/>
-            <a:r>
-              <a:rPr sz="1100" b="1">
-                <a:solidFill>
-                  <a:srgbClr val="AB4030"/>
-                </a:solidFill>
-                <a:latin typeface="Menlo"/>
-              </a:rPr>
-              <a:t>B / AUTH</a:t>
+              <a:rPr sz="2000">
+                <a:solidFill>
+                  <a:srgbClr val="1C1F26"/>
+                </a:solidFill>
+                <a:latin typeface="Arial"/>
+              </a:rPr>
+              <a:t>—  登入、部門權限、頁面外殼幾乎都是繼承來的，省下重新驗證的時間</a:t>
             </a:r>
           </a:p>
           <a:p>
             <a:pPr>
-              <a:spcBef>
-                <a:spcPts val="600"/>
-              </a:spcBef>
+              <a:spcAft>
+                <a:spcPts val="1400"/>
+              </a:spcAft>
             </a:pPr>
             <a:r>
-              <a:rPr sz="1400">
-                <a:solidFill>
-                  <a:srgbClr val="1C1F26"/>
-                </a:solidFill>
-                <a:latin typeface="Avenir Next"/>
-              </a:rPr>
-              <a:t>測試違反計畫明文禁止的規則，reviewer 抓到後來回 3 輪才收斂</a:t>
-            </a:r>
-          </a:p>
-          <a:p>
-            <a:pPr>
-              <a:spcBef>
-                <a:spcPts val="800"/>
-              </a:spcBef>
-            </a:pPr>
-            <a:r>
-              <a:rPr sz="1200" i="1">
-                <a:solidFill>
-                  <a:srgbClr val="55596A"/>
-                </a:solidFill>
-                <a:latin typeface="Avenir Next"/>
-              </a:rPr>
-              <a:t>計畫規則被違反</a:t>
-            </a:r>
-          </a:p>
-        </p:txBody>
-      </p:sp>
-      <p:sp>
-        <p:nvSpPr>
-          <p:cNvPr id="8" name="Rounded Rectangle 7"/>
-          <p:cNvSpPr/>
-          <p:nvPr/>
-        </p:nvSpPr>
-        <p:spPr>
-          <a:xfrm>
-            <a:off x="6035040" y="4754880"/>
-            <a:ext cx="5394960" cy="1737360"/>
-          </a:xfrm>
-          <a:prstGeom prst="roundRect">
-            <a:avLst>
-              <a:gd name="adj" fmla="val 4000"/>
-            </a:avLst>
-          </a:prstGeom>
-          <a:solidFill>
-            <a:srgbClr val="FFFFFF"/>
-          </a:solidFill>
-          <a:ln w="12700">
-            <a:solidFill>
-              <a:srgbClr val="D9D7CB"/>
-            </a:solidFill>
-          </a:ln>
-          <a:effectLst/>
-        </p:spPr>
-        <p:style>
-          <a:lnRef idx="1">
-            <a:schemeClr val="accent1"/>
-          </a:lnRef>
-          <a:fillRef idx="3">
-            <a:schemeClr val="accent1"/>
-          </a:fillRef>
-          <a:effectRef idx="2">
-            <a:schemeClr val="accent1"/>
-          </a:effectRef>
-          <a:fontRef idx="minor">
-            <a:schemeClr val="lt1"/>
-          </a:fontRef>
-        </p:style>
-        <p:txBody>
-          <a:bodyPr rtlCol="0" anchor="ctr" wrap="square" lIns="228600" rIns="228600" tIns="182880" bIns="182880"/>
-          <a:lstStyle/>
-          <a:p>
-            <a:pPr algn="ctr"/>
-            <a:r>
-              <a:rPr sz="1100" b="1">
-                <a:solidFill>
-                  <a:srgbClr val="3F7D4F"/>
-                </a:solidFill>
-                <a:latin typeface="Menlo"/>
-              </a:rPr>
-              <a:t>D / 節點管理</a:t>
-            </a:r>
-          </a:p>
-          <a:p>
-            <a:pPr>
-              <a:spcBef>
-                <a:spcPts val="600"/>
-              </a:spcBef>
-            </a:pPr>
-            <a:r>
-              <a:rPr sz="1400">
-                <a:solidFill>
-                  <a:srgbClr val="1C1F26"/>
-                </a:solidFill>
-                <a:latin typeface="Avenir Next"/>
-              </a:rPr>
-              <a:t>implementer 發現 brief 對 DB CASCADE 的假設在測試環境不成立，自行修正並附理由</a:t>
-            </a:r>
-          </a:p>
-          <a:p>
-            <a:pPr>
-              <a:spcBef>
-                <a:spcPts val="800"/>
-              </a:spcBef>
-            </a:pPr>
-            <a:r>
-              <a:rPr sz="1200" i="1">
-                <a:solidFill>
-                  <a:srgbClr val="55596A"/>
-                </a:solidFill>
-                <a:latin typeface="Avenir Next"/>
-              </a:rPr>
-              <a:t>計畫假設被證偽 —— Phase 5 又重演一次</a:t>
+              <a:rPr sz="2000">
+                <a:solidFill>
+                  <a:srgbClr val="1C1F26"/>
+                </a:solidFill>
+                <a:latin typeface="Arial"/>
+              </a:rPr>
+              <a:t>—  這一步之後，系統世界裡同時有「WBS 樹」跟「看板」兩套獨立產品 —— 也埋下了後面合併的動機</a:t>
             </a:r>
           </a:p>
         </p:txBody>
@@ -3689,9 +3494,9 @@
                 <a:solidFill>
                   <a:srgbClr val="1F6F6B"/>
                 </a:solidFill>
-                <a:latin typeface="Menlo"/>
-              </a:rPr>
-              <a:t>PHASE 5 · 這次 SESSION   ·   2026-08-09 → 08-10</a:t>
+                <a:latin typeface="Courier New"/>
+              </a:rPr>
+              <a:t>畫面長這樣</a:t>
             </a:r>
           </a:p>
         </p:txBody>
@@ -3719,134 +3524,117 @@
           <a:lstStyle/>
           <a:p>
             <a:r>
-              <a:rPr sz="3600" b="1">
+              <a:rPr sz="3000" b="1">
                 <a:solidFill>
                   <a:srgbClr val="1C1F26"/>
                 </a:solidFill>
                 <a:latin typeface="Georgia"/>
               </a:rPr>
-              <a:t>任務導向重構：把樹拆掉，看板變成 SaaS 核心</a:t>
-            </a:r>
-          </a:p>
-        </p:txBody>
-      </p:sp>
-      <p:sp>
-        <p:nvSpPr>
-          <p:cNvPr id="4" name="TextBox 3"/>
-          <p:cNvSpPr txBox="1"/>
-          <p:nvPr/>
-        </p:nvSpPr>
-        <p:spPr>
-          <a:xfrm>
-            <a:off x="685800" y="1691640"/>
-            <a:ext cx="10058400" cy="365760"/>
-          </a:xfrm>
-          <a:prstGeom prst="rect">
-            <a:avLst/>
-          </a:prstGeom>
-          <a:noFill/>
-        </p:spPr>
-        <p:txBody>
-          <a:bodyPr wrap="none">
-            <a:spAutoFit/>
-          </a:bodyPr>
-          <a:lstStyle/>
-          <a:p>
-            <a:r>
-              <a:rPr sz="1400">
+              <a:t>Spring-TaskFlow：待辦／進行中／完成三欄看板</a:t>
+            </a:r>
+          </a:p>
+        </p:txBody>
+      </p:sp>
+      <p:sp>
+        <p:nvSpPr>
+          <p:cNvPr id="4" name="Rectangle 3"/>
+          <p:cNvSpPr/>
+          <p:nvPr/>
+        </p:nvSpPr>
+        <p:spPr>
+          <a:xfrm>
+            <a:off x="2783939" y="1911096"/>
+            <a:ext cx="6623816" cy="4590288"/>
+          </a:xfrm>
+          <a:prstGeom prst="rect">
+            <a:avLst/>
+          </a:prstGeom>
+          <a:solidFill>
+            <a:srgbClr val="FFFFFF"/>
+          </a:solidFill>
+          <a:ln w="12700">
+            <a:solidFill>
+              <a:srgbClr val="D9D7CB"/>
+            </a:solidFill>
+          </a:ln>
+          <a:effectLst/>
+        </p:spPr>
+        <p:style>
+          <a:lnRef idx="1">
+            <a:schemeClr val="accent1"/>
+          </a:lnRef>
+          <a:fillRef idx="3">
+            <a:schemeClr val="accent1"/>
+          </a:fillRef>
+          <a:effectRef idx="2">
+            <a:schemeClr val="accent1"/>
+          </a:effectRef>
+          <a:fontRef idx="minor">
+            <a:schemeClr val="lt1"/>
+          </a:fontRef>
+        </p:style>
+        <p:txBody>
+          <a:bodyPr rtlCol="0" anchor="ctr"/>
+          <a:lstStyle/>
+          <a:p>
+            <a:pPr algn="ctr"/>
+          </a:p>
+        </p:txBody>
+      </p:sp>
+      <p:pic>
+        <p:nvPicPr>
+          <p:cNvPr id="5" name="Picture 4" descr="03-spring-taskflow-kanban.png"/>
+          <p:cNvPicPr>
+            <a:picLocks noChangeAspect="1"/>
+          </p:cNvPicPr>
+          <p:nvPr/>
+        </p:nvPicPr>
+        <p:blipFill>
+          <a:blip r:embed="rId2"/>
+          <a:stretch>
+            <a:fillRect/>
+          </a:stretch>
+        </p:blipFill>
+        <p:spPr>
+          <a:xfrm>
+            <a:off x="2838803" y="1965960"/>
+            <a:ext cx="6514088" cy="4480560"/>
+          </a:xfrm>
+          <a:prstGeom prst="rect">
+            <a:avLst/>
+          </a:prstGeom>
+        </p:spPr>
+      </p:pic>
+      <p:sp>
+        <p:nvSpPr>
+          <p:cNvPr id="6" name="TextBox 5"/>
+          <p:cNvSpPr txBox="1"/>
+          <p:nvPr/>
+        </p:nvSpPr>
+        <p:spPr>
+          <a:xfrm>
+            <a:off x="685800" y="6675120"/>
+            <a:ext cx="10789920" cy="548640"/>
+          </a:xfrm>
+          <a:prstGeom prst="rect">
+            <a:avLst/>
+          </a:prstGeom>
+          <a:noFill/>
+        </p:spPr>
+        <p:txBody>
+          <a:bodyPr wrap="square">
+            <a:normAutofit/>
+          </a:bodyPr>
+          <a:lstStyle/>
+          <a:p>
+            <a:r>
+              <a:rPr sz="1400" i="1">
                 <a:solidFill>
                   <a:srgbClr val="55596A"/>
                 </a:solidFill>
-                <a:latin typeface="Menlo"/>
-              </a:rPr>
-              <a:t>11 個任務 + 1 次全分支審查 + 1 輪修正  ·  104/104 測試</a:t>
-            </a:r>
-          </a:p>
-        </p:txBody>
-      </p:sp>
-      <p:sp>
-        <p:nvSpPr>
-          <p:cNvPr id="5" name="TextBox 4"/>
-          <p:cNvSpPr txBox="1"/>
-          <p:nvPr/>
-        </p:nvSpPr>
-        <p:spPr>
-          <a:xfrm>
-            <a:off x="685800" y="2148840"/>
-            <a:ext cx="10607040" cy="4206240"/>
-          </a:xfrm>
-          <a:prstGeom prst="rect">
-            <a:avLst/>
-          </a:prstGeom>
-          <a:noFill/>
-        </p:spPr>
-        <p:txBody>
-          <a:bodyPr wrap="square">
-            <a:spAutoFit/>
-          </a:bodyPr>
-          <a:lstStyle/>
-          <a:p>
-            <a:pPr>
-              <a:spcAft>
-                <a:spcPts val="1400"/>
-              </a:spcAft>
-            </a:pPr>
-            <a:r>
-              <a:rPr sz="1800">
-                <a:solidFill>
-                  <a:srgbClr val="1C1F26"/>
-                </a:solidFill>
-                <a:latin typeface="Avenir Next"/>
-              </a:rPr>
-              <a:t>—  用了快兩個月才發現：「先建骨架、再往下長細項」太重 —— 使用者要的是先建任務、事後歸類</a:t>
-            </a:r>
-          </a:p>
-          <a:p>
-            <a:pPr>
-              <a:spcAft>
-                <a:spcPts val="1400"/>
-              </a:spcAft>
-            </a:pPr>
-            <a:r>
-              <a:rPr sz="1800">
-                <a:solidFill>
-                  <a:srgbClr val="1C1F26"/>
-                </a:solidFill>
-                <a:latin typeface="Avenir Next"/>
-              </a:rPr>
-              <a:t>—  把 wbs_nodes 三層固定樹整個拆掉，換成天生獨立的扁平 tasks ＋ 選配兩層的 task_categories</a:t>
-            </a:r>
-          </a:p>
-          <a:p>
-            <a:pPr>
-              <a:spcAft>
-                <a:spcPts val="1400"/>
-              </a:spcAft>
-            </a:pPr>
-            <a:r>
-              <a:rPr sz="1800">
-                <a:solidFill>
-                  <a:srgbClr val="1C1F26"/>
-                </a:solidFill>
-                <a:latin typeface="Avenir Next"/>
-              </a:rPr>
-              <a:t>—  看板變成專案詳情頁預設且唯一的畫面，舊的樹編輯器／人員派工／甘特三分頁整個移除</a:t>
-            </a:r>
-          </a:p>
-          <a:p>
-            <a:pPr>
-              <a:spcAft>
-                <a:spcPts val="1400"/>
-              </a:spcAft>
-            </a:pPr>
-            <a:r>
-              <a:rPr sz="1800">
-                <a:solidFill>
-                  <a:srgbClr val="1C1F26"/>
-                </a:solidFill>
-                <a:latin typeface="Avenir Next"/>
-              </a:rPr>
-              <a:t>—  從「規劃工具」真正走向「任務派工 SaaS」的臨門一腳</a:t>
+                <a:latin typeface="Arial"/>
+              </a:rPr>
+              <a:t>從「一棵樹」變成「三個欄位＋卡片」，這個視覺轉變後來變成最終系統的核心體驗</a:t>
             </a:r>
           </a:p>
         </p:txBody>
@@ -3904,9 +3692,9 @@
                 <a:solidFill>
                   <a:srgbClr val="1F6F6B"/>
                 </a:solidFill>
-                <a:latin typeface="Menlo"/>
-              </a:rPr>
-              <a:t>AI TECHNIQUE · 研究先行</a:t>
+                <a:latin typeface="Courier New"/>
+              </a:rPr>
+              <a:t>AI TECHNIQUE</a:t>
             </a:r>
           </a:p>
         </p:txBody>
@@ -3934,13 +3722,13 @@
           <a:lstStyle/>
           <a:p>
             <a:r>
-              <a:rPr sz="3600" b="1">
+              <a:rPr sz="3000" b="1">
                 <a:solidFill>
                   <a:srgbClr val="1C1F26"/>
                 </a:solidFill>
                 <a:latin typeface="Georgia"/>
               </a:rPr>
-              <a:t>寫計畫前，先花大力氣把地基弄清楚</a:t>
+              <a:t>搬遷專案最容易踩的坑：繼承別人的舊程式碼</a:t>
             </a:r>
           </a:p>
         </p:txBody>
@@ -3954,7 +3742,7 @@
         <p:spPr>
           <a:xfrm>
             <a:off x="685800" y="1691640"/>
-            <a:ext cx="10607040" cy="4206240"/>
+            <a:ext cx="10607040" cy="1463040"/>
           </a:xfrm>
           <a:prstGeom prst="rect">
             <a:avLst/>
@@ -3963,7 +3751,7 @@
         </p:spPr>
         <p:txBody>
           <a:bodyPr wrap="square">
-            <a:spAutoFit/>
+            <a:normAutofit/>
           </a:bodyPr>
           <a:lstStyle/>
           <a:p>
@@ -3973,13 +3761,13 @@
               </a:spcAft>
             </a:pPr>
             <a:r>
-              <a:rPr sz="1900">
-                <a:solidFill>
-                  <a:srgbClr val="1C1F26"/>
-                </a:solidFill>
-                <a:latin typeface="Avenir Next"/>
-              </a:rPr>
-              <a:t>—  派 3 個平行 agent 研究：後端逐字抄錄、前端逐字抄錄，還讀了姊妹專案的拖曳/modal/逾期邏輯</a:t>
+              <a:rPr sz="1700">
+                <a:solidFill>
+                  <a:srgbClr val="1C1F26"/>
+                </a:solidFill>
+                <a:latin typeface="Arial"/>
+              </a:rPr>
+              <a:t>—  11 個任務，好幾個中途被打回去重做</a:t>
             </a:r>
           </a:p>
           <a:p>
@@ -3989,13 +3777,13 @@
               </a:spcAft>
             </a:pPr>
             <a:r>
-              <a:rPr sz="1900">
-                <a:solidFill>
-                  <a:srgbClr val="1C1F26"/>
-                </a:solidFill>
-                <a:latin typeface="Avenir Next"/>
-              </a:rPr>
-              <a:t>—  每個關鍵決策（欄位命名、刪除語意、API 形狀）先問過 advisor，修正意見反映進最終計畫</a:t>
+              <a:rPr sz="1700">
+                <a:solidFill>
+                  <a:srgbClr val="1C1F26"/>
+                </a:solidFill>
+                <a:latin typeface="Arial"/>
+              </a:rPr>
+              <a:t>—  AI 額度用完的時候，有明確的備案：由主控端直接接手修完，不會卡在原地</a:t>
             </a:r>
           </a:p>
           <a:p>
@@ -4005,13 +3793,195 @@
               </a:spcAft>
             </a:pPr>
             <a:r>
-              <a:rPr sz="1900">
-                <a:solidFill>
-                  <a:srgbClr val="1C1F26"/>
-                </a:solidFill>
-                <a:latin typeface="Avenir Next"/>
-              </a:rPr>
-              <a:t>—  寫完計畫做自我審查：對照規格逐條核對覆蓋率，掃描有沒有偷懶留下的佔位符</a:t>
+              <a:rPr sz="1700">
+                <a:solidFill>
+                  <a:srgbClr val="1C1F26"/>
+                </a:solidFill>
+                <a:latin typeface="Arial"/>
+              </a:rPr>
+              <a:t>—  最後總體檢查換了一顆更強的 AI 專門做</a:t>
+            </a:r>
+          </a:p>
+        </p:txBody>
+      </p:sp>
+      <p:sp>
+        <p:nvSpPr>
+          <p:cNvPr id="5" name="Rounded Rectangle 4"/>
+          <p:cNvSpPr/>
+          <p:nvPr/>
+        </p:nvSpPr>
+        <p:spPr>
+          <a:xfrm>
+            <a:off x="685800" y="3246120"/>
+            <a:ext cx="5120640" cy="2834640"/>
+          </a:xfrm>
+          <a:prstGeom prst="roundRect">
+            <a:avLst>
+              <a:gd name="adj" fmla="val 4000"/>
+            </a:avLst>
+          </a:prstGeom>
+          <a:solidFill>
+            <a:srgbClr val="FFFFFF"/>
+          </a:solidFill>
+          <a:ln w="12700">
+            <a:solidFill>
+              <a:srgbClr val="D9D7CB"/>
+            </a:solidFill>
+          </a:ln>
+          <a:effectLst/>
+        </p:spPr>
+        <p:style>
+          <a:lnRef idx="1">
+            <a:schemeClr val="accent1"/>
+          </a:lnRef>
+          <a:fillRef idx="3">
+            <a:schemeClr val="accent1"/>
+          </a:fillRef>
+          <a:effectRef idx="2">
+            <a:schemeClr val="accent1"/>
+          </a:effectRef>
+          <a:fontRef idx="minor">
+            <a:schemeClr val="lt1"/>
+          </a:fontRef>
+        </p:style>
+        <p:txBody>
+          <a:bodyPr rtlCol="0" anchor="ctr" wrap="square" lIns="228600" rIns="228600" tIns="182880" bIns="182880">
+            <a:normAutofit/>
+          </a:bodyPr>
+          <a:lstStyle/>
+          <a:p>
+            <a:pPr algn="ctr"/>
+            <a:r>
+              <a:rPr sz="1100" b="1">
+                <a:solidFill>
+                  <a:srgbClr val="AB4030"/>
+                </a:solidFill>
+                <a:latin typeface="Courier New"/>
+              </a:rPr>
+              <a:t>案例一 · 嚴重</a:t>
+            </a:r>
+          </a:p>
+          <a:p>
+            <a:pPr>
+              <a:spcBef>
+                <a:spcPts val="600"/>
+              </a:spcBef>
+            </a:pPr>
+            <a:r>
+              <a:rPr sz="1400">
+                <a:solidFill>
+                  <a:srgbClr val="1C1F26"/>
+                </a:solidFill>
+                <a:latin typeface="Arial"/>
+              </a:rPr>
+              <a:t>從 WbsScaff 繼承過來、畫面上根本沒用到的使用者管理 API，外部直接打就能繞過部門隔離改別人帳號</a:t>
+            </a:r>
+          </a:p>
+          <a:p>
+            <a:pPr>
+              <a:spcBef>
+                <a:spcPts val="800"/>
+              </a:spcBef>
+            </a:pPr>
+            <a:r>
+              <a:rPr sz="1200" i="1">
+                <a:solidFill>
+                  <a:srgbClr val="55596A"/>
+                </a:solidFill>
+                <a:latin typeface="Arial"/>
+              </a:rPr>
+              <a:t>最後總體檢查才抓到 —— 因為它從沒被任何一個任務碰過</a:t>
+            </a:r>
+          </a:p>
+        </p:txBody>
+      </p:sp>
+      <p:sp>
+        <p:nvSpPr>
+          <p:cNvPr id="6" name="Rounded Rectangle 5"/>
+          <p:cNvSpPr/>
+          <p:nvPr/>
+        </p:nvSpPr>
+        <p:spPr>
+          <a:xfrm>
+            <a:off x="6035040" y="3246120"/>
+            <a:ext cx="5394960" cy="2834640"/>
+          </a:xfrm>
+          <a:prstGeom prst="roundRect">
+            <a:avLst>
+              <a:gd name="adj" fmla="val 4000"/>
+            </a:avLst>
+          </a:prstGeom>
+          <a:solidFill>
+            <a:srgbClr val="FFFFFF"/>
+          </a:solidFill>
+          <a:ln w="12700">
+            <a:solidFill>
+              <a:srgbClr val="D9D7CB"/>
+            </a:solidFill>
+          </a:ln>
+          <a:effectLst/>
+        </p:spPr>
+        <p:style>
+          <a:lnRef idx="1">
+            <a:schemeClr val="accent1"/>
+          </a:lnRef>
+          <a:fillRef idx="3">
+            <a:schemeClr val="accent1"/>
+          </a:fillRef>
+          <a:effectRef idx="2">
+            <a:schemeClr val="accent1"/>
+          </a:effectRef>
+          <a:fontRef idx="minor">
+            <a:schemeClr val="lt1"/>
+          </a:fontRef>
+        </p:style>
+        <p:txBody>
+          <a:bodyPr rtlCol="0" anchor="ctr" wrap="square" lIns="228600" rIns="228600" tIns="182880" bIns="182880">
+            <a:normAutofit/>
+          </a:bodyPr>
+          <a:lstStyle/>
+          <a:p>
+            <a:pPr algn="ctr"/>
+            <a:r>
+              <a:rPr sz="1100" b="1">
+                <a:solidFill>
+                  <a:srgbClr val="B3791F"/>
+                </a:solidFill>
+                <a:latin typeface="Courier New"/>
+              </a:rPr>
+              <a:t>案例二 · 修好一個、壞了一個</a:t>
+            </a:r>
+          </a:p>
+          <a:p>
+            <a:pPr>
+              <a:spcBef>
+                <a:spcPts val="600"/>
+              </a:spcBef>
+            </a:pPr>
+            <a:r>
+              <a:rPr sz="1400">
+                <a:solidFill>
+                  <a:srgbClr val="1C1F26"/>
+                </a:solidFill>
+                <a:latin typeface="Arial"/>
+              </a:rPr>
+              <a:t>修完上面那個問題之後，複查發現修復本身弄壞了「主管自建看板」這個功能</a:t>
+            </a:r>
+          </a:p>
+          <a:p>
+            <a:pPr>
+              <a:spcBef>
+                <a:spcPts val="800"/>
+              </a:spcBef>
+            </a:pPr>
+            <a:r>
+              <a:rPr sz="1200" i="1">
+                <a:solidFill>
+                  <a:srgbClr val="55596A"/>
+                </a:solidFill>
+                <a:latin typeface="Arial"/>
+              </a:rPr>
+              <a:t>又補了一輪測試才真正全部過關</a:t>
             </a:r>
           </a:p>
         </p:txBody>
@@ -4069,9 +4039,9 @@
                 <a:solidFill>
                   <a:srgbClr val="1F6F6B"/>
                 </a:solidFill>
-                <a:latin typeface="Menlo"/>
-              </a:rPr>
-              <a:t>AI TECHNIQUE · 規模化執行</a:t>
+                <a:latin typeface="Courier New"/>
+              </a:rPr>
+              <a:t>PHASE 4   ·   2026-07-17 → 08-08</a:t>
             </a:r>
           </a:p>
         </p:txBody>
@@ -4105,7 +4075,7 @@
                 </a:solidFill>
                 <a:latin typeface="Georgia"/>
               </a:rPr>
-              <a:t>11 個任務、11 個全新 subagent，模型依難度分級</a:t>
+              <a:t>WbsFlow → MissionBoard：兩套系統合併成一套</a:t>
             </a:r>
           </a:p>
         </p:txBody>
@@ -4119,6 +4089,40 @@
         <p:spPr>
           <a:xfrm>
             <a:off x="685800" y="1691640"/>
+            <a:ext cx="10058400" cy="365760"/>
+          </a:xfrm>
+          <a:prstGeom prst="rect">
+            <a:avLst/>
+          </a:prstGeom>
+          <a:noFill/>
+        </p:spPr>
+        <p:txBody>
+          <a:bodyPr wrap="none">
+            <a:spAutoFit/>
+          </a:bodyPr>
+          <a:lstStyle/>
+          <a:p>
+            <a:r>
+              <a:rPr sz="1400">
+                <a:solidFill>
+                  <a:srgbClr val="55596A"/>
+                </a:solidFill>
+                <a:latin typeface="Courier New"/>
+              </a:rPr>
+              <a:t>73 commits（含本次重構）  ·  全新 repo</a:t>
+            </a:r>
+          </a:p>
+        </p:txBody>
+      </p:sp>
+      <p:sp>
+        <p:nvSpPr>
+          <p:cNvPr id="5" name="TextBox 4"/>
+          <p:cNvSpPr txBox="1"/>
+          <p:nvPr/>
+        </p:nvSpPr>
+        <p:spPr>
+          <a:xfrm>
+            <a:off x="685800" y="2148840"/>
             <a:ext cx="10607040" cy="4206240"/>
           </a:xfrm>
           <a:prstGeom prst="rect">
@@ -4128,7 +4132,7 @@
         </p:spPr>
         <p:txBody>
           <a:bodyPr wrap="square">
-            <a:spAutoFit/>
+            <a:normAutofit/>
           </a:bodyPr>
           <a:lstStyle/>
           <a:p>
@@ -4138,13 +4142,13 @@
               </a:spcAft>
             </a:pPr>
             <a:r>
-              <a:rPr sz="1900">
-                <a:solidFill>
-                  <a:srgbClr val="1C1F26"/>
-                </a:solidFill>
-                <a:latin typeface="Avenir Next"/>
-              </a:rPr>
-              <a:t>—  機械式轉譯用便宜快速模型；需判斷整合的任務用中階模型；最終全分支審查用最強模型</a:t>
+              <a:rPr sz="2000">
+                <a:solidFill>
+                  <a:srgbClr val="1C1F26"/>
+                </a:solidFill>
+                <a:latin typeface="Arial"/>
+              </a:rPr>
+              <a:t>—  核心決定：「WBS 節點即任務」—— 不做規劃層跟執行層兩套模型，樹狀圖最底層的節點本身就是可以指派的任務</a:t>
             </a:r>
           </a:p>
           <a:p>
@@ -4154,13 +4158,13 @@
               </a:spcAft>
             </a:pPr>
             <a:r>
-              <a:rPr sz="1900">
-                <a:solidFill>
-                  <a:srgbClr val="1C1F26"/>
-                </a:solidFill>
-                <a:latin typeface="Avenir Next"/>
-              </a:rPr>
-              <a:t>—  每任務節奏一致：implementer 寫測試 → 確認失敗 → 實作 → 確認通過 → commit → 獨立 reviewer 驗證</a:t>
+              <a:rPr sz="2000">
+                <a:solidFill>
+                  <a:srgbClr val="1C1F26"/>
+                </a:solidFill>
+                <a:latin typeface="Arial"/>
+              </a:rPr>
+              <a:t>—  全新開一個 repo，不是延續任一個舊專案，把兩邊已經驗證過的做法整合起來</a:t>
             </a:r>
           </a:p>
           <a:p>
@@ -4170,13 +4174,13 @@
               </a:spcAft>
             </a:pPr>
             <a:r>
-              <a:rPr sz="1900">
-                <a:solidFill>
-                  <a:srgbClr val="1C1F26"/>
-                </a:solidFill>
-                <a:latin typeface="Avenir Next"/>
-              </a:rPr>
-              <a:t>—  全程靠 progress.md ledger 記錄進度：對話被壓縮、記憶消失也能接續，不重複派工</a:t>
+              <a:rPr sz="2000">
+                <a:solidFill>
+                  <a:srgbClr val="1C1F26"/>
+                </a:solidFill>
+                <a:latin typeface="Arial"/>
+              </a:rPr>
+              <a:t>—  拆成四個小專案依序做：資料層與權限核心、登入認證、專案管理、節點與選單管理</a:t>
             </a:r>
           </a:p>
         </p:txBody>
@@ -4234,9 +4238,9 @@
                 <a:solidFill>
                   <a:srgbClr val="1F6F6B"/>
                 </a:solidFill>
-                <a:latin typeface="Menlo"/>
-              </a:rPr>
-              <a:t>AI TECHNIQUE · 證據為準</a:t>
+                <a:latin typeface="Courier New"/>
+              </a:rPr>
+              <a:t>AI TECHNIQUE</a:t>
             </a:r>
           </a:p>
         </p:txBody>
@@ -4264,42 +4268,92 @@
           <a:lstStyle/>
           <a:p>
             <a:r>
-              <a:rPr sz="3400" b="1">
+              <a:rPr sz="2800" b="1">
                 <a:solidFill>
                   <a:srgbClr val="1C1F26"/>
                 </a:solidFill>
                 <a:latin typeface="Georgia"/>
               </a:rPr>
-              <a:t>不相信報告，要真的重現</a:t>
-            </a:r>
-          </a:p>
-        </p:txBody>
-      </p:sp>
-      <p:sp>
-        <p:nvSpPr>
-          <p:cNvPr id="4" name="Rounded Rectangle 3"/>
+              <a:t>動手寫規格之前，先派兩個 AI 去讀舊專案</a:t>
+            </a:r>
+          </a:p>
+        </p:txBody>
+      </p:sp>
+      <p:sp>
+        <p:nvSpPr>
+          <p:cNvPr id="4" name="TextBox 3"/>
+          <p:cNvSpPr txBox="1"/>
+          <p:nvPr/>
+        </p:nvSpPr>
+        <p:spPr>
+          <a:xfrm>
+            <a:off x="685800" y="1645920"/>
+            <a:ext cx="10607040" cy="1371600"/>
+          </a:xfrm>
+          <a:prstGeom prst="rect">
+            <a:avLst/>
+          </a:prstGeom>
+          <a:noFill/>
+        </p:spPr>
+        <p:txBody>
+          <a:bodyPr wrap="square">
+            <a:normAutofit/>
+          </a:bodyPr>
+          <a:lstStyle/>
+          <a:p>
+            <a:pPr>
+              <a:spcAft>
+                <a:spcPts val="1400"/>
+              </a:spcAft>
+            </a:pPr>
+            <a:r>
+              <a:rPr sz="1700">
+                <a:solidFill>
+                  <a:srgbClr val="1C1F26"/>
+                </a:solidFill>
+                <a:latin typeface="Arial"/>
+              </a:rPr>
+              <a:t>—  正式討論規格之前，先平行派兩個 AI 分別去讀 WbsScaff 跟 TaskFlow 的架構，回來再一起討論</a:t>
+            </a:r>
+          </a:p>
+          <a:p>
+            <a:pPr>
+              <a:spcAft>
+                <a:spcPts val="1400"/>
+              </a:spcAft>
+            </a:pPr>
+            <a:r>
+              <a:rPr sz="1700">
+                <a:solidFill>
+                  <a:srgbClr val="1C1F26"/>
+                </a:solidFill>
+                <a:latin typeface="Arial"/>
+              </a:rPr>
+              <a:t>—  四個小專案、24 個任務全部用「先寫一支會失敗的測試、確認真的失敗，才開始寫功能」的方式做</a:t>
+            </a:r>
+          </a:p>
+        </p:txBody>
+      </p:sp>
+      <p:sp>
+        <p:nvSpPr>
+          <p:cNvPr id="5" name="Rectangle 4"/>
           <p:cNvSpPr/>
           <p:nvPr/>
         </p:nvSpPr>
         <p:spPr>
           <a:xfrm>
-            <a:off x="685800" y="1828800"/>
-            <a:ext cx="10744200" cy="1417320"/>
-          </a:xfrm>
-          <a:prstGeom prst="roundRect">
-            <a:avLst>
-              <a:gd name="adj" fmla="val 4000"/>
-            </a:avLst>
+            <a:off x="594360" y="3063240"/>
+            <a:ext cx="30000" cy="1280160"/>
+          </a:xfrm>
+          <a:prstGeom prst="rect">
+            <a:avLst/>
           </a:prstGeom>
           <a:solidFill>
-            <a:srgbClr val="FFFFFF"/>
+            <a:srgbClr val="B3791F"/>
           </a:solidFill>
-          <a:ln w="12700">
-            <a:solidFill>
-              <a:srgbClr val="D9D7CB"/>
-            </a:solidFill>
+          <a:ln>
+            <a:noFill/>
           </a:ln>
-          <a:effectLst/>
         </p:spPr>
         <p:style>
           <a:lnRef idx="1">
@@ -4316,18 +4370,43 @@
           </a:fontRef>
         </p:style>
         <p:txBody>
-          <a:bodyPr rtlCol="0" anchor="ctr" wrap="square" lIns="228600" rIns="228600" tIns="182880" bIns="182880"/>
+          <a:bodyPr rtlCol="0" anchor="ctr"/>
           <a:lstStyle/>
           <a:p>
             <a:pPr algn="ctr"/>
-            <a:r>
-              <a:rPr sz="1100" b="1">
-                <a:solidFill>
-                  <a:srgbClr val="3F7D4F"/>
-                </a:solidFill>
-                <a:latin typeface="Menlo"/>
-              </a:rPr>
-              <a:t>案例一 · 計畫寫錯，被證明</a:t>
+          </a:p>
+        </p:txBody>
+      </p:sp>
+      <p:sp>
+        <p:nvSpPr>
+          <p:cNvPr id="6" name="TextBox 5"/>
+          <p:cNvSpPr txBox="1"/>
+          <p:nvPr/>
+        </p:nvSpPr>
+        <p:spPr>
+          <a:xfrm>
+            <a:off x="822960" y="3063240"/>
+            <a:ext cx="10515600" cy="1371600"/>
+          </a:xfrm>
+          <a:prstGeom prst="rect">
+            <a:avLst/>
+          </a:prstGeom>
+          <a:noFill/>
+        </p:spPr>
+        <p:txBody>
+          <a:bodyPr wrap="square">
+            <a:normAutofit/>
+          </a:bodyPr>
+          <a:lstStyle/>
+          <a:p>
+            <a:r>
+              <a:rPr i="1" sz="1700">
+                <a:solidFill>
+                  <a:srgbClr val="1C1F26"/>
+                </a:solidFill>
+                <a:latin typeface="Georgia"/>
+              </a:rPr>
+              <a:t>“兩個舊專案技術棧同構，等於已經幫你驗證過八成的基礎設施；真正的新東西只有「節點即任務」的三層資料模型和四種檢視畫面。”</a:t>
             </a:r>
           </a:p>
           <a:p>
@@ -4337,43 +4416,27 @@
               </a:spcBef>
             </a:pPr>
             <a:r>
-              <a:rPr sz="1400">
-                <a:solidFill>
-                  <a:srgbClr val="1C1F26"/>
-                </a:solidFill>
-                <a:latin typeface="Avenir Next"/>
-              </a:rPr>
-              <a:t>某任務的 delete() 沒照計畫寫。Reviewer 沒接受 implementer 的解釋，自己在乾淨 checkout 上重現計畫版本 —— 真的會炸掉</a:t>
-            </a:r>
-          </a:p>
-          <a:p>
-            <a:pPr>
-              <a:spcBef>
-                <a:spcPts val="800"/>
-              </a:spcBef>
-            </a:pPr>
-            <a:r>
-              <a:rPr sz="1200" i="1">
+              <a:rPr sz="1100">
                 <a:solidFill>
                   <a:srgbClr val="55596A"/>
                 </a:solidFill>
-                <a:latin typeface="Avenir Next"/>
-              </a:rPr>
-              <a:t>結論：這次是計畫本身寫錯了，implementer 是對的</a:t>
-            </a:r>
-          </a:p>
-        </p:txBody>
-      </p:sp>
-      <p:sp>
-        <p:nvSpPr>
-          <p:cNvPr id="5" name="Rounded Rectangle 4"/>
+                <a:latin typeface="Courier New"/>
+              </a:rPr>
+              <a:t>— brainstorming 討論紀錄，2026-07-17</a:t>
+            </a:r>
+          </a:p>
+        </p:txBody>
+      </p:sp>
+      <p:sp>
+        <p:nvSpPr>
+          <p:cNvPr id="7" name="Rounded Rectangle 6"/>
           <p:cNvSpPr/>
           <p:nvPr/>
         </p:nvSpPr>
         <p:spPr>
           <a:xfrm>
-            <a:off x="685800" y="3429000"/>
-            <a:ext cx="10744200" cy="1417320"/>
+            <a:off x="685800" y="4709160"/>
+            <a:ext cx="5120640" cy="1783080"/>
           </a:xfrm>
           <a:prstGeom prst="roundRect">
             <a:avLst>
@@ -4405,18 +4468,20 @@
           </a:fontRef>
         </p:style>
         <p:txBody>
-          <a:bodyPr rtlCol="0" anchor="ctr" wrap="square" lIns="228600" rIns="228600" tIns="182880" bIns="182880"/>
+          <a:bodyPr rtlCol="0" anchor="ctr" wrap="square" lIns="228600" rIns="228600" tIns="182880" bIns="182880">
+            <a:normAutofit/>
+          </a:bodyPr>
           <a:lstStyle/>
           <a:p>
             <a:pPr algn="ctr"/>
             <a:r>
               <a:rPr sz="1100" b="1">
                 <a:solidFill>
-                  <a:srgbClr val="1F6F6B"/>
-                </a:solidFill>
-                <a:latin typeface="Menlo"/>
-              </a:rPr>
-              <a:t>案例二 · 工具環境問題，非程式碼缺陷</a:t>
+                  <a:srgbClr val="AB4030"/>
+                </a:solidFill>
+                <a:latin typeface="Courier New"/>
+              </a:rPr>
+              <a:t>登入子專案</a:t>
             </a:r>
           </a:p>
           <a:p>
@@ -4430,9 +4495,9 @@
                 <a:solidFill>
                   <a:srgbClr val="1C1F26"/>
                 </a:solidFill>
-                <a:latin typeface="Avenir Next"/>
-              </a:rPr>
-              <a:t>看板拖曳測試工具「回報成功但無效果」。Implementer 與獨立 reviewer 各自重現，還用不相關的登入按鈕排除「跟拖曳有關」的猜測</a:t>
+                <a:latin typeface="Arial"/>
+              </a:rPr>
+              <a:t>測試偷偷違反了計畫裡明文禁止的做法，被審查抓到後來回改了 3 輪才過關</a:t>
             </a:r>
           </a:p>
           <a:p>
@@ -4446,23 +4511,23 @@
                 <a:solidFill>
                   <a:srgbClr val="55596A"/>
                 </a:solidFill>
-                <a:latin typeface="Avenir Next"/>
-              </a:rPr>
-              <a:t>確認是本機自動化工具的環境性問題</a:t>
-            </a:r>
-          </a:p>
-        </p:txBody>
-      </p:sp>
-      <p:sp>
-        <p:nvSpPr>
-          <p:cNvPr id="6" name="Rounded Rectangle 5"/>
+                <a:latin typeface="Arial"/>
+              </a:rPr>
+              <a:t>規則被違反，但被抓到了</a:t>
+            </a:r>
+          </a:p>
+        </p:txBody>
+      </p:sp>
+      <p:sp>
+        <p:nvSpPr>
+          <p:cNvPr id="8" name="Rounded Rectangle 7"/>
           <p:cNvSpPr/>
           <p:nvPr/>
         </p:nvSpPr>
         <p:spPr>
           <a:xfrm>
-            <a:off x="685800" y="5029200"/>
-            <a:ext cx="10744200" cy="1417320"/>
+            <a:off x="6035040" y="4709160"/>
+            <a:ext cx="5394960" cy="1783080"/>
           </a:xfrm>
           <a:prstGeom prst="roundRect">
             <a:avLst>
@@ -4494,18 +4559,20 @@
           </a:fontRef>
         </p:style>
         <p:txBody>
-          <a:bodyPr rtlCol="0" anchor="ctr" wrap="square" lIns="228600" rIns="228600" tIns="182880" bIns="182880"/>
+          <a:bodyPr rtlCol="0" anchor="ctr" wrap="square" lIns="228600" rIns="228600" tIns="182880" bIns="182880">
+            <a:normAutofit/>
+          </a:bodyPr>
           <a:lstStyle/>
           <a:p>
             <a:pPr algn="ctr"/>
             <a:r>
               <a:rPr sz="1100" b="1">
                 <a:solidFill>
-                  <a:srgbClr val="AB4030"/>
-                </a:solidFill>
-                <a:latin typeface="Menlo"/>
-              </a:rPr>
-              <a:t>案例三 · 只有全分支視角才看得到</a:t>
+                  <a:srgbClr val="3F7D4F"/>
+                </a:solidFill>
+                <a:latin typeface="Courier New"/>
+              </a:rPr>
+              <a:t>節點管理子專案</a:t>
             </a:r>
           </a:p>
           <a:p>
@@ -4519,9 +4586,9 @@
                 <a:solidFill>
                   <a:srgbClr val="1C1F26"/>
                 </a:solidFill>
-                <a:latin typeface="Avenir Next"/>
-              </a:rPr>
-              <a:t>最終審查（最強模型）親手在瀏覽器逐格推演拖曳邏輯，抓到「同欄往下拖多插一格」的 off-by-one</a:t>
+                <a:latin typeface="Arial"/>
+              </a:rPr>
+              <a:t>AI 發現原本規劃書假設的資料庫行為，在測試環境裡根本不成立，自己修正並附上理由</a:t>
             </a:r>
           </a:p>
           <a:p>
@@ -4535,9 +4602,9 @@
                 <a:solidFill>
                   <a:srgbClr val="55596A"/>
                 </a:solidFill>
-                <a:latin typeface="Avenir Next"/>
-              </a:rPr>
-              <a:t>橫跨前端 JS 與後端排序演算法，單一任務 reviewer 不會發現</a:t>
+                <a:latin typeface="Arial"/>
+              </a:rPr>
+              <a:t>計畫假設被證偽 —— 這個問題後來在下一階段又重演一次</a:t>
             </a:r>
           </a:p>
         </p:txBody>
@@ -4595,9 +4662,9 @@
                 <a:solidFill>
                   <a:srgbClr val="1F6F6B"/>
                 </a:solidFill>
-                <a:latin typeface="Menlo"/>
-              </a:rPr>
-              <a:t>貫穿五個階段</a:t>
+                <a:latin typeface="Courier New"/>
+              </a:rPr>
+              <a:t>PHASE 5 · 這次 SESSION   ·   2026-08-09 → 08-10</a:t>
             </a:r>
           </a:p>
         </p:txBody>
@@ -4625,670 +4692,134 @@
           <a:lstStyle/>
           <a:p>
             <a:r>
-              <a:rPr sz="3400" b="1">
+              <a:rPr sz="3600" b="1">
                 <a:solidFill>
                   <a:srgbClr val="1C1F26"/>
                 </a:solidFill>
                 <a:latin typeface="Georgia"/>
               </a:rPr>
-              <a:t>用下來留下的技巧清單</a:t>
-            </a:r>
-          </a:p>
-        </p:txBody>
-      </p:sp>
-      <p:sp>
-        <p:nvSpPr>
-          <p:cNvPr id="4" name="Rounded Rectangle 3"/>
-          <p:cNvSpPr/>
-          <p:nvPr/>
-        </p:nvSpPr>
-        <p:spPr>
-          <a:xfrm>
-            <a:off x="685800" y="1828800"/>
-            <a:ext cx="3520440" cy="1417320"/>
-          </a:xfrm>
-          <a:prstGeom prst="roundRect">
-            <a:avLst>
-              <a:gd name="adj" fmla="val 5000"/>
-            </a:avLst>
-          </a:prstGeom>
-          <a:solidFill>
-            <a:srgbClr val="FFFFFF"/>
-          </a:solidFill>
-          <a:ln>
-            <a:solidFill>
-              <a:srgbClr val="D9D7CB"/>
-            </a:solidFill>
-          </a:ln>
-          <a:effectLst/>
-        </p:spPr>
-        <p:style>
-          <a:lnRef idx="1">
-            <a:schemeClr val="accent1"/>
-          </a:lnRef>
-          <a:fillRef idx="3">
-            <a:schemeClr val="accent1"/>
-          </a:fillRef>
-          <a:effectRef idx="2">
-            <a:schemeClr val="accent1"/>
-          </a:effectRef>
-          <a:fontRef idx="minor">
-            <a:schemeClr val="lt1"/>
-          </a:fontRef>
-        </p:style>
-        <p:txBody>
-          <a:bodyPr rtlCol="0" anchor="ctr" wrap="square" lIns="164592" rIns="164592" tIns="128016"/>
-          <a:lstStyle/>
-          <a:p>
-            <a:pPr algn="ctr"/>
-            <a:r>
-              <a:rPr b="1" sz="1450">
-                <a:solidFill>
-                  <a:srgbClr val="1C1F26"/>
-                </a:solidFill>
-                <a:latin typeface="Georgia"/>
-              </a:rPr>
-              <a:t>Brainstorm → Spec → Plan → TDD</a:t>
-            </a:r>
-          </a:p>
+              <a:t>任務導向重構：把樹拆掉，看板變成核心</a:t>
+            </a:r>
+          </a:p>
+        </p:txBody>
+      </p:sp>
+      <p:sp>
+        <p:nvSpPr>
+          <p:cNvPr id="4" name="TextBox 3"/>
+          <p:cNvSpPr txBox="1"/>
+          <p:nvPr/>
+        </p:nvSpPr>
+        <p:spPr>
+          <a:xfrm>
+            <a:off x="685800" y="1691640"/>
+            <a:ext cx="10058400" cy="365760"/>
+          </a:xfrm>
+          <a:prstGeom prst="rect">
+            <a:avLst/>
+          </a:prstGeom>
+          <a:noFill/>
+        </p:spPr>
+        <p:txBody>
+          <a:bodyPr wrap="none">
+            <a:spAutoFit/>
+          </a:bodyPr>
+          <a:lstStyle/>
+          <a:p>
+            <a:r>
+              <a:rPr sz="1400">
+                <a:solidFill>
+                  <a:srgbClr val="55596A"/>
+                </a:solidFill>
+                <a:latin typeface="Courier New"/>
+              </a:rPr>
+              <a:t>11 個任務 + 1 次總體檢查 + 1 輪修正  ·  104/104 測試</a:t>
+            </a:r>
+          </a:p>
+        </p:txBody>
+      </p:sp>
+      <p:sp>
+        <p:nvSpPr>
+          <p:cNvPr id="5" name="TextBox 4"/>
+          <p:cNvSpPr txBox="1"/>
+          <p:nvPr/>
+        </p:nvSpPr>
+        <p:spPr>
+          <a:xfrm>
+            <a:off x="685800" y="2148840"/>
+            <a:ext cx="10607040" cy="4206240"/>
+          </a:xfrm>
+          <a:prstGeom prst="rect">
+            <a:avLst/>
+          </a:prstGeom>
+          <a:noFill/>
+        </p:spPr>
+        <p:txBody>
+          <a:bodyPr wrap="square">
+            <a:normAutofit/>
+          </a:bodyPr>
+          <a:lstStyle/>
           <a:p>
             <a:pPr>
-              <a:spcBef>
-                <a:spcPts val="400"/>
-              </a:spcBef>
+              <a:spcAft>
+                <a:spcPts val="1400"/>
+              </a:spcAft>
             </a:pPr>
             <a:r>
-              <a:rPr sz="1150">
-                <a:solidFill>
-                  <a:srgbClr val="55596A"/>
-                </a:solidFill>
-                <a:latin typeface="Avenir Next"/>
-              </a:rPr>
-              <a:t>每個階段先想清楚、寫下來，再動手</a:t>
-            </a:r>
-          </a:p>
-        </p:txBody>
-      </p:sp>
-      <p:sp>
-        <p:nvSpPr>
-          <p:cNvPr id="5" name="Rounded Rectangle 4"/>
-          <p:cNvSpPr/>
-          <p:nvPr/>
-        </p:nvSpPr>
-        <p:spPr>
-          <a:xfrm>
-            <a:off x="4389120" y="1828800"/>
-            <a:ext cx="3520440" cy="1417320"/>
-          </a:xfrm>
-          <a:prstGeom prst="roundRect">
-            <a:avLst>
-              <a:gd name="adj" fmla="val 5000"/>
-            </a:avLst>
-          </a:prstGeom>
-          <a:solidFill>
-            <a:srgbClr val="FFFFFF"/>
-          </a:solidFill>
-          <a:ln>
-            <a:solidFill>
-              <a:srgbClr val="D9D7CB"/>
-            </a:solidFill>
-          </a:ln>
-          <a:effectLst/>
-        </p:spPr>
-        <p:style>
-          <a:lnRef idx="1">
-            <a:schemeClr val="accent1"/>
-          </a:lnRef>
-          <a:fillRef idx="3">
-            <a:schemeClr val="accent1"/>
-          </a:fillRef>
-          <a:effectRef idx="2">
-            <a:schemeClr val="accent1"/>
-          </a:effectRef>
-          <a:fontRef idx="minor">
-            <a:schemeClr val="lt1"/>
-          </a:fontRef>
-        </p:style>
-        <p:txBody>
-          <a:bodyPr rtlCol="0" anchor="ctr" wrap="square" lIns="164592" rIns="164592" tIns="128016"/>
-          <a:lstStyle/>
-          <a:p>
-            <a:pPr algn="ctr"/>
-            <a:r>
-              <a:rPr b="1" sz="1450">
-                <a:solidFill>
-                  <a:srgbClr val="1C1F26"/>
-                </a:solidFill>
-                <a:latin typeface="Georgia"/>
-              </a:rPr>
-              <a:t>Subagent-driven-development</a:t>
+              <a:rPr sz="1800">
+                <a:solidFill>
+                  <a:srgbClr val="1C1F26"/>
+                </a:solidFill>
+                <a:latin typeface="Arial"/>
+              </a:rPr>
+              <a:t>—  用了快兩個月才發現：「先建骨架、再往下長細項」這個流程太重，使用者要的其實是先建任務、事後再歸類</a:t>
             </a:r>
           </a:p>
           <a:p>
             <a:pPr>
-              <a:spcBef>
-                <a:spcPts val="400"/>
-              </a:spcBef>
+              <a:spcAft>
+                <a:spcPts val="1400"/>
+              </a:spcAft>
             </a:pPr>
             <a:r>
-              <a:rPr sz="1150">
-                <a:solidFill>
-                  <a:srgbClr val="55596A"/>
-                </a:solidFill>
-                <a:latin typeface="Avenir Next"/>
-              </a:rPr>
-              <a:t>任務拆給全新 subagent，避免對話雜訊污染上下文</a:t>
-            </a:r>
-          </a:p>
-        </p:txBody>
-      </p:sp>
-      <p:sp>
-        <p:nvSpPr>
-          <p:cNvPr id="6" name="Rounded Rectangle 5"/>
-          <p:cNvSpPr/>
-          <p:nvPr/>
-        </p:nvSpPr>
-        <p:spPr>
-          <a:xfrm>
-            <a:off x="8092440" y="1828800"/>
-            <a:ext cx="3520440" cy="1417320"/>
-          </a:xfrm>
-          <a:prstGeom prst="roundRect">
-            <a:avLst>
-              <a:gd name="adj" fmla="val 5000"/>
-            </a:avLst>
-          </a:prstGeom>
-          <a:solidFill>
-            <a:srgbClr val="FFFFFF"/>
-          </a:solidFill>
-          <a:ln>
-            <a:solidFill>
-              <a:srgbClr val="D9D7CB"/>
-            </a:solidFill>
-          </a:ln>
-          <a:effectLst/>
-        </p:spPr>
-        <p:style>
-          <a:lnRef idx="1">
-            <a:schemeClr val="accent1"/>
-          </a:lnRef>
-          <a:fillRef idx="3">
-            <a:schemeClr val="accent1"/>
-          </a:fillRef>
-          <a:effectRef idx="2">
-            <a:schemeClr val="accent1"/>
-          </a:effectRef>
-          <a:fontRef idx="minor">
-            <a:schemeClr val="lt1"/>
-          </a:fontRef>
-        </p:style>
-        <p:txBody>
-          <a:bodyPr rtlCol="0" anchor="ctr" wrap="square" lIns="164592" rIns="164592" tIns="128016"/>
-          <a:lstStyle/>
-          <a:p>
-            <a:pPr algn="ctr"/>
-            <a:r>
-              <a:rPr b="1" sz="1450">
-                <a:solidFill>
-                  <a:srgbClr val="1C1F26"/>
-                </a:solidFill>
-                <a:latin typeface="Georgia"/>
-              </a:rPr>
-              <a:t>獨立 Reviewer</a:t>
+              <a:rPr sz="1800">
+                <a:solidFill>
+                  <a:srgbClr val="1C1F26"/>
+                </a:solidFill>
+                <a:latin typeface="Arial"/>
+              </a:rPr>
+              <a:t>—  把三層固定的樹狀結構整個拆掉，換成天生就能獨立存在的任務，分類變成選配、不是必要條件</a:t>
             </a:r>
           </a:p>
           <a:p>
             <a:pPr>
-              <a:spcBef>
-                <a:spcPts val="400"/>
-              </a:spcBef>
+              <a:spcAft>
+                <a:spcPts val="1400"/>
+              </a:spcAft>
             </a:pPr>
             <a:r>
-              <a:rPr sz="1150">
-                <a:solidFill>
-                  <a:srgbClr val="55596A"/>
-                </a:solidFill>
-                <a:latin typeface="Avenir Next"/>
-              </a:rPr>
-              <a:t>implementer 與 reviewer 是不同 agent，不自審自己的作業</a:t>
-            </a:r>
-          </a:p>
-        </p:txBody>
-      </p:sp>
-      <p:sp>
-        <p:nvSpPr>
-          <p:cNvPr id="7" name="Rounded Rectangle 6"/>
-          <p:cNvSpPr/>
-          <p:nvPr/>
-        </p:nvSpPr>
-        <p:spPr>
-          <a:xfrm>
-            <a:off x="685800" y="3410712"/>
-            <a:ext cx="3520440" cy="1417320"/>
-          </a:xfrm>
-          <a:prstGeom prst="roundRect">
-            <a:avLst>
-              <a:gd name="adj" fmla="val 5000"/>
-            </a:avLst>
-          </a:prstGeom>
-          <a:solidFill>
-            <a:srgbClr val="FFFFFF"/>
-          </a:solidFill>
-          <a:ln>
-            <a:solidFill>
-              <a:srgbClr val="D9D7CB"/>
-            </a:solidFill>
-          </a:ln>
-          <a:effectLst/>
-        </p:spPr>
-        <p:style>
-          <a:lnRef idx="1">
-            <a:schemeClr val="accent1"/>
-          </a:lnRef>
-          <a:fillRef idx="3">
-            <a:schemeClr val="accent1"/>
-          </a:fillRef>
-          <a:effectRef idx="2">
-            <a:schemeClr val="accent1"/>
-          </a:effectRef>
-          <a:fontRef idx="minor">
-            <a:schemeClr val="lt1"/>
-          </a:fontRef>
-        </p:style>
-        <p:txBody>
-          <a:bodyPr rtlCol="0" anchor="ctr" wrap="square" lIns="164592" rIns="164592" tIns="128016"/>
-          <a:lstStyle/>
-          <a:p>
-            <a:pPr algn="ctr"/>
-            <a:r>
-              <a:rPr b="1" sz="1450">
-                <a:solidFill>
-                  <a:srgbClr val="1C1F26"/>
-                </a:solidFill>
-                <a:latin typeface="Georgia"/>
-              </a:rPr>
-              <a:t>Fix round + 升級機制</a:t>
+              <a:rPr sz="1800">
+                <a:solidFill>
+                  <a:srgbClr val="1C1F26"/>
+                </a:solidFill>
+                <a:latin typeface="Arial"/>
+              </a:rPr>
+              <a:t>—  看板變成專案畫面裡預設、也是唯一的畫面，舊的樹編輯器等三個分頁整個移除</a:t>
             </a:r>
           </a:p>
           <a:p>
             <a:pPr>
-              <a:spcBef>
-                <a:spcPts val="400"/>
-              </a:spcBef>
+              <a:spcAft>
+                <a:spcPts val="1400"/>
+              </a:spcAft>
             </a:pPr>
             <a:r>
-              <a:rPr sz="1150">
-                <a:solidFill>
-                  <a:srgbClr val="55596A"/>
-                </a:solidFill>
-                <a:latin typeface="Avenir Next"/>
-              </a:rPr>
-              <a:t>卡住換更強模型或換人重來；額度用盡有記錄在案的 fallback</a:t>
-            </a:r>
-          </a:p>
-        </p:txBody>
-      </p:sp>
-      <p:sp>
-        <p:nvSpPr>
-          <p:cNvPr id="8" name="Rounded Rectangle 7"/>
-          <p:cNvSpPr/>
-          <p:nvPr/>
-        </p:nvSpPr>
-        <p:spPr>
-          <a:xfrm>
-            <a:off x="4389120" y="3410712"/>
-            <a:ext cx="3520440" cy="1417320"/>
-          </a:xfrm>
-          <a:prstGeom prst="roundRect">
-            <a:avLst>
-              <a:gd name="adj" fmla="val 5000"/>
-            </a:avLst>
-          </a:prstGeom>
-          <a:solidFill>
-            <a:srgbClr val="FFFFFF"/>
-          </a:solidFill>
-          <a:ln>
-            <a:solidFill>
-              <a:srgbClr val="D9D7CB"/>
-            </a:solidFill>
-          </a:ln>
-          <a:effectLst/>
-        </p:spPr>
-        <p:style>
-          <a:lnRef idx="1">
-            <a:schemeClr val="accent1"/>
-          </a:lnRef>
-          <a:fillRef idx="3">
-            <a:schemeClr val="accent1"/>
-          </a:fillRef>
-          <a:effectRef idx="2">
-            <a:schemeClr val="accent1"/>
-          </a:effectRef>
-          <a:fontRef idx="minor">
-            <a:schemeClr val="lt1"/>
-          </a:fontRef>
-        </p:style>
-        <p:txBody>
-          <a:bodyPr rtlCol="0" anchor="ctr" wrap="square" lIns="164592" rIns="164592" tIns="128016"/>
-          <a:lstStyle/>
-          <a:p>
-            <a:pPr algn="ctr"/>
-            <a:r>
-              <a:rPr b="1" sz="1450">
-                <a:solidFill>
-                  <a:srgbClr val="1C1F26"/>
-                </a:solidFill>
-                <a:latin typeface="Georgia"/>
-              </a:rPr>
-              <a:t>全分支最終審查</a:t>
-            </a:r>
-          </a:p>
-          <a:p>
-            <a:pPr>
-              <a:spcBef>
-                <a:spcPts val="400"/>
-              </a:spcBef>
-            </a:pPr>
-            <a:r>
-              <a:rPr sz="1150">
-                <a:solidFill>
-                  <a:srgbClr val="55596A"/>
-                </a:solidFill>
-                <a:latin typeface="Avenir Next"/>
-              </a:rPr>
-              <a:t>抓「每個任務都對、合起來卻錯」的縫隙</a:t>
-            </a:r>
-          </a:p>
-        </p:txBody>
-      </p:sp>
-      <p:sp>
-        <p:nvSpPr>
-          <p:cNvPr id="9" name="Rounded Rectangle 8"/>
-          <p:cNvSpPr/>
-          <p:nvPr/>
-        </p:nvSpPr>
-        <p:spPr>
-          <a:xfrm>
-            <a:off x="8092440" y="3410712"/>
-            <a:ext cx="3520440" cy="1417320"/>
-          </a:xfrm>
-          <a:prstGeom prst="roundRect">
-            <a:avLst>
-              <a:gd name="adj" fmla="val 5000"/>
-            </a:avLst>
-          </a:prstGeom>
-          <a:solidFill>
-            <a:srgbClr val="FFFFFF"/>
-          </a:solidFill>
-          <a:ln>
-            <a:solidFill>
-              <a:srgbClr val="D9D7CB"/>
-            </a:solidFill>
-          </a:ln>
-          <a:effectLst/>
-        </p:spPr>
-        <p:style>
-          <a:lnRef idx="1">
-            <a:schemeClr val="accent1"/>
-          </a:lnRef>
-          <a:fillRef idx="3">
-            <a:schemeClr val="accent1"/>
-          </a:fillRef>
-          <a:effectRef idx="2">
-            <a:schemeClr val="accent1"/>
-          </a:effectRef>
-          <a:fontRef idx="minor">
-            <a:schemeClr val="lt1"/>
-          </a:fontRef>
-        </p:style>
-        <p:txBody>
-          <a:bodyPr rtlCol="0" anchor="ctr" wrap="square" lIns="164592" rIns="164592" tIns="128016"/>
-          <a:lstStyle/>
-          <a:p>
-            <a:pPr algn="ctr"/>
-            <a:r>
-              <a:rPr b="1" sz="1450">
-                <a:solidFill>
-                  <a:srgbClr val="1C1F26"/>
-                </a:solidFill>
-                <a:latin typeface="Georgia"/>
-              </a:rPr>
-              <a:t>模型依難度分級</a:t>
-            </a:r>
-          </a:p>
-          <a:p>
-            <a:pPr>
-              <a:spcBef>
-                <a:spcPts val="400"/>
-              </a:spcBef>
-            </a:pPr>
-            <a:r>
-              <a:rPr sz="1150">
-                <a:solidFill>
-                  <a:srgbClr val="55596A"/>
-                </a:solidFill>
-                <a:latin typeface="Avenir Next"/>
-              </a:rPr>
-              <a:t>機械轉譯用便宜模型，架構與最終審查用最強模型</a:t>
-            </a:r>
-          </a:p>
-        </p:txBody>
-      </p:sp>
-      <p:sp>
-        <p:nvSpPr>
-          <p:cNvPr id="10" name="Rounded Rectangle 9"/>
-          <p:cNvSpPr/>
-          <p:nvPr/>
-        </p:nvSpPr>
-        <p:spPr>
-          <a:xfrm>
-            <a:off x="685800" y="4992624"/>
-            <a:ext cx="3520440" cy="1417320"/>
-          </a:xfrm>
-          <a:prstGeom prst="roundRect">
-            <a:avLst>
-              <a:gd name="adj" fmla="val 5000"/>
-            </a:avLst>
-          </a:prstGeom>
-          <a:solidFill>
-            <a:srgbClr val="FFFFFF"/>
-          </a:solidFill>
-          <a:ln>
-            <a:solidFill>
-              <a:srgbClr val="D9D7CB"/>
-            </a:solidFill>
-          </a:ln>
-          <a:effectLst/>
-        </p:spPr>
-        <p:style>
-          <a:lnRef idx="1">
-            <a:schemeClr val="accent1"/>
-          </a:lnRef>
-          <a:fillRef idx="3">
-            <a:schemeClr val="accent1"/>
-          </a:fillRef>
-          <a:effectRef idx="2">
-            <a:schemeClr val="accent1"/>
-          </a:effectRef>
-          <a:fontRef idx="minor">
-            <a:schemeClr val="lt1"/>
-          </a:fontRef>
-        </p:style>
-        <p:txBody>
-          <a:bodyPr rtlCol="0" anchor="ctr" wrap="square" lIns="164592" rIns="164592" tIns="128016"/>
-          <a:lstStyle/>
-          <a:p>
-            <a:pPr algn="ctr"/>
-            <a:r>
-              <a:rPr b="1" sz="1450">
-                <a:solidFill>
-                  <a:srgbClr val="1C1F26"/>
-                </a:solidFill>
-                <a:latin typeface="Georgia"/>
-              </a:rPr>
-              <a:t>Ledger 記錄進度</a:t>
-            </a:r>
-          </a:p>
-          <a:p>
-            <a:pPr>
-              <a:spcBef>
-                <a:spcPts val="400"/>
-              </a:spcBef>
-            </a:pPr>
-            <a:r>
-              <a:rPr sz="1150">
-                <a:solidFill>
-                  <a:srgbClr val="55596A"/>
-                </a:solidFill>
-                <a:latin typeface="Avenir Next"/>
-              </a:rPr>
-              <a:t>對話被壓縮也能接續，不重複做工</a:t>
-            </a:r>
-          </a:p>
-        </p:txBody>
-      </p:sp>
-      <p:sp>
-        <p:nvSpPr>
-          <p:cNvPr id="11" name="Rounded Rectangle 10"/>
-          <p:cNvSpPr/>
-          <p:nvPr/>
-        </p:nvSpPr>
-        <p:spPr>
-          <a:xfrm>
-            <a:off x="4389120" y="4992624"/>
-            <a:ext cx="3520440" cy="1417320"/>
-          </a:xfrm>
-          <a:prstGeom prst="roundRect">
-            <a:avLst>
-              <a:gd name="adj" fmla="val 5000"/>
-            </a:avLst>
-          </a:prstGeom>
-          <a:solidFill>
-            <a:srgbClr val="FFFFFF"/>
-          </a:solidFill>
-          <a:ln>
-            <a:solidFill>
-              <a:srgbClr val="D9D7CB"/>
-            </a:solidFill>
-          </a:ln>
-          <a:effectLst/>
-        </p:spPr>
-        <p:style>
-          <a:lnRef idx="1">
-            <a:schemeClr val="accent1"/>
-          </a:lnRef>
-          <a:fillRef idx="3">
-            <a:schemeClr val="accent1"/>
-          </a:fillRef>
-          <a:effectRef idx="2">
-            <a:schemeClr val="accent1"/>
-          </a:effectRef>
-          <a:fontRef idx="minor">
-            <a:schemeClr val="lt1"/>
-          </a:fontRef>
-        </p:style>
-        <p:txBody>
-          <a:bodyPr rtlCol="0" anchor="ctr" wrap="square" lIns="164592" rIns="164592" tIns="128016"/>
-          <a:lstStyle/>
-          <a:p>
-            <a:pPr algn="ctr"/>
-            <a:r>
-              <a:rPr b="1" sz="1450">
-                <a:solidFill>
-                  <a:srgbClr val="1C1F26"/>
-                </a:solidFill>
-                <a:latin typeface="Georgia"/>
-              </a:rPr>
-              <a:t>證據為準</a:t>
-            </a:r>
-          </a:p>
-          <a:p>
-            <a:pPr>
-              <a:spcBef>
-                <a:spcPts val="400"/>
-              </a:spcBef>
-            </a:pPr>
-            <a:r>
-              <a:rPr sz="1150">
-                <a:solidFill>
-                  <a:srgbClr val="55596A"/>
-                </a:solidFill>
-                <a:latin typeface="Avenir Next"/>
-              </a:rPr>
-              <a:t>可疑結論要自己重現、獨立驗證，不採信報告</a:t>
-            </a:r>
-          </a:p>
-        </p:txBody>
-      </p:sp>
-      <p:sp>
-        <p:nvSpPr>
-          <p:cNvPr id="12" name="Rounded Rectangle 11"/>
-          <p:cNvSpPr/>
-          <p:nvPr/>
-        </p:nvSpPr>
-        <p:spPr>
-          <a:xfrm>
-            <a:off x="8092440" y="4992624"/>
-            <a:ext cx="3520440" cy="1417320"/>
-          </a:xfrm>
-          <a:prstGeom prst="roundRect">
-            <a:avLst>
-              <a:gd name="adj" fmla="val 5000"/>
-            </a:avLst>
-          </a:prstGeom>
-          <a:solidFill>
-            <a:srgbClr val="FFFFFF"/>
-          </a:solidFill>
-          <a:ln>
-            <a:solidFill>
-              <a:srgbClr val="D9D7CB"/>
-            </a:solidFill>
-          </a:ln>
-          <a:effectLst/>
-        </p:spPr>
-        <p:style>
-          <a:lnRef idx="1">
-            <a:schemeClr val="accent1"/>
-          </a:lnRef>
-          <a:fillRef idx="3">
-            <a:schemeClr val="accent1"/>
-          </a:fillRef>
-          <a:effectRef idx="2">
-            <a:schemeClr val="accent1"/>
-          </a:effectRef>
-          <a:fontRef idx="minor">
-            <a:schemeClr val="lt1"/>
-          </a:fontRef>
-        </p:style>
-        <p:txBody>
-          <a:bodyPr rtlCol="0" anchor="ctr" wrap="square" lIns="164592" rIns="164592" tIns="128016"/>
-          <a:lstStyle/>
-          <a:p>
-            <a:pPr algn="ctr"/>
-            <a:r>
-              <a:rPr b="1" sz="1450">
-                <a:solidFill>
-                  <a:srgbClr val="1C1F26"/>
-                </a:solidFill>
-                <a:latin typeface="Georgia"/>
-              </a:rPr>
-              <a:t>Advisor 諮詢</a:t>
-            </a:r>
-          </a:p>
-          <a:p>
-            <a:pPr>
-              <a:spcBef>
-                <a:spcPts val="400"/>
-              </a:spcBef>
-            </a:pPr>
-            <a:r>
-              <a:rPr sz="1150">
-                <a:solidFill>
-                  <a:srgbClr val="55596A"/>
-                </a:solidFill>
-                <a:latin typeface="Avenir Next"/>
-              </a:rPr>
-              <a:t>關鍵決策前先問一輪，衝突攤開來討論</a:t>
+              <a:rPr sz="1800">
+                <a:solidFill>
+                  <a:srgbClr val="1C1F26"/>
+                </a:solidFill>
+                <a:latin typeface="Arial"/>
+              </a:rPr>
+              <a:t>—  這是從「規劃工具」真正走向「任務派工系統」的臨門一腳</a:t>
             </a:r>
           </a:p>
         </p:txBody>
@@ -5346,9 +4877,9 @@
                 <a:solidFill>
                   <a:srgbClr val="1F6F6B"/>
                 </a:solidFill>
-                <a:latin typeface="Menlo"/>
-              </a:rPr>
-              <a:t>數字看整段旅程</a:t>
+                <a:latin typeface="Courier New"/>
+              </a:rPr>
+              <a:t>畫面長這樣</a:t>
             </a:r>
           </a:p>
         </p:txBody>
@@ -5376,27 +4907,97 @@
           <a:lstStyle/>
           <a:p>
             <a:r>
-              <a:rPr sz="3400" b="1">
+              <a:rPr sz="3200" b="1">
                 <a:solidFill>
                   <a:srgbClr val="1C1F26"/>
                 </a:solidFill>
                 <a:latin typeface="Georgia"/>
               </a:rPr>
-              <a:t>兩個月，四個世代</a:t>
-            </a:r>
-          </a:p>
-        </p:txBody>
-      </p:sp>
-      <p:sp>
-        <p:nvSpPr>
-          <p:cNvPr id="4" name="TextBox 3"/>
-          <p:cNvSpPr txBox="1"/>
-          <p:nvPr/>
-        </p:nvSpPr>
-        <p:spPr>
-          <a:xfrm>
-            <a:off x="685800" y="2194560"/>
-            <a:ext cx="3520440" cy="1005840"/>
+              <a:t>現在的 Spring-MissionBoard</a:t>
+            </a:r>
+          </a:p>
+        </p:txBody>
+      </p:sp>
+      <p:sp>
+        <p:nvSpPr>
+          <p:cNvPr id="4" name="Rectangle 3"/>
+          <p:cNvSpPr/>
+          <p:nvPr/>
+        </p:nvSpPr>
+        <p:spPr>
+          <a:xfrm>
+            <a:off x="630936" y="1911096"/>
+            <a:ext cx="5138928" cy="3252978"/>
+          </a:xfrm>
+          <a:prstGeom prst="rect">
+            <a:avLst/>
+          </a:prstGeom>
+          <a:solidFill>
+            <a:srgbClr val="FFFFFF"/>
+          </a:solidFill>
+          <a:ln>
+            <a:solidFill>
+              <a:srgbClr val="D9D7CB"/>
+            </a:solidFill>
+          </a:ln>
+          <a:effectLst/>
+        </p:spPr>
+        <p:style>
+          <a:lnRef idx="1">
+            <a:schemeClr val="accent1"/>
+          </a:lnRef>
+          <a:fillRef idx="3">
+            <a:schemeClr val="accent1"/>
+          </a:fillRef>
+          <a:effectRef idx="2">
+            <a:schemeClr val="accent1"/>
+          </a:effectRef>
+          <a:fontRef idx="minor">
+            <a:schemeClr val="lt1"/>
+          </a:fontRef>
+        </p:style>
+        <p:txBody>
+          <a:bodyPr rtlCol="0" anchor="ctr"/>
+          <a:lstStyle/>
+          <a:p>
+            <a:pPr algn="ctr"/>
+          </a:p>
+        </p:txBody>
+      </p:sp>
+      <p:pic>
+        <p:nvPicPr>
+          <p:cNvPr id="5" name="Picture 4" descr="04-missionboard-login.png"/>
+          <p:cNvPicPr>
+            <a:picLocks noChangeAspect="1"/>
+          </p:cNvPicPr>
+          <p:nvPr/>
+        </p:nvPicPr>
+        <p:blipFill>
+          <a:blip r:embed="rId2"/>
+          <a:stretch>
+            <a:fillRect/>
+          </a:stretch>
+        </p:blipFill>
+        <p:spPr>
+          <a:xfrm>
+            <a:off x="685800" y="1965960"/>
+            <a:ext cx="5029200" cy="3143250"/>
+          </a:xfrm>
+          <a:prstGeom prst="rect">
+            <a:avLst/>
+          </a:prstGeom>
+        </p:spPr>
+      </p:pic>
+      <p:sp>
+        <p:nvSpPr>
+          <p:cNvPr id="6" name="TextBox 5"/>
+          <p:cNvSpPr txBox="1"/>
+          <p:nvPr/>
+        </p:nvSpPr>
+        <p:spPr>
+          <a:xfrm>
+            <a:off x="685800" y="5246370"/>
+            <a:ext cx="5029200" cy="365760"/>
           </a:xfrm>
           <a:prstGeom prst="rect">
             <a:avLst/>
@@ -5410,61 +5011,97 @@
           <a:lstStyle/>
           <a:p>
             <a:r>
-              <a:rPr b="1" sz="4400">
-                <a:solidFill>
-                  <a:srgbClr val="B3791F"/>
-                </a:solidFill>
-                <a:latin typeface="Menlo"/>
-              </a:rPr>
-              <a:t>241</a:t>
-            </a:r>
-          </a:p>
-        </p:txBody>
-      </p:sp>
-      <p:sp>
-        <p:nvSpPr>
-          <p:cNvPr id="5" name="TextBox 4"/>
-          <p:cNvSpPr txBox="1"/>
-          <p:nvPr/>
-        </p:nvSpPr>
-        <p:spPr>
-          <a:xfrm>
-            <a:off x="685800" y="3154680"/>
-            <a:ext cx="3520440" cy="731520"/>
-          </a:xfrm>
-          <a:prstGeom prst="rect">
-            <a:avLst/>
-          </a:prstGeom>
-          <a:noFill/>
-        </p:spPr>
-        <p:txBody>
-          <a:bodyPr wrap="square">
-            <a:spAutoFit/>
-          </a:bodyPr>
-          <a:lstStyle/>
-          <a:p>
-            <a:r>
-              <a:rPr sz="1400">
+              <a:rPr sz="1300" i="1">
                 <a:solidFill>
                   <a:srgbClr val="55596A"/>
                 </a:solidFill>
-                <a:latin typeface="Avenir Next"/>
-              </a:rPr>
-              <a:t>總 commit 數（四個 repo 合計）</a:t>
-            </a:r>
-          </a:p>
-        </p:txBody>
-      </p:sp>
-      <p:sp>
-        <p:nvSpPr>
-          <p:cNvPr id="6" name="TextBox 5"/>
-          <p:cNvSpPr txBox="1"/>
-          <p:nvPr/>
-        </p:nvSpPr>
-        <p:spPr>
-          <a:xfrm>
-            <a:off x="4389120" y="2194560"/>
-            <a:ext cx="3520440" cy="1005840"/>
+                <a:latin typeface="Arial"/>
+              </a:rPr>
+              <a:t>登入頁</a:t>
+            </a:r>
+          </a:p>
+        </p:txBody>
+      </p:sp>
+      <p:sp>
+        <p:nvSpPr>
+          <p:cNvPr id="7" name="Rectangle 6"/>
+          <p:cNvSpPr/>
+          <p:nvPr/>
+        </p:nvSpPr>
+        <p:spPr>
+          <a:xfrm>
+            <a:off x="6254496" y="1911096"/>
+            <a:ext cx="5138928" cy="3252978"/>
+          </a:xfrm>
+          <a:prstGeom prst="rect">
+            <a:avLst/>
+          </a:prstGeom>
+          <a:solidFill>
+            <a:srgbClr val="FFFFFF"/>
+          </a:solidFill>
+          <a:ln>
+            <a:solidFill>
+              <a:srgbClr val="D9D7CB"/>
+            </a:solidFill>
+          </a:ln>
+          <a:effectLst/>
+        </p:spPr>
+        <p:style>
+          <a:lnRef idx="1">
+            <a:schemeClr val="accent1"/>
+          </a:lnRef>
+          <a:fillRef idx="3">
+            <a:schemeClr val="accent1"/>
+          </a:fillRef>
+          <a:effectRef idx="2">
+            <a:schemeClr val="accent1"/>
+          </a:effectRef>
+          <a:fontRef idx="minor">
+            <a:schemeClr val="lt1"/>
+          </a:fontRef>
+        </p:style>
+        <p:txBody>
+          <a:bodyPr rtlCol="0" anchor="ctr"/>
+          <a:lstStyle/>
+          <a:p>
+            <a:pPr algn="ctr"/>
+          </a:p>
+        </p:txBody>
+      </p:sp>
+      <p:pic>
+        <p:nvPicPr>
+          <p:cNvPr id="8" name="Picture 7" descr="05-missionboard-kanban.png"/>
+          <p:cNvPicPr>
+            <a:picLocks noChangeAspect="1"/>
+          </p:cNvPicPr>
+          <p:nvPr/>
+        </p:nvPicPr>
+        <p:blipFill>
+          <a:blip r:embed="rId3"/>
+          <a:stretch>
+            <a:fillRect/>
+          </a:stretch>
+        </p:blipFill>
+        <p:spPr>
+          <a:xfrm>
+            <a:off x="6309360" y="1965960"/>
+            <a:ext cx="5029200" cy="3143250"/>
+          </a:xfrm>
+          <a:prstGeom prst="rect">
+            <a:avLst/>
+          </a:prstGeom>
+        </p:spPr>
+      </p:pic>
+      <p:sp>
+        <p:nvSpPr>
+          <p:cNvPr id="9" name="TextBox 8"/>
+          <p:cNvSpPr txBox="1"/>
+          <p:nvPr/>
+        </p:nvSpPr>
+        <p:spPr>
+          <a:xfrm>
+            <a:off x="6309360" y="5246370"/>
+            <a:ext cx="5029200" cy="365760"/>
           </a:xfrm>
           <a:prstGeom prst="rect">
             <a:avLst/>
@@ -5478,319 +5115,13 @@
           <a:lstStyle/>
           <a:p>
             <a:r>
-              <a:rPr b="1" sz="4400">
-                <a:solidFill>
-                  <a:srgbClr val="B3791F"/>
-                </a:solidFill>
-                <a:latin typeface="Menlo"/>
-              </a:rPr>
-              <a:t>~2</a:t>
-            </a:r>
-          </a:p>
-        </p:txBody>
-      </p:sp>
-      <p:sp>
-        <p:nvSpPr>
-          <p:cNvPr id="7" name="TextBox 6"/>
-          <p:cNvSpPr txBox="1"/>
-          <p:nvPr/>
-        </p:nvSpPr>
-        <p:spPr>
-          <a:xfrm>
-            <a:off x="4389120" y="3154680"/>
-            <a:ext cx="3520440" cy="731520"/>
-          </a:xfrm>
-          <a:prstGeom prst="rect">
-            <a:avLst/>
-          </a:prstGeom>
-          <a:noFill/>
-        </p:spPr>
-        <p:txBody>
-          <a:bodyPr wrap="square">
-            <a:spAutoFit/>
-          </a:bodyPr>
-          <a:lstStyle/>
-          <a:p>
-            <a:r>
-              <a:rPr sz="1400">
+              <a:rPr sz="1300" i="1">
                 <a:solidFill>
                   <a:srgbClr val="55596A"/>
                 </a:solidFill>
-                <a:latin typeface="Avenir Next"/>
-              </a:rPr>
-              <a:t>個月（06-08 → 08-10）</a:t>
-            </a:r>
-          </a:p>
-        </p:txBody>
-      </p:sp>
-      <p:sp>
-        <p:nvSpPr>
-          <p:cNvPr id="8" name="TextBox 7"/>
-          <p:cNvSpPr txBox="1"/>
-          <p:nvPr/>
-        </p:nvSpPr>
-        <p:spPr>
-          <a:xfrm>
-            <a:off x="8092440" y="2194560"/>
-            <a:ext cx="3520440" cy="1005840"/>
-          </a:xfrm>
-          <a:prstGeom prst="rect">
-            <a:avLst/>
-          </a:prstGeom>
-          <a:noFill/>
-        </p:spPr>
-        <p:txBody>
-          <a:bodyPr wrap="none">
-            <a:spAutoFit/>
-          </a:bodyPr>
-          <a:lstStyle/>
-          <a:p>
-            <a:r>
-              <a:rPr b="1" sz="4400">
-                <a:solidFill>
-                  <a:srgbClr val="B3791F"/>
-                </a:solidFill>
-                <a:latin typeface="Menlo"/>
-              </a:rPr>
-              <a:t>5</a:t>
-            </a:r>
-          </a:p>
-        </p:txBody>
-      </p:sp>
-      <p:sp>
-        <p:nvSpPr>
-          <p:cNvPr id="9" name="TextBox 8"/>
-          <p:cNvSpPr txBox="1"/>
-          <p:nvPr/>
-        </p:nvSpPr>
-        <p:spPr>
-          <a:xfrm>
-            <a:off x="8092440" y="3154680"/>
-            <a:ext cx="3520440" cy="731520"/>
-          </a:xfrm>
-          <a:prstGeom prst="rect">
-            <a:avLst/>
-          </a:prstGeom>
-          <a:noFill/>
-        </p:spPr>
-        <p:txBody>
-          <a:bodyPr wrap="square">
-            <a:spAutoFit/>
-          </a:bodyPr>
-          <a:lstStyle/>
-          <a:p>
-            <a:r>
-              <a:rPr sz="1400">
-                <a:solidFill>
-                  <a:srgbClr val="55596A"/>
-                </a:solidFill>
-                <a:latin typeface="Avenir Next"/>
-              </a:rPr>
-              <a:t>個世代 / 階段</a:t>
-            </a:r>
-          </a:p>
-        </p:txBody>
-      </p:sp>
-      <p:sp>
-        <p:nvSpPr>
-          <p:cNvPr id="10" name="TextBox 9"/>
-          <p:cNvSpPr txBox="1"/>
-          <p:nvPr/>
-        </p:nvSpPr>
-        <p:spPr>
-          <a:xfrm>
-            <a:off x="685800" y="4297680"/>
-            <a:ext cx="3520440" cy="1005840"/>
-          </a:xfrm>
-          <a:prstGeom prst="rect">
-            <a:avLst/>
-          </a:prstGeom>
-          <a:noFill/>
-        </p:spPr>
-        <p:txBody>
-          <a:bodyPr wrap="none">
-            <a:spAutoFit/>
-          </a:bodyPr>
-          <a:lstStyle/>
-          <a:p>
-            <a:r>
-              <a:rPr b="1" sz="4400">
-                <a:solidFill>
-                  <a:srgbClr val="B3791F"/>
-                </a:solidFill>
-                <a:latin typeface="Menlo"/>
-              </a:rPr>
-              <a:t>35+</a:t>
-            </a:r>
-          </a:p>
-        </p:txBody>
-      </p:sp>
-      <p:sp>
-        <p:nvSpPr>
-          <p:cNvPr id="11" name="TextBox 10"/>
-          <p:cNvSpPr txBox="1"/>
-          <p:nvPr/>
-        </p:nvSpPr>
-        <p:spPr>
-          <a:xfrm>
-            <a:off x="685800" y="5257800"/>
-            <a:ext cx="3520440" cy="731520"/>
-          </a:xfrm>
-          <a:prstGeom prst="rect">
-            <a:avLst/>
-          </a:prstGeom>
-          <a:noFill/>
-        </p:spPr>
-        <p:txBody>
-          <a:bodyPr wrap="square">
-            <a:spAutoFit/>
-          </a:bodyPr>
-          <a:lstStyle/>
-          <a:p>
-            <a:r>
-              <a:rPr sz="1400">
-                <a:solidFill>
-                  <a:srgbClr val="55596A"/>
-                </a:solidFill>
-                <a:latin typeface="Avenir Next"/>
-              </a:rPr>
-              <a:t>個 subagent-driven-development 任務</a:t>
-            </a:r>
-          </a:p>
-        </p:txBody>
-      </p:sp>
-      <p:sp>
-        <p:nvSpPr>
-          <p:cNvPr id="12" name="TextBox 11"/>
-          <p:cNvSpPr txBox="1"/>
-          <p:nvPr/>
-        </p:nvSpPr>
-        <p:spPr>
-          <a:xfrm>
-            <a:off x="4389120" y="4297680"/>
-            <a:ext cx="3520440" cy="1005840"/>
-          </a:xfrm>
-          <a:prstGeom prst="rect">
-            <a:avLst/>
-          </a:prstGeom>
-          <a:noFill/>
-        </p:spPr>
-        <p:txBody>
-          <a:bodyPr wrap="none">
-            <a:spAutoFit/>
-          </a:bodyPr>
-          <a:lstStyle/>
-          <a:p>
-            <a:r>
-              <a:rPr b="1" sz="4400">
-                <a:solidFill>
-                  <a:srgbClr val="B3791F"/>
-                </a:solidFill>
-                <a:latin typeface="Menlo"/>
-              </a:rPr>
-              <a:t>104/104</a:t>
-            </a:r>
-          </a:p>
-        </p:txBody>
-      </p:sp>
-      <p:sp>
-        <p:nvSpPr>
-          <p:cNvPr id="13" name="TextBox 12"/>
-          <p:cNvSpPr txBox="1"/>
-          <p:nvPr/>
-        </p:nvSpPr>
-        <p:spPr>
-          <a:xfrm>
-            <a:off x="4389120" y="5257800"/>
-            <a:ext cx="3520440" cy="731520"/>
-          </a:xfrm>
-          <a:prstGeom prst="rect">
-            <a:avLst/>
-          </a:prstGeom>
-          <a:noFill/>
-        </p:spPr>
-        <p:txBody>
-          <a:bodyPr wrap="square">
-            <a:spAutoFit/>
-          </a:bodyPr>
-          <a:lstStyle/>
-          <a:p>
-            <a:r>
-              <a:rPr sz="1400">
-                <a:solidFill>
-                  <a:srgbClr val="55596A"/>
-                </a:solidFill>
-                <a:latin typeface="Avenir Next"/>
-              </a:rPr>
-              <a:t>現行系統測試通過</a:t>
-            </a:r>
-          </a:p>
-        </p:txBody>
-      </p:sp>
-      <p:sp>
-        <p:nvSpPr>
-          <p:cNvPr id="14" name="TextBox 13"/>
-          <p:cNvSpPr txBox="1"/>
-          <p:nvPr/>
-        </p:nvSpPr>
-        <p:spPr>
-          <a:xfrm>
-            <a:off x="8092440" y="4297680"/>
-            <a:ext cx="3520440" cy="1005840"/>
-          </a:xfrm>
-          <a:prstGeom prst="rect">
-            <a:avLst/>
-          </a:prstGeom>
-          <a:noFill/>
-        </p:spPr>
-        <p:txBody>
-          <a:bodyPr wrap="none">
-            <a:spAutoFit/>
-          </a:bodyPr>
-          <a:lstStyle/>
-          <a:p>
-            <a:r>
-              <a:rPr b="1" sz="4400">
-                <a:solidFill>
-                  <a:srgbClr val="B3791F"/>
-                </a:solidFill>
-                <a:latin typeface="Menlo"/>
-              </a:rPr>
-              <a:t>4×3</a:t>
-            </a:r>
-          </a:p>
-        </p:txBody>
-      </p:sp>
-      <p:sp>
-        <p:nvSpPr>
-          <p:cNvPr id="15" name="TextBox 14"/>
-          <p:cNvSpPr txBox="1"/>
-          <p:nvPr/>
-        </p:nvSpPr>
-        <p:spPr>
-          <a:xfrm>
-            <a:off x="8092440" y="5257800"/>
-            <a:ext cx="3520440" cy="731520"/>
-          </a:xfrm>
-          <a:prstGeom prst="rect">
-            <a:avLst/>
-          </a:prstGeom>
-          <a:noFill/>
-        </p:spPr>
-        <p:txBody>
-          <a:bodyPr wrap="square">
-            <a:spAutoFit/>
-          </a:bodyPr>
-          <a:lstStyle/>
-          <a:p>
-            <a:r>
-              <a:rPr sz="1400">
-                <a:solidFill>
-                  <a:srgbClr val="55596A"/>
-                </a:solidFill>
-                <a:latin typeface="Avenir Next"/>
-              </a:rPr>
-              <a:t>角色 × 讀／寫／封存 權限矩陣</a:t>
+                <a:latin typeface="Arial"/>
+              </a:rPr>
+              <a:t>任務看板</a:t>
             </a:r>
           </a:p>
         </p:txBody>
@@ -5848,9 +5179,9 @@
                 <a:solidFill>
                   <a:srgbClr val="1F6F6B"/>
                 </a:solidFill>
-                <a:latin typeface="Menlo"/>
-              </a:rPr>
-              <a:t>下一步</a:t>
+                <a:latin typeface="Courier New"/>
+              </a:rPr>
+              <a:t>AI TECHNIQUE · 研究先行</a:t>
             </a:r>
           </a:p>
         </p:txBody>
@@ -5884,7 +5215,7 @@
                 </a:solidFill>
                 <a:latin typeface="Georgia"/>
               </a:rPr>
-              <a:t>還沒做完的部分</a:t>
+              <a:t>寫計畫前，先花力氣把地基弄清楚</a:t>
             </a:r>
           </a:p>
         </p:txBody>
@@ -5907,7 +5238,7 @@
         </p:spPr>
         <p:txBody>
           <a:bodyPr wrap="square">
-            <a:spAutoFit/>
+            <a:normAutofit/>
           </a:bodyPr>
           <a:lstStyle/>
           <a:p>
@@ -5917,13 +5248,13 @@
               </a:spcAft>
             </a:pPr>
             <a:r>
-              <a:rPr sz="2000">
-                <a:solidFill>
-                  <a:srgbClr val="1C1F26"/>
-                </a:solidFill>
-                <a:latin typeface="Avenir Next"/>
-              </a:rPr>
-              <a:t>—  分類管理介面 —— 目前 task_categories 只有 API，畫面上還沒有能建立/管理分類的地方</a:t>
+              <a:rPr sz="1900">
+                <a:solidFill>
+                  <a:srgbClr val="1C1F26"/>
+                </a:solidFill>
+                <a:latin typeface="Arial"/>
+              </a:rPr>
+              <a:t>—  派 3 個平行 AI 做研究：把現有後端、前端程式碼逐字抄下來讀懂，還跑去讀了姊妹專案拖曳功能的實作邏輯</a:t>
             </a:r>
           </a:p>
           <a:p>
@@ -5933,13 +5264,13 @@
               </a:spcAft>
             </a:pPr>
             <a:r>
-              <a:rPr sz="2000">
-                <a:solidFill>
-                  <a:srgbClr val="1C1F26"/>
-                </a:solidFill>
-                <a:latin typeface="Avenir Next"/>
-              </a:rPr>
-              <a:t>—  人員派工／甘特兩個分頁 —— 舊模型版本已移除，要依新的扁平任務模型重新設計</a:t>
+              <a:rPr sz="1900">
+                <a:solidFill>
+                  <a:srgbClr val="1C1F26"/>
+                </a:solidFill>
+                <a:latin typeface="Arial"/>
+              </a:rPr>
+              <a:t>—  每個關鍵決定（欄位怎麼命名、刪除要怎麼處理、API 要長什麼樣）在寫進計畫之前，先問過一輪更資深的 AI 顧問意見</a:t>
             </a:r>
           </a:p>
           <a:p>
@@ -5949,13 +5280,13 @@
               </a:spcAft>
             </a:pPr>
             <a:r>
-              <a:rPr sz="2000">
-                <a:solidFill>
-                  <a:srgbClr val="1C1F26"/>
-                </a:solidFill>
-                <a:latin typeface="Avenir Next"/>
-              </a:rPr>
-              <a:t>—  文件同步已補上：README.md、docs/dev.md 都已對齊現行架構</a:t>
+              <a:rPr sz="1900">
+                <a:solidFill>
+                  <a:srgbClr val="1C1F26"/>
+                </a:solidFill>
+                <a:latin typeface="Arial"/>
+              </a:rPr>
+              <a:t>—  寫完計畫還會做一次自我檢查：對照原始需求逐條核對有沒有漏掉，掃一遍有沒有偷懶留白的地方</a:t>
             </a:r>
           </a:p>
         </p:txBody>
@@ -6013,9 +5344,9 @@
                 <a:solidFill>
                   <a:srgbClr val="1F6F6B"/>
                 </a:solidFill>
-                <a:latin typeface="Menlo"/>
-              </a:rPr>
-              <a:t>收尾</a:t>
+                <a:latin typeface="Courier New"/>
+              </a:rPr>
+              <a:t>AI TECHNIQUE · 規模化執行</a:t>
             </a:r>
           </a:p>
         </p:txBody>
@@ -6028,8 +5359,8 @@
         </p:nvSpPr>
         <p:spPr>
           <a:xfrm>
-            <a:off x="822960" y="1828800"/>
-            <a:ext cx="10515600" cy="2011680"/>
+            <a:off x="685800" y="914400"/>
+            <a:ext cx="10789920" cy="1463040"/>
           </a:xfrm>
           <a:prstGeom prst="rect">
             <a:avLst/>
@@ -6043,13 +5374,13 @@
           <a:lstStyle/>
           <a:p>
             <a:r>
-              <a:rPr b="1" sz="4400">
+              <a:rPr sz="3600" b="1">
                 <a:solidFill>
                   <a:srgbClr val="1C1F26"/>
                 </a:solidFill>
                 <a:latin typeface="Georgia"/>
               </a:rPr>
-              <a:t>一支 HTML 檔，走到一套 SaaS。</a:t>
+              <a:t>11 個任務、11 個全新 AI，難的用強模型、簡單的用便宜模型</a:t>
             </a:r>
           </a:p>
         </p:txBody>
@@ -6062,8 +5393,105 @@
         </p:nvSpPr>
         <p:spPr>
           <a:xfrm>
-            <a:off x="822960" y="3566160"/>
-            <a:ext cx="9875520" cy="1463040"/>
+            <a:off x="685800" y="1691640"/>
+            <a:ext cx="10607040" cy="4206240"/>
+          </a:xfrm>
+          <a:prstGeom prst="rect">
+            <a:avLst/>
+          </a:prstGeom>
+          <a:noFill/>
+        </p:spPr>
+        <p:txBody>
+          <a:bodyPr wrap="square">
+            <a:normAutofit/>
+          </a:bodyPr>
+          <a:lstStyle/>
+          <a:p>
+            <a:pPr>
+              <a:spcAft>
+                <a:spcPts val="1400"/>
+              </a:spcAft>
+            </a:pPr>
+            <a:r>
+              <a:rPr sz="1800">
+                <a:solidFill>
+                  <a:srgbClr val="1C1F26"/>
+                </a:solidFill>
+                <a:latin typeface="Arial"/>
+              </a:rPr>
+              <a:t>—  機械式的轉抄工作（資料結構、測試骨架）用便宜快速的模型；需要判斷跟整合的用中階模型；最後總體檢查用最強的模型</a:t>
+            </a:r>
+          </a:p>
+          <a:p>
+            <a:pPr>
+              <a:spcAft>
+                <a:spcPts val="1400"/>
+              </a:spcAft>
+            </a:pPr>
+            <a:r>
+              <a:rPr sz="1800">
+                <a:solidFill>
+                  <a:srgbClr val="1C1F26"/>
+                </a:solidFill>
+                <a:latin typeface="Arial"/>
+              </a:rPr>
+              <a:t>—  每個任務都走一樣的流程：先寫測試 → 確認真的會失敗 → 開始寫功能 → 確認測試通過 → 送出 → 交給另一個 AI 獨立審查</a:t>
+            </a:r>
+          </a:p>
+          <a:p>
+            <a:pPr>
+              <a:spcAft>
+                <a:spcPts val="1400"/>
+              </a:spcAft>
+            </a:pPr>
+            <a:r>
+              <a:rPr sz="1800">
+                <a:solidFill>
+                  <a:srgbClr val="1C1F26"/>
+                </a:solidFill>
+                <a:latin typeface="Arial"/>
+              </a:rPr>
+              <a:t>—  全程靠一份進度記錄檔追蹤：就算對話中斷、記憶被清空，回頭讀這份記錄也能接著做，不會重複做工</a:t>
+            </a:r>
+          </a:p>
+        </p:txBody>
+      </p:sp>
+    </p:spTree>
+  </p:cSld>
+  <p:clrMapOvr>
+    <a:masterClrMapping/>
+  </p:clrMapOvr>
+</p:sld>
+</file>
+
+<file path=ppt/slides/slide19.xml><?xml version="1.0" encoding="utf-8"?>
+<p:sld xmlns:a="http://schemas.openxmlformats.org/drawingml/2006/main" xmlns:p="http://schemas.openxmlformats.org/presentationml/2006/main" xmlns:r="http://schemas.openxmlformats.org/officeDocument/2006/relationships">
+  <p:cSld>
+    <p:bg>
+      <p:bgPr>
+        <a:solidFill>
+          <a:srgbClr val="F2F2EC"/>
+        </a:solidFill>
+        <a:effectLst/>
+      </p:bgPr>
+    </p:bg>
+    <p:spTree>
+      <p:nvGrpSpPr>
+        <p:cNvPr id="1" name=""/>
+        <p:cNvGrpSpPr/>
+        <p:nvPr/>
+      </p:nvGrpSpPr>
+      <p:grpSpPr/>
+      <p:sp>
+        <p:nvSpPr>
+          <p:cNvPr id="2" name="TextBox 1"/>
+          <p:cNvSpPr txBox="1"/>
+          <p:nvPr/>
+        </p:nvSpPr>
+        <p:spPr>
+          <a:xfrm>
+            <a:off x="685800" y="502920"/>
+            <a:ext cx="10515600" cy="365760"/>
           </a:xfrm>
           <a:prstGeom prst="rect">
             <a:avLst/>
@@ -6077,47 +5505,320 @@
           <a:lstStyle/>
           <a:p>
             <a:r>
-              <a:rPr sz="2000">
+              <a:rPr sz="1300" b="1">
+                <a:solidFill>
+                  <a:srgbClr val="1F6F6B"/>
+                </a:solidFill>
+                <a:latin typeface="Courier New"/>
+              </a:rPr>
+              <a:t>AI TECHNIQUE · 證據為準</a:t>
+            </a:r>
+          </a:p>
+        </p:txBody>
+      </p:sp>
+      <p:sp>
+        <p:nvSpPr>
+          <p:cNvPr id="3" name="TextBox 2"/>
+          <p:cNvSpPr txBox="1"/>
+          <p:nvPr/>
+        </p:nvSpPr>
+        <p:spPr>
+          <a:xfrm>
+            <a:off x="685800" y="914400"/>
+            <a:ext cx="10789920" cy="1463040"/>
+          </a:xfrm>
+          <a:prstGeom prst="rect">
+            <a:avLst/>
+          </a:prstGeom>
+          <a:noFill/>
+        </p:spPr>
+        <p:txBody>
+          <a:bodyPr wrap="square">
+            <a:spAutoFit/>
+          </a:bodyPr>
+          <a:lstStyle/>
+          <a:p>
+            <a:r>
+              <a:rPr sz="3200" b="1">
+                <a:solidFill>
+                  <a:srgbClr val="1C1F26"/>
+                </a:solidFill>
+                <a:latin typeface="Georgia"/>
+              </a:rPr>
+              <a:t>不相信報告，要真的重現給我看</a:t>
+            </a:r>
+          </a:p>
+        </p:txBody>
+      </p:sp>
+      <p:sp>
+        <p:nvSpPr>
+          <p:cNvPr id="4" name="Rounded Rectangle 3"/>
+          <p:cNvSpPr/>
+          <p:nvPr/>
+        </p:nvSpPr>
+        <p:spPr>
+          <a:xfrm>
+            <a:off x="685800" y="1828800"/>
+            <a:ext cx="10744200" cy="1417320"/>
+          </a:xfrm>
+          <a:prstGeom prst="roundRect">
+            <a:avLst>
+              <a:gd name="adj" fmla="val 4000"/>
+            </a:avLst>
+          </a:prstGeom>
+          <a:solidFill>
+            <a:srgbClr val="FFFFFF"/>
+          </a:solidFill>
+          <a:ln w="12700">
+            <a:solidFill>
+              <a:srgbClr val="D9D7CB"/>
+            </a:solidFill>
+          </a:ln>
+          <a:effectLst/>
+        </p:spPr>
+        <p:style>
+          <a:lnRef idx="1">
+            <a:schemeClr val="accent1"/>
+          </a:lnRef>
+          <a:fillRef idx="3">
+            <a:schemeClr val="accent1"/>
+          </a:fillRef>
+          <a:effectRef idx="2">
+            <a:schemeClr val="accent1"/>
+          </a:effectRef>
+          <a:fontRef idx="minor">
+            <a:schemeClr val="lt1"/>
+          </a:fontRef>
+        </p:style>
+        <p:txBody>
+          <a:bodyPr rtlCol="0" anchor="ctr" wrap="square" lIns="228600" rIns="228600" tIns="182880" bIns="182880">
+            <a:normAutofit/>
+          </a:bodyPr>
+          <a:lstStyle/>
+          <a:p>
+            <a:pPr algn="ctr"/>
+            <a:r>
+              <a:rPr sz="1100" b="1">
+                <a:solidFill>
+                  <a:srgbClr val="3F7D4F"/>
+                </a:solidFill>
+                <a:latin typeface="Courier New"/>
+              </a:rPr>
+              <a:t>案例一 · 計畫真的寫錯了</a:t>
+            </a:r>
+          </a:p>
+          <a:p>
+            <a:pPr>
+              <a:spcBef>
+                <a:spcPts val="600"/>
+              </a:spcBef>
+            </a:pPr>
+            <a:r>
+              <a:rPr sz="1400">
+                <a:solidFill>
+                  <a:srgbClr val="1C1F26"/>
+                </a:solidFill>
+                <a:latin typeface="Arial"/>
+              </a:rPr>
+              <a:t>某個任務沒照計畫寫的程式碼做。審查的 AI 沒有直接接受解釋，自己在乾淨的環境重現一次計畫版本 —— 真的會出錯</a:t>
+            </a:r>
+          </a:p>
+          <a:p>
+            <a:pPr>
+              <a:spcBef>
+                <a:spcPts val="800"/>
+              </a:spcBef>
+            </a:pPr>
+            <a:r>
+              <a:rPr sz="1200" i="1">
                 <a:solidFill>
                   <a:srgbClr val="55596A"/>
                 </a:solidFill>
-                <a:latin typeface="Avenir Next"/>
-              </a:rPr>
-              <a:t>技巧不是重點，讓每一步都可以被重現、被審查、被記錄下來 —— 才是真正把「vibe coding」收斂成可以交付的系統的原因。</a:t>
-            </a:r>
-          </a:p>
-        </p:txBody>
-      </p:sp>
-      <p:sp>
-        <p:nvSpPr>
-          <p:cNvPr id="5" name="TextBox 4"/>
-          <p:cNvSpPr txBox="1"/>
-          <p:nvPr/>
-        </p:nvSpPr>
-        <p:spPr>
-          <a:xfrm>
-            <a:off x="822960" y="6126480"/>
-            <a:ext cx="9144000" cy="457200"/>
-          </a:xfrm>
-          <a:prstGeom prst="rect">
-            <a:avLst/>
-          </a:prstGeom>
-          <a:noFill/>
-        </p:spPr>
-        <p:txBody>
-          <a:bodyPr wrap="none">
-            <a:spAutoFit/>
-          </a:bodyPr>
-          <a:lstStyle/>
-          <a:p>
-            <a:r>
-              <a:rPr sz="1200">
+                <a:latin typeface="Arial"/>
+              </a:rPr>
+              <a:t>結論：這次是計畫本身寫錯了，動手做的那個 AI 是對的</a:t>
+            </a:r>
+          </a:p>
+        </p:txBody>
+      </p:sp>
+      <p:sp>
+        <p:nvSpPr>
+          <p:cNvPr id="5" name="Rounded Rectangle 4"/>
+          <p:cNvSpPr/>
+          <p:nvPr/>
+        </p:nvSpPr>
+        <p:spPr>
+          <a:xfrm>
+            <a:off x="685800" y="3429000"/>
+            <a:ext cx="10744200" cy="1417320"/>
+          </a:xfrm>
+          <a:prstGeom prst="roundRect">
+            <a:avLst>
+              <a:gd name="adj" fmla="val 4000"/>
+            </a:avLst>
+          </a:prstGeom>
+          <a:solidFill>
+            <a:srgbClr val="FFFFFF"/>
+          </a:solidFill>
+          <a:ln w="12700">
+            <a:solidFill>
+              <a:srgbClr val="D9D7CB"/>
+            </a:solidFill>
+          </a:ln>
+          <a:effectLst/>
+        </p:spPr>
+        <p:style>
+          <a:lnRef idx="1">
+            <a:schemeClr val="accent1"/>
+          </a:lnRef>
+          <a:fillRef idx="3">
+            <a:schemeClr val="accent1"/>
+          </a:fillRef>
+          <a:effectRef idx="2">
+            <a:schemeClr val="accent1"/>
+          </a:effectRef>
+          <a:fontRef idx="minor">
+            <a:schemeClr val="lt1"/>
+          </a:fontRef>
+        </p:style>
+        <p:txBody>
+          <a:bodyPr rtlCol="0" anchor="ctr" wrap="square" lIns="228600" rIns="228600" tIns="182880" bIns="182880">
+            <a:normAutofit/>
+          </a:bodyPr>
+          <a:lstStyle/>
+          <a:p>
+            <a:pPr algn="ctr"/>
+            <a:r>
+              <a:rPr sz="1100" b="1">
+                <a:solidFill>
+                  <a:srgbClr val="1F6F6B"/>
+                </a:solidFill>
+                <a:latin typeface="Courier New"/>
+              </a:rPr>
+              <a:t>案例二 · 工具本身的問題，不是程式碼的錯</a:t>
+            </a:r>
+          </a:p>
+          <a:p>
+            <a:pPr>
+              <a:spcBef>
+                <a:spcPts val="600"/>
+              </a:spcBef>
+            </a:pPr>
+            <a:r>
+              <a:rPr sz="1400">
+                <a:solidFill>
+                  <a:srgbClr val="1C1F26"/>
+                </a:solidFill>
+                <a:latin typeface="Arial"/>
+              </a:rPr>
+              <a:t>測試看板拖曳的自動化工具「回報成功但畫面沒反應」。兩個獨立的 AI 各自重現，還用一個完全不相關的登入按鈕排除「跟拖曳有關」的猜測</a:t>
+            </a:r>
+          </a:p>
+          <a:p>
+            <a:pPr>
+              <a:spcBef>
+                <a:spcPts val="800"/>
+              </a:spcBef>
+            </a:pPr>
+            <a:r>
+              <a:rPr sz="1200" i="1">
                 <a:solidFill>
                   <a:srgbClr val="55596A"/>
                 </a:solidFill>
-                <a:latin typeface="Menlo"/>
-              </a:rPr>
-              <a:t>Spring-MissionBoard · 2026-06-08 → 2026-08-10</a:t>
+                <a:latin typeface="Arial"/>
+              </a:rPr>
+              <a:t>確認是本機工具本身的環境問題</a:t>
+            </a:r>
+          </a:p>
+        </p:txBody>
+      </p:sp>
+      <p:sp>
+        <p:nvSpPr>
+          <p:cNvPr id="6" name="Rounded Rectangle 5"/>
+          <p:cNvSpPr/>
+          <p:nvPr/>
+        </p:nvSpPr>
+        <p:spPr>
+          <a:xfrm>
+            <a:off x="685800" y="5029200"/>
+            <a:ext cx="10744200" cy="1417320"/>
+          </a:xfrm>
+          <a:prstGeom prst="roundRect">
+            <a:avLst>
+              <a:gd name="adj" fmla="val 4000"/>
+            </a:avLst>
+          </a:prstGeom>
+          <a:solidFill>
+            <a:srgbClr val="FFFFFF"/>
+          </a:solidFill>
+          <a:ln w="12700">
+            <a:solidFill>
+              <a:srgbClr val="D9D7CB"/>
+            </a:solidFill>
+          </a:ln>
+          <a:effectLst/>
+        </p:spPr>
+        <p:style>
+          <a:lnRef idx="1">
+            <a:schemeClr val="accent1"/>
+          </a:lnRef>
+          <a:fillRef idx="3">
+            <a:schemeClr val="accent1"/>
+          </a:fillRef>
+          <a:effectRef idx="2">
+            <a:schemeClr val="accent1"/>
+          </a:effectRef>
+          <a:fontRef idx="minor">
+            <a:schemeClr val="lt1"/>
+          </a:fontRef>
+        </p:style>
+        <p:txBody>
+          <a:bodyPr rtlCol="0" anchor="ctr" wrap="square" lIns="228600" rIns="228600" tIns="182880" bIns="182880">
+            <a:normAutofit/>
+          </a:bodyPr>
+          <a:lstStyle/>
+          <a:p>
+            <a:pPr algn="ctr"/>
+            <a:r>
+              <a:rPr sz="1100" b="1">
+                <a:solidFill>
+                  <a:srgbClr val="AB4030"/>
+                </a:solidFill>
+                <a:latin typeface="Courier New"/>
+              </a:rPr>
+              <a:t>案例三 · 只有整體檢查才看得到</a:t>
+            </a:r>
+          </a:p>
+          <a:p>
+            <a:pPr>
+              <a:spcBef>
+                <a:spcPts val="600"/>
+              </a:spcBef>
+            </a:pPr>
+            <a:r>
+              <a:rPr sz="1400">
+                <a:solidFill>
+                  <a:srgbClr val="1C1F26"/>
+                </a:solidFill>
+                <a:latin typeface="Arial"/>
+              </a:rPr>
+              <a:t>最後總體檢查（最強的 AI）親手在瀏覽器裡一格一格推演拖曳邏輯，抓到一個「同欄往下拖會多插一格」的小 bug</a:t>
+            </a:r>
+          </a:p>
+          <a:p>
+            <a:pPr>
+              <a:spcBef>
+                <a:spcPts val="800"/>
+              </a:spcBef>
+            </a:pPr>
+            <a:r>
+              <a:rPr sz="1200" i="1">
+                <a:solidFill>
+                  <a:srgbClr val="55596A"/>
+                </a:solidFill>
+                <a:latin typeface="Arial"/>
+              </a:rPr>
+              <a:t>這種問題要橫跨前端跟後端一起看，單一任務的審查根本看不到</a:t>
             </a:r>
           </a:p>
         </p:txBody>
@@ -6175,9 +5876,9 @@
                 <a:solidFill>
                   <a:srgbClr val="1F6F6B"/>
                 </a:solidFill>
-                <a:latin typeface="Menlo"/>
-              </a:rPr>
-              <a:t>全景</a:t>
+                <a:latin typeface="Courier New"/>
+              </a:rPr>
+              <a:t>為什麼會有這個專案</a:t>
             </a:r>
           </a:p>
         </p:txBody>
@@ -6211,7 +5912,7 @@
                 </a:solidFill>
                 <a:latin typeface="Georgia"/>
               </a:rPr>
-              <a:t>五個階段，一條時間軸</a:t>
+              <a:t>一切的起點：會議都在等文件</a:t>
             </a:r>
           </a:p>
         </p:txBody>
@@ -6224,52 +5925,1029 @@
         </p:nvSpPr>
         <p:spPr>
           <a:xfrm>
-            <a:off x="685800" y="1965960"/>
-            <a:ext cx="1554480" cy="841248"/>
-          </a:xfrm>
-          <a:prstGeom prst="rect">
-            <a:avLst/>
-          </a:prstGeom>
-          <a:noFill/>
-        </p:spPr>
-        <p:txBody>
-          <a:bodyPr wrap="none">
+            <a:off x="685800" y="1691640"/>
+            <a:ext cx="10607040" cy="4206240"/>
+          </a:xfrm>
+          <a:prstGeom prst="rect">
+            <a:avLst/>
+          </a:prstGeom>
+          <a:noFill/>
+        </p:spPr>
+        <p:txBody>
+          <a:bodyPr wrap="square">
+            <a:normAutofit/>
+          </a:bodyPr>
+          <a:lstStyle/>
+          <a:p>
+            <a:pPr>
+              <a:spcAft>
+                <a:spcPts val="1400"/>
+              </a:spcAft>
+            </a:pPr>
+            <a:r>
+              <a:rPr sz="2000">
+                <a:solidFill>
+                  <a:srgbClr val="1C1F26"/>
+                </a:solidFill>
+                <a:latin typeface="Arial"/>
+              </a:rPr>
+              <a:t>—  我在銀行做 AP 工程師。開發本身不是最花時間的，最花時間的是每次開會都要重新對一次文件</a:t>
+            </a:r>
+          </a:p>
+          <a:p>
+            <a:pPr>
+              <a:spcAft>
+                <a:spcPts val="1400"/>
+              </a:spcAft>
+            </a:pPr>
+            <a:r>
+              <a:rPr sz="2000">
+                <a:solidFill>
+                  <a:srgbClr val="1C1F26"/>
+                </a:solidFill>
+                <a:latin typeface="Arial"/>
+              </a:rPr>
+              <a:t>—  文件品質參差不齊、格式各寫各的，開會常常變成在對格式、對用詞，不是在對真正的內容</a:t>
+            </a:r>
+          </a:p>
+          <a:p>
+            <a:pPr>
+              <a:spcAft>
+                <a:spcPts val="1400"/>
+              </a:spcAft>
+            </a:pPr>
+            <a:r>
+              <a:rPr sz="2000">
+                <a:solidFill>
+                  <a:srgbClr val="1C1F26"/>
+                </a:solidFill>
+                <a:latin typeface="Arial"/>
+              </a:rPr>
+              <a:t>—  想法很單純：能不能用 AI 幫忙，把「做文件、對文件」這件事變輕鬆一點？</a:t>
+            </a:r>
+          </a:p>
+          <a:p>
+            <a:pPr>
+              <a:spcAft>
+                <a:spcPts val="1400"/>
+              </a:spcAft>
+            </a:pPr>
+            <a:r>
+              <a:rPr sz="2000">
+                <a:solidFill>
+                  <a:srgbClr val="1C1F26"/>
+                </a:solidFill>
+                <a:latin typeface="Arial"/>
+              </a:rPr>
+              <a:t>—  一開始沒想清楚商業模式，也沒想要做成產品——就是先動手，試試看能不能解決這個真實碰到的痛點</a:t>
+            </a:r>
+          </a:p>
+        </p:txBody>
+      </p:sp>
+    </p:spTree>
+  </p:cSld>
+  <p:clrMapOvr>
+    <a:masterClrMapping/>
+  </p:clrMapOvr>
+</p:sld>
+</file>
+
+<file path=ppt/slides/slide20.xml><?xml version="1.0" encoding="utf-8"?>
+<p:sld xmlns:a="http://schemas.openxmlformats.org/drawingml/2006/main" xmlns:p="http://schemas.openxmlformats.org/presentationml/2006/main" xmlns:r="http://schemas.openxmlformats.org/officeDocument/2006/relationships">
+  <p:cSld>
+    <p:bg>
+      <p:bgPr>
+        <a:solidFill>
+          <a:srgbClr val="F2F2EC"/>
+        </a:solidFill>
+        <a:effectLst/>
+      </p:bgPr>
+    </p:bg>
+    <p:spTree>
+      <p:nvGrpSpPr>
+        <p:cNvPr id="1" name=""/>
+        <p:cNvGrpSpPr/>
+        <p:nvPr/>
+      </p:nvGrpSpPr>
+      <p:grpSpPr/>
+      <p:sp>
+        <p:nvSpPr>
+          <p:cNvPr id="2" name="TextBox 1"/>
+          <p:cNvSpPr txBox="1"/>
+          <p:nvPr/>
+        </p:nvSpPr>
+        <p:spPr>
+          <a:xfrm>
+            <a:off x="685800" y="502920"/>
+            <a:ext cx="10515600" cy="365760"/>
+          </a:xfrm>
+          <a:prstGeom prst="rect">
+            <a:avLst/>
+          </a:prstGeom>
+          <a:noFill/>
+        </p:spPr>
+        <p:txBody>
+          <a:bodyPr wrap="square">
             <a:spAutoFit/>
           </a:bodyPr>
           <a:lstStyle/>
           <a:p>
             <a:r>
-              <a:rPr sz="1300">
-                <a:solidFill>
-                  <a:srgbClr val="55596A"/>
-                </a:solidFill>
-                <a:latin typeface="Menlo"/>
-              </a:rPr>
-              <a:t>06-08 → 06-19</a:t>
-            </a:r>
-          </a:p>
-        </p:txBody>
-      </p:sp>
-      <p:sp>
-        <p:nvSpPr>
-          <p:cNvPr id="5" name="Oval 4"/>
+              <a:rPr sz="1300" b="1">
+                <a:solidFill>
+                  <a:srgbClr val="1F6F6B"/>
+                </a:solidFill>
+                <a:latin typeface="Courier New"/>
+              </a:rPr>
+              <a:t>架構怎麼選</a:t>
+            </a:r>
+          </a:p>
+        </p:txBody>
+      </p:sp>
+      <p:sp>
+        <p:nvSpPr>
+          <p:cNvPr id="3" name="TextBox 2"/>
+          <p:cNvSpPr txBox="1"/>
+          <p:nvPr/>
+        </p:nvSpPr>
+        <p:spPr>
+          <a:xfrm>
+            <a:off x="685800" y="914400"/>
+            <a:ext cx="10789920" cy="1463040"/>
+          </a:xfrm>
+          <a:prstGeom prst="rect">
+            <a:avLst/>
+          </a:prstGeom>
+          <a:noFill/>
+        </p:spPr>
+        <p:txBody>
+          <a:bodyPr wrap="square">
+            <a:spAutoFit/>
+          </a:bodyPr>
+          <a:lstStyle/>
+          <a:p>
+            <a:r>
+              <a:rPr sz="3600" b="1">
+                <a:solidFill>
+                  <a:srgbClr val="1C1F26"/>
+                </a:solidFill>
+                <a:latin typeface="Georgia"/>
+              </a:rPr>
+              <a:t>先求穩，留擴充空間</a:t>
+            </a:r>
+          </a:p>
+        </p:txBody>
+      </p:sp>
+      <p:sp>
+        <p:nvSpPr>
+          <p:cNvPr id="4" name="TextBox 3"/>
+          <p:cNvSpPr txBox="1"/>
+          <p:nvPr/>
+        </p:nvSpPr>
+        <p:spPr>
+          <a:xfrm>
+            <a:off x="685800" y="1691640"/>
+            <a:ext cx="10607040" cy="4206240"/>
+          </a:xfrm>
+          <a:prstGeom prst="rect">
+            <a:avLst/>
+          </a:prstGeom>
+          <a:noFill/>
+        </p:spPr>
+        <p:txBody>
+          <a:bodyPr wrap="square">
+            <a:normAutofit/>
+          </a:bodyPr>
+          <a:lstStyle/>
+          <a:p>
+            <a:pPr>
+              <a:spcAft>
+                <a:spcPts val="1400"/>
+              </a:spcAft>
+            </a:pPr>
+            <a:r>
+              <a:rPr sz="2100">
+                <a:solidFill>
+                  <a:srgbClr val="1C1F26"/>
+                </a:solidFill>
+                <a:latin typeface="Arial"/>
+              </a:rPr>
+              <a:t>—  MVC 是我過去開發經驗裡比較熟悉、也最容易驗證正確性的架構</a:t>
+            </a:r>
+          </a:p>
+          <a:p>
+            <a:pPr>
+              <a:spcAft>
+                <a:spcPts val="1400"/>
+              </a:spcAft>
+            </a:pPr>
+            <a:r>
+              <a:rPr sz="2100">
+                <a:solidFill>
+                  <a:srgbClr val="1C1F26"/>
+                </a:solidFill>
+                <a:latin typeface="Arial"/>
+              </a:rPr>
+              <a:t>—  選它不是因為最潮，是因為它是個「安全的起點」—— 先把資料模型跟權限邏輯做對，比一開始就衝去做微服務更重要</a:t>
+            </a:r>
+          </a:p>
+          <a:p>
+            <a:pPr>
+              <a:spcAft>
+                <a:spcPts val="1400"/>
+              </a:spcAft>
+            </a:pPr>
+            <a:r>
+              <a:rPr sz="2100">
+                <a:solidFill>
+                  <a:srgbClr val="1C1F26"/>
+                </a:solidFill>
+                <a:latin typeface="Arial"/>
+              </a:rPr>
+              <a:t>—  之後如果要拆前後端、走 MVVM，或往微服務發展，這個底子改起來也不會太痛</a:t>
+            </a:r>
+          </a:p>
+        </p:txBody>
+      </p:sp>
+    </p:spTree>
+  </p:cSld>
+  <p:clrMapOvr>
+    <a:masterClrMapping/>
+  </p:clrMapOvr>
+</p:sld>
+</file>
+
+<file path=ppt/slides/slide21.xml><?xml version="1.0" encoding="utf-8"?>
+<p:sld xmlns:a="http://schemas.openxmlformats.org/drawingml/2006/main" xmlns:p="http://schemas.openxmlformats.org/presentationml/2006/main" xmlns:r="http://schemas.openxmlformats.org/officeDocument/2006/relationships">
+  <p:cSld>
+    <p:bg>
+      <p:bgPr>
+        <a:solidFill>
+          <a:srgbClr val="F2F2EC"/>
+        </a:solidFill>
+        <a:effectLst/>
+      </p:bgPr>
+    </p:bg>
+    <p:spTree>
+      <p:nvGrpSpPr>
+        <p:cNvPr id="1" name=""/>
+        <p:cNvGrpSpPr/>
+        <p:nvPr/>
+      </p:nvGrpSpPr>
+      <p:grpSpPr/>
+      <p:sp>
+        <p:nvSpPr>
+          <p:cNvPr id="2" name="TextBox 1"/>
+          <p:cNvSpPr txBox="1"/>
+          <p:nvPr/>
+        </p:nvSpPr>
+        <p:spPr>
+          <a:xfrm>
+            <a:off x="685800" y="502920"/>
+            <a:ext cx="10515600" cy="365760"/>
+          </a:xfrm>
+          <a:prstGeom prst="rect">
+            <a:avLst/>
+          </a:prstGeom>
+          <a:noFill/>
+        </p:spPr>
+        <p:txBody>
+          <a:bodyPr wrap="square">
+            <a:spAutoFit/>
+          </a:bodyPr>
+          <a:lstStyle/>
+          <a:p>
+            <a:r>
+              <a:rPr sz="1300" b="1">
+                <a:solidFill>
+                  <a:srgbClr val="1F6F6B"/>
+                </a:solidFill>
+                <a:latin typeface="Courier New"/>
+              </a:rPr>
+              <a:t>快速部署</a:t>
+            </a:r>
+          </a:p>
+        </p:txBody>
+      </p:sp>
+      <p:sp>
+        <p:nvSpPr>
+          <p:cNvPr id="3" name="TextBox 2"/>
+          <p:cNvSpPr txBox="1"/>
+          <p:nvPr/>
+        </p:nvSpPr>
+        <p:spPr>
+          <a:xfrm>
+            <a:off x="685800" y="914400"/>
+            <a:ext cx="10789920" cy="1463040"/>
+          </a:xfrm>
+          <a:prstGeom prst="rect">
+            <a:avLst/>
+          </a:prstGeom>
+          <a:noFill/>
+        </p:spPr>
+        <p:txBody>
+          <a:bodyPr wrap="square">
+            <a:spAutoFit/>
+          </a:bodyPr>
+          <a:lstStyle/>
+          <a:p>
+            <a:r>
+              <a:rPr sz="3600" b="1">
+                <a:solidFill>
+                  <a:srgbClr val="1C1F26"/>
+                </a:solidFill>
+                <a:latin typeface="Georgia"/>
+              </a:rPr>
+              <a:t>Docker Compose：一行指令，環境就好了</a:t>
+            </a:r>
+          </a:p>
+        </p:txBody>
+      </p:sp>
+      <p:sp>
+        <p:nvSpPr>
+          <p:cNvPr id="4" name="TextBox 3"/>
+          <p:cNvSpPr txBox="1"/>
+          <p:nvPr/>
+        </p:nvSpPr>
+        <p:spPr>
+          <a:xfrm>
+            <a:off x="685800" y="1691640"/>
+            <a:ext cx="10607040" cy="4206240"/>
+          </a:xfrm>
+          <a:prstGeom prst="rect">
+            <a:avLst/>
+          </a:prstGeom>
+          <a:noFill/>
+        </p:spPr>
+        <p:txBody>
+          <a:bodyPr wrap="square">
+            <a:normAutofit/>
+          </a:bodyPr>
+          <a:lstStyle/>
+          <a:p>
+            <a:pPr>
+              <a:spcAft>
+                <a:spcPts val="1400"/>
+              </a:spcAft>
+            </a:pPr>
+            <a:r>
+              <a:rPr sz="2100">
+                <a:solidFill>
+                  <a:srgbClr val="1C1F26"/>
+                </a:solidFill>
+                <a:latin typeface="Arial"/>
+              </a:rPr>
+              <a:t>—  每個專案都用同一套模式：docker compose up -d 資料庫就起來了，.env.example 複製成 .env 就能跑</a:t>
+            </a:r>
+          </a:p>
+          <a:p>
+            <a:pPr>
+              <a:spcAft>
+                <a:spcPts val="1400"/>
+              </a:spcAft>
+            </a:pPr>
+            <a:r>
+              <a:rPr sz="2100">
+                <a:solidFill>
+                  <a:srgbClr val="1C1F26"/>
+                </a:solidFill>
+                <a:latin typeface="Arial"/>
+              </a:rPr>
+              <a:t>—  不用再手動裝資料庫、對版本、喬 port —— 這件事情只要做對一次，之後每個專案都能直接複製貼上</a:t>
+            </a:r>
+          </a:p>
+          <a:p>
+            <a:pPr>
+              <a:spcAft>
+                <a:spcPts val="1400"/>
+              </a:spcAft>
+            </a:pPr>
+            <a:r>
+              <a:rPr sz="2100">
+                <a:solidFill>
+                  <a:srgbClr val="1C1F26"/>
+                </a:solidFill>
+                <a:latin typeface="Arial"/>
+              </a:rPr>
+              <a:t>—  一個人開發最怕卡在環境設定上，這件事解決得越快，剩下的時間才能花在真正的問題上</a:t>
+            </a:r>
+          </a:p>
+        </p:txBody>
+      </p:sp>
+    </p:spTree>
+  </p:cSld>
+  <p:clrMapOvr>
+    <a:masterClrMapping/>
+  </p:clrMapOvr>
+</p:sld>
+</file>
+
+<file path=ppt/slides/slide22.xml><?xml version="1.0" encoding="utf-8"?>
+<p:sld xmlns:a="http://schemas.openxmlformats.org/drawingml/2006/main" xmlns:p="http://schemas.openxmlformats.org/presentationml/2006/main" xmlns:r="http://schemas.openxmlformats.org/officeDocument/2006/relationships">
+  <p:cSld>
+    <p:bg>
+      <p:bgPr>
+        <a:solidFill>
+          <a:srgbClr val="F2F2EC"/>
+        </a:solidFill>
+        <a:effectLst/>
+      </p:bgPr>
+    </p:bg>
+    <p:spTree>
+      <p:nvGrpSpPr>
+        <p:cNvPr id="1" name=""/>
+        <p:cNvGrpSpPr/>
+        <p:nvPr/>
+      </p:nvGrpSpPr>
+      <p:grpSpPr/>
+      <p:sp>
+        <p:nvSpPr>
+          <p:cNvPr id="2" name="TextBox 1"/>
+          <p:cNvSpPr txBox="1"/>
+          <p:nvPr/>
+        </p:nvSpPr>
+        <p:spPr>
+          <a:xfrm>
+            <a:off x="685800" y="502920"/>
+            <a:ext cx="10515600" cy="365760"/>
+          </a:xfrm>
+          <a:prstGeom prst="rect">
+            <a:avLst/>
+          </a:prstGeom>
+          <a:noFill/>
+        </p:spPr>
+        <p:txBody>
+          <a:bodyPr wrap="square">
+            <a:spAutoFit/>
+          </a:bodyPr>
+          <a:lstStyle/>
+          <a:p>
+            <a:r>
+              <a:rPr sz="1300" b="1">
+                <a:solidFill>
+                  <a:srgbClr val="1F6F6B"/>
+                </a:solidFill>
+                <a:latin typeface="Courier New"/>
+              </a:rPr>
+              <a:t>怎麼幫下一個專案打底</a:t>
+            </a:r>
+          </a:p>
+        </p:txBody>
+      </p:sp>
+      <p:sp>
+        <p:nvSpPr>
+          <p:cNvPr id="3" name="TextBox 2"/>
+          <p:cNvSpPr txBox="1"/>
+          <p:nvPr/>
+        </p:nvSpPr>
+        <p:spPr>
+          <a:xfrm>
+            <a:off x="685800" y="914400"/>
+            <a:ext cx="10789920" cy="1463040"/>
+          </a:xfrm>
+          <a:prstGeom prst="rect">
+            <a:avLst/>
+          </a:prstGeom>
+          <a:noFill/>
+        </p:spPr>
+        <p:txBody>
+          <a:bodyPr wrap="square">
+            <a:spAutoFit/>
+          </a:bodyPr>
+          <a:lstStyle/>
+          <a:p>
+            <a:r>
+              <a:rPr sz="3600" b="1">
+                <a:solidFill>
+                  <a:srgbClr val="1C1F26"/>
+                </a:solidFill>
+                <a:latin typeface="Georgia"/>
+              </a:rPr>
+              <a:t>把「怎麼開發」也寫成規則，不用每次重新想</a:t>
+            </a:r>
+          </a:p>
+        </p:txBody>
+      </p:sp>
+      <p:sp>
+        <p:nvSpPr>
+          <p:cNvPr id="4" name="TextBox 3"/>
+          <p:cNvSpPr txBox="1"/>
+          <p:nvPr/>
+        </p:nvSpPr>
+        <p:spPr>
+          <a:xfrm>
+            <a:off x="685800" y="1691640"/>
+            <a:ext cx="10607040" cy="4206240"/>
+          </a:xfrm>
+          <a:prstGeom prst="rect">
+            <a:avLst/>
+          </a:prstGeom>
+          <a:noFill/>
+        </p:spPr>
+        <p:txBody>
+          <a:bodyPr wrap="square">
+            <a:normAutofit/>
+          </a:bodyPr>
+          <a:lstStyle/>
+          <a:p>
+            <a:pPr>
+              <a:spcAft>
+                <a:spcPts val="1400"/>
+              </a:spcAft>
+            </a:pPr>
+            <a:r>
+              <a:rPr sz="1800">
+                <a:solidFill>
+                  <a:srgbClr val="1C1F26"/>
+                </a:solidFill>
+                <a:latin typeface="Arial"/>
+              </a:rPr>
+              <a:t>—  在自己的全域設定檔裡寫一套跨專案規則：用什麼語言溝通、git 流程怎麼走、什麼時候該停下來問我、什麼時候 AI 可以自己做決定</a:t>
+            </a:r>
+          </a:p>
+          <a:p>
+            <a:pPr>
+              <a:spcAft>
+                <a:spcPts val="1400"/>
+              </a:spcAft>
+            </a:pPr>
+            <a:r>
+              <a:rPr sz="1800">
+                <a:solidFill>
+                  <a:srgbClr val="1C1F26"/>
+                </a:solidFill>
+                <a:latin typeface="Arial"/>
+              </a:rPr>
+              <a:t>—  做了一個「建新專案」的固定流程，依標準規格建立骨架 —— 下次要開新專案，不用再從零想「資料夾要怎麼擺」</a:t>
+            </a:r>
+          </a:p>
+          <a:p>
+            <a:pPr>
+              <a:spcAft>
+                <a:spcPts val="1400"/>
+              </a:spcAft>
+            </a:pPr>
+            <a:r>
+              <a:rPr sz="1800">
+                <a:solidFill>
+                  <a:srgbClr val="1C1F26"/>
+                </a:solidFill>
+                <a:latin typeface="Arial"/>
+              </a:rPr>
+              <a:t>—  危險操作（像強制推送、大範圍刪除）都被攔住，要嘛我親口同意，要嘛巡檢自動確認沒問題才放行 —— 降低我不在電腦前也會出包的風險</a:t>
+            </a:r>
+          </a:p>
+        </p:txBody>
+      </p:sp>
+    </p:spTree>
+  </p:cSld>
+  <p:clrMapOvr>
+    <a:masterClrMapping/>
+  </p:clrMapOvr>
+</p:sld>
+</file>
+
+<file path=ppt/slides/slide23.xml><?xml version="1.0" encoding="utf-8"?>
+<p:sld xmlns:a="http://schemas.openxmlformats.org/drawingml/2006/main" xmlns:p="http://schemas.openxmlformats.org/presentationml/2006/main" xmlns:r="http://schemas.openxmlformats.org/officeDocument/2006/relationships">
+  <p:cSld>
+    <p:bg>
+      <p:bgPr>
+        <a:solidFill>
+          <a:srgbClr val="F2F2EC"/>
+        </a:solidFill>
+        <a:effectLst/>
+      </p:bgPr>
+    </p:bg>
+    <p:spTree>
+      <p:nvGrpSpPr>
+        <p:cNvPr id="1" name=""/>
+        <p:cNvGrpSpPr/>
+        <p:nvPr/>
+      </p:nvGrpSpPr>
+      <p:grpSpPr/>
+      <p:sp>
+        <p:nvSpPr>
+          <p:cNvPr id="2" name="TextBox 1"/>
+          <p:cNvSpPr txBox="1"/>
+          <p:nvPr/>
+        </p:nvSpPr>
+        <p:spPr>
+          <a:xfrm>
+            <a:off x="685800" y="502920"/>
+            <a:ext cx="10515600" cy="365760"/>
+          </a:xfrm>
+          <a:prstGeom prst="rect">
+            <a:avLst/>
+          </a:prstGeom>
+          <a:noFill/>
+        </p:spPr>
+        <p:txBody>
+          <a:bodyPr wrap="square">
+            <a:spAutoFit/>
+          </a:bodyPr>
+          <a:lstStyle/>
+          <a:p>
+            <a:r>
+              <a:rPr sz="1300" b="1">
+                <a:solidFill>
+                  <a:srgbClr val="1F6F6B"/>
+                </a:solidFill>
+                <a:latin typeface="Courier New"/>
+              </a:rPr>
+              <a:t>釐清需求</a:t>
+            </a:r>
+          </a:p>
+        </p:txBody>
+      </p:sp>
+      <p:sp>
+        <p:nvSpPr>
+          <p:cNvPr id="3" name="TextBox 2"/>
+          <p:cNvSpPr txBox="1"/>
+          <p:nvPr/>
+        </p:nvSpPr>
+        <p:spPr>
+          <a:xfrm>
+            <a:off x="685800" y="914400"/>
+            <a:ext cx="10789920" cy="1463040"/>
+          </a:xfrm>
+          <a:prstGeom prst="rect">
+            <a:avLst/>
+          </a:prstGeom>
+          <a:noFill/>
+        </p:spPr>
+        <p:txBody>
+          <a:bodyPr wrap="square">
+            <a:spAutoFit/>
+          </a:bodyPr>
+          <a:lstStyle/>
+          <a:p>
+            <a:r>
+              <a:rPr sz="3600" b="1">
+                <a:solidFill>
+                  <a:srgbClr val="1C1F26"/>
+                </a:solidFill>
+                <a:latin typeface="Georgia"/>
+              </a:rPr>
+              <a:t>先問清楚，比先動手更重要</a:t>
+            </a:r>
+          </a:p>
+        </p:txBody>
+      </p:sp>
+      <p:sp>
+        <p:nvSpPr>
+          <p:cNvPr id="4" name="TextBox 3"/>
+          <p:cNvSpPr txBox="1"/>
+          <p:nvPr/>
+        </p:nvSpPr>
+        <p:spPr>
+          <a:xfrm>
+            <a:off x="685800" y="1691640"/>
+            <a:ext cx="10607040" cy="4206240"/>
+          </a:xfrm>
+          <a:prstGeom prst="rect">
+            <a:avLst/>
+          </a:prstGeom>
+          <a:noFill/>
+        </p:spPr>
+        <p:txBody>
+          <a:bodyPr wrap="square">
+            <a:normAutofit/>
+          </a:bodyPr>
+          <a:lstStyle/>
+          <a:p>
+            <a:pPr>
+              <a:spcAft>
+                <a:spcPts val="1400"/>
+              </a:spcAft>
+            </a:pPr>
+            <a:r>
+              <a:rPr sz="2000">
+                <a:solidFill>
+                  <a:srgbClr val="1C1F26"/>
+                </a:solidFill>
+                <a:latin typeface="Arial"/>
+              </a:rPr>
+              <a:t>—  每次要做新功能，AI 不會馬上動手，會先用討論的方式跟我來回問答，把真正要解決的問題問清楚</a:t>
+            </a:r>
+          </a:p>
+          <a:p>
+            <a:pPr>
+              <a:spcAft>
+                <a:spcPts val="1400"/>
+              </a:spcAft>
+            </a:pPr>
+            <a:r>
+              <a:rPr sz="2000">
+                <a:solidFill>
+                  <a:srgbClr val="1C1F26"/>
+                </a:solidFill>
+                <a:latin typeface="Arial"/>
+              </a:rPr>
+              <a:t>—  遇到關鍵決策 —— 例如要不要用隔離環境做重構、要不要整個資料模型都重寫 —— AI 會主動停下來問我，不會自己憑感覺猜</a:t>
+            </a:r>
+          </a:p>
+          <a:p>
+            <a:pPr>
+              <a:spcAft>
+                <a:spcPts val="1400"/>
+              </a:spcAft>
+            </a:pPr>
+            <a:r>
+              <a:rPr sz="2000">
+                <a:solidFill>
+                  <a:srgbClr val="1C1F26"/>
+                </a:solidFill>
+                <a:latin typeface="Arial"/>
+              </a:rPr>
+              <a:t>—  這個習慣救了不少次：後來回頭看，會發現很多返工都是因為一開始沒問清楚就衝去做</a:t>
+            </a:r>
+          </a:p>
+        </p:txBody>
+      </p:sp>
+    </p:spTree>
+  </p:cSld>
+  <p:clrMapOvr>
+    <a:masterClrMapping/>
+  </p:clrMapOvr>
+</p:sld>
+</file>
+
+<file path=ppt/slides/slide24.xml><?xml version="1.0" encoding="utf-8"?>
+<p:sld xmlns:a="http://schemas.openxmlformats.org/drawingml/2006/main" xmlns:p="http://schemas.openxmlformats.org/presentationml/2006/main" xmlns:r="http://schemas.openxmlformats.org/officeDocument/2006/relationships">
+  <p:cSld>
+    <p:bg>
+      <p:bgPr>
+        <a:solidFill>
+          <a:srgbClr val="F2F2EC"/>
+        </a:solidFill>
+        <a:effectLst/>
+      </p:bgPr>
+    </p:bg>
+    <p:spTree>
+      <p:nvGrpSpPr>
+        <p:cNvPr id="1" name=""/>
+        <p:cNvGrpSpPr/>
+        <p:nvPr/>
+      </p:nvGrpSpPr>
+      <p:grpSpPr/>
+      <p:sp>
+        <p:nvSpPr>
+          <p:cNvPr id="2" name="TextBox 1"/>
+          <p:cNvSpPr txBox="1"/>
+          <p:nvPr/>
+        </p:nvSpPr>
+        <p:spPr>
+          <a:xfrm>
+            <a:off x="685800" y="502920"/>
+            <a:ext cx="10515600" cy="365760"/>
+          </a:xfrm>
+          <a:prstGeom prst="rect">
+            <a:avLst/>
+          </a:prstGeom>
+          <a:noFill/>
+        </p:spPr>
+        <p:txBody>
+          <a:bodyPr wrap="square">
+            <a:spAutoFit/>
+          </a:bodyPr>
+          <a:lstStyle/>
+          <a:p>
+            <a:r>
+              <a:rPr sz="1300" b="1">
+                <a:solidFill>
+                  <a:srgbClr val="1F6F6B"/>
+                </a:solidFill>
+                <a:latin typeface="Courier New"/>
+              </a:rPr>
+              <a:t>決策方式</a:t>
+            </a:r>
+          </a:p>
+        </p:txBody>
+      </p:sp>
+      <p:sp>
+        <p:nvSpPr>
+          <p:cNvPr id="3" name="TextBox 2"/>
+          <p:cNvSpPr txBox="1"/>
+          <p:nvPr/>
+        </p:nvSpPr>
+        <p:spPr>
+          <a:xfrm>
+            <a:off x="685800" y="914400"/>
+            <a:ext cx="10789920" cy="1463040"/>
+          </a:xfrm>
+          <a:prstGeom prst="rect">
+            <a:avLst/>
+          </a:prstGeom>
+          <a:noFill/>
+        </p:spPr>
+        <p:txBody>
+          <a:bodyPr wrap="square">
+            <a:spAutoFit/>
+          </a:bodyPr>
+          <a:lstStyle/>
+          <a:p>
+            <a:r>
+              <a:rPr sz="3600" b="1">
+                <a:solidFill>
+                  <a:srgbClr val="1C1F26"/>
+                </a:solidFill>
+                <a:latin typeface="Georgia"/>
+              </a:rPr>
+              <a:t>用選單決策，不是丟一段話要我自己抓重點</a:t>
+            </a:r>
+          </a:p>
+        </p:txBody>
+      </p:sp>
+      <p:sp>
+        <p:nvSpPr>
+          <p:cNvPr id="4" name="TextBox 3"/>
+          <p:cNvSpPr txBox="1"/>
+          <p:nvPr/>
+        </p:nvSpPr>
+        <p:spPr>
+          <a:xfrm>
+            <a:off x="685800" y="1691640"/>
+            <a:ext cx="10607040" cy="4206240"/>
+          </a:xfrm>
+          <a:prstGeom prst="rect">
+            <a:avLst/>
+          </a:prstGeom>
+          <a:noFill/>
+        </p:spPr>
+        <p:txBody>
+          <a:bodyPr wrap="square">
+            <a:normAutofit/>
+          </a:bodyPr>
+          <a:lstStyle/>
+          <a:p>
+            <a:pPr>
+              <a:spcAft>
+                <a:spcPts val="1400"/>
+              </a:spcAft>
+            </a:pPr>
+            <a:r>
+              <a:rPr sz="2000">
+                <a:solidFill>
+                  <a:srgbClr val="1C1F26"/>
+                </a:solidFill>
+                <a:latin typeface="Arial"/>
+              </a:rPr>
+              <a:t>—  遇到需要我拍板的地方，AI 不會丟一大段文字解釋，而是列出幾個明確的選項讓我直接選</a:t>
+            </a:r>
+          </a:p>
+          <a:p>
+            <a:pPr>
+              <a:spcAft>
+                <a:spcPts val="1400"/>
+              </a:spcAft>
+            </a:pPr>
+            <a:r>
+              <a:rPr sz="2000">
+                <a:solidFill>
+                  <a:srgbClr val="1C1F26"/>
+                </a:solidFill>
+                <a:latin typeface="Arial"/>
+              </a:rPr>
+              <a:t>—  像是「這次重構要不要用隔離環境？」「截圖要抬幾代舊系統？」都是這樣問出來的，包含這份簡報的內容方向也是</a:t>
+            </a:r>
+          </a:p>
+          <a:p>
+            <a:pPr>
+              <a:spcAft>
+                <a:spcPts val="1400"/>
+              </a:spcAft>
+            </a:pPr>
+            <a:r>
+              <a:rPr sz="2000">
+                <a:solidFill>
+                  <a:srgbClr val="1C1F26"/>
+                </a:solidFill>
+                <a:latin typeface="Arial"/>
+              </a:rPr>
+              <a:t>—  好處很直接：決策速度變快，也比較不會漏掉「原來還有這個選項」</a:t>
+            </a:r>
+          </a:p>
+        </p:txBody>
+      </p:sp>
+    </p:spTree>
+  </p:cSld>
+  <p:clrMapOvr>
+    <a:masterClrMapping/>
+  </p:clrMapOvr>
+</p:sld>
+</file>
+
+<file path=ppt/slides/slide25.xml><?xml version="1.0" encoding="utf-8"?>
+<p:sld xmlns:a="http://schemas.openxmlformats.org/drawingml/2006/main" xmlns:p="http://schemas.openxmlformats.org/presentationml/2006/main" xmlns:r="http://schemas.openxmlformats.org/officeDocument/2006/relationships">
+  <p:cSld>
+    <p:bg>
+      <p:bgPr>
+        <a:solidFill>
+          <a:srgbClr val="F2F2EC"/>
+        </a:solidFill>
+        <a:effectLst/>
+      </p:bgPr>
+    </p:bg>
+    <p:spTree>
+      <p:nvGrpSpPr>
+        <p:cNvPr id="1" name=""/>
+        <p:cNvGrpSpPr/>
+        <p:nvPr/>
+      </p:nvGrpSpPr>
+      <p:grpSpPr/>
+      <p:sp>
+        <p:nvSpPr>
+          <p:cNvPr id="2" name="TextBox 1"/>
+          <p:cNvSpPr txBox="1"/>
+          <p:nvPr/>
+        </p:nvSpPr>
+        <p:spPr>
+          <a:xfrm>
+            <a:off x="685800" y="502920"/>
+            <a:ext cx="10515600" cy="365760"/>
+          </a:xfrm>
+          <a:prstGeom prst="rect">
+            <a:avLst/>
+          </a:prstGeom>
+          <a:noFill/>
+        </p:spPr>
+        <p:txBody>
+          <a:bodyPr wrap="square">
+            <a:spAutoFit/>
+          </a:bodyPr>
+          <a:lstStyle/>
+          <a:p>
+            <a:r>
+              <a:rPr sz="1300" b="1">
+                <a:solidFill>
+                  <a:srgbClr val="1F6F6B"/>
+                </a:solidFill>
+                <a:latin typeface="Courier New"/>
+              </a:rPr>
+              <a:t>貫穿五個階段</a:t>
+            </a:r>
+          </a:p>
+        </p:txBody>
+      </p:sp>
+      <p:sp>
+        <p:nvSpPr>
+          <p:cNvPr id="3" name="TextBox 2"/>
+          <p:cNvSpPr txBox="1"/>
+          <p:nvPr/>
+        </p:nvSpPr>
+        <p:spPr>
+          <a:xfrm>
+            <a:off x="685800" y="914400"/>
+            <a:ext cx="10789920" cy="1463040"/>
+          </a:xfrm>
+          <a:prstGeom prst="rect">
+            <a:avLst/>
+          </a:prstGeom>
+          <a:noFill/>
+        </p:spPr>
+        <p:txBody>
+          <a:bodyPr wrap="square">
+            <a:spAutoFit/>
+          </a:bodyPr>
+          <a:lstStyle/>
+          <a:p>
+            <a:r>
+              <a:rPr sz="3200" b="1">
+                <a:solidFill>
+                  <a:srgbClr val="1C1F26"/>
+                </a:solidFill>
+                <a:latin typeface="Georgia"/>
+              </a:rPr>
+              <a:t>用下來留下的技巧清單</a:t>
+            </a:r>
+          </a:p>
+        </p:txBody>
+      </p:sp>
+      <p:sp>
+        <p:nvSpPr>
+          <p:cNvPr id="4" name="Rounded Rectangle 3"/>
           <p:cNvSpPr/>
           <p:nvPr/>
         </p:nvSpPr>
         <p:spPr>
           <a:xfrm>
-            <a:off x="2331720" y="2020824"/>
-            <a:ext cx="128016" cy="128016"/>
-          </a:xfrm>
-          <a:prstGeom prst="ellipse">
-            <a:avLst/>
+            <a:off x="685800" y="1783080"/>
+            <a:ext cx="3520440" cy="1417320"/>
+          </a:xfrm>
+          <a:prstGeom prst="roundRect">
+            <a:avLst>
+              <a:gd name="adj" fmla="val 5000"/>
+            </a:avLst>
           </a:prstGeom>
           <a:solidFill>
-            <a:srgbClr val="B3791F"/>
+            <a:srgbClr val="FFFFFF"/>
           </a:solidFill>
           <a:ln>
-            <a:noFill/>
+            <a:solidFill>
+              <a:srgbClr val="D9D7CB"/>
+            </a:solidFill>
           </a:ln>
+          <a:effectLst/>
         </p:spPr>
         <p:style>
           <a:lnRef idx="1">
@@ -6286,112 +6964,65 @@
           </a:fontRef>
         </p:style>
         <p:txBody>
-          <a:bodyPr rtlCol="0" anchor="ctr"/>
+          <a:bodyPr rtlCol="0" anchor="ctr" wrap="square" lIns="164592" rIns="164592" tIns="128016">
+            <a:normAutofit/>
+          </a:bodyPr>
           <a:lstStyle/>
           <a:p>
             <a:pPr algn="ctr"/>
-          </a:p>
-        </p:txBody>
-      </p:sp>
-      <p:sp>
-        <p:nvSpPr>
-          <p:cNvPr id="6" name="TextBox 5"/>
-          <p:cNvSpPr txBox="1"/>
-          <p:nvPr/>
-        </p:nvSpPr>
-        <p:spPr>
-          <a:xfrm>
-            <a:off x="2697480" y="1965960"/>
-            <a:ext cx="8412480" cy="841248"/>
-          </a:xfrm>
-          <a:prstGeom prst="rect">
-            <a:avLst/>
-          </a:prstGeom>
-          <a:noFill/>
-        </p:spPr>
-        <p:txBody>
-          <a:bodyPr wrap="square">
-            <a:spAutoFit/>
-          </a:bodyPr>
-          <a:lstStyle/>
-          <a:p>
-            <a:r>
-              <a:rPr b="1" sz="1900">
+            <a:r>
+              <a:rPr b="1" sz="1450">
                 <a:solidFill>
                   <a:srgbClr val="1C1F26"/>
                 </a:solidFill>
                 <a:latin typeface="Georgia"/>
               </a:rPr>
-              <a:t>WbsScaff</a:t>
-            </a:r>
-          </a:p>
-          <a:p>
-            <a:r>
-              <a:rPr sz="1400">
+              <a:t>先討論再動手</a:t>
+            </a:r>
+          </a:p>
+          <a:p>
+            <a:pPr>
+              <a:spcBef>
+                <a:spcPts val="400"/>
+              </a:spcBef>
+            </a:pPr>
+            <a:r>
+              <a:rPr sz="1150">
                 <a:solidFill>
                   <a:srgbClr val="55596A"/>
                 </a:solidFill>
-                <a:latin typeface="Avenir Next"/>
-              </a:rPr>
-              <a:t>單檔 HTML WBS 工具，氣隙環境，無伺服器</a:t>
-            </a:r>
-          </a:p>
-        </p:txBody>
-      </p:sp>
-      <p:sp>
-        <p:nvSpPr>
-          <p:cNvPr id="7" name="TextBox 6"/>
-          <p:cNvSpPr txBox="1"/>
-          <p:nvPr/>
-        </p:nvSpPr>
-        <p:spPr>
-          <a:xfrm>
-            <a:off x="685800" y="2807208"/>
-            <a:ext cx="1554480" cy="841248"/>
-          </a:xfrm>
-          <a:prstGeom prst="rect">
-            <a:avLst/>
-          </a:prstGeom>
-          <a:noFill/>
-        </p:spPr>
-        <p:txBody>
-          <a:bodyPr wrap="none">
-            <a:spAutoFit/>
-          </a:bodyPr>
-          <a:lstStyle/>
-          <a:p>
-            <a:r>
-              <a:rPr sz="1300">
-                <a:solidFill>
-                  <a:srgbClr val="55596A"/>
-                </a:solidFill>
-                <a:latin typeface="Menlo"/>
-              </a:rPr>
-              <a:t>06-19 → 07-03</a:t>
-            </a:r>
-          </a:p>
-        </p:txBody>
-      </p:sp>
-      <p:sp>
-        <p:nvSpPr>
-          <p:cNvPr id="8" name="Oval 7"/>
+                <a:latin typeface="Arial"/>
+              </a:rPr>
+              <a:t>brainstorming → 規格 → 計畫 → 測試先行，每階段先想清楚再做</a:t>
+            </a:r>
+          </a:p>
+        </p:txBody>
+      </p:sp>
+      <p:sp>
+        <p:nvSpPr>
+          <p:cNvPr id="5" name="Rounded Rectangle 4"/>
           <p:cNvSpPr/>
           <p:nvPr/>
         </p:nvSpPr>
         <p:spPr>
           <a:xfrm>
-            <a:off x="2331720" y="2862072"/>
-            <a:ext cx="128016" cy="128016"/>
-          </a:xfrm>
-          <a:prstGeom prst="ellipse">
-            <a:avLst/>
+            <a:off x="4389120" y="1783080"/>
+            <a:ext cx="3520440" cy="1417320"/>
+          </a:xfrm>
+          <a:prstGeom prst="roundRect">
+            <a:avLst>
+              <a:gd name="adj" fmla="val 5000"/>
+            </a:avLst>
           </a:prstGeom>
           <a:solidFill>
-            <a:srgbClr val="B3791F"/>
+            <a:srgbClr val="FFFFFF"/>
           </a:solidFill>
           <a:ln>
-            <a:noFill/>
+            <a:solidFill>
+              <a:srgbClr val="D9D7CB"/>
+            </a:solidFill>
           </a:ln>
+          <a:effectLst/>
         </p:spPr>
         <p:style>
           <a:lnRef idx="1">
@@ -6408,112 +7039,65 @@
           </a:fontRef>
         </p:style>
         <p:txBody>
-          <a:bodyPr rtlCol="0" anchor="ctr"/>
+          <a:bodyPr rtlCol="0" anchor="ctr" wrap="square" lIns="164592" rIns="164592" tIns="128016">
+            <a:normAutofit/>
+          </a:bodyPr>
           <a:lstStyle/>
           <a:p>
             <a:pPr algn="ctr"/>
-          </a:p>
-        </p:txBody>
-      </p:sp>
-      <p:sp>
-        <p:nvSpPr>
-          <p:cNvPr id="9" name="TextBox 8"/>
-          <p:cNvSpPr txBox="1"/>
-          <p:nvPr/>
-        </p:nvSpPr>
-        <p:spPr>
-          <a:xfrm>
-            <a:off x="2697480" y="2807208"/>
-            <a:ext cx="8412480" cy="841248"/>
-          </a:xfrm>
-          <a:prstGeom prst="rect">
-            <a:avLst/>
-          </a:prstGeom>
-          <a:noFill/>
-        </p:spPr>
-        <p:txBody>
-          <a:bodyPr wrap="square">
-            <a:spAutoFit/>
-          </a:bodyPr>
-          <a:lstStyle/>
-          <a:p>
-            <a:r>
-              <a:rPr b="1" sz="1900">
+            <a:r>
+              <a:rPr b="1" sz="1450">
                 <a:solidFill>
                   <a:srgbClr val="1C1F26"/>
                 </a:solidFill>
                 <a:latin typeface="Georgia"/>
               </a:rPr>
-              <a:t>Spring-WbsScaff</a:t>
-            </a:r>
-          </a:p>
-          <a:p>
-            <a:r>
-              <a:rPr sz="1400">
+              <a:t>任務拆給全新 AI</a:t>
+            </a:r>
+          </a:p>
+          <a:p>
+            <a:pPr>
+              <a:spcBef>
+                <a:spcPts val="400"/>
+              </a:spcBef>
+            </a:pPr>
+            <a:r>
+              <a:rPr sz="1150">
                 <a:solidFill>
                   <a:srgbClr val="55596A"/>
                 </a:solidFill>
-                <a:latin typeface="Avenir Next"/>
-              </a:rPr>
-              <a:t>搬上 Web，多人即時協作、部門權限</a:t>
-            </a:r>
-          </a:p>
-        </p:txBody>
-      </p:sp>
-      <p:sp>
-        <p:nvSpPr>
-          <p:cNvPr id="10" name="TextBox 9"/>
-          <p:cNvSpPr txBox="1"/>
-          <p:nvPr/>
-        </p:nvSpPr>
-        <p:spPr>
-          <a:xfrm>
-            <a:off x="685800" y="3648456"/>
-            <a:ext cx="1554480" cy="841248"/>
-          </a:xfrm>
-          <a:prstGeom prst="rect">
-            <a:avLst/>
-          </a:prstGeom>
-          <a:noFill/>
-        </p:spPr>
-        <p:txBody>
-          <a:bodyPr wrap="none">
-            <a:spAutoFit/>
-          </a:bodyPr>
-          <a:lstStyle/>
-          <a:p>
-            <a:r>
-              <a:rPr sz="1300">
-                <a:solidFill>
-                  <a:srgbClr val="55596A"/>
-                </a:solidFill>
-                <a:latin typeface="Menlo"/>
-              </a:rPr>
-              <a:t>07-03 → 07-08</a:t>
-            </a:r>
-          </a:p>
-        </p:txBody>
-      </p:sp>
-      <p:sp>
-        <p:nvSpPr>
-          <p:cNvPr id="11" name="Oval 10"/>
+                <a:latin typeface="Arial"/>
+              </a:rPr>
+              <a:t>避免對話累積的雜訊污染判斷</a:t>
+            </a:r>
+          </a:p>
+        </p:txBody>
+      </p:sp>
+      <p:sp>
+        <p:nvSpPr>
+          <p:cNvPr id="6" name="Rounded Rectangle 5"/>
           <p:cNvSpPr/>
           <p:nvPr/>
         </p:nvSpPr>
         <p:spPr>
           <a:xfrm>
-            <a:off x="2331720" y="3703320"/>
-            <a:ext cx="128016" cy="128016"/>
-          </a:xfrm>
-          <a:prstGeom prst="ellipse">
-            <a:avLst/>
+            <a:off x="8092440" y="1783080"/>
+            <a:ext cx="3520440" cy="1417320"/>
+          </a:xfrm>
+          <a:prstGeom prst="roundRect">
+            <a:avLst>
+              <a:gd name="adj" fmla="val 5000"/>
+            </a:avLst>
           </a:prstGeom>
           <a:solidFill>
-            <a:srgbClr val="B3791F"/>
+            <a:srgbClr val="FFFFFF"/>
           </a:solidFill>
           <a:ln>
-            <a:noFill/>
+            <a:solidFill>
+              <a:srgbClr val="D9D7CB"/>
+            </a:solidFill>
           </a:ln>
+          <a:effectLst/>
         </p:spPr>
         <p:style>
           <a:lnRef idx="1">
@@ -6530,112 +7114,65 @@
           </a:fontRef>
         </p:style>
         <p:txBody>
-          <a:bodyPr rtlCol="0" anchor="ctr"/>
+          <a:bodyPr rtlCol="0" anchor="ctr" wrap="square" lIns="164592" rIns="164592" tIns="128016">
+            <a:normAutofit/>
+          </a:bodyPr>
           <a:lstStyle/>
           <a:p>
             <a:pPr algn="ctr"/>
-          </a:p>
-        </p:txBody>
-      </p:sp>
-      <p:sp>
-        <p:nvSpPr>
-          <p:cNvPr id="12" name="TextBox 11"/>
-          <p:cNvSpPr txBox="1"/>
-          <p:nvPr/>
-        </p:nvSpPr>
-        <p:spPr>
-          <a:xfrm>
-            <a:off x="2697480" y="3648456"/>
-            <a:ext cx="8412480" cy="841248"/>
-          </a:xfrm>
-          <a:prstGeom prst="rect">
-            <a:avLst/>
-          </a:prstGeom>
-          <a:noFill/>
-        </p:spPr>
-        <p:txBody>
-          <a:bodyPr wrap="square">
-            <a:spAutoFit/>
-          </a:bodyPr>
-          <a:lstStyle/>
-          <a:p>
-            <a:r>
-              <a:rPr b="1" sz="1900">
+            <a:r>
+              <a:rPr b="1" sz="1450">
                 <a:solidFill>
                   <a:srgbClr val="1C1F26"/>
                 </a:solidFill>
                 <a:latin typeface="Georgia"/>
               </a:rPr>
-              <a:t>Spring-TaskFlow</a:t>
-            </a:r>
-          </a:p>
-          <a:p>
-            <a:r>
-              <a:rPr sz="1400">
+              <a:t>獨立審查</a:t>
+            </a:r>
+          </a:p>
+          <a:p>
+            <a:pPr>
+              <a:spcBef>
+                <a:spcPts val="400"/>
+              </a:spcBef>
+            </a:pPr>
+            <a:r>
+              <a:rPr sz="1150">
                 <a:solidFill>
                   <a:srgbClr val="55596A"/>
                 </a:solidFill>
-                <a:latin typeface="Avenir Next"/>
-              </a:rPr>
-              <a:t>拆出獨立看板系統，核心從樹狀改拖曳卡片</a:t>
-            </a:r>
-          </a:p>
-        </p:txBody>
-      </p:sp>
-      <p:sp>
-        <p:nvSpPr>
-          <p:cNvPr id="13" name="TextBox 12"/>
-          <p:cNvSpPr txBox="1"/>
-          <p:nvPr/>
-        </p:nvSpPr>
-        <p:spPr>
-          <a:xfrm>
-            <a:off x="685800" y="4489704"/>
-            <a:ext cx="1554480" cy="841248"/>
-          </a:xfrm>
-          <a:prstGeom prst="rect">
-            <a:avLst/>
-          </a:prstGeom>
-          <a:noFill/>
-        </p:spPr>
-        <p:txBody>
-          <a:bodyPr wrap="none">
-            <a:spAutoFit/>
-          </a:bodyPr>
-          <a:lstStyle/>
-          <a:p>
-            <a:r>
-              <a:rPr sz="1300">
-                <a:solidFill>
-                  <a:srgbClr val="55596A"/>
-                </a:solidFill>
-                <a:latin typeface="Menlo"/>
-              </a:rPr>
-              <a:t>07-17 → 08-08</a:t>
-            </a:r>
-          </a:p>
-        </p:txBody>
-      </p:sp>
-      <p:sp>
-        <p:nvSpPr>
-          <p:cNvPr id="14" name="Oval 13"/>
+                <a:latin typeface="Arial"/>
+              </a:rPr>
+              <a:t>動手做的跟審查的是不同 AI，不自己審自己的作業</a:t>
+            </a:r>
+          </a:p>
+        </p:txBody>
+      </p:sp>
+      <p:sp>
+        <p:nvSpPr>
+          <p:cNvPr id="7" name="Rounded Rectangle 6"/>
           <p:cNvSpPr/>
           <p:nvPr/>
         </p:nvSpPr>
         <p:spPr>
           <a:xfrm>
-            <a:off x="2331720" y="4544568"/>
-            <a:ext cx="128016" cy="128016"/>
-          </a:xfrm>
-          <a:prstGeom prst="ellipse">
-            <a:avLst/>
+            <a:off x="685800" y="3364992"/>
+            <a:ext cx="3520440" cy="1417320"/>
+          </a:xfrm>
+          <a:prstGeom prst="roundRect">
+            <a:avLst>
+              <a:gd name="adj" fmla="val 5000"/>
+            </a:avLst>
           </a:prstGeom>
           <a:solidFill>
-            <a:srgbClr val="B3791F"/>
+            <a:srgbClr val="FFFFFF"/>
           </a:solidFill>
           <a:ln>
-            <a:noFill/>
+            <a:solidFill>
+              <a:srgbClr val="D9D7CB"/>
+            </a:solidFill>
           </a:ln>
+          <a:effectLst/>
         </p:spPr>
         <p:style>
           <a:lnRef idx="1">
@@ -6652,112 +7189,65 @@
           </a:fontRef>
         </p:style>
         <p:txBody>
-          <a:bodyPr rtlCol="0" anchor="ctr"/>
+          <a:bodyPr rtlCol="0" anchor="ctr" wrap="square" lIns="164592" rIns="164592" tIns="128016">
+            <a:normAutofit/>
+          </a:bodyPr>
           <a:lstStyle/>
           <a:p>
             <a:pPr algn="ctr"/>
-          </a:p>
-        </p:txBody>
-      </p:sp>
-      <p:sp>
-        <p:nvSpPr>
-          <p:cNvPr id="15" name="TextBox 14"/>
-          <p:cNvSpPr txBox="1"/>
-          <p:nvPr/>
-        </p:nvSpPr>
-        <p:spPr>
-          <a:xfrm>
-            <a:off x="2697480" y="4489704"/>
-            <a:ext cx="8412480" cy="841248"/>
-          </a:xfrm>
-          <a:prstGeom prst="rect">
-            <a:avLst/>
-          </a:prstGeom>
-          <a:noFill/>
-        </p:spPr>
-        <p:txBody>
-          <a:bodyPr wrap="square">
-            <a:spAutoFit/>
-          </a:bodyPr>
-          <a:lstStyle/>
-          <a:p>
-            <a:r>
-              <a:rPr b="1" sz="1900">
+            <a:r>
+              <a:rPr b="1" sz="1450">
                 <a:solidFill>
                   <a:srgbClr val="1C1F26"/>
                 </a:solidFill>
                 <a:latin typeface="Georgia"/>
               </a:rPr>
-              <a:t>WbsFlow → MissionBoard</a:t>
-            </a:r>
-          </a:p>
-          <a:p>
-            <a:r>
-              <a:rPr sz="1400">
+              <a:t>卡住就升級</a:t>
+            </a:r>
+          </a:p>
+          <a:p>
+            <a:pPr>
+              <a:spcBef>
+                <a:spcPts val="400"/>
+              </a:spcBef>
+            </a:pPr>
+            <a:r>
+              <a:rPr sz="1150">
                 <a:solidFill>
                   <a:srgbClr val="55596A"/>
                 </a:solidFill>
-                <a:latin typeface="Avenir Next"/>
-              </a:rPr>
-              <a:t>全新 repo 合併兩者：「WBS 節點即任務」</a:t>
-            </a:r>
-          </a:p>
-        </p:txBody>
-      </p:sp>
-      <p:sp>
-        <p:nvSpPr>
-          <p:cNvPr id="16" name="TextBox 15"/>
-          <p:cNvSpPr txBox="1"/>
-          <p:nvPr/>
-        </p:nvSpPr>
-        <p:spPr>
-          <a:xfrm>
-            <a:off x="685800" y="5330952"/>
-            <a:ext cx="1554480" cy="841248"/>
-          </a:xfrm>
-          <a:prstGeom prst="rect">
-            <a:avLst/>
-          </a:prstGeom>
-          <a:noFill/>
-        </p:spPr>
-        <p:txBody>
-          <a:bodyPr wrap="none">
-            <a:spAutoFit/>
-          </a:bodyPr>
-          <a:lstStyle/>
-          <a:p>
-            <a:r>
-              <a:rPr sz="1300">
-                <a:solidFill>
-                  <a:srgbClr val="55596A"/>
-                </a:solidFill>
-                <a:latin typeface="Menlo"/>
-              </a:rPr>
-              <a:t>08-09 → 08-10</a:t>
-            </a:r>
-          </a:p>
-        </p:txBody>
-      </p:sp>
-      <p:sp>
-        <p:nvSpPr>
-          <p:cNvPr id="17" name="Oval 16"/>
+                <a:latin typeface="Arial"/>
+              </a:rPr>
+              <a:t>換更強模型或換人重來，不是原地打轉</a:t>
+            </a:r>
+          </a:p>
+        </p:txBody>
+      </p:sp>
+      <p:sp>
+        <p:nvSpPr>
+          <p:cNvPr id="8" name="Rounded Rectangle 7"/>
           <p:cNvSpPr/>
           <p:nvPr/>
         </p:nvSpPr>
         <p:spPr>
           <a:xfrm>
-            <a:off x="2331720" y="5385816"/>
-            <a:ext cx="128016" cy="128016"/>
-          </a:xfrm>
-          <a:prstGeom prst="ellipse">
-            <a:avLst/>
+            <a:off x="4389120" y="3364992"/>
+            <a:ext cx="3520440" cy="1417320"/>
+          </a:xfrm>
+          <a:prstGeom prst="roundRect">
+            <a:avLst>
+              <a:gd name="adj" fmla="val 5000"/>
+            </a:avLst>
           </a:prstGeom>
           <a:solidFill>
-            <a:srgbClr val="B3791F"/>
+            <a:srgbClr val="FFFFFF"/>
           </a:solidFill>
           <a:ln>
-            <a:noFill/>
+            <a:solidFill>
+              <a:srgbClr val="D9D7CB"/>
+            </a:solidFill>
           </a:ln>
+          <a:effectLst/>
         </p:spPr>
         <p:style>
           <a:lnRef idx="1">
@@ -6774,23 +7264,376 @@
           </a:fontRef>
         </p:style>
         <p:txBody>
-          <a:bodyPr rtlCol="0" anchor="ctr"/>
+          <a:bodyPr rtlCol="0" anchor="ctr" wrap="square" lIns="164592" rIns="164592" tIns="128016">
+            <a:normAutofit/>
+          </a:bodyPr>
           <a:lstStyle/>
           <a:p>
             <a:pPr algn="ctr"/>
-          </a:p>
-        </p:txBody>
-      </p:sp>
-      <p:sp>
-        <p:nvSpPr>
-          <p:cNvPr id="18" name="TextBox 17"/>
-          <p:cNvSpPr txBox="1"/>
-          <p:nvPr/>
-        </p:nvSpPr>
-        <p:spPr>
-          <a:xfrm>
-            <a:off x="2697480" y="5330952"/>
-            <a:ext cx="8412480" cy="841248"/>
+            <a:r>
+              <a:rPr b="1" sz="1450">
+                <a:solidFill>
+                  <a:srgbClr val="1C1F26"/>
+                </a:solidFill>
+                <a:latin typeface="Georgia"/>
+              </a:rPr>
+              <a:t>最後做總體檢查</a:t>
+            </a:r>
+          </a:p>
+          <a:p>
+            <a:pPr>
+              <a:spcBef>
+                <a:spcPts val="400"/>
+              </a:spcBef>
+            </a:pPr>
+            <a:r>
+              <a:rPr sz="1150">
+                <a:solidFill>
+                  <a:srgbClr val="55596A"/>
+                </a:solidFill>
+                <a:latin typeface="Arial"/>
+              </a:rPr>
+              <a:t>抓「每個任務都對、合起來卻錯」的縫隙</a:t>
+            </a:r>
+          </a:p>
+        </p:txBody>
+      </p:sp>
+      <p:sp>
+        <p:nvSpPr>
+          <p:cNvPr id="9" name="Rounded Rectangle 8"/>
+          <p:cNvSpPr/>
+          <p:nvPr/>
+        </p:nvSpPr>
+        <p:spPr>
+          <a:xfrm>
+            <a:off x="8092440" y="3364992"/>
+            <a:ext cx="3520440" cy="1417320"/>
+          </a:xfrm>
+          <a:prstGeom prst="roundRect">
+            <a:avLst>
+              <a:gd name="adj" fmla="val 5000"/>
+            </a:avLst>
+          </a:prstGeom>
+          <a:solidFill>
+            <a:srgbClr val="FFFFFF"/>
+          </a:solidFill>
+          <a:ln>
+            <a:solidFill>
+              <a:srgbClr val="D9D7CB"/>
+            </a:solidFill>
+          </a:ln>
+          <a:effectLst/>
+        </p:spPr>
+        <p:style>
+          <a:lnRef idx="1">
+            <a:schemeClr val="accent1"/>
+          </a:lnRef>
+          <a:fillRef idx="3">
+            <a:schemeClr val="accent1"/>
+          </a:fillRef>
+          <a:effectRef idx="2">
+            <a:schemeClr val="accent1"/>
+          </a:effectRef>
+          <a:fontRef idx="minor">
+            <a:schemeClr val="lt1"/>
+          </a:fontRef>
+        </p:style>
+        <p:txBody>
+          <a:bodyPr rtlCol="0" anchor="ctr" wrap="square" lIns="164592" rIns="164592" tIns="128016">
+            <a:normAutofit/>
+          </a:bodyPr>
+          <a:lstStyle/>
+          <a:p>
+            <a:pPr algn="ctr"/>
+            <a:r>
+              <a:rPr b="1" sz="1450">
+                <a:solidFill>
+                  <a:srgbClr val="1C1F26"/>
+                </a:solidFill>
+                <a:latin typeface="Georgia"/>
+              </a:rPr>
+              <a:t>模型分級用</a:t>
+            </a:r>
+          </a:p>
+          <a:p>
+            <a:pPr>
+              <a:spcBef>
+                <a:spcPts val="400"/>
+              </a:spcBef>
+            </a:pPr>
+            <a:r>
+              <a:rPr sz="1150">
+                <a:solidFill>
+                  <a:srgbClr val="55596A"/>
+                </a:solidFill>
+                <a:latin typeface="Arial"/>
+              </a:rPr>
+              <a:t>簡單轉抄用便宜快模型，關鍵判斷用最強模型</a:t>
+            </a:r>
+          </a:p>
+        </p:txBody>
+      </p:sp>
+      <p:sp>
+        <p:nvSpPr>
+          <p:cNvPr id="10" name="Rounded Rectangle 9"/>
+          <p:cNvSpPr/>
+          <p:nvPr/>
+        </p:nvSpPr>
+        <p:spPr>
+          <a:xfrm>
+            <a:off x="685800" y="4946904"/>
+            <a:ext cx="3520440" cy="1417320"/>
+          </a:xfrm>
+          <a:prstGeom prst="roundRect">
+            <a:avLst>
+              <a:gd name="adj" fmla="val 5000"/>
+            </a:avLst>
+          </a:prstGeom>
+          <a:solidFill>
+            <a:srgbClr val="FFFFFF"/>
+          </a:solidFill>
+          <a:ln>
+            <a:solidFill>
+              <a:srgbClr val="D9D7CB"/>
+            </a:solidFill>
+          </a:ln>
+          <a:effectLst/>
+        </p:spPr>
+        <p:style>
+          <a:lnRef idx="1">
+            <a:schemeClr val="accent1"/>
+          </a:lnRef>
+          <a:fillRef idx="3">
+            <a:schemeClr val="accent1"/>
+          </a:fillRef>
+          <a:effectRef idx="2">
+            <a:schemeClr val="accent1"/>
+          </a:effectRef>
+          <a:fontRef idx="minor">
+            <a:schemeClr val="lt1"/>
+          </a:fontRef>
+        </p:style>
+        <p:txBody>
+          <a:bodyPr rtlCol="0" anchor="ctr" wrap="square" lIns="164592" rIns="164592" tIns="128016">
+            <a:normAutofit/>
+          </a:bodyPr>
+          <a:lstStyle/>
+          <a:p>
+            <a:pPr algn="ctr"/>
+            <a:r>
+              <a:rPr b="1" sz="1450">
+                <a:solidFill>
+                  <a:srgbClr val="1C1F26"/>
+                </a:solidFill>
+                <a:latin typeface="Georgia"/>
+              </a:rPr>
+              <a:t>進度寫成記錄檔</a:t>
+            </a:r>
+          </a:p>
+          <a:p>
+            <a:pPr>
+              <a:spcBef>
+                <a:spcPts val="400"/>
+              </a:spcBef>
+            </a:pPr>
+            <a:r>
+              <a:rPr sz="1150">
+                <a:solidFill>
+                  <a:srgbClr val="55596A"/>
+                </a:solidFill>
+                <a:latin typeface="Arial"/>
+              </a:rPr>
+              <a:t>對話中斷也能接續，不重複做工</a:t>
+            </a:r>
+          </a:p>
+        </p:txBody>
+      </p:sp>
+      <p:sp>
+        <p:nvSpPr>
+          <p:cNvPr id="11" name="Rounded Rectangle 10"/>
+          <p:cNvSpPr/>
+          <p:nvPr/>
+        </p:nvSpPr>
+        <p:spPr>
+          <a:xfrm>
+            <a:off x="4389120" y="4946904"/>
+            <a:ext cx="3520440" cy="1417320"/>
+          </a:xfrm>
+          <a:prstGeom prst="roundRect">
+            <a:avLst>
+              <a:gd name="adj" fmla="val 5000"/>
+            </a:avLst>
+          </a:prstGeom>
+          <a:solidFill>
+            <a:srgbClr val="FFFFFF"/>
+          </a:solidFill>
+          <a:ln>
+            <a:solidFill>
+              <a:srgbClr val="D9D7CB"/>
+            </a:solidFill>
+          </a:ln>
+          <a:effectLst/>
+        </p:spPr>
+        <p:style>
+          <a:lnRef idx="1">
+            <a:schemeClr val="accent1"/>
+          </a:lnRef>
+          <a:fillRef idx="3">
+            <a:schemeClr val="accent1"/>
+          </a:fillRef>
+          <a:effectRef idx="2">
+            <a:schemeClr val="accent1"/>
+          </a:effectRef>
+          <a:fontRef idx="minor">
+            <a:schemeClr val="lt1"/>
+          </a:fontRef>
+        </p:style>
+        <p:txBody>
+          <a:bodyPr rtlCol="0" anchor="ctr" wrap="square" lIns="164592" rIns="164592" tIns="128016">
+            <a:normAutofit/>
+          </a:bodyPr>
+          <a:lstStyle/>
+          <a:p>
+            <a:pPr algn="ctr"/>
+            <a:r>
+              <a:rPr b="1" sz="1450">
+                <a:solidFill>
+                  <a:srgbClr val="1C1F26"/>
+                </a:solidFill>
+                <a:latin typeface="Georgia"/>
+              </a:rPr>
+              <a:t>不採信報告</a:t>
+            </a:r>
+          </a:p>
+          <a:p>
+            <a:pPr>
+              <a:spcBef>
+                <a:spcPts val="400"/>
+              </a:spcBef>
+            </a:pPr>
+            <a:r>
+              <a:rPr sz="1150">
+                <a:solidFill>
+                  <a:srgbClr val="55596A"/>
+                </a:solidFill>
+                <a:latin typeface="Arial"/>
+              </a:rPr>
+              <a:t>可疑的結論要自己重現、獨立驗證</a:t>
+            </a:r>
+          </a:p>
+        </p:txBody>
+      </p:sp>
+      <p:sp>
+        <p:nvSpPr>
+          <p:cNvPr id="12" name="Rounded Rectangle 11"/>
+          <p:cNvSpPr/>
+          <p:nvPr/>
+        </p:nvSpPr>
+        <p:spPr>
+          <a:xfrm>
+            <a:off x="8092440" y="4946904"/>
+            <a:ext cx="3520440" cy="1417320"/>
+          </a:xfrm>
+          <a:prstGeom prst="roundRect">
+            <a:avLst>
+              <a:gd name="adj" fmla="val 5000"/>
+            </a:avLst>
+          </a:prstGeom>
+          <a:solidFill>
+            <a:srgbClr val="FFFFFF"/>
+          </a:solidFill>
+          <a:ln>
+            <a:solidFill>
+              <a:srgbClr val="D9D7CB"/>
+            </a:solidFill>
+          </a:ln>
+          <a:effectLst/>
+        </p:spPr>
+        <p:style>
+          <a:lnRef idx="1">
+            <a:schemeClr val="accent1"/>
+          </a:lnRef>
+          <a:fillRef idx="3">
+            <a:schemeClr val="accent1"/>
+          </a:fillRef>
+          <a:effectRef idx="2">
+            <a:schemeClr val="accent1"/>
+          </a:effectRef>
+          <a:fontRef idx="minor">
+            <a:schemeClr val="lt1"/>
+          </a:fontRef>
+        </p:style>
+        <p:txBody>
+          <a:bodyPr rtlCol="0" anchor="ctr" wrap="square" lIns="164592" rIns="164592" tIns="128016">
+            <a:normAutofit/>
+          </a:bodyPr>
+          <a:lstStyle/>
+          <a:p>
+            <a:pPr algn="ctr"/>
+            <a:r>
+              <a:rPr b="1" sz="1450">
+                <a:solidFill>
+                  <a:srgbClr val="1C1F26"/>
+                </a:solidFill>
+                <a:latin typeface="Georgia"/>
+              </a:rPr>
+              <a:t>關鍵決策先問顧問</a:t>
+            </a:r>
+          </a:p>
+          <a:p>
+            <a:pPr>
+              <a:spcBef>
+                <a:spcPts val="400"/>
+              </a:spcBef>
+            </a:pPr>
+            <a:r>
+              <a:rPr sz="1150">
+                <a:solidFill>
+                  <a:srgbClr val="55596A"/>
+                </a:solidFill>
+                <a:latin typeface="Arial"/>
+              </a:rPr>
+              <a:t>衝突就攤開來一起討論，不悶著頭選一邊</a:t>
+            </a:r>
+          </a:p>
+        </p:txBody>
+      </p:sp>
+    </p:spTree>
+  </p:cSld>
+  <p:clrMapOvr>
+    <a:masterClrMapping/>
+  </p:clrMapOvr>
+</p:sld>
+</file>
+
+<file path=ppt/slides/slide26.xml><?xml version="1.0" encoding="utf-8"?>
+<p:sld xmlns:a="http://schemas.openxmlformats.org/drawingml/2006/main" xmlns:p="http://schemas.openxmlformats.org/presentationml/2006/main" xmlns:r="http://schemas.openxmlformats.org/officeDocument/2006/relationships">
+  <p:cSld>
+    <p:bg>
+      <p:bgPr>
+        <a:solidFill>
+          <a:srgbClr val="F2F2EC"/>
+        </a:solidFill>
+        <a:effectLst/>
+      </p:bgPr>
+    </p:bg>
+    <p:spTree>
+      <p:nvGrpSpPr>
+        <p:cNvPr id="1" name=""/>
+        <p:cNvGrpSpPr/>
+        <p:nvPr/>
+      </p:nvGrpSpPr>
+      <p:grpSpPr/>
+      <p:sp>
+        <p:nvSpPr>
+          <p:cNvPr id="2" name="TextBox 1"/>
+          <p:cNvSpPr txBox="1"/>
+          <p:nvPr/>
+        </p:nvSpPr>
+        <p:spPr>
+          <a:xfrm>
+            <a:off x="685800" y="502920"/>
+            <a:ext cx="10515600" cy="365760"/>
           </a:xfrm>
           <a:prstGeom prst="rect">
             <a:avLst/>
@@ -6804,24 +7647,783 @@
           <a:lstStyle/>
           <a:p>
             <a:r>
-              <a:rPr b="1" sz="1900">
+              <a:rPr sz="1300" b="1">
+                <a:solidFill>
+                  <a:srgbClr val="1F6F6B"/>
+                </a:solidFill>
+                <a:latin typeface="Courier New"/>
+              </a:rPr>
+              <a:t>數字看整段旅程</a:t>
+            </a:r>
+          </a:p>
+        </p:txBody>
+      </p:sp>
+      <p:sp>
+        <p:nvSpPr>
+          <p:cNvPr id="3" name="TextBox 2"/>
+          <p:cNvSpPr txBox="1"/>
+          <p:nvPr/>
+        </p:nvSpPr>
+        <p:spPr>
+          <a:xfrm>
+            <a:off x="685800" y="914400"/>
+            <a:ext cx="10789920" cy="1463040"/>
+          </a:xfrm>
+          <a:prstGeom prst="rect">
+            <a:avLst/>
+          </a:prstGeom>
+          <a:noFill/>
+        </p:spPr>
+        <p:txBody>
+          <a:bodyPr wrap="square">
+            <a:spAutoFit/>
+          </a:bodyPr>
+          <a:lstStyle/>
+          <a:p>
+            <a:r>
+              <a:rPr sz="3200" b="1">
                 <a:solidFill>
                   <a:srgbClr val="1C1F26"/>
                 </a:solidFill>
                 <a:latin typeface="Georgia"/>
               </a:rPr>
-              <a:t>任務導向重構</a:t>
-            </a:r>
-          </a:p>
+              <a:t>兩個月，四個世代</a:t>
+            </a:r>
+          </a:p>
+        </p:txBody>
+      </p:sp>
+      <p:sp>
+        <p:nvSpPr>
+          <p:cNvPr id="4" name="TextBox 3"/>
+          <p:cNvSpPr txBox="1"/>
+          <p:nvPr/>
+        </p:nvSpPr>
+        <p:spPr>
+          <a:xfrm>
+            <a:off x="685800" y="2103120"/>
+            <a:ext cx="3520440" cy="1005840"/>
+          </a:xfrm>
+          <a:prstGeom prst="rect">
+            <a:avLst/>
+          </a:prstGeom>
+          <a:noFill/>
+        </p:spPr>
+        <p:txBody>
+          <a:bodyPr wrap="none">
+            <a:spAutoFit/>
+          </a:bodyPr>
+          <a:lstStyle/>
+          <a:p>
+            <a:r>
+              <a:rPr b="1" sz="4400">
+                <a:solidFill>
+                  <a:srgbClr val="B3791F"/>
+                </a:solidFill>
+                <a:latin typeface="Courier New"/>
+              </a:rPr>
+              <a:t>241</a:t>
+            </a:r>
+          </a:p>
+        </p:txBody>
+      </p:sp>
+      <p:sp>
+        <p:nvSpPr>
+          <p:cNvPr id="5" name="TextBox 4"/>
+          <p:cNvSpPr txBox="1"/>
+          <p:nvPr/>
+        </p:nvSpPr>
+        <p:spPr>
+          <a:xfrm>
+            <a:off x="685800" y="3063240"/>
+            <a:ext cx="3520440" cy="731520"/>
+          </a:xfrm>
+          <a:prstGeom prst="rect">
+            <a:avLst/>
+          </a:prstGeom>
+          <a:noFill/>
+        </p:spPr>
+        <p:txBody>
+          <a:bodyPr wrap="square">
+            <a:normAutofit/>
+          </a:bodyPr>
+          <a:lstStyle/>
           <a:p>
             <a:r>
               <a:rPr sz="1400">
                 <a:solidFill>
                   <a:srgbClr val="55596A"/>
                 </a:solidFill>
-                <a:latin typeface="Avenir Next"/>
-              </a:rPr>
-              <a:t>拆掉節點模型，看板變預設首頁 —— 這次 session</a:t>
+                <a:latin typeface="Arial"/>
+              </a:rPr>
+              <a:t>總 commit 數（四個 repo 合計）</a:t>
+            </a:r>
+          </a:p>
+        </p:txBody>
+      </p:sp>
+      <p:sp>
+        <p:nvSpPr>
+          <p:cNvPr id="6" name="TextBox 5"/>
+          <p:cNvSpPr txBox="1"/>
+          <p:nvPr/>
+        </p:nvSpPr>
+        <p:spPr>
+          <a:xfrm>
+            <a:off x="4389120" y="2103120"/>
+            <a:ext cx="3520440" cy="1005840"/>
+          </a:xfrm>
+          <a:prstGeom prst="rect">
+            <a:avLst/>
+          </a:prstGeom>
+          <a:noFill/>
+        </p:spPr>
+        <p:txBody>
+          <a:bodyPr wrap="none">
+            <a:spAutoFit/>
+          </a:bodyPr>
+          <a:lstStyle/>
+          <a:p>
+            <a:r>
+              <a:rPr b="1" sz="4400">
+                <a:solidFill>
+                  <a:srgbClr val="B3791F"/>
+                </a:solidFill>
+                <a:latin typeface="Courier New"/>
+              </a:rPr>
+              <a:t>~2</a:t>
+            </a:r>
+          </a:p>
+        </p:txBody>
+      </p:sp>
+      <p:sp>
+        <p:nvSpPr>
+          <p:cNvPr id="7" name="TextBox 6"/>
+          <p:cNvSpPr txBox="1"/>
+          <p:nvPr/>
+        </p:nvSpPr>
+        <p:spPr>
+          <a:xfrm>
+            <a:off x="4389120" y="3063240"/>
+            <a:ext cx="3520440" cy="731520"/>
+          </a:xfrm>
+          <a:prstGeom prst="rect">
+            <a:avLst/>
+          </a:prstGeom>
+          <a:noFill/>
+        </p:spPr>
+        <p:txBody>
+          <a:bodyPr wrap="square">
+            <a:normAutofit/>
+          </a:bodyPr>
+          <a:lstStyle/>
+          <a:p>
+            <a:r>
+              <a:rPr sz="1400">
+                <a:solidFill>
+                  <a:srgbClr val="55596A"/>
+                </a:solidFill>
+                <a:latin typeface="Arial"/>
+              </a:rPr>
+              <a:t>個月（06-08 → 08-10）</a:t>
+            </a:r>
+          </a:p>
+        </p:txBody>
+      </p:sp>
+      <p:sp>
+        <p:nvSpPr>
+          <p:cNvPr id="8" name="TextBox 7"/>
+          <p:cNvSpPr txBox="1"/>
+          <p:nvPr/>
+        </p:nvSpPr>
+        <p:spPr>
+          <a:xfrm>
+            <a:off x="8092440" y="2103120"/>
+            <a:ext cx="3520440" cy="1005840"/>
+          </a:xfrm>
+          <a:prstGeom prst="rect">
+            <a:avLst/>
+          </a:prstGeom>
+          <a:noFill/>
+        </p:spPr>
+        <p:txBody>
+          <a:bodyPr wrap="none">
+            <a:spAutoFit/>
+          </a:bodyPr>
+          <a:lstStyle/>
+          <a:p>
+            <a:r>
+              <a:rPr b="1" sz="4400">
+                <a:solidFill>
+                  <a:srgbClr val="B3791F"/>
+                </a:solidFill>
+                <a:latin typeface="Courier New"/>
+              </a:rPr>
+              <a:t>5</a:t>
+            </a:r>
+          </a:p>
+        </p:txBody>
+      </p:sp>
+      <p:sp>
+        <p:nvSpPr>
+          <p:cNvPr id="9" name="TextBox 8"/>
+          <p:cNvSpPr txBox="1"/>
+          <p:nvPr/>
+        </p:nvSpPr>
+        <p:spPr>
+          <a:xfrm>
+            <a:off x="8092440" y="3063240"/>
+            <a:ext cx="3520440" cy="731520"/>
+          </a:xfrm>
+          <a:prstGeom prst="rect">
+            <a:avLst/>
+          </a:prstGeom>
+          <a:noFill/>
+        </p:spPr>
+        <p:txBody>
+          <a:bodyPr wrap="square">
+            <a:normAutofit/>
+          </a:bodyPr>
+          <a:lstStyle/>
+          <a:p>
+            <a:r>
+              <a:rPr sz="1400">
+                <a:solidFill>
+                  <a:srgbClr val="55596A"/>
+                </a:solidFill>
+                <a:latin typeface="Arial"/>
+              </a:rPr>
+              <a:t>個世代 / 階段</a:t>
+            </a:r>
+          </a:p>
+        </p:txBody>
+      </p:sp>
+      <p:sp>
+        <p:nvSpPr>
+          <p:cNvPr id="10" name="TextBox 9"/>
+          <p:cNvSpPr txBox="1"/>
+          <p:nvPr/>
+        </p:nvSpPr>
+        <p:spPr>
+          <a:xfrm>
+            <a:off x="685800" y="4206240"/>
+            <a:ext cx="3520440" cy="1005840"/>
+          </a:xfrm>
+          <a:prstGeom prst="rect">
+            <a:avLst/>
+          </a:prstGeom>
+          <a:noFill/>
+        </p:spPr>
+        <p:txBody>
+          <a:bodyPr wrap="none">
+            <a:spAutoFit/>
+          </a:bodyPr>
+          <a:lstStyle/>
+          <a:p>
+            <a:r>
+              <a:rPr b="1" sz="4400">
+                <a:solidFill>
+                  <a:srgbClr val="B3791F"/>
+                </a:solidFill>
+                <a:latin typeface="Courier New"/>
+              </a:rPr>
+              <a:t>35+</a:t>
+            </a:r>
+          </a:p>
+        </p:txBody>
+      </p:sp>
+      <p:sp>
+        <p:nvSpPr>
+          <p:cNvPr id="11" name="TextBox 10"/>
+          <p:cNvSpPr txBox="1"/>
+          <p:nvPr/>
+        </p:nvSpPr>
+        <p:spPr>
+          <a:xfrm>
+            <a:off x="685800" y="5166360"/>
+            <a:ext cx="3520440" cy="731520"/>
+          </a:xfrm>
+          <a:prstGeom prst="rect">
+            <a:avLst/>
+          </a:prstGeom>
+          <a:noFill/>
+        </p:spPr>
+        <p:txBody>
+          <a:bodyPr wrap="square">
+            <a:normAutofit/>
+          </a:bodyPr>
+          <a:lstStyle/>
+          <a:p>
+            <a:r>
+              <a:rPr sz="1400">
+                <a:solidFill>
+                  <a:srgbClr val="55596A"/>
+                </a:solidFill>
+                <a:latin typeface="Arial"/>
+              </a:rPr>
+              <a:t>個拆分給 AI 做的任務</a:t>
+            </a:r>
+          </a:p>
+        </p:txBody>
+      </p:sp>
+      <p:sp>
+        <p:nvSpPr>
+          <p:cNvPr id="12" name="TextBox 11"/>
+          <p:cNvSpPr txBox="1"/>
+          <p:nvPr/>
+        </p:nvSpPr>
+        <p:spPr>
+          <a:xfrm>
+            <a:off x="4389120" y="4206240"/>
+            <a:ext cx="3520440" cy="1005840"/>
+          </a:xfrm>
+          <a:prstGeom prst="rect">
+            <a:avLst/>
+          </a:prstGeom>
+          <a:noFill/>
+        </p:spPr>
+        <p:txBody>
+          <a:bodyPr wrap="none">
+            <a:spAutoFit/>
+          </a:bodyPr>
+          <a:lstStyle/>
+          <a:p>
+            <a:r>
+              <a:rPr b="1" sz="4400">
+                <a:solidFill>
+                  <a:srgbClr val="B3791F"/>
+                </a:solidFill>
+                <a:latin typeface="Courier New"/>
+              </a:rPr>
+              <a:t>104/104</a:t>
+            </a:r>
+          </a:p>
+        </p:txBody>
+      </p:sp>
+      <p:sp>
+        <p:nvSpPr>
+          <p:cNvPr id="13" name="TextBox 12"/>
+          <p:cNvSpPr txBox="1"/>
+          <p:nvPr/>
+        </p:nvSpPr>
+        <p:spPr>
+          <a:xfrm>
+            <a:off x="4389120" y="5166360"/>
+            <a:ext cx="3520440" cy="731520"/>
+          </a:xfrm>
+          <a:prstGeom prst="rect">
+            <a:avLst/>
+          </a:prstGeom>
+          <a:noFill/>
+        </p:spPr>
+        <p:txBody>
+          <a:bodyPr wrap="square">
+            <a:normAutofit/>
+          </a:bodyPr>
+          <a:lstStyle/>
+          <a:p>
+            <a:r>
+              <a:rPr sz="1400">
+                <a:solidFill>
+                  <a:srgbClr val="55596A"/>
+                </a:solidFill>
+                <a:latin typeface="Arial"/>
+              </a:rPr>
+              <a:t>現行系統測試通過</a:t>
+            </a:r>
+          </a:p>
+        </p:txBody>
+      </p:sp>
+      <p:sp>
+        <p:nvSpPr>
+          <p:cNvPr id="14" name="TextBox 13"/>
+          <p:cNvSpPr txBox="1"/>
+          <p:nvPr/>
+        </p:nvSpPr>
+        <p:spPr>
+          <a:xfrm>
+            <a:off x="8092440" y="4206240"/>
+            <a:ext cx="3520440" cy="1005840"/>
+          </a:xfrm>
+          <a:prstGeom prst="rect">
+            <a:avLst/>
+          </a:prstGeom>
+          <a:noFill/>
+        </p:spPr>
+        <p:txBody>
+          <a:bodyPr wrap="none">
+            <a:spAutoFit/>
+          </a:bodyPr>
+          <a:lstStyle/>
+          <a:p>
+            <a:r>
+              <a:rPr b="1" sz="4400">
+                <a:solidFill>
+                  <a:srgbClr val="B3791F"/>
+                </a:solidFill>
+                <a:latin typeface="Courier New"/>
+              </a:rPr>
+              <a:t>4×3</a:t>
+            </a:r>
+          </a:p>
+        </p:txBody>
+      </p:sp>
+      <p:sp>
+        <p:nvSpPr>
+          <p:cNvPr id="15" name="TextBox 14"/>
+          <p:cNvSpPr txBox="1"/>
+          <p:nvPr/>
+        </p:nvSpPr>
+        <p:spPr>
+          <a:xfrm>
+            <a:off x="8092440" y="5166360"/>
+            <a:ext cx="3520440" cy="731520"/>
+          </a:xfrm>
+          <a:prstGeom prst="rect">
+            <a:avLst/>
+          </a:prstGeom>
+          <a:noFill/>
+        </p:spPr>
+        <p:txBody>
+          <a:bodyPr wrap="square">
+            <a:normAutofit/>
+          </a:bodyPr>
+          <a:lstStyle/>
+          <a:p>
+            <a:r>
+              <a:rPr sz="1400">
+                <a:solidFill>
+                  <a:srgbClr val="55596A"/>
+                </a:solidFill>
+                <a:latin typeface="Arial"/>
+              </a:rPr>
+              <a:t>角色 × 讀／寫／封存 權限矩陣</a:t>
+            </a:r>
+          </a:p>
+        </p:txBody>
+      </p:sp>
+    </p:spTree>
+  </p:cSld>
+  <p:clrMapOvr>
+    <a:masterClrMapping/>
+  </p:clrMapOvr>
+</p:sld>
+</file>
+
+<file path=ppt/slides/slide27.xml><?xml version="1.0" encoding="utf-8"?>
+<p:sld xmlns:a="http://schemas.openxmlformats.org/drawingml/2006/main" xmlns:p="http://schemas.openxmlformats.org/presentationml/2006/main" xmlns:r="http://schemas.openxmlformats.org/officeDocument/2006/relationships">
+  <p:cSld>
+    <p:bg>
+      <p:bgPr>
+        <a:solidFill>
+          <a:srgbClr val="F2F2EC"/>
+        </a:solidFill>
+        <a:effectLst/>
+      </p:bgPr>
+    </p:bg>
+    <p:spTree>
+      <p:nvGrpSpPr>
+        <p:cNvPr id="1" name=""/>
+        <p:cNvGrpSpPr/>
+        <p:nvPr/>
+      </p:nvGrpSpPr>
+      <p:grpSpPr/>
+      <p:sp>
+        <p:nvSpPr>
+          <p:cNvPr id="2" name="TextBox 1"/>
+          <p:cNvSpPr txBox="1"/>
+          <p:nvPr/>
+        </p:nvSpPr>
+        <p:spPr>
+          <a:xfrm>
+            <a:off x="685800" y="502920"/>
+            <a:ext cx="10515600" cy="365760"/>
+          </a:xfrm>
+          <a:prstGeom prst="rect">
+            <a:avLst/>
+          </a:prstGeom>
+          <a:noFill/>
+        </p:spPr>
+        <p:txBody>
+          <a:bodyPr wrap="square">
+            <a:spAutoFit/>
+          </a:bodyPr>
+          <a:lstStyle/>
+          <a:p>
+            <a:r>
+              <a:rPr sz="1300" b="1">
+                <a:solidFill>
+                  <a:srgbClr val="1F6F6B"/>
+                </a:solidFill>
+                <a:latin typeface="Courier New"/>
+              </a:rPr>
+              <a:t>下一步</a:t>
+            </a:r>
+          </a:p>
+        </p:txBody>
+      </p:sp>
+      <p:sp>
+        <p:nvSpPr>
+          <p:cNvPr id="3" name="TextBox 2"/>
+          <p:cNvSpPr txBox="1"/>
+          <p:nvPr/>
+        </p:nvSpPr>
+        <p:spPr>
+          <a:xfrm>
+            <a:off x="685800" y="914400"/>
+            <a:ext cx="10789920" cy="1463040"/>
+          </a:xfrm>
+          <a:prstGeom prst="rect">
+            <a:avLst/>
+          </a:prstGeom>
+          <a:noFill/>
+        </p:spPr>
+        <p:txBody>
+          <a:bodyPr wrap="square">
+            <a:spAutoFit/>
+          </a:bodyPr>
+          <a:lstStyle/>
+          <a:p>
+            <a:r>
+              <a:rPr sz="3600" b="1">
+                <a:solidFill>
+                  <a:srgbClr val="1C1F26"/>
+                </a:solidFill>
+                <a:latin typeface="Georgia"/>
+              </a:rPr>
+              <a:t>還沒做完的部分</a:t>
+            </a:r>
+          </a:p>
+        </p:txBody>
+      </p:sp>
+      <p:sp>
+        <p:nvSpPr>
+          <p:cNvPr id="4" name="TextBox 3"/>
+          <p:cNvSpPr txBox="1"/>
+          <p:nvPr/>
+        </p:nvSpPr>
+        <p:spPr>
+          <a:xfrm>
+            <a:off x="685800" y="1691640"/>
+            <a:ext cx="10607040" cy="4206240"/>
+          </a:xfrm>
+          <a:prstGeom prst="rect">
+            <a:avLst/>
+          </a:prstGeom>
+          <a:noFill/>
+        </p:spPr>
+        <p:txBody>
+          <a:bodyPr wrap="square">
+            <a:normAutofit/>
+          </a:bodyPr>
+          <a:lstStyle/>
+          <a:p>
+            <a:pPr>
+              <a:spcAft>
+                <a:spcPts val="1400"/>
+              </a:spcAft>
+            </a:pPr>
+            <a:r>
+              <a:rPr sz="2000">
+                <a:solidFill>
+                  <a:srgbClr val="1C1F26"/>
+                </a:solidFill>
+                <a:latin typeface="Arial"/>
+              </a:rPr>
+              <a:t>—  分類管理畫面 —— 目前只有 API，畫面上還沒有能建立/管理分類的地方</a:t>
+            </a:r>
+          </a:p>
+          <a:p>
+            <a:pPr>
+              <a:spcAft>
+                <a:spcPts val="1400"/>
+              </a:spcAft>
+            </a:pPr>
+            <a:r>
+              <a:rPr sz="2000">
+                <a:solidFill>
+                  <a:srgbClr val="1C1F26"/>
+                </a:solidFill>
+                <a:latin typeface="Arial"/>
+              </a:rPr>
+              <a:t>—  人員派工／甘特兩個分頁 —— 舊模型下的版本已經拿掉，要依新的任務模型重新設計</a:t>
+            </a:r>
+          </a:p>
+          <a:p>
+            <a:pPr>
+              <a:spcAft>
+                <a:spcPts val="1400"/>
+              </a:spcAft>
+            </a:pPr>
+            <a:r>
+              <a:rPr sz="2000">
+                <a:solidFill>
+                  <a:srgbClr val="1C1F26"/>
+                </a:solidFill>
+                <a:latin typeface="Arial"/>
+              </a:rPr>
+              <a:t>—  文件已經同步：README、開發文件都對齊現在的架構了</a:t>
+            </a:r>
+          </a:p>
+        </p:txBody>
+      </p:sp>
+    </p:spTree>
+  </p:cSld>
+  <p:clrMapOvr>
+    <a:masterClrMapping/>
+  </p:clrMapOvr>
+</p:sld>
+</file>
+
+<file path=ppt/slides/slide28.xml><?xml version="1.0" encoding="utf-8"?>
+<p:sld xmlns:a="http://schemas.openxmlformats.org/drawingml/2006/main" xmlns:p="http://schemas.openxmlformats.org/presentationml/2006/main" xmlns:r="http://schemas.openxmlformats.org/officeDocument/2006/relationships">
+  <p:cSld>
+    <p:bg>
+      <p:bgPr>
+        <a:solidFill>
+          <a:srgbClr val="F2F2EC"/>
+        </a:solidFill>
+        <a:effectLst/>
+      </p:bgPr>
+    </p:bg>
+    <p:spTree>
+      <p:nvGrpSpPr>
+        <p:cNvPr id="1" name=""/>
+        <p:cNvGrpSpPr/>
+        <p:nvPr/>
+      </p:nvGrpSpPr>
+      <p:grpSpPr/>
+      <p:sp>
+        <p:nvSpPr>
+          <p:cNvPr id="2" name="TextBox 1"/>
+          <p:cNvSpPr txBox="1"/>
+          <p:nvPr/>
+        </p:nvSpPr>
+        <p:spPr>
+          <a:xfrm>
+            <a:off x="685800" y="502920"/>
+            <a:ext cx="10515600" cy="365760"/>
+          </a:xfrm>
+          <a:prstGeom prst="rect">
+            <a:avLst/>
+          </a:prstGeom>
+          <a:noFill/>
+        </p:spPr>
+        <p:txBody>
+          <a:bodyPr wrap="square">
+            <a:spAutoFit/>
+          </a:bodyPr>
+          <a:lstStyle/>
+          <a:p>
+            <a:r>
+              <a:rPr sz="1300" b="1">
+                <a:solidFill>
+                  <a:srgbClr val="1F6F6B"/>
+                </a:solidFill>
+                <a:latin typeface="Courier New"/>
+              </a:rPr>
+              <a:t>收尾</a:t>
+            </a:r>
+          </a:p>
+        </p:txBody>
+      </p:sp>
+      <p:sp>
+        <p:nvSpPr>
+          <p:cNvPr id="3" name="TextBox 2"/>
+          <p:cNvSpPr txBox="1"/>
+          <p:nvPr/>
+        </p:nvSpPr>
+        <p:spPr>
+          <a:xfrm>
+            <a:off x="822960" y="1828800"/>
+            <a:ext cx="10515600" cy="2011680"/>
+          </a:xfrm>
+          <a:prstGeom prst="rect">
+            <a:avLst/>
+          </a:prstGeom>
+          <a:noFill/>
+        </p:spPr>
+        <p:txBody>
+          <a:bodyPr wrap="square">
+            <a:normAutofit/>
+          </a:bodyPr>
+          <a:lstStyle/>
+          <a:p>
+            <a:r>
+              <a:rPr b="1" sz="3800">
+                <a:solidFill>
+                  <a:srgbClr val="1C1F26"/>
+                </a:solidFill>
+                <a:latin typeface="Georgia"/>
+              </a:rPr>
+              <a:t>從一個開會的痛點，
+走到一支可以看板拖曳的系統。</a:t>
+            </a:r>
+          </a:p>
+        </p:txBody>
+      </p:sp>
+      <p:sp>
+        <p:nvSpPr>
+          <p:cNvPr id="4" name="TextBox 3"/>
+          <p:cNvSpPr txBox="1"/>
+          <p:nvPr/>
+        </p:nvSpPr>
+        <p:spPr>
+          <a:xfrm>
+            <a:off x="822960" y="3749039"/>
+            <a:ext cx="9875520" cy="1645920"/>
+          </a:xfrm>
+          <a:prstGeom prst="rect">
+            <a:avLst/>
+          </a:prstGeom>
+          <a:noFill/>
+        </p:spPr>
+        <p:txBody>
+          <a:bodyPr wrap="square">
+            <a:normAutofit/>
+          </a:bodyPr>
+          <a:lstStyle/>
+          <a:p>
+            <a:r>
+              <a:rPr sz="1900">
+                <a:solidFill>
+                  <a:srgbClr val="55596A"/>
+                </a:solidFill>
+                <a:latin typeface="Arial"/>
+              </a:rPr>
+              <a:t>技巧不是重點，讓每一步都能被重現、被審查、被記錄下來 —— 才是真正把「憑感覺開發」收斂成可以交付的系統的原因。</a:t>
+            </a:r>
+          </a:p>
+        </p:txBody>
+      </p:sp>
+      <p:sp>
+        <p:nvSpPr>
+          <p:cNvPr id="5" name="TextBox 4"/>
+          <p:cNvSpPr txBox="1"/>
+          <p:nvPr/>
+        </p:nvSpPr>
+        <p:spPr>
+          <a:xfrm>
+            <a:off x="822960" y="6126480"/>
+            <a:ext cx="9144000" cy="457200"/>
+          </a:xfrm>
+          <a:prstGeom prst="rect">
+            <a:avLst/>
+          </a:prstGeom>
+          <a:noFill/>
+        </p:spPr>
+        <p:txBody>
+          <a:bodyPr wrap="none">
+            <a:spAutoFit/>
+          </a:bodyPr>
+          <a:lstStyle/>
+          <a:p>
+            <a:r>
+              <a:rPr sz="1200">
+                <a:solidFill>
+                  <a:srgbClr val="55596A"/>
+                </a:solidFill>
+                <a:latin typeface="Courier New"/>
+              </a:rPr>
+              <a:t>Spring-MissionBoard · 2026-06-08 → 2026-08-10</a:t>
             </a:r>
           </a:p>
         </p:txBody>
@@ -6879,9 +8481,9 @@
                 <a:solidFill>
                   <a:srgbClr val="1F6F6B"/>
                 </a:solidFill>
-                <a:latin typeface="Menlo"/>
-              </a:rPr>
-              <a:t>PHASE 1   ·   2026-06-08 → 06-19</a:t>
+                <a:latin typeface="Courier New"/>
+              </a:rPr>
+              <a:t>全景</a:t>
             </a:r>
           </a:p>
         </p:txBody>
@@ -6909,13 +8511,13 @@
           <a:lstStyle/>
           <a:p>
             <a:r>
-              <a:rPr sz="3600" b="1">
+              <a:rPr sz="3400" b="1">
                 <a:solidFill>
                   <a:srgbClr val="1C1F26"/>
                 </a:solidFill>
                 <a:latin typeface="Georgia"/>
               </a:rPr>
-              <a:t>WbsScaff：一支不需要伺服器的 HTML 檔</a:t>
+              <a:t>五個階段，一條時間軸</a:t>
             </a:r>
           </a:p>
         </p:txBody>
@@ -6928,8 +8530,8 @@
         </p:nvSpPr>
         <p:spPr>
           <a:xfrm>
-            <a:off x="685800" y="1691640"/>
-            <a:ext cx="10058400" cy="365760"/>
+            <a:off x="685800" y="1783080"/>
+            <a:ext cx="1554480" cy="841248"/>
           </a:xfrm>
           <a:prstGeom prst="rect">
             <a:avLst/>
@@ -6943,27 +8545,192 @@
           <a:lstStyle/>
           <a:p>
             <a:r>
+              <a:rPr sz="1300">
+                <a:solidFill>
+                  <a:srgbClr val="55596A"/>
+                </a:solidFill>
+                <a:latin typeface="Courier New"/>
+              </a:rPr>
+              <a:t>06-08 → 06-19</a:t>
+            </a:r>
+          </a:p>
+        </p:txBody>
+      </p:sp>
+      <p:sp>
+        <p:nvSpPr>
+          <p:cNvPr id="5" name="Oval 4"/>
+          <p:cNvSpPr/>
+          <p:nvPr/>
+        </p:nvSpPr>
+        <p:spPr>
+          <a:xfrm>
+            <a:off x="2331720" y="1837944"/>
+            <a:ext cx="128016" cy="128016"/>
+          </a:xfrm>
+          <a:prstGeom prst="ellipse">
+            <a:avLst/>
+          </a:prstGeom>
+          <a:solidFill>
+            <a:srgbClr val="B3791F"/>
+          </a:solidFill>
+          <a:ln>
+            <a:noFill/>
+          </a:ln>
+        </p:spPr>
+        <p:style>
+          <a:lnRef idx="1">
+            <a:schemeClr val="accent1"/>
+          </a:lnRef>
+          <a:fillRef idx="3">
+            <a:schemeClr val="accent1"/>
+          </a:fillRef>
+          <a:effectRef idx="2">
+            <a:schemeClr val="accent1"/>
+          </a:effectRef>
+          <a:fontRef idx="minor">
+            <a:schemeClr val="lt1"/>
+          </a:fontRef>
+        </p:style>
+        <p:txBody>
+          <a:bodyPr rtlCol="0" anchor="ctr"/>
+          <a:lstStyle/>
+          <a:p>
+            <a:pPr algn="ctr"/>
+          </a:p>
+        </p:txBody>
+      </p:sp>
+      <p:sp>
+        <p:nvSpPr>
+          <p:cNvPr id="6" name="TextBox 5"/>
+          <p:cNvSpPr txBox="1"/>
+          <p:nvPr/>
+        </p:nvSpPr>
+        <p:spPr>
+          <a:xfrm>
+            <a:off x="2697480" y="1783080"/>
+            <a:ext cx="8412480" cy="841248"/>
+          </a:xfrm>
+          <a:prstGeom prst="rect">
+            <a:avLst/>
+          </a:prstGeom>
+          <a:noFill/>
+        </p:spPr>
+        <p:txBody>
+          <a:bodyPr wrap="square">
+            <a:normAutofit/>
+          </a:bodyPr>
+          <a:lstStyle/>
+          <a:p>
+            <a:r>
+              <a:rPr b="1" sz="1900">
+                <a:solidFill>
+                  <a:srgbClr val="1C1F26"/>
+                </a:solidFill>
+                <a:latin typeface="Georgia"/>
+              </a:rPr>
+              <a:t>WbsScaff</a:t>
+            </a:r>
+          </a:p>
+          <a:p>
+            <a:r>
               <a:rPr sz="1400">
                 <a:solidFill>
                   <a:srgbClr val="55596A"/>
                 </a:solidFill>
-                <a:latin typeface="Menlo"/>
-              </a:rPr>
-              <a:t>39 commits  ·  原始命名 Scaff-WBS-Builder</a:t>
-            </a:r>
-          </a:p>
-        </p:txBody>
-      </p:sp>
-      <p:sp>
-        <p:nvSpPr>
-          <p:cNvPr id="5" name="TextBox 4"/>
-          <p:cNvSpPr txBox="1"/>
-          <p:nvPr/>
-        </p:nvSpPr>
-        <p:spPr>
-          <a:xfrm>
-            <a:off x="685800" y="2148840"/>
-            <a:ext cx="10607040" cy="4206240"/>
+                <a:latin typeface="Arial"/>
+              </a:rPr>
+              <a:t>單檔 HTML WBS 工具，氣隙環境，無伺服器</a:t>
+            </a:r>
+          </a:p>
+        </p:txBody>
+      </p:sp>
+      <p:sp>
+        <p:nvSpPr>
+          <p:cNvPr id="7" name="TextBox 6"/>
+          <p:cNvSpPr txBox="1"/>
+          <p:nvPr/>
+        </p:nvSpPr>
+        <p:spPr>
+          <a:xfrm>
+            <a:off x="685800" y="2624328"/>
+            <a:ext cx="1554480" cy="841248"/>
+          </a:xfrm>
+          <a:prstGeom prst="rect">
+            <a:avLst/>
+          </a:prstGeom>
+          <a:noFill/>
+        </p:spPr>
+        <p:txBody>
+          <a:bodyPr wrap="none">
+            <a:spAutoFit/>
+          </a:bodyPr>
+          <a:lstStyle/>
+          <a:p>
+            <a:r>
+              <a:rPr sz="1300">
+                <a:solidFill>
+                  <a:srgbClr val="55596A"/>
+                </a:solidFill>
+                <a:latin typeface="Courier New"/>
+              </a:rPr>
+              <a:t>06-19 → 07-03</a:t>
+            </a:r>
+          </a:p>
+        </p:txBody>
+      </p:sp>
+      <p:sp>
+        <p:nvSpPr>
+          <p:cNvPr id="8" name="Oval 7"/>
+          <p:cNvSpPr/>
+          <p:nvPr/>
+        </p:nvSpPr>
+        <p:spPr>
+          <a:xfrm>
+            <a:off x="2331720" y="2679192"/>
+            <a:ext cx="128016" cy="128016"/>
+          </a:xfrm>
+          <a:prstGeom prst="ellipse">
+            <a:avLst/>
+          </a:prstGeom>
+          <a:solidFill>
+            <a:srgbClr val="B3791F"/>
+          </a:solidFill>
+          <a:ln>
+            <a:noFill/>
+          </a:ln>
+        </p:spPr>
+        <p:style>
+          <a:lnRef idx="1">
+            <a:schemeClr val="accent1"/>
+          </a:lnRef>
+          <a:fillRef idx="3">
+            <a:schemeClr val="accent1"/>
+          </a:fillRef>
+          <a:effectRef idx="2">
+            <a:schemeClr val="accent1"/>
+          </a:effectRef>
+          <a:fontRef idx="minor">
+            <a:schemeClr val="lt1"/>
+          </a:fontRef>
+        </p:style>
+        <p:txBody>
+          <a:bodyPr rtlCol="0" anchor="ctr"/>
+          <a:lstStyle/>
+          <a:p>
+            <a:pPr algn="ctr"/>
+          </a:p>
+        </p:txBody>
+      </p:sp>
+      <p:sp>
+        <p:nvSpPr>
+          <p:cNvPr id="9" name="TextBox 8"/>
+          <p:cNvSpPr txBox="1"/>
+          <p:nvPr/>
+        </p:nvSpPr>
+        <p:spPr>
+          <a:xfrm>
+            <a:off x="2697480" y="2624328"/>
+            <a:ext cx="8412480" cy="841248"/>
           </a:xfrm>
           <a:prstGeom prst="rect">
             <a:avLst/>
@@ -6972,71 +8739,395 @@
         </p:spPr>
         <p:txBody>
           <a:bodyPr wrap="square">
+            <a:normAutofit/>
+          </a:bodyPr>
+          <a:lstStyle/>
+          <a:p>
+            <a:r>
+              <a:rPr b="1" sz="1900">
+                <a:solidFill>
+                  <a:srgbClr val="1C1F26"/>
+                </a:solidFill>
+                <a:latin typeface="Georgia"/>
+              </a:rPr>
+              <a:t>Spring-WbsScaff</a:t>
+            </a:r>
+          </a:p>
+          <a:p>
+            <a:r>
+              <a:rPr sz="1400">
+                <a:solidFill>
+                  <a:srgbClr val="55596A"/>
+                </a:solidFill>
+                <a:latin typeface="Arial"/>
+              </a:rPr>
+              <a:t>搬上 Web，多人即時協作、部門權限</a:t>
+            </a:r>
+          </a:p>
+        </p:txBody>
+      </p:sp>
+      <p:sp>
+        <p:nvSpPr>
+          <p:cNvPr id="10" name="TextBox 9"/>
+          <p:cNvSpPr txBox="1"/>
+          <p:nvPr/>
+        </p:nvSpPr>
+        <p:spPr>
+          <a:xfrm>
+            <a:off x="685800" y="3465576"/>
+            <a:ext cx="1554480" cy="841248"/>
+          </a:xfrm>
+          <a:prstGeom prst="rect">
+            <a:avLst/>
+          </a:prstGeom>
+          <a:noFill/>
+        </p:spPr>
+        <p:txBody>
+          <a:bodyPr wrap="none">
             <a:spAutoFit/>
           </a:bodyPr>
           <a:lstStyle/>
           <a:p>
-            <a:pPr>
-              <a:spcAft>
-                <a:spcPts val="1400"/>
-              </a:spcAft>
-            </a:pPr>
-            <a:r>
-              <a:rPr sz="2000">
-                <a:solidFill>
-                  <a:srgbClr val="1C1F26"/>
-                </a:solidFill>
-                <a:latin typeface="Avenir Next"/>
-              </a:rPr>
-              <a:t>—  純 Vanilla JS + 內嵌 CSS，無任何外部依賴，適用氣隙（air-gapped）生產環境</a:t>
-            </a:r>
-          </a:p>
-          <a:p>
-            <a:pPr>
-              <a:spcAft>
-                <a:spcPts val="1400"/>
-              </a:spcAft>
-            </a:pPr>
-            <a:r>
-              <a:rPr sz="2000">
-                <a:solidFill>
-                  <a:srgbClr val="1C1F26"/>
-                </a:solidFill>
-                <a:latin typeface="Avenir Next"/>
-              </a:rPr>
-              <a:t>—  樹狀節點最多 5 層，雙擊行內編輯、跨層拖曳排序</a:t>
-            </a:r>
-          </a:p>
-          <a:p>
-            <a:pPr>
-              <a:spcAft>
-                <a:spcPts val="1400"/>
-              </a:spcAft>
-            </a:pPr>
-            <a:r>
-              <a:rPr sz="2000">
-                <a:solidFill>
-                  <a:srgbClr val="1C1F26"/>
-                </a:solidFill>
-                <a:latin typeface="Avenir Next"/>
-              </a:rPr>
-              <a:t>—  父層狀態由子層自動推算，不可手動更改 —— 這個設計一路延續到後面每一代系統</a:t>
-            </a:r>
-          </a:p>
-          <a:p>
-            <a:pPr>
-              <a:spcAft>
-                <a:spcPts val="1400"/>
-              </a:spcAft>
-            </a:pPr>
-            <a:r>
-              <a:rPr sz="2000">
-                <a:solidFill>
-                  <a:srgbClr val="1C1F26"/>
-                </a:solidFill>
-                <a:latin typeface="Avenir Next"/>
-              </a:rPr>
-              <a:t>—  CSV／XLSX／JSON 匯出入，XLSX 用 SheetJS 內嵌實作維持離線可用</a:t>
+            <a:r>
+              <a:rPr sz="1300">
+                <a:solidFill>
+                  <a:srgbClr val="55596A"/>
+                </a:solidFill>
+                <a:latin typeface="Courier New"/>
+              </a:rPr>
+              <a:t>07-03 → 07-08</a:t>
+            </a:r>
+          </a:p>
+        </p:txBody>
+      </p:sp>
+      <p:sp>
+        <p:nvSpPr>
+          <p:cNvPr id="11" name="Oval 10"/>
+          <p:cNvSpPr/>
+          <p:nvPr/>
+        </p:nvSpPr>
+        <p:spPr>
+          <a:xfrm>
+            <a:off x="2331720" y="3520440"/>
+            <a:ext cx="128016" cy="128016"/>
+          </a:xfrm>
+          <a:prstGeom prst="ellipse">
+            <a:avLst/>
+          </a:prstGeom>
+          <a:solidFill>
+            <a:srgbClr val="B3791F"/>
+          </a:solidFill>
+          <a:ln>
+            <a:noFill/>
+          </a:ln>
+        </p:spPr>
+        <p:style>
+          <a:lnRef idx="1">
+            <a:schemeClr val="accent1"/>
+          </a:lnRef>
+          <a:fillRef idx="3">
+            <a:schemeClr val="accent1"/>
+          </a:fillRef>
+          <a:effectRef idx="2">
+            <a:schemeClr val="accent1"/>
+          </a:effectRef>
+          <a:fontRef idx="minor">
+            <a:schemeClr val="lt1"/>
+          </a:fontRef>
+        </p:style>
+        <p:txBody>
+          <a:bodyPr rtlCol="0" anchor="ctr"/>
+          <a:lstStyle/>
+          <a:p>
+            <a:pPr algn="ctr"/>
+          </a:p>
+        </p:txBody>
+      </p:sp>
+      <p:sp>
+        <p:nvSpPr>
+          <p:cNvPr id="12" name="TextBox 11"/>
+          <p:cNvSpPr txBox="1"/>
+          <p:nvPr/>
+        </p:nvSpPr>
+        <p:spPr>
+          <a:xfrm>
+            <a:off x="2697480" y="3465576"/>
+            <a:ext cx="8412480" cy="841248"/>
+          </a:xfrm>
+          <a:prstGeom prst="rect">
+            <a:avLst/>
+          </a:prstGeom>
+          <a:noFill/>
+        </p:spPr>
+        <p:txBody>
+          <a:bodyPr wrap="square">
+            <a:normAutofit/>
+          </a:bodyPr>
+          <a:lstStyle/>
+          <a:p>
+            <a:r>
+              <a:rPr b="1" sz="1900">
+                <a:solidFill>
+                  <a:srgbClr val="1C1F26"/>
+                </a:solidFill>
+                <a:latin typeface="Georgia"/>
+              </a:rPr>
+              <a:t>Spring-TaskFlow</a:t>
+            </a:r>
+          </a:p>
+          <a:p>
+            <a:r>
+              <a:rPr sz="1400">
+                <a:solidFill>
+                  <a:srgbClr val="55596A"/>
+                </a:solidFill>
+                <a:latin typeface="Arial"/>
+              </a:rPr>
+              <a:t>拆出獨立看板系統，核心從樹狀改拖曳卡片</a:t>
+            </a:r>
+          </a:p>
+        </p:txBody>
+      </p:sp>
+      <p:sp>
+        <p:nvSpPr>
+          <p:cNvPr id="13" name="TextBox 12"/>
+          <p:cNvSpPr txBox="1"/>
+          <p:nvPr/>
+        </p:nvSpPr>
+        <p:spPr>
+          <a:xfrm>
+            <a:off x="685800" y="4306824"/>
+            <a:ext cx="1554480" cy="841248"/>
+          </a:xfrm>
+          <a:prstGeom prst="rect">
+            <a:avLst/>
+          </a:prstGeom>
+          <a:noFill/>
+        </p:spPr>
+        <p:txBody>
+          <a:bodyPr wrap="none">
+            <a:spAutoFit/>
+          </a:bodyPr>
+          <a:lstStyle/>
+          <a:p>
+            <a:r>
+              <a:rPr sz="1300">
+                <a:solidFill>
+                  <a:srgbClr val="55596A"/>
+                </a:solidFill>
+                <a:latin typeface="Courier New"/>
+              </a:rPr>
+              <a:t>07-17 → 08-08</a:t>
+            </a:r>
+          </a:p>
+        </p:txBody>
+      </p:sp>
+      <p:sp>
+        <p:nvSpPr>
+          <p:cNvPr id="14" name="Oval 13"/>
+          <p:cNvSpPr/>
+          <p:nvPr/>
+        </p:nvSpPr>
+        <p:spPr>
+          <a:xfrm>
+            <a:off x="2331720" y="4361688"/>
+            <a:ext cx="128016" cy="128016"/>
+          </a:xfrm>
+          <a:prstGeom prst="ellipse">
+            <a:avLst/>
+          </a:prstGeom>
+          <a:solidFill>
+            <a:srgbClr val="B3791F"/>
+          </a:solidFill>
+          <a:ln>
+            <a:noFill/>
+          </a:ln>
+        </p:spPr>
+        <p:style>
+          <a:lnRef idx="1">
+            <a:schemeClr val="accent1"/>
+          </a:lnRef>
+          <a:fillRef idx="3">
+            <a:schemeClr val="accent1"/>
+          </a:fillRef>
+          <a:effectRef idx="2">
+            <a:schemeClr val="accent1"/>
+          </a:effectRef>
+          <a:fontRef idx="minor">
+            <a:schemeClr val="lt1"/>
+          </a:fontRef>
+        </p:style>
+        <p:txBody>
+          <a:bodyPr rtlCol="0" anchor="ctr"/>
+          <a:lstStyle/>
+          <a:p>
+            <a:pPr algn="ctr"/>
+          </a:p>
+        </p:txBody>
+      </p:sp>
+      <p:sp>
+        <p:nvSpPr>
+          <p:cNvPr id="15" name="TextBox 14"/>
+          <p:cNvSpPr txBox="1"/>
+          <p:nvPr/>
+        </p:nvSpPr>
+        <p:spPr>
+          <a:xfrm>
+            <a:off x="2697480" y="4306824"/>
+            <a:ext cx="8412480" cy="841248"/>
+          </a:xfrm>
+          <a:prstGeom prst="rect">
+            <a:avLst/>
+          </a:prstGeom>
+          <a:noFill/>
+        </p:spPr>
+        <p:txBody>
+          <a:bodyPr wrap="square">
+            <a:normAutofit/>
+          </a:bodyPr>
+          <a:lstStyle/>
+          <a:p>
+            <a:r>
+              <a:rPr b="1" sz="1900">
+                <a:solidFill>
+                  <a:srgbClr val="1C1F26"/>
+                </a:solidFill>
+                <a:latin typeface="Georgia"/>
+              </a:rPr>
+              <a:t>WbsFlow → MissionBoard</a:t>
+            </a:r>
+          </a:p>
+          <a:p>
+            <a:r>
+              <a:rPr sz="1400">
+                <a:solidFill>
+                  <a:srgbClr val="55596A"/>
+                </a:solidFill>
+                <a:latin typeface="Arial"/>
+              </a:rPr>
+              <a:t>全新 repo 合併兩者：「WBS 節點即任務」</a:t>
+            </a:r>
+          </a:p>
+        </p:txBody>
+      </p:sp>
+      <p:sp>
+        <p:nvSpPr>
+          <p:cNvPr id="16" name="TextBox 15"/>
+          <p:cNvSpPr txBox="1"/>
+          <p:nvPr/>
+        </p:nvSpPr>
+        <p:spPr>
+          <a:xfrm>
+            <a:off x="685800" y="5148072"/>
+            <a:ext cx="1554480" cy="841248"/>
+          </a:xfrm>
+          <a:prstGeom prst="rect">
+            <a:avLst/>
+          </a:prstGeom>
+          <a:noFill/>
+        </p:spPr>
+        <p:txBody>
+          <a:bodyPr wrap="none">
+            <a:spAutoFit/>
+          </a:bodyPr>
+          <a:lstStyle/>
+          <a:p>
+            <a:r>
+              <a:rPr sz="1300">
+                <a:solidFill>
+                  <a:srgbClr val="55596A"/>
+                </a:solidFill>
+                <a:latin typeface="Courier New"/>
+              </a:rPr>
+              <a:t>08-09 → 08-10</a:t>
+            </a:r>
+          </a:p>
+        </p:txBody>
+      </p:sp>
+      <p:sp>
+        <p:nvSpPr>
+          <p:cNvPr id="17" name="Oval 16"/>
+          <p:cNvSpPr/>
+          <p:nvPr/>
+        </p:nvSpPr>
+        <p:spPr>
+          <a:xfrm>
+            <a:off x="2331720" y="5202936"/>
+            <a:ext cx="128016" cy="128016"/>
+          </a:xfrm>
+          <a:prstGeom prst="ellipse">
+            <a:avLst/>
+          </a:prstGeom>
+          <a:solidFill>
+            <a:srgbClr val="B3791F"/>
+          </a:solidFill>
+          <a:ln>
+            <a:noFill/>
+          </a:ln>
+        </p:spPr>
+        <p:style>
+          <a:lnRef idx="1">
+            <a:schemeClr val="accent1"/>
+          </a:lnRef>
+          <a:fillRef idx="3">
+            <a:schemeClr val="accent1"/>
+          </a:fillRef>
+          <a:effectRef idx="2">
+            <a:schemeClr val="accent1"/>
+          </a:effectRef>
+          <a:fontRef idx="minor">
+            <a:schemeClr val="lt1"/>
+          </a:fontRef>
+        </p:style>
+        <p:txBody>
+          <a:bodyPr rtlCol="0" anchor="ctr"/>
+          <a:lstStyle/>
+          <a:p>
+            <a:pPr algn="ctr"/>
+          </a:p>
+        </p:txBody>
+      </p:sp>
+      <p:sp>
+        <p:nvSpPr>
+          <p:cNvPr id="18" name="TextBox 17"/>
+          <p:cNvSpPr txBox="1"/>
+          <p:nvPr/>
+        </p:nvSpPr>
+        <p:spPr>
+          <a:xfrm>
+            <a:off x="2697480" y="5148072"/>
+            <a:ext cx="8412480" cy="841248"/>
+          </a:xfrm>
+          <a:prstGeom prst="rect">
+            <a:avLst/>
+          </a:prstGeom>
+          <a:noFill/>
+        </p:spPr>
+        <p:txBody>
+          <a:bodyPr wrap="square">
+            <a:normAutofit/>
+          </a:bodyPr>
+          <a:lstStyle/>
+          <a:p>
+            <a:r>
+              <a:rPr b="1" sz="1900">
+                <a:solidFill>
+                  <a:srgbClr val="1C1F26"/>
+                </a:solidFill>
+                <a:latin typeface="Georgia"/>
+              </a:rPr>
+              <a:t>任務導向重構</a:t>
+            </a:r>
+          </a:p>
+          <a:p>
+            <a:r>
+              <a:rPr sz="1400">
+                <a:solidFill>
+                  <a:srgbClr val="55596A"/>
+                </a:solidFill>
+                <a:latin typeface="Arial"/>
+              </a:rPr>
+              <a:t>拆掉節點模型，看板變預設首頁 —— 這次 session</a:t>
             </a:r>
           </a:p>
         </p:txBody>
@@ -7094,9 +9185,9 @@
                 <a:solidFill>
                   <a:srgbClr val="1F6F6B"/>
                 </a:solidFill>
-                <a:latin typeface="Menlo"/>
-              </a:rPr>
-              <a:t>AI TECHNIQUE</a:t>
+                <a:latin typeface="Courier New"/>
+              </a:rPr>
+              <a:t>PHASE 1   ·   2026-06-08 → 06-19</a:t>
             </a:r>
           </a:p>
         </p:txBody>
@@ -7130,7 +9221,7 @@
                 </a:solidFill>
                 <a:latin typeface="Georgia"/>
               </a:rPr>
-              <a:t>先做出可以按的東西，再寫規格</a:t>
+              <a:t>WbsScaff：一支不需要伺服器的 HTML 檔</a:t>
             </a:r>
           </a:p>
         </p:txBody>
@@ -7144,6 +9235,40 @@
         <p:spPr>
           <a:xfrm>
             <a:off x="685800" y="1691640"/>
+            <a:ext cx="10058400" cy="365760"/>
+          </a:xfrm>
+          <a:prstGeom prst="rect">
+            <a:avLst/>
+          </a:prstGeom>
+          <a:noFill/>
+        </p:spPr>
+        <p:txBody>
+          <a:bodyPr wrap="none">
+            <a:spAutoFit/>
+          </a:bodyPr>
+          <a:lstStyle/>
+          <a:p>
+            <a:r>
+              <a:rPr sz="1400">
+                <a:solidFill>
+                  <a:srgbClr val="55596A"/>
+                </a:solidFill>
+                <a:latin typeface="Courier New"/>
+              </a:rPr>
+              <a:t>39 commits  ·  原始命名 Scaff-WBS-Builder</a:t>
+            </a:r>
+          </a:p>
+        </p:txBody>
+      </p:sp>
+      <p:sp>
+        <p:nvSpPr>
+          <p:cNvPr id="5" name="TextBox 4"/>
+          <p:cNvSpPr txBox="1"/>
+          <p:nvPr/>
+        </p:nvSpPr>
+        <p:spPr>
+          <a:xfrm>
+            <a:off x="685800" y="2148840"/>
             <a:ext cx="10607040" cy="4206240"/>
           </a:xfrm>
           <a:prstGeom prst="rect">
@@ -7153,7 +9278,7 @@
         </p:spPr>
         <p:txBody>
           <a:bodyPr wrap="square">
-            <a:spAutoFit/>
+            <a:normAutofit/>
           </a:bodyPr>
           <a:lstStyle/>
           <a:p>
@@ -7163,13 +9288,13 @@
               </a:spcAft>
             </a:pPr>
             <a:r>
-              <a:rPr sz="1900">
-                <a:solidFill>
-                  <a:srgbClr val="1C1F26"/>
-                </a:solidFill>
-                <a:latin typeface="Avenir Next"/>
-              </a:rPr>
-              <a:t>—  brainstorming skill 產出真的能點的 HTML mockup，動工前先做視覺化 A/B 選擇</a:t>
+              <a:rPr sz="2000">
+                <a:solidFill>
+                  <a:srgbClr val="1C1F26"/>
+                </a:solidFill>
+                <a:latin typeface="Arial"/>
+              </a:rPr>
+              <a:t>—  純 Vanilla JS + 內嵌 CSS，沒有任何外部依賴，瀏覽器打開就能用</a:t>
             </a:r>
           </a:p>
           <a:p>
@@ -7179,13 +9304,13 @@
               </a:spcAft>
             </a:pPr>
             <a:r>
-              <a:rPr sz="1900">
-                <a:solidFill>
-                  <a:srgbClr val="1C1F26"/>
-                </a:solidFill>
-                <a:latin typeface="Avenir Next"/>
-              </a:rPr>
-              <a:t>—  原訂建置流程（src/app.js + dist/）做出來後放棄，改用單檔手改 —— 計畫輸給現實</a:t>
+              <a:rPr sz="2000">
+                <a:solidFill>
+                  <a:srgbClr val="1C1F26"/>
+                </a:solidFill>
+                <a:latin typeface="Arial"/>
+              </a:rPr>
+              <a:t>—  樹狀節點最多 5 層，雙擊可以直接改標題，還能跨層拖曳排序</a:t>
             </a:r>
           </a:p>
           <a:p>
@@ -7195,106 +9320,29 @@
               </a:spcAft>
             </a:pPr>
             <a:r>
-              <a:rPr sz="1900">
-                <a:solidFill>
-                  <a:srgbClr val="1C1F26"/>
-                </a:solidFill>
-                <a:latin typeface="Avenir Next"/>
-              </a:rPr>
-              <a:t>—  曾做出 AI 生成功能，後來整支移除，CLAUDE.md 留下警語「請勿重新引入」</a:t>
-            </a:r>
-          </a:p>
-        </p:txBody>
-      </p:sp>
-      <p:sp>
-        <p:nvSpPr>
-          <p:cNvPr id="5" name="Rectangle 4"/>
-          <p:cNvSpPr/>
-          <p:nvPr/>
-        </p:nvSpPr>
-        <p:spPr>
-          <a:xfrm>
-            <a:off x="594360" y="4846320"/>
-            <a:ext cx="30000" cy="1280160"/>
-          </a:xfrm>
-          <a:prstGeom prst="rect">
-            <a:avLst/>
-          </a:prstGeom>
-          <a:solidFill>
-            <a:srgbClr val="B3791F"/>
-          </a:solidFill>
-          <a:ln>
-            <a:noFill/>
-          </a:ln>
-        </p:spPr>
-        <p:style>
-          <a:lnRef idx="1">
-            <a:schemeClr val="accent1"/>
-          </a:lnRef>
-          <a:fillRef idx="3">
-            <a:schemeClr val="accent1"/>
-          </a:fillRef>
-          <a:effectRef idx="2">
-            <a:schemeClr val="accent1"/>
-          </a:effectRef>
-          <a:fontRef idx="minor">
-            <a:schemeClr val="lt1"/>
-          </a:fontRef>
-        </p:style>
-        <p:txBody>
-          <a:bodyPr rtlCol="0" anchor="ctr"/>
-          <a:lstStyle/>
-          <a:p>
-            <a:pPr algn="ctr"/>
-          </a:p>
-        </p:txBody>
-      </p:sp>
-      <p:sp>
-        <p:nvSpPr>
-          <p:cNvPr id="6" name="TextBox 5"/>
-          <p:cNvSpPr txBox="1"/>
-          <p:nvPr/>
-        </p:nvSpPr>
-        <p:spPr>
-          <a:xfrm>
-            <a:off x="822960" y="4846320"/>
-            <a:ext cx="10241280" cy="1371600"/>
-          </a:xfrm>
-          <a:prstGeom prst="rect">
-            <a:avLst/>
-          </a:prstGeom>
-          <a:noFill/>
-        </p:spPr>
-        <p:txBody>
-          <a:bodyPr wrap="square">
-            <a:spAutoFit/>
-          </a:bodyPr>
-          <a:lstStyle/>
-          <a:p>
-            <a:r>
-              <a:rPr i="1" sz="1700">
-                <a:solidFill>
-                  <a:srgbClr val="1C1F26"/>
-                </a:solidFill>
-                <a:latin typeface="Georgia"/>
-              </a:rPr>
-              <a:t>“氣隙生產環境這個定位，從第一天就決定了後面每一次「要不要加依賴」的取捨。”</a:t>
+              <a:rPr sz="2000">
+                <a:solidFill>
+                  <a:srgbClr val="1C1F26"/>
+                </a:solidFill>
+                <a:latin typeface="Arial"/>
+              </a:rPr>
+              <a:t>—  父層狀態自動用子層算出來，不能手動亂改 —— 這個設計後來一路延續到每一代系統</a:t>
             </a:r>
           </a:p>
           <a:p>
             <a:pPr>
-              <a:spcBef>
-                <a:spcPts val="600"/>
-              </a:spcBef>
+              <a:spcAft>
+                <a:spcPts val="1400"/>
+              </a:spcAft>
             </a:pPr>
             <a:r>
-              <a:rPr sz="1100">
-                <a:solidFill>
-                  <a:srgbClr val="55596A"/>
-                </a:solidFill>
-                <a:latin typeface="Menlo"/>
-              </a:rPr>
-              <a:t>— WbsScaff README / CLAUDE.md</a:t>
+              <a:rPr sz="2000">
+                <a:solidFill>
+                  <a:srgbClr val="1C1F26"/>
+                </a:solidFill>
+                <a:latin typeface="Arial"/>
+              </a:rPr>
+              <a:t>—  CSV／XLSX／JSON 匯出入都做了，方便跟現有的 Excel 流程接軌</a:t>
             </a:r>
           </a:p>
         </p:txBody>
@@ -7352,9 +9400,9 @@
                 <a:solidFill>
                   <a:srgbClr val="1F6F6B"/>
                 </a:solidFill>
-                <a:latin typeface="Menlo"/>
-              </a:rPr>
-              <a:t>PHASE 2   ·   2026-06-19 → 07-03</a:t>
+                <a:latin typeface="Courier New"/>
+              </a:rPr>
+              <a:t>畫面長這樣</a:t>
             </a:r>
           </a:p>
         </p:txBody>
@@ -7382,118 +9430,117 @@
           <a:lstStyle/>
           <a:p>
             <a:r>
-              <a:rPr sz="3600" b="1">
+              <a:rPr sz="3000" b="1">
                 <a:solidFill>
                   <a:srgbClr val="1C1F26"/>
                 </a:solidFill>
                 <a:latin typeface="Georgia"/>
               </a:rPr>
-              <a:t>Spring-WbsScaff：搬上 Web，變成多人系統</a:t>
-            </a:r>
-          </a:p>
-        </p:txBody>
-      </p:sp>
-      <p:sp>
-        <p:nvSpPr>
-          <p:cNvPr id="4" name="TextBox 3"/>
-          <p:cNvSpPr txBox="1"/>
-          <p:nvPr/>
-        </p:nvSpPr>
-        <p:spPr>
-          <a:xfrm>
-            <a:off x="685800" y="1691640"/>
-            <a:ext cx="10058400" cy="365760"/>
-          </a:xfrm>
-          <a:prstGeom prst="rect">
-            <a:avLst/>
-          </a:prstGeom>
-          <a:noFill/>
-        </p:spPr>
-        <p:txBody>
-          <a:bodyPr wrap="none">
-            <a:spAutoFit/>
-          </a:bodyPr>
-          <a:lstStyle/>
-          <a:p>
-            <a:r>
-              <a:rPr sz="1400">
+              <a:t>WbsScaff：離線 WBS 樹狀編輯器</a:t>
+            </a:r>
+          </a:p>
+        </p:txBody>
+      </p:sp>
+      <p:sp>
+        <p:nvSpPr>
+          <p:cNvPr id="4" name="Rectangle 3"/>
+          <p:cNvSpPr/>
+          <p:nvPr/>
+        </p:nvSpPr>
+        <p:spPr>
+          <a:xfrm>
+            <a:off x="2456535" y="1911096"/>
+            <a:ext cx="7278624" cy="4590288"/>
+          </a:xfrm>
+          <a:prstGeom prst="rect">
+            <a:avLst/>
+          </a:prstGeom>
+          <a:solidFill>
+            <a:srgbClr val="FFFFFF"/>
+          </a:solidFill>
+          <a:ln w="12700">
+            <a:solidFill>
+              <a:srgbClr val="D9D7CB"/>
+            </a:solidFill>
+          </a:ln>
+          <a:effectLst/>
+        </p:spPr>
+        <p:style>
+          <a:lnRef idx="1">
+            <a:schemeClr val="accent1"/>
+          </a:lnRef>
+          <a:fillRef idx="3">
+            <a:schemeClr val="accent1"/>
+          </a:fillRef>
+          <a:effectRef idx="2">
+            <a:schemeClr val="accent1"/>
+          </a:effectRef>
+          <a:fontRef idx="minor">
+            <a:schemeClr val="lt1"/>
+          </a:fontRef>
+        </p:style>
+        <p:txBody>
+          <a:bodyPr rtlCol="0" anchor="ctr"/>
+          <a:lstStyle/>
+          <a:p>
+            <a:pPr algn="ctr"/>
+          </a:p>
+        </p:txBody>
+      </p:sp>
+      <p:pic>
+        <p:nvPicPr>
+          <p:cNvPr id="5" name="Picture 4" descr="01-wbsscaff-html.png"/>
+          <p:cNvPicPr>
+            <a:picLocks noChangeAspect="1"/>
+          </p:cNvPicPr>
+          <p:nvPr/>
+        </p:nvPicPr>
+        <p:blipFill>
+          <a:blip r:embed="rId2"/>
+          <a:stretch>
+            <a:fillRect/>
+          </a:stretch>
+        </p:blipFill>
+        <p:spPr>
+          <a:xfrm>
+            <a:off x="2511399" y="1965960"/>
+            <a:ext cx="7168896" cy="4480560"/>
+          </a:xfrm>
+          <a:prstGeom prst="rect">
+            <a:avLst/>
+          </a:prstGeom>
+        </p:spPr>
+      </p:pic>
+      <p:sp>
+        <p:nvSpPr>
+          <p:cNvPr id="6" name="TextBox 5"/>
+          <p:cNvSpPr txBox="1"/>
+          <p:nvPr/>
+        </p:nvSpPr>
+        <p:spPr>
+          <a:xfrm>
+            <a:off x="685800" y="6675120"/>
+            <a:ext cx="10789920" cy="548640"/>
+          </a:xfrm>
+          <a:prstGeom prst="rect">
+            <a:avLst/>
+          </a:prstGeom>
+          <a:noFill/>
+        </p:spPr>
+        <p:txBody>
+          <a:bodyPr wrap="square">
+            <a:normAutofit/>
+          </a:bodyPr>
+          <a:lstStyle/>
+          <a:p>
+            <a:r>
+              <a:rPr sz="1400" i="1">
                 <a:solidFill>
                   <a:srgbClr val="55596A"/>
                 </a:solidFill>
-                <a:latin typeface="Menlo"/>
-              </a:rPr>
-              <a:t>97 commits</a:t>
-            </a:r>
-          </a:p>
-        </p:txBody>
-      </p:sp>
-      <p:sp>
-        <p:nvSpPr>
-          <p:cNvPr id="5" name="TextBox 4"/>
-          <p:cNvSpPr txBox="1"/>
-          <p:nvPr/>
-        </p:nvSpPr>
-        <p:spPr>
-          <a:xfrm>
-            <a:off x="685800" y="2148840"/>
-            <a:ext cx="10607040" cy="4206240"/>
-          </a:xfrm>
-          <a:prstGeom prst="rect">
-            <a:avLst/>
-          </a:prstGeom>
-          <a:noFill/>
-        </p:spPr>
-        <p:txBody>
-          <a:bodyPr wrap="square">
-            <a:spAutoFit/>
-          </a:bodyPr>
-          <a:lstStyle/>
-          <a:p>
-            <a:pPr>
-              <a:spcAft>
-                <a:spcPts val="1400"/>
-              </a:spcAft>
-            </a:pPr>
-            <a:r>
-              <a:rPr sz="2000">
-                <a:solidFill>
-                  <a:srgbClr val="1C1F26"/>
-                </a:solidFill>
-                <a:latin typeface="Avenir Next"/>
-              </a:rPr>
-              <a:t>—  從「單機工具」轉成「企業後台管理、部門層級權限、多人即時協作」的 Web 平台</a:t>
-            </a:r>
-          </a:p>
-          <a:p>
-            <a:pPr>
-              <a:spcAft>
-                <a:spcPts val="1400"/>
-              </a:spcAft>
-            </a:pPr>
-            <a:r>
-              <a:rPr sz="2000">
-                <a:solidFill>
-                  <a:srgbClr val="1C1F26"/>
-                </a:solidFill>
-                <a:latin typeface="Avenir Next"/>
-              </a:rPr>
-              <a:t>—  技術棧：Spring Boot 3.4 + Spring Security／Session JDBC + STOMP WebSocket</a:t>
-            </a:r>
-          </a:p>
-          <a:p>
-            <a:pPr>
-              <a:spcAft>
-                <a:spcPts val="1400"/>
-              </a:spcAft>
-            </a:pPr>
-            <a:r>
-              <a:rPr sz="2000">
-                <a:solidFill>
-                  <a:srgbClr val="1C1F26"/>
-                </a:solidFill>
-                <a:latin typeface="Avenir Next"/>
-              </a:rPr>
-              <a:t>—  整條路線上第一次真正的架構升級：單檔 JS 變成有資料庫、有登入、多人協作的系統</a:t>
+                <a:latin typeface="Arial"/>
+              </a:rPr>
+              <a:t>打開瀏覽器就是一支完整的工具，不用裝任何東西、不用連網路</a:t>
             </a:r>
           </a:p>
         </p:txBody>
@@ -7551,7 +9598,7 @@
                 <a:solidFill>
                   <a:srgbClr val="1F6F6B"/>
                 </a:solidFill>
-                <a:latin typeface="Menlo"/>
+                <a:latin typeface="Courier New"/>
               </a:rPr>
               <a:t>AI TECHNIQUE</a:t>
             </a:r>
@@ -7587,7 +9634,7 @@
                 </a:solidFill>
                 <a:latin typeface="Georgia"/>
               </a:rPr>
-              <a:t>整條分支做完之後，才看得出縫隙在哪</a:t>
+              <a:t>先做出可以按的東西，再寫規格</a:t>
             </a:r>
           </a:p>
         </p:txBody>
@@ -7610,7 +9657,7 @@
         </p:spPr>
         <p:txBody>
           <a:bodyPr wrap="square">
-            <a:spAutoFit/>
+            <a:normAutofit/>
           </a:bodyPr>
           <a:lstStyle/>
           <a:p>
@@ -7620,13 +9667,13 @@
               </a:spcAft>
             </a:pPr>
             <a:r>
-              <a:rPr sz="1800">
-                <a:solidFill>
-                  <a:srgbClr val="1C1F26"/>
-                </a:solidFill>
-                <a:latin typeface="Avenir Next"/>
-              </a:rPr>
-              <a:t>—  前四份計畫在同一天 50 分鐘內一次執行完，沒有 subagent 分工的 ledger 紀錄</a:t>
+              <a:rPr sz="1900">
+                <a:solidFill>
+                  <a:srgbClr val="1C1F26"/>
+                </a:solidFill>
+                <a:latin typeface="Arial"/>
+              </a:rPr>
+              <a:t>—  brainstorming 先做出一個真的能點的 HTML 畫面草稿，動工前就先讓我用眼睛選、用手點，不是憑空想像</a:t>
             </a:r>
           </a:p>
           <a:p>
@@ -7636,13 +9683,13 @@
               </a:spcAft>
             </a:pPr>
             <a:r>
-              <a:rPr sz="1800">
-                <a:solidFill>
-                  <a:srgbClr val="1C1F26"/>
-                </a:solidFill>
-                <a:latin typeface="Avenir Next"/>
-              </a:rPr>
-              <a:t>—  後續功能改用 subagent-driven-development：9 個任務，各自 review clean</a:t>
+              <a:rPr sz="1900">
+                <a:solidFill>
+                  <a:srgbClr val="1C1F26"/>
+                </a:solidFill>
+                <a:latin typeface="Arial"/>
+              </a:rPr>
+              <a:t>—  原本打算做一套建置流程（要編譯才能跑），真的做出來以後發現根本不需要，改成單檔手改就好 —— 計畫輸給現實</a:t>
             </a:r>
           </a:p>
           <a:p>
@@ -7652,29 +9699,106 @@
               </a:spcAft>
             </a:pPr>
             <a:r>
-              <a:rPr sz="1800">
-                <a:solidFill>
-                  <a:srgbClr val="1C1F26"/>
-                </a:solidFill>
-                <a:latin typeface="Avenir Next"/>
-              </a:rPr>
-              <a:t>—  最終全分支審查抓到跨科拖曳掛父節點的 IDOR —— 單一任務審查看不出來</a:t>
+              <a:rPr sz="1900">
+                <a:solidFill>
+                  <a:srgbClr val="1C1F26"/>
+                </a:solidFill>
+                <a:latin typeface="Arial"/>
+              </a:rPr>
+              <a:t>—  曾經做過一個直接串 AI 生成的功能，後來整支拿掉，因為不是每個能做的功能都該留</a:t>
+            </a:r>
+          </a:p>
+        </p:txBody>
+      </p:sp>
+      <p:sp>
+        <p:nvSpPr>
+          <p:cNvPr id="5" name="Rectangle 4"/>
+          <p:cNvSpPr/>
+          <p:nvPr/>
+        </p:nvSpPr>
+        <p:spPr>
+          <a:xfrm>
+            <a:off x="594360" y="4846320"/>
+            <a:ext cx="30000" cy="1280160"/>
+          </a:xfrm>
+          <a:prstGeom prst="rect">
+            <a:avLst/>
+          </a:prstGeom>
+          <a:solidFill>
+            <a:srgbClr val="B3791F"/>
+          </a:solidFill>
+          <a:ln>
+            <a:noFill/>
+          </a:ln>
+        </p:spPr>
+        <p:style>
+          <a:lnRef idx="1">
+            <a:schemeClr val="accent1"/>
+          </a:lnRef>
+          <a:fillRef idx="3">
+            <a:schemeClr val="accent1"/>
+          </a:fillRef>
+          <a:effectRef idx="2">
+            <a:schemeClr val="accent1"/>
+          </a:effectRef>
+          <a:fontRef idx="minor">
+            <a:schemeClr val="lt1"/>
+          </a:fontRef>
+        </p:style>
+        <p:txBody>
+          <a:bodyPr rtlCol="0" anchor="ctr"/>
+          <a:lstStyle/>
+          <a:p>
+            <a:pPr algn="ctr"/>
+          </a:p>
+        </p:txBody>
+      </p:sp>
+      <p:sp>
+        <p:nvSpPr>
+          <p:cNvPr id="6" name="TextBox 5"/>
+          <p:cNvSpPr txBox="1"/>
+          <p:nvPr/>
+        </p:nvSpPr>
+        <p:spPr>
+          <a:xfrm>
+            <a:off x="822960" y="4846320"/>
+            <a:ext cx="10241280" cy="1371600"/>
+          </a:xfrm>
+          <a:prstGeom prst="rect">
+            <a:avLst/>
+          </a:prstGeom>
+          <a:noFill/>
+        </p:spPr>
+        <p:txBody>
+          <a:bodyPr wrap="square">
+            <a:normAutofit/>
+          </a:bodyPr>
+          <a:lstStyle/>
+          <a:p>
+            <a:r>
+              <a:rPr i="1" sz="1700">
+                <a:solidFill>
+                  <a:srgbClr val="1C1F26"/>
+                </a:solidFill>
+                <a:latin typeface="Georgia"/>
+              </a:rPr>
+              <a:t>“氣隙生產環境這個定位，從第一天就決定了後面每一次「要不要加依賴」的取捨。”</a:t>
             </a:r>
           </a:p>
           <a:p>
             <a:pPr>
-              <a:spcAft>
-                <a:spcPts val="1400"/>
-              </a:spcAft>
+              <a:spcBef>
+                <a:spcPts val="600"/>
+              </a:spcBef>
             </a:pPr>
             <a:r>
-              <a:rPr sz="1800">
-                <a:solidFill>
-                  <a:srgbClr val="1C1F26"/>
-                </a:solidFill>
-                <a:latin typeface="Avenir Next"/>
-              </a:rPr>
-              <a:t>—  技術選型繞一圈：加 MSSQL 雙資料庫 → 全面改 MSSQL → 最後在 MissionBoard 換回 PostgreSQL</a:t>
+              <a:rPr sz="1100">
+                <a:solidFill>
+                  <a:srgbClr val="55596A"/>
+                </a:solidFill>
+                <a:latin typeface="Courier New"/>
+              </a:rPr>
+              <a:t>— WbsScaff README / CLAUDE.md</a:t>
             </a:r>
           </a:p>
         </p:txBody>
@@ -7732,9 +9856,9 @@
                 <a:solidFill>
                   <a:srgbClr val="1F6F6B"/>
                 </a:solidFill>
-                <a:latin typeface="Menlo"/>
-              </a:rPr>
-              <a:t>PHASE 3   ·   2026-07-03 → 07-08</a:t>
+                <a:latin typeface="Courier New"/>
+              </a:rPr>
+              <a:t>PHASE 2   ·   2026-06-19 → 07-03</a:t>
             </a:r>
           </a:p>
         </p:txBody>
@@ -7768,7 +9892,7 @@
                 </a:solidFill>
                 <a:latin typeface="Georgia"/>
               </a:rPr>
-              <a:t>Spring-TaskFlow：拆出獨立的看板系統</a:t>
+              <a:t>Spring-WbsScaff：搬上 Web，變成多人系統</a:t>
             </a:r>
           </a:p>
         </p:txBody>
@@ -7800,9 +9924,9 @@
                 <a:solidFill>
                   <a:srgbClr val="55596A"/>
                 </a:solidFill>
-                <a:latin typeface="Menlo"/>
-              </a:rPr>
-              <a:t>32 commits  ·  主體一天內完成</a:t>
+                <a:latin typeface="Courier New"/>
+              </a:rPr>
+              <a:t>97 commits</a:t>
             </a:r>
           </a:p>
         </p:txBody>
@@ -7825,7 +9949,7 @@
         </p:spPr>
         <p:txBody>
           <a:bodyPr wrap="square">
-            <a:spAutoFit/>
+            <a:normAutofit/>
           </a:bodyPr>
           <a:lstStyle/>
           <a:p>
@@ -7839,9 +9963,9 @@
                 <a:solidFill>
                   <a:srgbClr val="1C1F26"/>
                 </a:solidFill>
-                <a:latin typeface="Avenir Next"/>
-              </a:rPr>
-              <a:t>—  策略明確：「方案 A」把 WbsScaff 的架構與畫面風格原封不動搬過來</a:t>
+                <a:latin typeface="Arial"/>
+              </a:rPr>
+              <a:t>—  從「我自己用的小工具」變成「大家一起用、有部門權限、能即時協作」的後台系統</a:t>
             </a:r>
           </a:p>
           <a:p>
@@ -7855,9 +9979,9 @@
                 <a:solidFill>
                   <a:srgbClr val="1C1F26"/>
                 </a:solidFill>
-                <a:latin typeface="Avenir Next"/>
-              </a:rPr>
-              <a:t>—  只把核心功能從「樹狀編輯」換成「看板拖曳」</a:t>
+                <a:latin typeface="Arial"/>
+              </a:rPr>
+              <a:t>—  技術棧：Spring Boot 3.4 + Spring Security + STOMP WebSocket 即時同步</a:t>
             </a:r>
           </a:p>
           <a:p>
@@ -7871,25 +9995,9 @@
                 <a:solidFill>
                   <a:srgbClr val="1C1F26"/>
                 </a:solidFill>
-                <a:latin typeface="Avenir Next"/>
-              </a:rPr>
-              <a:t>—  基礎設施（登入、部門權限、頁殼）幾乎全部繼承，省下重新驗證的成本</a:t>
-            </a:r>
-          </a:p>
-          <a:p>
-            <a:pPr>
-              <a:spcAft>
-                <a:spcPts val="1400"/>
-              </a:spcAft>
-            </a:pPr>
-            <a:r>
-              <a:rPr sz="2000">
-                <a:solidFill>
-                  <a:srgbClr val="1C1F26"/>
-                </a:solidFill>
-                <a:latin typeface="Avenir Next"/>
-              </a:rPr>
-              <a:t>—  此後系統世界同時存在 WBS 樹與看板兩套產品 —— 為 Phase 4 合併埋下動機</a:t>
+                <a:latin typeface="Arial"/>
+              </a:rPr>
+              <a:t>—  這是整條路上第一次真正的架構升級：單檔 JS 變成有資料庫、有登入的正式系統</a:t>
             </a:r>
           </a:p>
         </p:txBody>
@@ -7947,9 +10055,9 @@
                 <a:solidFill>
                   <a:srgbClr val="1F6F6B"/>
                 </a:solidFill>
-                <a:latin typeface="Menlo"/>
-              </a:rPr>
-              <a:t>AI TECHNIQUE</a:t>
+                <a:latin typeface="Courier New"/>
+              </a:rPr>
+              <a:t>畫面長這樣</a:t>
             </a:r>
           </a:p>
         </p:txBody>
@@ -7977,103 +10085,30 @@
           <a:lstStyle/>
           <a:p>
             <a:r>
-              <a:rPr sz="3200" b="1">
+              <a:rPr sz="3000" b="1">
                 <a:solidFill>
                   <a:srgbClr val="1C1F26"/>
                 </a:solidFill>
                 <a:latin typeface="Georgia"/>
               </a:rPr>
-              <a:t>搬遷專案最容易踩的坑：繼承別人的死程式碼</a:t>
-            </a:r>
-          </a:p>
-        </p:txBody>
-      </p:sp>
-      <p:sp>
-        <p:nvSpPr>
-          <p:cNvPr id="4" name="TextBox 3"/>
-          <p:cNvSpPr txBox="1"/>
-          <p:nvPr/>
-        </p:nvSpPr>
-        <p:spPr>
-          <a:xfrm>
-            <a:off x="685800" y="1737360"/>
-            <a:ext cx="10607040" cy="1463040"/>
-          </a:xfrm>
-          <a:prstGeom prst="rect">
-            <a:avLst/>
-          </a:prstGeom>
-          <a:noFill/>
-        </p:spPr>
-        <p:txBody>
-          <a:bodyPr wrap="square">
-            <a:spAutoFit/>
-          </a:bodyPr>
-          <a:lstStyle/>
-          <a:p>
-            <a:pPr>
-              <a:spcAft>
-                <a:spcPts val="1400"/>
-              </a:spcAft>
-            </a:pPr>
-            <a:r>
-              <a:rPr sz="1800">
-                <a:solidFill>
-                  <a:srgbClr val="1C1F26"/>
-                </a:solidFill>
-                <a:latin typeface="Avenir Next"/>
-              </a:rPr>
-              <a:t>—  11 個任務的 SDD，好幾個進了 fix round</a:t>
-            </a:r>
-          </a:p>
-          <a:p>
-            <a:pPr>
-              <a:spcAft>
-                <a:spcPts val="1400"/>
-              </a:spcAft>
-            </a:pPr>
-            <a:r>
-              <a:rPr sz="1800">
-                <a:solidFill>
-                  <a:srgbClr val="1C1F26"/>
-                </a:solidFill>
-                <a:latin typeface="Avenir Next"/>
-              </a:rPr>
-              <a:t>—  額度用盡時有明確 fallback：「Fix round 由 controller inline 完成」</a:t>
-            </a:r>
-          </a:p>
-          <a:p>
-            <a:pPr>
-              <a:spcAft>
-                <a:spcPts val="1400"/>
-              </a:spcAft>
-            </a:pPr>
-            <a:r>
-              <a:rPr sz="1800">
-                <a:solidFill>
-                  <a:srgbClr val="1C1F26"/>
-                </a:solidFill>
-                <a:latin typeface="Avenir Next"/>
-              </a:rPr>
-              <a:t>—  最終審查換了一顆更強的模型專門做</a:t>
-            </a:r>
-          </a:p>
-        </p:txBody>
-      </p:sp>
-      <p:sp>
-        <p:nvSpPr>
-          <p:cNvPr id="5" name="Rounded Rectangle 4"/>
+              <a:t>Spring-WbsScaff：多人版 WBS 樹狀畫面</a:t>
+            </a:r>
+          </a:p>
+        </p:txBody>
+      </p:sp>
+      <p:sp>
+        <p:nvSpPr>
+          <p:cNvPr id="4" name="Rectangle 3"/>
           <p:cNvSpPr/>
           <p:nvPr/>
         </p:nvSpPr>
         <p:spPr>
           <a:xfrm>
-            <a:off x="685800" y="3291840"/>
-            <a:ext cx="5120640" cy="2834640"/>
-          </a:xfrm>
-          <a:prstGeom prst="roundRect">
-            <a:avLst>
-              <a:gd name="adj" fmla="val 4000"/>
-            </a:avLst>
+            <a:off x="4747000" y="1911096"/>
+            <a:ext cx="2697695" cy="4590288"/>
+          </a:xfrm>
+          <a:prstGeom prst="rect">
+            <a:avLst/>
           </a:prstGeom>
           <a:solidFill>
             <a:srgbClr val="FFFFFF"/>
@@ -8100,139 +10135,67 @@
           </a:fontRef>
         </p:style>
         <p:txBody>
-          <a:bodyPr rtlCol="0" anchor="ctr" wrap="square" lIns="228600" rIns="228600" tIns="182880" bIns="182880"/>
+          <a:bodyPr rtlCol="0" anchor="ctr"/>
           <a:lstStyle/>
           <a:p>
             <a:pPr algn="ctr"/>
-            <a:r>
-              <a:rPr sz="1100" b="1">
-                <a:solidFill>
-                  <a:srgbClr val="AB4030"/>
-                </a:solidFill>
-                <a:latin typeface="Menlo"/>
-              </a:rPr>
-              <a:t>CASE 1 · Critical</a:t>
-            </a:r>
-          </a:p>
-          <a:p>
-            <a:pPr>
-              <a:spcBef>
-                <a:spcPts val="600"/>
-              </a:spcBef>
-            </a:pPr>
-            <a:r>
-              <a:rPr sz="1400">
-                <a:solidFill>
-                  <a:srgbClr val="1C1F26"/>
-                </a:solidFill>
-                <a:latin typeface="Avenir Next"/>
-              </a:rPr>
-              <a:t>從 WbsScaff 繼承、UI 完全沒引用的 /admin/users API：外部直接打可繞過部門隔離改任何帳號</a:t>
-            </a:r>
-          </a:p>
-          <a:p>
-            <a:pPr>
-              <a:spcBef>
-                <a:spcPts val="800"/>
-              </a:spcBef>
-            </a:pPr>
-            <a:r>
-              <a:rPr sz="1200" i="1">
+          </a:p>
+        </p:txBody>
+      </p:sp>
+      <p:pic>
+        <p:nvPicPr>
+          <p:cNvPr id="5" name="Picture 4" descr="02-spring-wbsscaff-tree.png"/>
+          <p:cNvPicPr>
+            <a:picLocks noChangeAspect="1"/>
+          </p:cNvPicPr>
+          <p:nvPr/>
+        </p:nvPicPr>
+        <p:blipFill>
+          <a:blip r:embed="rId2"/>
+          <a:stretch>
+            <a:fillRect/>
+          </a:stretch>
+        </p:blipFill>
+        <p:spPr>
+          <a:xfrm>
+            <a:off x="4801864" y="1965960"/>
+            <a:ext cx="2587967" cy="4480560"/>
+          </a:xfrm>
+          <a:prstGeom prst="rect">
+            <a:avLst/>
+          </a:prstGeom>
+        </p:spPr>
+      </p:pic>
+      <p:sp>
+        <p:nvSpPr>
+          <p:cNvPr id="6" name="TextBox 5"/>
+          <p:cNvSpPr txBox="1"/>
+          <p:nvPr/>
+        </p:nvSpPr>
+        <p:spPr>
+          <a:xfrm>
+            <a:off x="685800" y="6675120"/>
+            <a:ext cx="10789920" cy="548640"/>
+          </a:xfrm>
+          <a:prstGeom prst="rect">
+            <a:avLst/>
+          </a:prstGeom>
+          <a:noFill/>
+        </p:spPr>
+        <p:txBody>
+          <a:bodyPr wrap="square">
+            <a:normAutofit/>
+          </a:bodyPr>
+          <a:lstStyle/>
+          <a:p>
+            <a:r>
+              <a:rPr sz="1400" i="1">
                 <a:solidFill>
                   <a:srgbClr val="55596A"/>
                 </a:solidFill>
-                <a:latin typeface="Avenir Next"/>
-              </a:rPr>
-              <a:t>最終審查用最強模型才抓到 —— 從沒被任何一個任務碰過</a:t>
-            </a:r>
-          </a:p>
-        </p:txBody>
-      </p:sp>
-      <p:sp>
-        <p:nvSpPr>
-          <p:cNvPr id="6" name="Rounded Rectangle 5"/>
-          <p:cNvSpPr/>
-          <p:nvPr/>
-        </p:nvSpPr>
-        <p:spPr>
-          <a:xfrm>
-            <a:off x="6035040" y="3291840"/>
-            <a:ext cx="5394960" cy="2834640"/>
-          </a:xfrm>
-          <a:prstGeom prst="roundRect">
-            <a:avLst>
-              <a:gd name="adj" fmla="val 4000"/>
-            </a:avLst>
-          </a:prstGeom>
-          <a:solidFill>
-            <a:srgbClr val="FFFFFF"/>
-          </a:solidFill>
-          <a:ln w="12700">
-            <a:solidFill>
-              <a:srgbClr val="D9D7CB"/>
-            </a:solidFill>
-          </a:ln>
-          <a:effectLst/>
-        </p:spPr>
-        <p:style>
-          <a:lnRef idx="1">
-            <a:schemeClr val="accent1"/>
-          </a:lnRef>
-          <a:fillRef idx="3">
-            <a:schemeClr val="accent1"/>
-          </a:fillRef>
-          <a:effectRef idx="2">
-            <a:schemeClr val="accent1"/>
-          </a:effectRef>
-          <a:fontRef idx="minor">
-            <a:schemeClr val="lt1"/>
-          </a:fontRef>
-        </p:style>
-        <p:txBody>
-          <a:bodyPr rtlCol="0" anchor="ctr" wrap="square" lIns="228600" rIns="228600" tIns="182880" bIns="182880"/>
-          <a:lstStyle/>
-          <a:p>
-            <a:pPr algn="ctr"/>
-            <a:r>
-              <a:rPr sz="1100" b="1">
-                <a:solidFill>
-                  <a:srgbClr val="B3791F"/>
-                </a:solidFill>
-                <a:latin typeface="Menlo"/>
-              </a:rPr>
-              <a:t>CASE 2 · 修復引發迴歸</a:t>
-            </a:r>
-          </a:p>
-          <a:p>
-            <a:pPr>
-              <a:spcBef>
-                <a:spcPts val="600"/>
-              </a:spcBef>
-            </a:pPr>
-            <a:r>
-              <a:rPr sz="1400">
-                <a:solidFill>
-                  <a:srgbClr val="1C1F26"/>
-                </a:solidFill>
-                <a:latin typeface="Avenir Next"/>
-              </a:rPr>
-              <a:t>修完 Critical 之後，re-review 抓到修復本身弄壞了「部長自建看板」功能</a:t>
-            </a:r>
-          </a:p>
-          <a:p>
-            <a:pPr>
-              <a:spcBef>
-                <a:spcPts val="800"/>
-              </a:spcBef>
-            </a:pPr>
-            <a:r>
-              <a:rPr sz="1200" i="1">
-                <a:solidFill>
-                  <a:srgbClr val="55596A"/>
-                </a:solidFill>
-                <a:latin typeface="Avenir Next"/>
-              </a:rPr>
-              <a:t>Fix Round 2 補上對應測試，60/60 全綠才真正收斂</a:t>
+                <a:latin typeface="Arial"/>
+              </a:rPr>
+              <a:t>節點內容改得比較貼近真實場景：主機申請、防火牆開通、資安檢核……都是實際會遇到的項目</a:t>
             </a:r>
           </a:p>
         </p:txBody>
@@ -8290,9 +10253,9 @@
                 <a:solidFill>
                   <a:srgbClr val="1F6F6B"/>
                 </a:solidFill>
-                <a:latin typeface="Menlo"/>
-              </a:rPr>
-              <a:t>PHASE 4   ·   2026-07-17 → 08-08</a:t>
+                <a:latin typeface="Courier New"/>
+              </a:rPr>
+              <a:t>AI TECHNIQUE</a:t>
             </a:r>
           </a:p>
         </p:txBody>
@@ -8326,7 +10289,7 @@
                 </a:solidFill>
                 <a:latin typeface="Georgia"/>
               </a:rPr>
-              <a:t>WbsFlow → MissionBoard：兩套系統合併成一套</a:t>
+              <a:t>整條分支做完之後，才看得出縫隙在哪</a:t>
             </a:r>
           </a:p>
         </p:txBody>
@@ -8340,40 +10303,6 @@
         <p:spPr>
           <a:xfrm>
             <a:off x="685800" y="1691640"/>
-            <a:ext cx="10058400" cy="365760"/>
-          </a:xfrm>
-          <a:prstGeom prst="rect">
-            <a:avLst/>
-          </a:prstGeom>
-          <a:noFill/>
-        </p:spPr>
-        <p:txBody>
-          <a:bodyPr wrap="none">
-            <a:spAutoFit/>
-          </a:bodyPr>
-          <a:lstStyle/>
-          <a:p>
-            <a:r>
-              <a:rPr sz="1400">
-                <a:solidFill>
-                  <a:srgbClr val="55596A"/>
-                </a:solidFill>
-                <a:latin typeface="Menlo"/>
-              </a:rPr>
-              <a:t>73 commits（含本次重構）  ·  全新 repo，不基於任一舊專案</a:t>
-            </a:r>
-          </a:p>
-        </p:txBody>
-      </p:sp>
-      <p:sp>
-        <p:nvSpPr>
-          <p:cNvPr id="5" name="TextBox 4"/>
-          <p:cNvSpPr txBox="1"/>
-          <p:nvPr/>
-        </p:nvSpPr>
-        <p:spPr>
-          <a:xfrm>
-            <a:off x="685800" y="2148840"/>
             <a:ext cx="10607040" cy="4206240"/>
           </a:xfrm>
           <a:prstGeom prst="rect">
@@ -8383,7 +10312,7 @@
         </p:spPr>
         <p:txBody>
           <a:bodyPr wrap="square">
-            <a:spAutoFit/>
+            <a:normAutofit/>
           </a:bodyPr>
           <a:lstStyle/>
           <a:p>
@@ -8393,13 +10322,13 @@
               </a:spcAft>
             </a:pPr>
             <a:r>
-              <a:rPr sz="2000">
-                <a:solidFill>
-                  <a:srgbClr val="1C1F26"/>
-                </a:solidFill>
-                <a:latin typeface="Avenir Next"/>
-              </a:rPr>
-              <a:t>—  核心決策：「WBS 節點即任務」—— 不做規劃層＋執行層雙模型，L3 節點本身就是可指派的任務</a:t>
+              <a:rPr sz="1700">
+                <a:solidFill>
+                  <a:srgbClr val="1C1F26"/>
+                </a:solidFill>
+                <a:latin typeface="Arial"/>
+              </a:rPr>
+              <a:t>—  前四份計畫在同一天 50 分鐘內一口氣做完，那時候還沒有拆任務給不同 AI 分工這件事</a:t>
             </a:r>
           </a:p>
           <a:p>
@@ -8409,13 +10338,13 @@
               </a:spcAft>
             </a:pPr>
             <a:r>
-              <a:rPr sz="2000">
-                <a:solidFill>
-                  <a:srgbClr val="1C1F26"/>
-                </a:solidFill>
-                <a:latin typeface="Avenir Next"/>
-              </a:rPr>
-              <a:t>—  拆成四個子專案依序執行：A 資料層與權限核心、B 認證、C 專案管理、D 節點與選單管理</a:t>
+              <a:rPr sz="1700">
+                <a:solidFill>
+                  <a:srgbClr val="1C1F26"/>
+                </a:solidFill>
+                <a:latin typeface="Arial"/>
+              </a:rPr>
+              <a:t>—  後續補功能改用「一個任務一個全新 AI」的方式：9 個任務，每個都各自審查過關</a:t>
             </a:r>
           </a:p>
           <a:p>
@@ -8425,13 +10354,29 @@
               </a:spcAft>
             </a:pPr>
             <a:r>
-              <a:rPr sz="2000">
-                <a:solidFill>
-                  <a:srgbClr val="1C1F26"/>
-                </a:solidFill>
-                <a:latin typeface="Avenir Next"/>
-              </a:rPr>
-              <a:t>—  整合兩邊已驗證過的模式：TaskFlow 的看板／指派／成員機制，WbsScaff 的樹編輯／權限／生命週期</a:t>
+              <a:rPr sz="1700">
+                <a:solidFill>
+                  <a:srgbClr val="1C1F26"/>
+                </a:solidFill>
+                <a:latin typeface="Arial"/>
+              </a:rPr>
+              <a:t>—  但整條分支做完、拿去做最後總體檢查時，才抓到一個漏洞：跨部門拖曳節點時，只檢查了節點本身，沒檢查新掛的父節點也屬於自己的專案 —— 這種問題單獨看每個任務都看不出來</a:t>
+            </a:r>
+          </a:p>
+          <a:p>
+            <a:pPr>
+              <a:spcAft>
+                <a:spcPts val="1400"/>
+              </a:spcAft>
+            </a:pPr>
+            <a:r>
+              <a:rPr sz="1700">
+                <a:solidFill>
+                  <a:srgbClr val="1C1F26"/>
+                </a:solidFill>
+                <a:latin typeface="Arial"/>
+              </a:rPr>
+              <a:t>—  中途還繞了一圈：加了 MSSQL 支援 → 乾脆全部換 MSSQL → 最後在最終版本又換回 PostgreSQL</a:t>
             </a:r>
           </a:p>
         </p:txBody>

--- a/docs/從HTML到SaaS_AI開發技巧回顧.pptx
+++ b/docs/從HTML到SaaS_AI開發技巧回顧.pptx
@@ -33,6 +33,9 @@
     <p:sldId id="278" r:id="rId30"/>
     <p:sldId id="279" r:id="rId31"/>
     <p:sldId id="280" r:id="rId32"/>
+    <p:sldId id="281" r:id="rId33"/>
+    <p:sldId id="282" r:id="rId34"/>
+    <p:sldId id="283" r:id="rId35"/>
   </p:sldIdLst>
   <p:sldSz cx="12179300" cy="6858000"/>
   <p:notesSz cx="6858000" cy="9144000"/>
@@ -847,7 +850,7 @@
         <p:spPr>
           <a:xfrm>
             <a:off x="722312" y="2906713"/>
-            <a:ext cx="7772401" cy="1500194"/>
+            <a:ext cx="7772401" cy="1500195"/>
           </a:xfrm>
           <a:prstGeom prst="rect">
             <a:avLst/>
@@ -1290,7 +1293,7 @@
         <p:spPr>
           <a:xfrm>
             <a:off x="4645025" y="1535111"/>
-            <a:ext cx="4041775" cy="639770"/>
+            <a:ext cx="4041775" cy="639771"/>
           </a:xfrm>
           <a:prstGeom prst="rect">
             <a:avLst/>
@@ -1699,7 +1702,7 @@
         <p:spPr>
           <a:xfrm>
             <a:off x="1792288" y="5367337"/>
-            <a:ext cx="5486404" cy="804869"/>
+            <a:ext cx="5486404" cy="804870"/>
           </a:xfrm>
           <a:prstGeom prst="rect">
             <a:avLst/>
@@ -2745,7 +2748,7 @@
         <p:spPr>
           <a:xfrm>
             <a:off x="868680" y="1920236"/>
-            <a:ext cx="10424161" cy="2377449"/>
+            <a:ext cx="10424161" cy="2377450"/>
           </a:xfrm>
           <a:prstGeom prst="rect">
             <a:avLst/>
@@ -2789,7 +2792,7 @@
         <p:spPr>
           <a:xfrm>
             <a:off x="868680" y="3886198"/>
-            <a:ext cx="9966961" cy="1097286"/>
+            <a:ext cx="9966961" cy="1097287"/>
           </a:xfrm>
           <a:prstGeom prst="rect">
             <a:avLst/>
@@ -3042,7 +3045,7 @@
         <p:spPr>
           <a:xfrm>
             <a:off x="2728755" y="1911092"/>
-            <a:ext cx="6734183" cy="4246945"/>
+            <a:ext cx="6734183" cy="4246946"/>
           </a:xfrm>
           <a:prstGeom prst="rect">
             <a:avLst/>
@@ -3332,7 +3335,7 @@
         <p:spPr>
           <a:xfrm>
             <a:off x="731518" y="2148836"/>
-            <a:ext cx="10515604" cy="4206250"/>
+            <a:ext cx="10515604" cy="4206251"/>
           </a:xfrm>
           <a:prstGeom prst="rect">
             <a:avLst/>
@@ -3628,7 +3631,7 @@
         <p:spPr>
           <a:xfrm>
             <a:off x="4847894" y="1911092"/>
-            <a:ext cx="2495907" cy="4246945"/>
+            <a:ext cx="2495907" cy="4246946"/>
           </a:xfrm>
           <a:prstGeom prst="rect">
             <a:avLst/>
@@ -3679,7 +3682,7 @@
         <p:spPr>
           <a:xfrm>
             <a:off x="4898654" y="1965960"/>
-            <a:ext cx="2394394" cy="4145416"/>
+            <a:ext cx="2394395" cy="4145416"/>
           </a:xfrm>
           <a:prstGeom prst="rect">
             <a:avLst/>
@@ -3928,7 +3931,7 @@
         <p:spPr>
           <a:xfrm>
             <a:off x="731518" y="2148836"/>
-            <a:ext cx="10515604" cy="4206250"/>
+            <a:ext cx="10515604" cy="4206251"/>
           </a:xfrm>
           <a:prstGeom prst="rect">
             <a:avLst/>
@@ -4223,8 +4226,8 @@
         </p:nvSpPr>
         <p:spPr>
           <a:xfrm>
-            <a:off x="3031664" y="1911092"/>
-            <a:ext cx="6128365" cy="4246945"/>
+            <a:off x="3031663" y="1911092"/>
+            <a:ext cx="6128367" cy="4246946"/>
           </a:xfrm>
           <a:prstGeom prst="rect">
             <a:avLst/>
@@ -4458,7 +4461,7 @@
         </p:nvSpPr>
         <p:spPr>
           <a:xfrm>
-            <a:off x="731515" y="1691638"/>
+            <a:off x="731514" y="1691638"/>
             <a:ext cx="3660137" cy="345437"/>
           </a:xfrm>
           <a:prstGeom prst="rect">
@@ -4691,7 +4694,7 @@
         <p:spPr>
           <a:xfrm>
             <a:off x="2579321" y="4150000"/>
-            <a:ext cx="1212965" cy="2100007"/>
+            <a:ext cx="1212966" cy="2100008"/>
           </a:xfrm>
           <a:prstGeom prst="rect">
             <a:avLst/>
@@ -4720,7 +4723,7 @@
         <p:spPr>
           <a:xfrm>
             <a:off x="7112840" y="4150000"/>
-            <a:ext cx="3360007" cy="2100007"/>
+            <a:ext cx="3360008" cy="2100008"/>
           </a:xfrm>
           <a:prstGeom prst="rect">
             <a:avLst/>
@@ -4739,7 +4742,7 @@
         <p:spPr>
           <a:xfrm>
             <a:off x="5785799" y="5074999"/>
-            <a:ext cx="400007" cy="250007"/>
+            <a:ext cx="400008" cy="250008"/>
           </a:xfrm>
           <a:prstGeom prst="rightArrow">
             <a:avLst>
@@ -4781,7 +4784,7 @@
         <p:spPr>
           <a:xfrm>
             <a:off x="685793" y="6349998"/>
-            <a:ext cx="5000013" cy="228601"/>
+            <a:ext cx="5000014" cy="228601"/>
           </a:xfrm>
           <a:prstGeom prst="rect">
             <a:avLst/>
@@ -5017,7 +5020,7 @@
         <p:spPr>
           <a:xfrm>
             <a:off x="731518" y="1691636"/>
-            <a:ext cx="10515604" cy="4206250"/>
+            <a:ext cx="10515604" cy="4206251"/>
           </a:xfrm>
           <a:prstGeom prst="rect">
             <a:avLst/>
@@ -5211,7 +5214,7 @@
         <p:spPr>
           <a:xfrm>
             <a:off x="594359" y="4846320"/>
-            <a:ext cx="30007" cy="1280167"/>
+            <a:ext cx="30008" cy="1280168"/>
           </a:xfrm>
           <a:prstGeom prst="rect">
             <a:avLst/>
@@ -5257,7 +5260,7 @@
         <p:spPr>
           <a:xfrm>
             <a:off x="868677" y="4846320"/>
-            <a:ext cx="10149845" cy="1371605"/>
+            <a:ext cx="10149845" cy="1371606"/>
           </a:xfrm>
           <a:prstGeom prst="rect">
             <a:avLst/>
@@ -5422,7 +5425,7 @@
         <p:spPr>
           <a:xfrm>
             <a:off x="731518" y="1691637"/>
-            <a:ext cx="10515604" cy="1463048"/>
+            <a:ext cx="10515604" cy="1463049"/>
           </a:xfrm>
           <a:prstGeom prst="rect">
             <a:avLst/>
@@ -5507,10 +5510,10 @@
         </p:nvGrpSpPr>
         <p:grpSpPr>
           <a:xfrm>
-            <a:off x="685793" y="3246117"/>
-            <a:ext cx="5120657" cy="2834655"/>
-            <a:chOff x="0" y="0"/>
-            <a:chExt cx="5120656" cy="2834653"/>
+            <a:off x="685791" y="3246115"/>
+            <a:ext cx="5120659" cy="2834658"/>
+            <a:chOff x="-1" y="0"/>
+            <a:chExt cx="5120657" cy="2834656"/>
           </a:xfrm>
         </p:grpSpPr>
         <p:sp>
@@ -5521,8 +5524,8 @@
           </p:nvSpPr>
           <p:spPr>
             <a:xfrm>
-              <a:off x="-1" y="-1"/>
-              <a:ext cx="5120657" cy="2834654"/>
+              <a:off x="-2" y="-1"/>
+              <a:ext cx="5120659" cy="2834657"/>
             </a:xfrm>
             <a:prstGeom prst="roundRect">
               <a:avLst>
@@ -5572,8 +5575,8 @@
           </p:nvSpPr>
           <p:spPr>
             <a:xfrm>
-              <a:off x="85278" y="39559"/>
-              <a:ext cx="4950095" cy="2755534"/>
+              <a:off x="85277" y="39558"/>
+              <a:ext cx="4950097" cy="2755538"/>
             </a:xfrm>
             <a:prstGeom prst="rect">
               <a:avLst/>
@@ -5678,10 +5681,10 @@
         </p:nvGrpSpPr>
         <p:grpSpPr>
           <a:xfrm>
-            <a:off x="6035033" y="3246117"/>
-            <a:ext cx="5394974" cy="2834655"/>
-            <a:chOff x="-1" y="0"/>
-            <a:chExt cx="5394972" cy="2834653"/>
+            <a:off x="6035032" y="3246115"/>
+            <a:ext cx="5394977" cy="2834658"/>
+            <a:chOff x="0" y="0"/>
+            <a:chExt cx="5394976" cy="2834656"/>
           </a:xfrm>
         </p:grpSpPr>
         <p:sp>
@@ -5692,8 +5695,8 @@
           </p:nvSpPr>
           <p:spPr>
             <a:xfrm>
-              <a:off x="-2" y="-1"/>
-              <a:ext cx="5394974" cy="2834654"/>
+              <a:off x="-1" y="-1"/>
+              <a:ext cx="5394977" cy="2834657"/>
             </a:xfrm>
             <a:prstGeom prst="roundRect">
               <a:avLst>
@@ -5743,8 +5746,8 @@
           </p:nvSpPr>
           <p:spPr>
             <a:xfrm>
-              <a:off x="85276" y="39559"/>
-              <a:ext cx="5224416" cy="2755534"/>
+              <a:off x="85277" y="39558"/>
+              <a:ext cx="5224419" cy="2755538"/>
             </a:xfrm>
             <a:prstGeom prst="rect">
               <a:avLst/>
@@ -5964,7 +5967,7 @@
         <p:spPr>
           <a:xfrm>
             <a:off x="731518" y="1691636"/>
-            <a:ext cx="10515604" cy="400001"/>
+            <a:ext cx="10515604" cy="400002"/>
           </a:xfrm>
           <a:prstGeom prst="rect">
             <a:avLst/>
@@ -5987,7 +5990,7 @@
               <a:spcBef>
                 <a:spcPts val="1200"/>
               </a:spcBef>
-              <a:defRPr sz="1740">
+              <a:defRPr sz="1700">
                 <a:solidFill>
                   <a:srgbClr val="1C1F26"/>
                 </a:solidFill>
@@ -6014,10 +6017,10 @@
         </p:nvGrpSpPr>
         <p:grpSpPr>
           <a:xfrm>
-            <a:off x="731517" y="2149999"/>
-            <a:ext cx="10515601" cy="672120"/>
+            <a:off x="731516" y="2149999"/>
+            <a:ext cx="10515602" cy="672117"/>
             <a:chOff x="0" y="0"/>
-            <a:chExt cx="10515600" cy="672118"/>
+            <a:chExt cx="10515600" cy="672116"/>
           </a:xfrm>
         </p:grpSpPr>
         <p:sp>
@@ -6029,7 +6032,7 @@
           <p:spPr>
             <a:xfrm>
               <a:off x="0" y="0"/>
-              <a:ext cx="10515600" cy="650001"/>
+              <a:ext cx="10515601" cy="650003"/>
             </a:xfrm>
             <a:prstGeom prst="roundRect">
               <a:avLst>
@@ -6073,7 +6076,7 @@
           <p:spPr>
             <a:xfrm>
               <a:off x="99518" y="9518"/>
-              <a:ext cx="10316564" cy="662601"/>
+              <a:ext cx="10316565" cy="662599"/>
             </a:xfrm>
             <a:prstGeom prst="rect">
               <a:avLst/>
@@ -6101,25 +6104,19 @@
                   <a:solidFill>
                     <a:srgbClr val="55596A"/>
                   </a:solidFill>
-                  <a:latin typeface="Arial"/>
-                  <a:ea typeface="Arial"/>
-                  <a:cs typeface="Arial"/>
-                  <a:sym typeface="Arial"/>
                 </a:defRPr>
               </a:pPr>
               <a:r>
-                <a:rPr>
-                  <a:latin typeface="+mn-lt"/>
-                  <a:ea typeface="+mn-ea"/>
-                  <a:cs typeface="+mn-cs"/>
-                  <a:sym typeface="Helvetica"/>
-                </a:rPr>
                 <a:t>你</a:t>
               </a:r>
               <a:endParaRPr>
                 <a:solidFill>
                   <a:srgbClr val="FFFFFF"/>
                 </a:solidFill>
+                <a:latin typeface="Arial"/>
+                <a:ea typeface="Arial"/>
+                <a:cs typeface="Arial"/>
+                <a:sym typeface="Arial"/>
               </a:endParaRPr>
             </a:p>
             <a:p>
@@ -6131,19 +6128,9 @@
                   <a:solidFill>
                     <a:srgbClr val="1C1F26"/>
                   </a:solidFill>
-                  <a:latin typeface="Arial"/>
-                  <a:ea typeface="Arial"/>
-                  <a:cs typeface="Arial"/>
-                  <a:sym typeface="Arial"/>
                 </a:defRPr>
               </a:pPr>
               <a:r>
-                <a:rPr>
-                  <a:latin typeface="+mn-lt"/>
-                  <a:ea typeface="+mn-ea"/>
-                  <a:cs typeface="+mn-cs"/>
-                  <a:sym typeface="Helvetica"/>
-                </a:rPr>
                 <a:t>「請繼續完成系統建制」</a:t>
               </a:r>
             </a:p>
@@ -6158,10 +6145,10 @@
         </p:nvGrpSpPr>
         <p:grpSpPr>
           <a:xfrm>
-            <a:off x="731517" y="2949999"/>
-            <a:ext cx="10515601" cy="2350001"/>
+            <a:off x="731516" y="2949999"/>
+            <a:ext cx="10515602" cy="2350002"/>
             <a:chOff x="0" y="0"/>
-            <a:chExt cx="10515600" cy="2349999"/>
+            <a:chExt cx="10515600" cy="2350001"/>
           </a:xfrm>
         </p:grpSpPr>
         <p:sp>
@@ -6173,7 +6160,7 @@
           <p:spPr>
             <a:xfrm>
               <a:off x="0" y="0"/>
-              <a:ext cx="10515600" cy="2350000"/>
+              <a:ext cx="10515601" cy="2350002"/>
             </a:xfrm>
             <a:prstGeom prst="roundRect">
               <a:avLst>
@@ -6216,8 +6203,8 @@
           </p:nvSpPr>
           <p:spPr>
             <a:xfrm>
-              <a:off x="124414" y="34414"/>
-              <a:ext cx="10266772" cy="1297602"/>
+              <a:off x="124413" y="34414"/>
+              <a:ext cx="10266774" cy="1297599"/>
             </a:xfrm>
             <a:prstGeom prst="rect">
               <a:avLst/>
@@ -6245,21 +6232,17 @@
                   <a:solidFill>
                     <a:srgbClr val="FFFFFF"/>
                   </a:solidFill>
-                  <a:latin typeface="Arial"/>
-                  <a:ea typeface="Arial"/>
-                  <a:cs typeface="Arial"/>
-                  <a:sym typeface="Arial"/>
                 </a:defRPr>
               </a:pPr>
               <a:r>
-                <a:rPr>
-                  <a:latin typeface="+mn-lt"/>
-                  <a:ea typeface="+mn-ea"/>
-                  <a:cs typeface="+mn-cs"/>
-                  <a:sym typeface="Helvetica"/>
-                </a:rPr>
                 <a:t>我</a:t>
               </a:r>
+              <a:endParaRPr>
+                <a:latin typeface="Arial"/>
+                <a:ea typeface="Arial"/>
+                <a:cs typeface="Arial"/>
+                <a:sym typeface="Arial"/>
+              </a:endParaRPr>
             </a:p>
             <a:p>
               <a:pPr>
@@ -6270,21 +6253,17 @@
                   <a:solidFill>
                     <a:srgbClr val="FFFFFF"/>
                   </a:solidFill>
-                  <a:latin typeface="Arial"/>
-                  <a:ea typeface="Arial"/>
-                  <a:cs typeface="Arial"/>
-                  <a:sym typeface="Arial"/>
                 </a:defRPr>
               </a:pPr>
               <a:r>
-                <a:rPr>
-                  <a:latin typeface="+mn-lt"/>
-                  <a:ea typeface="+mn-ea"/>
-                  <a:cs typeface="+mn-cs"/>
-                  <a:sym typeface="Helvetica"/>
-                </a:rPr>
                 <a:t>「繼續完成系統建制」指的是哪個方向？兩者路線互斥（重構會移除現有樹編輯器）</a:t>
               </a:r>
+              <a:endParaRPr>
+                <a:latin typeface="Arial"/>
+                <a:ea typeface="Arial"/>
+                <a:cs typeface="Arial"/>
+                <a:sym typeface="Arial"/>
+              </a:endParaRPr>
             </a:p>
             <a:p>
               <a:pPr>
@@ -6415,70 +6394,70 @@
                 <a:solidFill>
                   <a:srgbClr val="55596A"/>
                 </a:solidFill>
+                <a:latin typeface="+mj-lt"/>
+                <a:ea typeface="+mj-ea"/>
+                <a:cs typeface="+mj-cs"/>
+                <a:sym typeface="Calibri"/>
+              </a:defRPr>
+            </a:pPr>
+            <a:r>
+              <a:t>結果： 選了</a:t>
+            </a:r>
+            <a:r>
+              <a:rPr>
                 <a:latin typeface="Arial"/>
                 <a:ea typeface="Arial"/>
                 <a:cs typeface="Arial"/>
                 <a:sym typeface="Arial"/>
-              </a:defRPr>
-            </a:pPr>
+              </a:rPr>
+              <a:t>①</a:t>
+            </a:r>
+            <a:r>
+              <a:t>，後續做出 </a:t>
+            </a:r>
             <a:r>
               <a:rPr>
-                <a:latin typeface="+mj-lt"/>
-                <a:ea typeface="+mj-ea"/>
-                <a:cs typeface="+mj-cs"/>
-                <a:sym typeface="Calibri"/>
+                <a:latin typeface="Arial"/>
+                <a:ea typeface="Arial"/>
+                <a:cs typeface="Arial"/>
+                <a:sym typeface="Arial"/>
               </a:rPr>
-              <a:t>結果： 選了</a:t>
-            </a:r>
-            <a:r>
-              <a:t>①</a:t>
+              <a:t>11 </a:t>
+            </a:r>
+            <a:r>
+              <a:t>個任務、</a:t>
             </a:r>
             <a:r>
               <a:rPr>
-                <a:latin typeface="+mj-lt"/>
-                <a:ea typeface="+mj-ea"/>
-                <a:cs typeface="+mj-cs"/>
-                <a:sym typeface="Calibri"/>
+                <a:latin typeface="Arial"/>
+                <a:ea typeface="Arial"/>
+                <a:cs typeface="Arial"/>
+                <a:sym typeface="Arial"/>
               </a:rPr>
-              <a:t>，後續做出 </a:t>
-            </a:r>
-            <a:r>
-              <a:t>11 </a:t>
+              <a:t>73 commits</a:t>
+            </a:r>
+            <a:r>
+              <a:t>，</a:t>
             </a:r>
             <a:r>
               <a:rPr>
-                <a:latin typeface="+mj-lt"/>
-                <a:ea typeface="+mj-ea"/>
-                <a:cs typeface="+mj-cs"/>
-                <a:sym typeface="Calibri"/>
+                <a:latin typeface="Arial"/>
+                <a:ea typeface="Arial"/>
+                <a:cs typeface="Arial"/>
+                <a:sym typeface="Arial"/>
               </a:rPr>
-              <a:t>個任務、</a:t>
-            </a:r>
-            <a:r>
-              <a:t>73 commits</a:t>
+              <a:t>104/104 </a:t>
+            </a:r>
+            <a:r>
+              <a:t>測試通過，才有現在的 </a:t>
             </a:r>
             <a:r>
               <a:rPr>
-                <a:latin typeface="+mj-lt"/>
-                <a:ea typeface="+mj-ea"/>
-                <a:cs typeface="+mj-cs"/>
-                <a:sym typeface="Calibri"/>
+                <a:latin typeface="Arial"/>
+                <a:ea typeface="Arial"/>
+                <a:cs typeface="Arial"/>
+                <a:sym typeface="Arial"/>
               </a:rPr>
-              <a:t>，</a:t>
-            </a:r>
-            <a:r>
-              <a:t>104/104 </a:t>
-            </a:r>
-            <a:r>
-              <a:rPr>
-                <a:latin typeface="+mj-lt"/>
-                <a:ea typeface="+mj-ea"/>
-                <a:cs typeface="+mj-cs"/>
-                <a:sym typeface="Calibri"/>
-              </a:rPr>
-              <a:t>測試通過，才有現在的 </a:t>
-            </a:r>
-            <a:r>
               <a:t>MissionBoard</a:t>
             </a:r>
           </a:p>
@@ -6607,7 +6586,7 @@
         <p:spPr>
           <a:xfrm>
             <a:off x="731518" y="1691636"/>
-            <a:ext cx="10515604" cy="400001"/>
+            <a:ext cx="10515604" cy="400002"/>
           </a:xfrm>
           <a:prstGeom prst="rect">
             <a:avLst/>
@@ -6630,7 +6609,7 @@
               <a:spcBef>
                 <a:spcPts val="1200"/>
               </a:spcBef>
-              <a:defRPr sz="1740">
+              <a:defRPr sz="1700">
                 <a:solidFill>
                   <a:srgbClr val="1C1F26"/>
                 </a:solidFill>
@@ -6657,10 +6636,10 @@
         </p:nvGrpSpPr>
         <p:grpSpPr>
           <a:xfrm>
-            <a:off x="731517" y="2149999"/>
-            <a:ext cx="10515601" cy="672120"/>
+            <a:off x="731516" y="2149999"/>
+            <a:ext cx="10515602" cy="672117"/>
             <a:chOff x="0" y="0"/>
-            <a:chExt cx="10515600" cy="672118"/>
+            <a:chExt cx="10515600" cy="672116"/>
           </a:xfrm>
         </p:grpSpPr>
         <p:sp>
@@ -6672,7 +6651,7 @@
           <p:spPr>
             <a:xfrm>
               <a:off x="0" y="0"/>
-              <a:ext cx="10515600" cy="650001"/>
+              <a:ext cx="10515601" cy="650003"/>
             </a:xfrm>
             <a:prstGeom prst="roundRect">
               <a:avLst>
@@ -6716,7 +6695,7 @@
           <p:spPr>
             <a:xfrm>
               <a:off x="99518" y="9518"/>
-              <a:ext cx="10316564" cy="662601"/>
+              <a:ext cx="10316565" cy="662599"/>
             </a:xfrm>
             <a:prstGeom prst="rect">
               <a:avLst/>
@@ -6744,25 +6723,19 @@
                   <a:solidFill>
                     <a:srgbClr val="55596A"/>
                   </a:solidFill>
-                  <a:latin typeface="Arial"/>
-                  <a:ea typeface="Arial"/>
-                  <a:cs typeface="Arial"/>
-                  <a:sym typeface="Arial"/>
                 </a:defRPr>
               </a:pPr>
               <a:r>
-                <a:rPr>
-                  <a:latin typeface="+mn-lt"/>
-                  <a:ea typeface="+mn-ea"/>
-                  <a:cs typeface="+mn-cs"/>
-                  <a:sym typeface="Helvetica"/>
-                </a:rPr>
                 <a:t>你</a:t>
               </a:r>
               <a:endParaRPr>
                 <a:solidFill>
                   <a:srgbClr val="FFFFFF"/>
                 </a:solidFill>
+                <a:latin typeface="Arial"/>
+                <a:ea typeface="Arial"/>
+                <a:cs typeface="Arial"/>
+                <a:sym typeface="Arial"/>
               </a:endParaRPr>
             </a:p>
             <a:p>
@@ -6774,31 +6747,21 @@
                   <a:solidFill>
                     <a:srgbClr val="1C1F26"/>
                   </a:solidFill>
+                </a:defRPr>
+              </a:pPr>
+              <a:r>
+                <a:t>「（</a:t>
+              </a:r>
+              <a:r>
+                <a:rPr>
                   <a:latin typeface="Arial"/>
                   <a:ea typeface="Arial"/>
                   <a:cs typeface="Arial"/>
                   <a:sym typeface="Arial"/>
-                </a:defRPr>
-              </a:pPr>
-              <a:r>
-                <a:rPr>
-                  <a:latin typeface="+mn-lt"/>
-                  <a:ea typeface="+mn-ea"/>
-                  <a:cs typeface="+mn-cs"/>
-                  <a:sym typeface="Helvetica"/>
                 </a:rPr>
-                <a:t>「（</a:t>
-              </a:r>
-              <a:r>
                 <a:t>11 </a:t>
               </a:r>
               <a:r>
-                <a:rPr>
-                  <a:latin typeface="+mn-lt"/>
-                  <a:ea typeface="+mn-ea"/>
-                  <a:cs typeface="+mn-cs"/>
-                  <a:sym typeface="Helvetica"/>
-                </a:rPr>
                 <a:t>個任務全數完成、各自審查通過後，啟動最終總體檢查）」</a:t>
               </a:r>
             </a:p>
@@ -6813,10 +6776,10 @@
         </p:nvGrpSpPr>
         <p:grpSpPr>
           <a:xfrm>
-            <a:off x="731517" y="2949999"/>
-            <a:ext cx="10515601" cy="2350001"/>
+            <a:off x="731516" y="2949999"/>
+            <a:ext cx="10515602" cy="2350002"/>
             <a:chOff x="0" y="0"/>
-            <a:chExt cx="10515600" cy="2349999"/>
+            <a:chExt cx="10515600" cy="2350001"/>
           </a:xfrm>
         </p:grpSpPr>
         <p:sp>
@@ -6828,7 +6791,7 @@
           <p:spPr>
             <a:xfrm>
               <a:off x="0" y="0"/>
-              <a:ext cx="10515600" cy="2350000"/>
+              <a:ext cx="10515601" cy="2350002"/>
             </a:xfrm>
             <a:prstGeom prst="roundRect">
               <a:avLst>
@@ -6871,8 +6834,8 @@
           </p:nvSpPr>
           <p:spPr>
             <a:xfrm>
-              <a:off x="124414" y="34414"/>
-              <a:ext cx="10266772" cy="1231373"/>
+              <a:off x="124413" y="34414"/>
+              <a:ext cx="10266774" cy="1231370"/>
             </a:xfrm>
             <a:prstGeom prst="rect">
               <a:avLst/>
@@ -6900,21 +6863,17 @@
                   <a:solidFill>
                     <a:srgbClr val="FFFFFF"/>
                   </a:solidFill>
-                  <a:latin typeface="Arial"/>
-                  <a:ea typeface="Arial"/>
-                  <a:cs typeface="Arial"/>
-                  <a:sym typeface="Arial"/>
                 </a:defRPr>
               </a:pPr>
               <a:r>
-                <a:rPr>
-                  <a:latin typeface="+mn-lt"/>
-                  <a:ea typeface="+mn-ea"/>
-                  <a:cs typeface="+mn-cs"/>
-                  <a:sym typeface="Helvetica"/>
-                </a:rPr>
                 <a:t>我</a:t>
               </a:r>
+              <a:endParaRPr>
+                <a:latin typeface="Arial"/>
+                <a:ea typeface="Arial"/>
+                <a:cs typeface="Arial"/>
+                <a:sym typeface="Arial"/>
+              </a:endParaRPr>
             </a:p>
             <a:p>
               <a:pPr>
@@ -6953,45 +6912,41 @@
                   <a:solidFill>
                     <a:srgbClr val="FFFFFF"/>
                   </a:solidFill>
+                </a:defRPr>
+              </a:pPr>
+              <a:r>
+                <a:t>額外納入修正：</a:t>
+              </a:r>
+              <a:r>
+                <a:rPr>
                   <a:latin typeface="Arial"/>
                   <a:ea typeface="Arial"/>
                   <a:cs typeface="Arial"/>
                   <a:sym typeface="Arial"/>
-                </a:defRPr>
-              </a:pPr>
-              <a:r>
-                <a:rPr>
-                  <a:latin typeface="+mn-lt"/>
-                  <a:ea typeface="+mn-ea"/>
-                  <a:cs typeface="+mn-cs"/>
-                  <a:sym typeface="Helvetica"/>
                 </a:rPr>
-                <a:t>額外納入修正：</a:t>
-              </a:r>
-              <a:r>
                 <a:t>project-detail.js </a:t>
               </a:r>
               <a:r>
-                <a:rPr>
-                  <a:latin typeface="+mn-lt"/>
-                  <a:ea typeface="+mn-ea"/>
-                  <a:cs typeface="+mn-cs"/>
-                  <a:sym typeface="Helvetica"/>
-                </a:rPr>
                 <a:t>同欄向下拖曳有 </a:t>
               </a:r>
               <a:r>
+                <a:rPr>
+                  <a:latin typeface="Arial"/>
+                  <a:ea typeface="Arial"/>
+                  <a:cs typeface="Arial"/>
+                  <a:sym typeface="Arial"/>
+                </a:rPr>
                 <a:t>off-by-one</a:t>
               </a:r>
               <a:r>
-                <a:rPr>
-                  <a:latin typeface="+mn-lt"/>
-                  <a:ea typeface="+mn-ea"/>
-                  <a:cs typeface="+mn-cs"/>
-                  <a:sym typeface="Helvetica"/>
-                </a:rPr>
                 <a:t>（插入位置差一格）</a:t>
               </a:r>
+              <a:endParaRPr>
+                <a:latin typeface="Arial"/>
+                <a:ea typeface="Arial"/>
+                <a:cs typeface="Arial"/>
+                <a:sym typeface="Arial"/>
+              </a:endParaRPr>
             </a:p>
             <a:p>
               <a:pPr>
@@ -7002,34 +6957,30 @@
                   <a:solidFill>
                     <a:srgbClr val="FFFFFF"/>
                   </a:solidFill>
+                </a:defRPr>
+              </a:pPr>
+              <a:r>
+                <a:t>派一個統整 </a:t>
+              </a:r>
+              <a:r>
+                <a:rPr>
                   <a:latin typeface="Arial"/>
                   <a:ea typeface="Arial"/>
                   <a:cs typeface="Arial"/>
                   <a:sym typeface="Arial"/>
-                </a:defRPr>
-              </a:pPr>
-              <a:r>
-                <a:rPr>
-                  <a:latin typeface="+mn-lt"/>
-                  <a:ea typeface="+mn-ea"/>
-                  <a:cs typeface="+mn-cs"/>
-                  <a:sym typeface="Helvetica"/>
                 </a:rPr>
-                <a:t>派一個統整 </a:t>
-              </a:r>
-              <a:r>
                 <a:t>fix wave </a:t>
               </a:r>
               <a:r>
-                <a:rPr>
-                  <a:latin typeface="+mn-lt"/>
-                  <a:ea typeface="+mn-ea"/>
-                  <a:cs typeface="+mn-cs"/>
-                  <a:sym typeface="Helvetica"/>
-                </a:rPr>
                 <a:t>處理全部發現，不是一個發現派一個 </a:t>
               </a:r>
               <a:r>
+                <a:rPr>
+                  <a:latin typeface="Arial"/>
+                  <a:ea typeface="Arial"/>
+                  <a:cs typeface="Arial"/>
+                  <a:sym typeface="Arial"/>
+                </a:rPr>
                 <a:t>fixer</a:t>
               </a:r>
             </a:p>
@@ -7070,46 +7021,46 @@
                 <a:solidFill>
                   <a:srgbClr val="55596A"/>
                 </a:solidFill>
+                <a:latin typeface="+mj-lt"/>
+                <a:ea typeface="+mj-ea"/>
+                <a:cs typeface="+mj-cs"/>
+                <a:sym typeface="Calibri"/>
+              </a:defRPr>
+            </a:pPr>
+            <a:r>
+              <a:t>結果： </a:t>
+            </a:r>
+            <a:r>
+              <a:rPr>
                 <a:latin typeface="Arial"/>
                 <a:ea typeface="Arial"/>
                 <a:cs typeface="Arial"/>
                 <a:sym typeface="Arial"/>
-              </a:defRPr>
-            </a:pPr>
+              </a:rPr>
+              <a:t>8 </a:t>
+            </a:r>
+            <a:r>
+              <a:t>個發現全部修復，複查乾淨，</a:t>
+            </a:r>
             <a:r>
               <a:rPr>
-                <a:latin typeface="+mj-lt"/>
-                <a:ea typeface="+mj-ea"/>
-                <a:cs typeface="+mj-cs"/>
-                <a:sym typeface="Calibri"/>
+                <a:latin typeface="Arial"/>
+                <a:ea typeface="Arial"/>
+                <a:cs typeface="Arial"/>
+                <a:sym typeface="Arial"/>
               </a:rPr>
-              <a:t>結果： </a:t>
-            </a:r>
-            <a:r>
-              <a:t>8 </a:t>
+              <a:t>104/104 </a:t>
+            </a:r>
+            <a:r>
+              <a:t>測試通過才 </a:t>
             </a:r>
             <a:r>
               <a:rPr>
-                <a:latin typeface="+mj-lt"/>
-                <a:ea typeface="+mj-ea"/>
-                <a:cs typeface="+mj-cs"/>
-                <a:sym typeface="Calibri"/>
+                <a:latin typeface="Arial"/>
+                <a:ea typeface="Arial"/>
+                <a:cs typeface="Arial"/>
+                <a:sym typeface="Arial"/>
               </a:rPr>
-              <a:t>個發現全部修復，複查乾淨，</a:t>
-            </a:r>
-            <a:r>
-              <a:t>104/104 </a:t>
-            </a:r>
-            <a:r>
-              <a:rPr>
-                <a:latin typeface="+mj-lt"/>
-                <a:ea typeface="+mj-ea"/>
-                <a:cs typeface="+mj-cs"/>
-                <a:sym typeface="Calibri"/>
-              </a:rPr>
-              <a:t>測試通過才 </a:t>
-            </a:r>
-            <a:r>
               <a:t>commit</a:t>
             </a:r>
           </a:p>
@@ -7192,10 +7143,10 @@
         </p:nvGrpSpPr>
         <p:grpSpPr>
           <a:xfrm>
-            <a:off x="685800" y="699996"/>
-            <a:ext cx="10807700" cy="750008"/>
+            <a:off x="685800" y="699994"/>
+            <a:ext cx="10807700" cy="750010"/>
             <a:chOff x="0" y="0"/>
-            <a:chExt cx="10807700" cy="750007"/>
+            <a:chExt cx="10807700" cy="750008"/>
           </a:xfrm>
         </p:grpSpPr>
         <p:sp>
@@ -7207,7 +7158,7 @@
           <p:spPr>
             <a:xfrm>
               <a:off x="0" y="-1"/>
-              <a:ext cx="10807700" cy="750008"/>
+              <a:ext cx="10807700" cy="750009"/>
             </a:xfrm>
             <a:prstGeom prst="roundRect">
               <a:avLst>
@@ -7757,7 +7708,7 @@
         <p:spPr>
           <a:xfrm>
             <a:off x="731518" y="1691636"/>
-            <a:ext cx="10515604" cy="4206250"/>
+            <a:ext cx="10515604" cy="4206251"/>
           </a:xfrm>
           <a:prstGeom prst="rect">
             <a:avLst/>
@@ -7997,7 +7948,7 @@
         <p:spPr>
           <a:xfrm>
             <a:off x="731518" y="1691637"/>
-            <a:ext cx="10515604" cy="500002"/>
+            <a:ext cx="10515604" cy="500003"/>
           </a:xfrm>
           <a:prstGeom prst="rect">
             <a:avLst/>
@@ -8048,9 +7999,9 @@
         <p:grpSpPr>
           <a:xfrm>
             <a:off x="731516" y="2450000"/>
-            <a:ext cx="2350003" cy="1750002"/>
+            <a:ext cx="2350005" cy="1750004"/>
             <a:chOff x="0" y="0"/>
-            <a:chExt cx="2350001" cy="1750001"/>
+            <a:chExt cx="2350004" cy="1750003"/>
           </a:xfrm>
         </p:grpSpPr>
         <p:sp>
@@ -8062,7 +8013,7 @@
           <p:spPr>
             <a:xfrm>
               <a:off x="0" y="0"/>
-              <a:ext cx="2350002" cy="1750002"/>
+              <a:ext cx="2350005" cy="1750004"/>
             </a:xfrm>
             <a:prstGeom prst="roundRect">
               <a:avLst>
@@ -8110,7 +8061,7 @@
           <p:spPr>
             <a:xfrm>
               <a:off x="60752" y="262549"/>
-              <a:ext cx="2228498" cy="1224901"/>
+              <a:ext cx="2228500" cy="1224901"/>
             </a:xfrm>
             <a:prstGeom prst="rect">
               <a:avLst/>
@@ -8218,8 +8169,8 @@
         </p:nvSpPr>
         <p:spPr>
           <a:xfrm>
-            <a:off x="3081516" y="3225000"/>
-            <a:ext cx="300002" cy="200002"/>
+            <a:off x="3081515" y="3225000"/>
+            <a:ext cx="300003" cy="200003"/>
           </a:xfrm>
           <a:prstGeom prst="rightArrow">
             <a:avLst>
@@ -8261,9 +8212,9 @@
         <p:grpSpPr>
           <a:xfrm>
             <a:off x="3381518" y="2450000"/>
-            <a:ext cx="2350001" cy="1750002"/>
+            <a:ext cx="2350002" cy="1750004"/>
             <a:chOff x="0" y="0"/>
-            <a:chExt cx="2350000" cy="1750001"/>
+            <a:chExt cx="2350001" cy="1750003"/>
           </a:xfrm>
         </p:grpSpPr>
         <p:sp>
@@ -8275,7 +8226,7 @@
           <p:spPr>
             <a:xfrm>
               <a:off x="0" y="0"/>
-              <a:ext cx="2350001" cy="1750002"/>
+              <a:ext cx="2350002" cy="1750004"/>
             </a:xfrm>
             <a:prstGeom prst="roundRect">
               <a:avLst>
@@ -8323,7 +8274,7 @@
           <p:spPr>
             <a:xfrm>
               <a:off x="60752" y="262549"/>
-              <a:ext cx="2228497" cy="1224901"/>
+              <a:ext cx="2228498" cy="1224901"/>
             </a:xfrm>
             <a:prstGeom prst="rect">
               <a:avLst/>
@@ -8432,7 +8383,7 @@
         <p:spPr>
           <a:xfrm>
             <a:off x="5731516" y="3225000"/>
-            <a:ext cx="300002" cy="200002"/>
+            <a:ext cx="300003" cy="200003"/>
           </a:xfrm>
           <a:prstGeom prst="rightArrow">
             <a:avLst>
@@ -8474,9 +8425,9 @@
         <p:grpSpPr>
           <a:xfrm>
             <a:off x="6031517" y="2450000"/>
-            <a:ext cx="2350003" cy="1750002"/>
+            <a:ext cx="2350005" cy="1750004"/>
             <a:chOff x="0" y="0"/>
-            <a:chExt cx="2350001" cy="1750001"/>
+            <a:chExt cx="2350004" cy="1750003"/>
           </a:xfrm>
         </p:grpSpPr>
         <p:sp>
@@ -8488,7 +8439,7 @@
           <p:spPr>
             <a:xfrm>
               <a:off x="0" y="0"/>
-              <a:ext cx="2350002" cy="1750002"/>
+              <a:ext cx="2350005" cy="1750004"/>
             </a:xfrm>
             <a:prstGeom prst="roundRect">
               <a:avLst>
@@ -8536,7 +8487,7 @@
           <p:spPr>
             <a:xfrm>
               <a:off x="60752" y="262549"/>
-              <a:ext cx="2228498" cy="1224901"/>
+              <a:ext cx="2228500" cy="1224901"/>
             </a:xfrm>
             <a:prstGeom prst="rect">
               <a:avLst/>
@@ -8636,7 +8587,7 @@
         <p:spPr>
           <a:xfrm>
             <a:off x="8381517" y="3225000"/>
-            <a:ext cx="300002" cy="200002"/>
+            <a:ext cx="300003" cy="200003"/>
           </a:xfrm>
           <a:prstGeom prst="rightArrow">
             <a:avLst>
@@ -8678,9 +8629,9 @@
         <p:grpSpPr>
           <a:xfrm>
             <a:off x="8681518" y="2450000"/>
-            <a:ext cx="2350003" cy="1750002"/>
+            <a:ext cx="2350005" cy="1750004"/>
             <a:chOff x="0" y="0"/>
-            <a:chExt cx="2350001" cy="1750001"/>
+            <a:chExt cx="2350004" cy="1750003"/>
           </a:xfrm>
         </p:grpSpPr>
         <p:sp>
@@ -8692,7 +8643,7 @@
           <p:spPr>
             <a:xfrm>
               <a:off x="0" y="0"/>
-              <a:ext cx="2350002" cy="1750002"/>
+              <a:ext cx="2350005" cy="1750004"/>
             </a:xfrm>
             <a:prstGeom prst="roundRect">
               <a:avLst>
@@ -8740,7 +8691,7 @@
           <p:spPr>
             <a:xfrm>
               <a:off x="60752" y="260264"/>
-              <a:ext cx="2228498" cy="1229471"/>
+              <a:ext cx="2228500" cy="1229471"/>
             </a:xfrm>
             <a:prstGeom prst="rect">
               <a:avLst/>
@@ -9067,7 +9018,7 @@
         <p:spPr>
           <a:xfrm>
             <a:off x="731518" y="1691636"/>
-            <a:ext cx="10515604" cy="4206250"/>
+            <a:ext cx="10515604" cy="4206251"/>
           </a:xfrm>
           <a:prstGeom prst="rect">
             <a:avLst/>
@@ -9390,7 +9341,7 @@
         <p:spPr>
           <a:xfrm>
             <a:off x="731519" y="3063238"/>
-            <a:ext cx="3429002" cy="731526"/>
+            <a:ext cx="3429002" cy="731527"/>
           </a:xfrm>
           <a:prstGeom prst="rect">
             <a:avLst/>
@@ -9504,7 +9455,7 @@
         <p:spPr>
           <a:xfrm>
             <a:off x="4434839" y="3063238"/>
-            <a:ext cx="3429002" cy="731526"/>
+            <a:ext cx="3429002" cy="731527"/>
           </a:xfrm>
           <a:prstGeom prst="rect">
             <a:avLst/>
@@ -9618,7 +9569,7 @@
         <p:spPr>
           <a:xfrm>
             <a:off x="8138159" y="3063238"/>
-            <a:ext cx="3429006" cy="731526"/>
+            <a:ext cx="3429006" cy="731527"/>
           </a:xfrm>
           <a:prstGeom prst="rect">
             <a:avLst/>
@@ -9720,7 +9671,7 @@
         <p:spPr>
           <a:xfrm>
             <a:off x="731519" y="5166359"/>
-            <a:ext cx="3429002" cy="731525"/>
+            <a:ext cx="3429002" cy="731526"/>
           </a:xfrm>
           <a:prstGeom prst="rect">
             <a:avLst/>
@@ -9822,7 +9773,7 @@
         <p:spPr>
           <a:xfrm>
             <a:off x="4434839" y="5166359"/>
-            <a:ext cx="3429002" cy="731525"/>
+            <a:ext cx="3429002" cy="731526"/>
           </a:xfrm>
           <a:prstGeom prst="rect">
             <a:avLst/>
@@ -9914,7 +9865,7 @@
         <p:spPr>
           <a:xfrm>
             <a:off x="8138159" y="5166359"/>
-            <a:ext cx="3429006" cy="731525"/>
+            <a:ext cx="3429006" cy="731526"/>
           </a:xfrm>
           <a:prstGeom prst="rect">
             <a:avLst/>
@@ -10031,7 +9982,7 @@
           <a:p>
             <a:pPr/>
             <a:r>
-              <a:t>做完這一輪之後</a:t>
+              <a:t>近期優化</a:t>
             </a:r>
           </a:p>
         </p:txBody>
@@ -10075,7 +10026,7 @@
           <a:p>
             <a:pPr/>
             <a:r>
-              <a:t>接下來大概會往哪走</a:t>
+              <a:t>上線後又做了一輪：導覽重構＋首頁儀表板</a:t>
             </a:r>
           </a:p>
         </p:txBody>
@@ -10089,7 +10040,7 @@
         <p:spPr>
           <a:xfrm>
             <a:off x="731518" y="1691636"/>
-            <a:ext cx="10515604" cy="4206250"/>
+            <a:ext cx="10515604" cy="4206251"/>
           </a:xfrm>
           <a:prstGeom prst="rect">
             <a:avLst/>
@@ -10124,16 +10075,7 @@
               </a:defRPr>
             </a:pPr>
             <a:r>
-              <a:t>—  </a:t>
-            </a:r>
-            <a:r>
-              <a:rPr>
-                <a:latin typeface="+mn-lt"/>
-                <a:ea typeface="+mn-ea"/>
-                <a:cs typeface="+mn-cs"/>
-                <a:sym typeface="Helvetica"/>
-              </a:rPr>
-              <a:t>分類管理、人員派工都做完了；甘特圖還沒，之後有空再看</a:t>
+              <a:t>—  全站視覺改成白色簡約風格：卡片陰影全部換成細邊框，色彩與字體統一抽成 CSS token</a:t>
             </a:r>
           </a:p>
           <a:p>
@@ -10152,16 +10094,7 @@
               </a:defRPr>
             </a:pPr>
             <a:r>
-              <a:t>—  </a:t>
-            </a:r>
-            <a:r>
-              <a:rPr>
-                <a:latin typeface="+mn-lt"/>
-                <a:ea typeface="+mn-ea"/>
-                <a:cs typeface="+mn-cs"/>
-                <a:sym typeface="Helvetica"/>
-              </a:rPr>
-              <a:t>過程中用的那幾條規矩（推送要我點頭、測試要過），我打算繼續用在下一個專案</a:t>
+              <a:t>—  看板、人員派工、WBS 檢視搬進側邊欄第二層，跟著目前所在專案走，不再跟內容區搶版面</a:t>
             </a:r>
           </a:p>
           <a:p>
@@ -10180,16 +10113,26 @@
               </a:defRPr>
             </a:pPr>
             <a:r>
-              <a:t>—  </a:t>
-            </a:r>
-            <a:r>
-              <a:rPr>
-                <a:latin typeface="+mn-lt"/>
-                <a:ea typeface="+mn-ea"/>
-                <a:cs typeface="+mn-cs"/>
-                <a:sym typeface="Helvetica"/>
-              </a:rPr>
-              <a:t>文件都跟著更新了，之後接手的人看得懂</a:t>
+              <a:t>—  WBS 檢視補上「新增大項」，跟看板共用同一套選單挑選邏輯，不用重寫一份</a:t>
+            </a:r>
+          </a:p>
+          <a:p>
+            <a:pPr>
+              <a:spcBef>
+                <a:spcPts val="1400"/>
+              </a:spcBef>
+              <a:defRPr sz="2000">
+                <a:solidFill>
+                  <a:srgbClr val="1C1F26"/>
+                </a:solidFill>
+                <a:latin typeface="Arial"/>
+                <a:ea typeface="Arial"/>
+                <a:cs typeface="Arial"/>
+                <a:sym typeface="Arial"/>
+              </a:defRPr>
+            </a:pPr>
+            <a:r>
+              <a:t>—  首頁從單純的歡迎詞，改成依角色分三層的儀表板：操作人員看自己的專案跟任務、科長看本科總覽、主任看跨科總覽</a:t>
             </a:r>
           </a:p>
         </p:txBody>
@@ -10266,7 +10209,7 @@
           <a:p>
             <a:pPr/>
             <a:r>
-              <a:t>寫在最後</a:t>
+              <a:t>近期優化 · 畫面</a:t>
             </a:r>
           </a:p>
         </p:txBody>
@@ -10280,7 +10223,7 @@
         <p:spPr>
           <a:xfrm>
             <a:off x="731519" y="914399"/>
-            <a:ext cx="10698482" cy="726437"/>
+            <a:ext cx="10698482" cy="662937"/>
           </a:xfrm>
           <a:prstGeom prst="rect">
             <a:avLst/>
@@ -10300,7 +10243,7 @@
           </a:bodyPr>
           <a:lstStyle>
             <a:lvl1pPr>
-              <a:defRPr b="1" sz="3600">
+              <a:defRPr b="1" sz="3200">
                 <a:solidFill>
                   <a:srgbClr val="1C1F26"/>
                 </a:solidFill>
@@ -10310,6 +10253,829 @@
           <a:p>
             <a:pPr/>
             <a:r>
+              <a:t>側邊欄導覽 × WBS 新增大項</a:t>
+            </a:r>
+          </a:p>
+        </p:txBody>
+      </p:sp>
+      <p:sp>
+        <p:nvSpPr>
+          <p:cNvPr id="318" name="Rectangle 3"/>
+          <p:cNvSpPr/>
+          <p:nvPr/>
+        </p:nvSpPr>
+        <p:spPr>
+          <a:xfrm>
+            <a:off x="630933" y="1911092"/>
+            <a:ext cx="5138934" cy="3252990"/>
+          </a:xfrm>
+          <a:prstGeom prst="rect">
+            <a:avLst/>
+          </a:prstGeom>
+          <a:solidFill>
+            <a:srgbClr val="FFFFFF"/>
+          </a:solidFill>
+          <a:ln>
+            <a:solidFill>
+              <a:srgbClr val="D9D7CB"/>
+            </a:solidFill>
+          </a:ln>
+        </p:spPr>
+        <p:txBody>
+          <a:bodyPr lIns="45718" tIns="45718" rIns="45718" bIns="45718" anchor="ctr"/>
+          <a:lstStyle/>
+          <a:p>
+            <a:pPr algn="ctr">
+              <a:defRPr>
+                <a:solidFill>
+                  <a:srgbClr val="FFFFFF"/>
+                </a:solidFill>
+                <a:latin typeface="+mj-lt"/>
+                <a:ea typeface="+mj-ea"/>
+                <a:cs typeface="+mj-cs"/>
+                <a:sym typeface="Calibri"/>
+              </a:defRPr>
+            </a:pPr>
+          </a:p>
+        </p:txBody>
+      </p:sp>
+      <p:sp>
+        <p:nvSpPr>
+          <p:cNvPr id="319" name="TextBox 5"/>
+          <p:cNvSpPr txBox="1"/>
+          <p:nvPr/>
+        </p:nvSpPr>
+        <p:spPr>
+          <a:xfrm>
+            <a:off x="731516" y="5246370"/>
+            <a:ext cx="1424937" cy="320037"/>
+          </a:xfrm>
+          <a:prstGeom prst="rect">
+            <a:avLst/>
+          </a:prstGeom>
+          <a:ln w="12700">
+            <a:miter lim="400000"/>
+          </a:ln>
+          <a:extLst>
+            <a:ext uri="{C572A759-6A51-4108-AA02-DFA0A04FC94B}">
+              <ma14:wrappingTextBoxFlag xmlns:ma14="http://schemas.microsoft.com/office/mac/drawingml/2011/main" val="1"/>
+            </a:ext>
+          </a:extLst>
+        </p:spPr>
+        <p:txBody>
+          <a:bodyPr wrap="none" lIns="45718" tIns="45718" rIns="45718" bIns="45718">
+            <a:spAutoFit/>
+          </a:bodyPr>
+          <a:lstStyle>
+            <a:lvl1pPr>
+              <a:defRPr i="1" sz="1300">
+                <a:solidFill>
+                  <a:srgbClr val="55596A"/>
+                </a:solidFill>
+              </a:defRPr>
+            </a:lvl1pPr>
+          </a:lstStyle>
+          <a:p>
+            <a:pPr/>
+            <a:r>
+              <a:t>看板＋側邊欄導覽</a:t>
+            </a:r>
+          </a:p>
+        </p:txBody>
+      </p:sp>
+      <p:sp>
+        <p:nvSpPr>
+          <p:cNvPr id="320" name="Rectangle 6"/>
+          <p:cNvSpPr/>
+          <p:nvPr/>
+        </p:nvSpPr>
+        <p:spPr>
+          <a:xfrm>
+            <a:off x="6254496" y="1911092"/>
+            <a:ext cx="5138933" cy="3252990"/>
+          </a:xfrm>
+          <a:prstGeom prst="rect">
+            <a:avLst/>
+          </a:prstGeom>
+          <a:solidFill>
+            <a:srgbClr val="FFFFFF"/>
+          </a:solidFill>
+          <a:ln>
+            <a:solidFill>
+              <a:srgbClr val="D9D7CB"/>
+            </a:solidFill>
+          </a:ln>
+        </p:spPr>
+        <p:txBody>
+          <a:bodyPr lIns="45718" tIns="45718" rIns="45718" bIns="45718" anchor="ctr"/>
+          <a:lstStyle/>
+          <a:p>
+            <a:pPr algn="ctr">
+              <a:defRPr>
+                <a:solidFill>
+                  <a:srgbClr val="FFFFFF"/>
+                </a:solidFill>
+                <a:latin typeface="+mj-lt"/>
+                <a:ea typeface="+mj-ea"/>
+                <a:cs typeface="+mj-cs"/>
+                <a:sym typeface="Calibri"/>
+              </a:defRPr>
+            </a:pPr>
+          </a:p>
+        </p:txBody>
+      </p:sp>
+      <p:pic>
+        <p:nvPicPr>
+          <p:cNvPr id="321" name="Picture 7" descr="Picture 7"/>
+          <p:cNvPicPr>
+            <a:picLocks noChangeAspect="1"/>
+          </p:cNvPicPr>
+          <p:nvPr/>
+        </p:nvPicPr>
+        <p:blipFill>
+          <a:blip r:embed="rId2">
+            <a:extLst/>
+          </a:blip>
+          <a:stretch>
+            <a:fillRect/>
+          </a:stretch>
+        </p:blipFill>
+        <p:spPr>
+          <a:xfrm>
+            <a:off x="6309359" y="2262997"/>
+            <a:ext cx="5029204" cy="2549178"/>
+          </a:xfrm>
+          <a:prstGeom prst="rect">
+            <a:avLst/>
+          </a:prstGeom>
+          <a:ln w="12700">
+            <a:miter lim="400000"/>
+          </a:ln>
+        </p:spPr>
+      </p:pic>
+      <p:sp>
+        <p:nvSpPr>
+          <p:cNvPr id="322" name="TextBox 8"/>
+          <p:cNvSpPr txBox="1"/>
+          <p:nvPr/>
+        </p:nvSpPr>
+        <p:spPr>
+          <a:xfrm>
+            <a:off x="6355079" y="5246370"/>
+            <a:ext cx="1681777" cy="320037"/>
+          </a:xfrm>
+          <a:prstGeom prst="rect">
+            <a:avLst/>
+          </a:prstGeom>
+          <a:ln w="12700">
+            <a:miter lim="400000"/>
+          </a:ln>
+          <a:extLst>
+            <a:ext uri="{C572A759-6A51-4108-AA02-DFA0A04FC94B}">
+              <ma14:wrappingTextBoxFlag xmlns:ma14="http://schemas.microsoft.com/office/mac/drawingml/2011/main" val="1"/>
+            </a:ext>
+          </a:extLst>
+        </p:spPr>
+        <p:txBody>
+          <a:bodyPr wrap="none" lIns="45718" tIns="45718" rIns="45718" bIns="45718">
+            <a:spAutoFit/>
+          </a:bodyPr>
+          <a:lstStyle>
+            <a:lvl1pPr>
+              <a:defRPr i="1" sz="1300">
+                <a:solidFill>
+                  <a:srgbClr val="55596A"/>
+                </a:solidFill>
+              </a:defRPr>
+            </a:lvl1pPr>
+          </a:lstStyle>
+          <a:p>
+            <a:pPr/>
+            <a:r>
+              <a:t>WBS 檢視＋新增大項</a:t>
+            </a:r>
+          </a:p>
+        </p:txBody>
+      </p:sp>
+      <p:pic>
+        <p:nvPicPr>
+          <p:cNvPr id="323" name="Picture 9" descr="Picture 9"/>
+          <p:cNvPicPr>
+            <a:picLocks noChangeAspect="1"/>
+          </p:cNvPicPr>
+          <p:nvPr/>
+        </p:nvPicPr>
+        <p:blipFill>
+          <a:blip r:embed="rId3">
+            <a:extLst/>
+          </a:blip>
+          <a:stretch>
+            <a:fillRect/>
+          </a:stretch>
+        </p:blipFill>
+        <p:spPr>
+          <a:xfrm>
+            <a:off x="685800" y="2262999"/>
+            <a:ext cx="5029200" cy="2549176"/>
+          </a:xfrm>
+          <a:prstGeom prst="rect">
+            <a:avLst/>
+          </a:prstGeom>
+          <a:ln w="12700">
+            <a:miter lim="400000"/>
+          </a:ln>
+        </p:spPr>
+      </p:pic>
+    </p:spTree>
+  </p:cSld>
+  <p:clrMapOvr>
+    <a:masterClrMapping/>
+  </p:clrMapOvr>
+  <p:transition xmlns:p14="http://schemas.microsoft.com/office/powerpoint/2010/main" spd="med" advClick="1"/>
+</p:sld>
+</file>
+
+<file path=ppt/slides/slide26.xml><?xml version="1.0" encoding="utf-8"?>
+<p:sld xmlns:a="http://schemas.openxmlformats.org/drawingml/2006/main" xmlns:r="http://schemas.openxmlformats.org/officeDocument/2006/relationships" xmlns:p="http://schemas.openxmlformats.org/presentationml/2006/main" xmlns:m="http://schemas.openxmlformats.org/officeDocument/2006/math" xmlns:a14="http://schemas.microsoft.com/office/drawing/2010/main" showMasterSp="1" showMasterPhAnim="1">
+  <p:cSld>
+    <p:bg>
+      <p:bgPr>
+        <a:solidFill>
+          <a:srgbClr val="F2F2EC"/>
+        </a:solidFill>
+      </p:bgPr>
+    </p:bg>
+    <p:spTree>
+      <p:nvGrpSpPr>
+        <p:cNvPr id="1" name=""/>
+        <p:cNvGrpSpPr/>
+        <p:nvPr/>
+      </p:nvGrpSpPr>
+      <p:grpSpPr>
+        <a:xfrm>
+          <a:off x="0" y="0"/>
+          <a:ext cx="0" cy="0"/>
+          <a:chOff x="0" y="0"/>
+          <a:chExt cx="0" cy="0"/>
+        </a:xfrm>
+      </p:grpSpPr>
+      <p:sp>
+        <p:nvSpPr>
+          <p:cNvPr id="325" name="TextBox 1"/>
+          <p:cNvSpPr txBox="1"/>
+          <p:nvPr/>
+        </p:nvSpPr>
+        <p:spPr>
+          <a:xfrm>
+            <a:off x="731516" y="502919"/>
+            <a:ext cx="10424167" cy="320037"/>
+          </a:xfrm>
+          <a:prstGeom prst="rect">
+            <a:avLst/>
+          </a:prstGeom>
+          <a:ln w="12700">
+            <a:miter lim="400000"/>
+          </a:ln>
+          <a:extLst>
+            <a:ext uri="{C572A759-6A51-4108-AA02-DFA0A04FC94B}">
+              <ma14:wrappingTextBoxFlag xmlns:ma14="http://schemas.microsoft.com/office/mac/drawingml/2011/main" val="1"/>
+            </a:ext>
+          </a:extLst>
+        </p:spPr>
+        <p:txBody>
+          <a:bodyPr lIns="45718" tIns="45718" rIns="45718" bIns="45718">
+            <a:spAutoFit/>
+          </a:bodyPr>
+          <a:lstStyle>
+            <a:lvl1pPr>
+              <a:defRPr b="1" sz="1300">
+                <a:solidFill>
+                  <a:srgbClr val="1F6F6B"/>
+                </a:solidFill>
+              </a:defRPr>
+            </a:lvl1pPr>
+          </a:lstStyle>
+          <a:p>
+            <a:pPr/>
+            <a:r>
+              <a:t>近期優化 · 首頁</a:t>
+            </a:r>
+          </a:p>
+        </p:txBody>
+      </p:sp>
+      <p:sp>
+        <p:nvSpPr>
+          <p:cNvPr id="326" name="TextBox 2"/>
+          <p:cNvSpPr txBox="1"/>
+          <p:nvPr/>
+        </p:nvSpPr>
+        <p:spPr>
+          <a:xfrm>
+            <a:off x="731519" y="914399"/>
+            <a:ext cx="10698482" cy="624837"/>
+          </a:xfrm>
+          <a:prstGeom prst="rect">
+            <a:avLst/>
+          </a:prstGeom>
+          <a:ln w="12700">
+            <a:miter lim="400000"/>
+          </a:ln>
+          <a:extLst>
+            <a:ext uri="{C572A759-6A51-4108-AA02-DFA0A04FC94B}">
+              <ma14:wrappingTextBoxFlag xmlns:ma14="http://schemas.microsoft.com/office/mac/drawingml/2011/main" val="1"/>
+            </a:ext>
+          </a:extLst>
+        </p:spPr>
+        <p:txBody>
+          <a:bodyPr lIns="45718" tIns="45718" rIns="45718" bIns="45718">
+            <a:spAutoFit/>
+          </a:bodyPr>
+          <a:lstStyle>
+            <a:lvl1pPr>
+              <a:defRPr b="1" sz="3000">
+                <a:solidFill>
+                  <a:srgbClr val="1C1F26"/>
+                </a:solidFill>
+                <a:latin typeface="Georgia"/>
+                <a:ea typeface="Georgia"/>
+                <a:cs typeface="Georgia"/>
+                <a:sym typeface="Georgia"/>
+              </a:defRPr>
+            </a:lvl1pPr>
+          </a:lstStyle>
+          <a:p>
+            <a:pPr/>
+            <a:r>
+              <a:t>首頁儀表板：依角色分三層</a:t>
+            </a:r>
+          </a:p>
+        </p:txBody>
+      </p:sp>
+      <p:sp>
+        <p:nvSpPr>
+          <p:cNvPr id="327" name="Rectangle 3"/>
+          <p:cNvSpPr/>
+          <p:nvPr/>
+        </p:nvSpPr>
+        <p:spPr>
+          <a:xfrm>
+            <a:off x="2728755" y="1911092"/>
+            <a:ext cx="6734183" cy="4246946"/>
+          </a:xfrm>
+          <a:prstGeom prst="rect">
+            <a:avLst/>
+          </a:prstGeom>
+          <a:solidFill>
+            <a:srgbClr val="FFFFFF"/>
+          </a:solidFill>
+          <a:ln w="12700">
+            <a:solidFill>
+              <a:srgbClr val="D9D7CB"/>
+            </a:solidFill>
+          </a:ln>
+        </p:spPr>
+        <p:txBody>
+          <a:bodyPr lIns="45718" tIns="45718" rIns="45718" bIns="45718" anchor="ctr"/>
+          <a:lstStyle/>
+          <a:p>
+            <a:pPr algn="ctr">
+              <a:defRPr>
+                <a:solidFill>
+                  <a:srgbClr val="FFFFFF"/>
+                </a:solidFill>
+                <a:latin typeface="+mj-lt"/>
+                <a:ea typeface="+mj-ea"/>
+                <a:cs typeface="+mj-cs"/>
+                <a:sym typeface="Calibri"/>
+              </a:defRPr>
+            </a:pPr>
+          </a:p>
+        </p:txBody>
+      </p:sp>
+      <p:pic>
+        <p:nvPicPr>
+          <p:cNvPr id="328" name="Picture 4" descr="Picture 4"/>
+          <p:cNvPicPr>
+            <a:picLocks noChangeAspect="1"/>
+          </p:cNvPicPr>
+          <p:nvPr/>
+        </p:nvPicPr>
+        <p:blipFill>
+          <a:blip r:embed="rId2">
+            <a:extLst/>
+          </a:blip>
+          <a:stretch>
+            <a:fillRect/>
+          </a:stretch>
+        </p:blipFill>
+        <p:spPr>
+          <a:xfrm>
+            <a:off x="2779516" y="2353598"/>
+            <a:ext cx="6632662" cy="3361932"/>
+          </a:xfrm>
+          <a:prstGeom prst="rect">
+            <a:avLst/>
+          </a:prstGeom>
+          <a:ln w="12700">
+            <a:miter lim="400000"/>
+          </a:ln>
+        </p:spPr>
+      </p:pic>
+      <p:sp>
+        <p:nvSpPr>
+          <p:cNvPr id="329" name="TextBox 5"/>
+          <p:cNvSpPr txBox="1"/>
+          <p:nvPr/>
+        </p:nvSpPr>
+        <p:spPr>
+          <a:xfrm>
+            <a:off x="731519" y="6258030"/>
+            <a:ext cx="10698482" cy="450004"/>
+          </a:xfrm>
+          <a:prstGeom prst="rect">
+            <a:avLst/>
+          </a:prstGeom>
+          <a:ln w="12700">
+            <a:miter lim="400000"/>
+          </a:ln>
+          <a:extLst>
+            <a:ext uri="{C572A759-6A51-4108-AA02-DFA0A04FC94B}">
+              <ma14:wrappingTextBoxFlag xmlns:ma14="http://schemas.microsoft.com/office/mac/drawingml/2011/main" val="1"/>
+            </a:ext>
+          </a:extLst>
+        </p:spPr>
+        <p:txBody>
+          <a:bodyPr lIns="45718" tIns="45718" rIns="45718" bIns="45718">
+            <a:normAutofit fontScale="100000" lnSpcReduction="0"/>
+          </a:bodyPr>
+          <a:lstStyle>
+            <a:lvl1pPr>
+              <a:defRPr i="1" sz="1400">
+                <a:solidFill>
+                  <a:srgbClr val="55596A"/>
+                </a:solidFill>
+              </a:defRPr>
+            </a:lvl1pPr>
+          </a:lstStyle>
+          <a:p>
+            <a:pPr/>
+            <a:r>
+              <a:t>leader 登入看到的個人視角：進行中的專案＋指派給我的任務，逾期會標紅提醒</a:t>
+            </a:r>
+          </a:p>
+        </p:txBody>
+      </p:sp>
+    </p:spTree>
+  </p:cSld>
+  <p:clrMapOvr>
+    <a:masterClrMapping/>
+  </p:clrMapOvr>
+  <p:transition xmlns:p14="http://schemas.microsoft.com/office/powerpoint/2010/main" spd="med" advClick="1"/>
+</p:sld>
+</file>
+
+<file path=ppt/slides/slide27.xml><?xml version="1.0" encoding="utf-8"?>
+<p:sld xmlns:a="http://schemas.openxmlformats.org/drawingml/2006/main" xmlns:r="http://schemas.openxmlformats.org/officeDocument/2006/relationships" xmlns:p="http://schemas.openxmlformats.org/presentationml/2006/main" xmlns:m="http://schemas.openxmlformats.org/officeDocument/2006/math" xmlns:a14="http://schemas.microsoft.com/office/drawing/2010/main" showMasterSp="1" showMasterPhAnim="1">
+  <p:cSld>
+    <p:bg>
+      <p:bgPr>
+        <a:solidFill>
+          <a:srgbClr val="F2F2EC"/>
+        </a:solidFill>
+      </p:bgPr>
+    </p:bg>
+    <p:spTree>
+      <p:nvGrpSpPr>
+        <p:cNvPr id="1" name=""/>
+        <p:cNvGrpSpPr/>
+        <p:nvPr/>
+      </p:nvGrpSpPr>
+      <p:grpSpPr>
+        <a:xfrm>
+          <a:off x="0" y="0"/>
+          <a:ext cx="0" cy="0"/>
+          <a:chOff x="0" y="0"/>
+          <a:chExt cx="0" cy="0"/>
+        </a:xfrm>
+      </p:grpSpPr>
+      <p:sp>
+        <p:nvSpPr>
+          <p:cNvPr id="331" name="TextBox 1"/>
+          <p:cNvSpPr txBox="1"/>
+          <p:nvPr/>
+        </p:nvSpPr>
+        <p:spPr>
+          <a:xfrm>
+            <a:off x="731516" y="502919"/>
+            <a:ext cx="10424167" cy="320037"/>
+          </a:xfrm>
+          <a:prstGeom prst="rect">
+            <a:avLst/>
+          </a:prstGeom>
+          <a:ln w="12700">
+            <a:miter lim="400000"/>
+          </a:ln>
+          <a:extLst>
+            <a:ext uri="{C572A759-6A51-4108-AA02-DFA0A04FC94B}">
+              <ma14:wrappingTextBoxFlag xmlns:ma14="http://schemas.microsoft.com/office/mac/drawingml/2011/main" val="1"/>
+            </a:ext>
+          </a:extLst>
+        </p:spPr>
+        <p:txBody>
+          <a:bodyPr lIns="45718" tIns="45718" rIns="45718" bIns="45718">
+            <a:spAutoFit/>
+          </a:bodyPr>
+          <a:lstStyle>
+            <a:lvl1pPr>
+              <a:defRPr b="1" sz="1300">
+                <a:solidFill>
+                  <a:srgbClr val="1F6F6B"/>
+                </a:solidFill>
+              </a:defRPr>
+            </a:lvl1pPr>
+          </a:lstStyle>
+          <a:p>
+            <a:pPr/>
+            <a:r>
+              <a:t>做完這一輪之後</a:t>
+            </a:r>
+          </a:p>
+        </p:txBody>
+      </p:sp>
+      <p:sp>
+        <p:nvSpPr>
+          <p:cNvPr id="332" name="TextBox 2"/>
+          <p:cNvSpPr txBox="1"/>
+          <p:nvPr/>
+        </p:nvSpPr>
+        <p:spPr>
+          <a:xfrm>
+            <a:off x="731519" y="914399"/>
+            <a:ext cx="10698482" cy="726437"/>
+          </a:xfrm>
+          <a:prstGeom prst="rect">
+            <a:avLst/>
+          </a:prstGeom>
+          <a:ln w="12700">
+            <a:miter lim="400000"/>
+          </a:ln>
+          <a:extLst>
+            <a:ext uri="{C572A759-6A51-4108-AA02-DFA0A04FC94B}">
+              <ma14:wrappingTextBoxFlag xmlns:ma14="http://schemas.microsoft.com/office/mac/drawingml/2011/main" val="1"/>
+            </a:ext>
+          </a:extLst>
+        </p:spPr>
+        <p:txBody>
+          <a:bodyPr lIns="45718" tIns="45718" rIns="45718" bIns="45718">
+            <a:spAutoFit/>
+          </a:bodyPr>
+          <a:lstStyle>
+            <a:lvl1pPr>
+              <a:defRPr b="1" sz="3600">
+                <a:solidFill>
+                  <a:srgbClr val="1C1F26"/>
+                </a:solidFill>
+              </a:defRPr>
+            </a:lvl1pPr>
+          </a:lstStyle>
+          <a:p>
+            <a:pPr/>
+            <a:r>
+              <a:t>接下來大概會往哪走</a:t>
+            </a:r>
+          </a:p>
+        </p:txBody>
+      </p:sp>
+      <p:sp>
+        <p:nvSpPr>
+          <p:cNvPr id="333" name="TextBox 3"/>
+          <p:cNvSpPr txBox="1"/>
+          <p:nvPr/>
+        </p:nvSpPr>
+        <p:spPr>
+          <a:xfrm>
+            <a:off x="731518" y="1691636"/>
+            <a:ext cx="10515604" cy="4206251"/>
+          </a:xfrm>
+          <a:prstGeom prst="rect">
+            <a:avLst/>
+          </a:prstGeom>
+          <a:ln w="12700">
+            <a:miter lim="400000"/>
+          </a:ln>
+          <a:extLst>
+            <a:ext uri="{C572A759-6A51-4108-AA02-DFA0A04FC94B}">
+              <ma14:wrappingTextBoxFlag xmlns:ma14="http://schemas.microsoft.com/office/mac/drawingml/2011/main" val="1"/>
+            </a:ext>
+          </a:extLst>
+        </p:spPr>
+        <p:txBody>
+          <a:bodyPr lIns="45718" tIns="45718" rIns="45718" bIns="45718">
+            <a:normAutofit fontScale="100000" lnSpcReduction="0"/>
+          </a:bodyPr>
+          <a:lstStyle/>
+          <a:p>
+            <a:pPr>
+              <a:spcBef>
+                <a:spcPts val="1400"/>
+              </a:spcBef>
+              <a:defRPr sz="2000">
+                <a:solidFill>
+                  <a:srgbClr val="1C1F26"/>
+                </a:solidFill>
+                <a:latin typeface="Arial"/>
+                <a:ea typeface="Arial"/>
+                <a:cs typeface="Arial"/>
+                <a:sym typeface="Arial"/>
+              </a:defRPr>
+            </a:pPr>
+            <a:r>
+              <a:t>—  </a:t>
+            </a:r>
+            <a:r>
+              <a:rPr>
+                <a:latin typeface="+mn-lt"/>
+                <a:ea typeface="+mn-ea"/>
+                <a:cs typeface="+mn-cs"/>
+                <a:sym typeface="Helvetica"/>
+              </a:rPr>
+              <a:t>分類管理、人員派工都做完了；甘特圖還沒，之後有空再看</a:t>
+            </a:r>
+          </a:p>
+          <a:p>
+            <a:pPr>
+              <a:spcBef>
+                <a:spcPts val="1400"/>
+              </a:spcBef>
+              <a:defRPr sz="2000">
+                <a:solidFill>
+                  <a:srgbClr val="1C1F26"/>
+                </a:solidFill>
+                <a:latin typeface="Arial"/>
+                <a:ea typeface="Arial"/>
+                <a:cs typeface="Arial"/>
+                <a:sym typeface="Arial"/>
+              </a:defRPr>
+            </a:pPr>
+            <a:r>
+              <a:t>—  </a:t>
+            </a:r>
+            <a:r>
+              <a:rPr>
+                <a:latin typeface="+mn-lt"/>
+                <a:ea typeface="+mn-ea"/>
+                <a:cs typeface="+mn-cs"/>
+                <a:sym typeface="Helvetica"/>
+              </a:rPr>
+              <a:t>過程中用的那幾條規矩（推送要我點頭、測試要過），我打算繼續用在下一個專案</a:t>
+            </a:r>
+          </a:p>
+          <a:p>
+            <a:pPr>
+              <a:spcBef>
+                <a:spcPts val="1400"/>
+              </a:spcBef>
+              <a:defRPr sz="2000">
+                <a:solidFill>
+                  <a:srgbClr val="1C1F26"/>
+                </a:solidFill>
+                <a:latin typeface="Arial"/>
+                <a:ea typeface="Arial"/>
+                <a:cs typeface="Arial"/>
+                <a:sym typeface="Arial"/>
+              </a:defRPr>
+            </a:pPr>
+            <a:r>
+              <a:t>—  </a:t>
+            </a:r>
+            <a:r>
+              <a:rPr>
+                <a:latin typeface="+mn-lt"/>
+                <a:ea typeface="+mn-ea"/>
+                <a:cs typeface="+mn-cs"/>
+                <a:sym typeface="Helvetica"/>
+              </a:rPr>
+              <a:t>文件都跟著更新了，之後接手的人看得懂</a:t>
+            </a:r>
+          </a:p>
+        </p:txBody>
+      </p:sp>
+    </p:spTree>
+  </p:cSld>
+  <p:clrMapOvr>
+    <a:masterClrMapping/>
+  </p:clrMapOvr>
+  <p:transition xmlns:p14="http://schemas.microsoft.com/office/powerpoint/2010/main" spd="med" advClick="1"/>
+</p:sld>
+</file>
+
+<file path=ppt/slides/slide28.xml><?xml version="1.0" encoding="utf-8"?>
+<p:sld xmlns:a="http://schemas.openxmlformats.org/drawingml/2006/main" xmlns:r="http://schemas.openxmlformats.org/officeDocument/2006/relationships" xmlns:p="http://schemas.openxmlformats.org/presentationml/2006/main" xmlns:m="http://schemas.openxmlformats.org/officeDocument/2006/math" xmlns:a14="http://schemas.microsoft.com/office/drawing/2010/main" showMasterSp="1" showMasterPhAnim="1">
+  <p:cSld>
+    <p:bg>
+      <p:bgPr>
+        <a:solidFill>
+          <a:srgbClr val="F2F2EC"/>
+        </a:solidFill>
+      </p:bgPr>
+    </p:bg>
+    <p:spTree>
+      <p:nvGrpSpPr>
+        <p:cNvPr id="1" name=""/>
+        <p:cNvGrpSpPr/>
+        <p:nvPr/>
+      </p:nvGrpSpPr>
+      <p:grpSpPr>
+        <a:xfrm>
+          <a:off x="0" y="0"/>
+          <a:ext cx="0" cy="0"/>
+          <a:chOff x="0" y="0"/>
+          <a:chExt cx="0" cy="0"/>
+        </a:xfrm>
+      </p:grpSpPr>
+      <p:sp>
+        <p:nvSpPr>
+          <p:cNvPr id="335" name="TextBox 1"/>
+          <p:cNvSpPr txBox="1"/>
+          <p:nvPr/>
+        </p:nvSpPr>
+        <p:spPr>
+          <a:xfrm>
+            <a:off x="731516" y="502919"/>
+            <a:ext cx="10424167" cy="320037"/>
+          </a:xfrm>
+          <a:prstGeom prst="rect">
+            <a:avLst/>
+          </a:prstGeom>
+          <a:ln w="12700">
+            <a:miter lim="400000"/>
+          </a:ln>
+          <a:extLst>
+            <a:ext uri="{C572A759-6A51-4108-AA02-DFA0A04FC94B}">
+              <ma14:wrappingTextBoxFlag xmlns:ma14="http://schemas.microsoft.com/office/mac/drawingml/2011/main" val="1"/>
+            </a:ext>
+          </a:extLst>
+        </p:spPr>
+        <p:txBody>
+          <a:bodyPr lIns="45718" tIns="45718" rIns="45718" bIns="45718">
+            <a:spAutoFit/>
+          </a:bodyPr>
+          <a:lstStyle>
+            <a:lvl1pPr>
+              <a:defRPr b="1" sz="1300">
+                <a:solidFill>
+                  <a:srgbClr val="1F6F6B"/>
+                </a:solidFill>
+              </a:defRPr>
+            </a:lvl1pPr>
+          </a:lstStyle>
+          <a:p>
+            <a:pPr/>
+            <a:r>
+              <a:t>寫在最後</a:t>
+            </a:r>
+          </a:p>
+        </p:txBody>
+      </p:sp>
+      <p:sp>
+        <p:nvSpPr>
+          <p:cNvPr id="336" name="TextBox 2"/>
+          <p:cNvSpPr txBox="1"/>
+          <p:nvPr/>
+        </p:nvSpPr>
+        <p:spPr>
+          <a:xfrm>
+            <a:off x="731519" y="914399"/>
+            <a:ext cx="10698482" cy="726437"/>
+          </a:xfrm>
+          <a:prstGeom prst="rect">
+            <a:avLst/>
+          </a:prstGeom>
+          <a:ln w="12700">
+            <a:miter lim="400000"/>
+          </a:ln>
+          <a:extLst>
+            <a:ext uri="{C572A759-6A51-4108-AA02-DFA0A04FC94B}">
+              <ma14:wrappingTextBoxFlag xmlns:ma14="http://schemas.microsoft.com/office/mac/drawingml/2011/main" val="1"/>
+            </a:ext>
+          </a:extLst>
+        </p:spPr>
+        <p:txBody>
+          <a:bodyPr lIns="45718" tIns="45718" rIns="45718" bIns="45718">
+            <a:spAutoFit/>
+          </a:bodyPr>
+          <a:lstStyle>
+            <a:lvl1pPr>
+              <a:defRPr b="1" sz="3600">
+                <a:solidFill>
+                  <a:srgbClr val="1C1F26"/>
+                </a:solidFill>
+              </a:defRPr>
+            </a:lvl1pPr>
+          </a:lstStyle>
+          <a:p>
+            <a:pPr/>
+            <a:r>
               <a:t>這次做完，我自己比較有感的幾件事</a:t>
             </a:r>
           </a:p>
@@ -10317,14 +11083,14 @@
       </p:sp>
       <p:sp>
         <p:nvSpPr>
-          <p:cNvPr id="318" name="TextBox 3"/>
+          <p:cNvPr id="337" name="TextBox 3"/>
           <p:cNvSpPr txBox="1"/>
           <p:nvPr/>
         </p:nvSpPr>
         <p:spPr>
           <a:xfrm>
             <a:off x="731518" y="1691636"/>
-            <a:ext cx="10515604" cy="4206250"/>
+            <a:ext cx="10515604" cy="4206251"/>
           </a:xfrm>
           <a:prstGeom prst="rect">
             <a:avLst/>
@@ -10623,7 +11389,7 @@
         <p:spPr>
           <a:xfrm>
             <a:off x="731518" y="1691636"/>
-            <a:ext cx="10515604" cy="4206250"/>
+            <a:ext cx="10515604" cy="4206251"/>
           </a:xfrm>
           <a:prstGeom prst="rect">
             <a:avLst/>
@@ -10992,7 +11758,7 @@
         <p:spPr>
           <a:xfrm>
             <a:off x="731518" y="1691636"/>
-            <a:ext cx="10515604" cy="4206250"/>
+            <a:ext cx="10515604" cy="4206251"/>
           </a:xfrm>
           <a:prstGeom prst="rect">
             <a:avLst/>
@@ -11049,8 +11815,8 @@
         </p:nvSpPr>
         <p:spPr>
           <a:xfrm>
-            <a:off x="685793" y="2860000"/>
-            <a:ext cx="4800012" cy="266701"/>
+            <a:off x="685792" y="2860000"/>
+            <a:ext cx="4800014" cy="266701"/>
           </a:xfrm>
           <a:prstGeom prst="rect">
             <a:avLst/>
@@ -11103,10 +11869,10 @@
         </p:nvGrpSpPr>
         <p:grpSpPr>
           <a:xfrm>
-            <a:off x="685790" y="3399991"/>
-            <a:ext cx="1350018" cy="700017"/>
-            <a:chOff x="-1" y="0"/>
-            <a:chExt cx="1350016" cy="700015"/>
+            <a:off x="685789" y="3399989"/>
+            <a:ext cx="1350021" cy="700019"/>
+            <a:chOff x="-1" y="-1"/>
+            <a:chExt cx="1350020" cy="700018"/>
           </a:xfrm>
         </p:grpSpPr>
         <p:sp>
@@ -11117,8 +11883,8 @@
           </p:nvSpPr>
           <p:spPr>
             <a:xfrm>
-              <a:off x="-2" y="-1"/>
-              <a:ext cx="1350018" cy="700016"/>
+              <a:off x="-2" y="-2"/>
+              <a:ext cx="1350022" cy="700020"/>
             </a:xfrm>
             <a:prstGeom prst="roundRect">
               <a:avLst>
@@ -11165,8 +11931,8 @@
           </p:nvSpPr>
           <p:spPr>
             <a:xfrm>
-              <a:off x="45235" y="189980"/>
-              <a:ext cx="1259545" cy="320037"/>
+              <a:off x="45236" y="189980"/>
+              <a:ext cx="1259547" cy="320037"/>
             </a:xfrm>
             <a:prstGeom prst="rect">
               <a:avLst/>
@@ -11213,10 +11979,10 @@
         </p:nvGrpSpPr>
         <p:grpSpPr>
           <a:xfrm>
-            <a:off x="2385790" y="3399991"/>
-            <a:ext cx="1350017" cy="700017"/>
-            <a:chOff x="-1" y="0"/>
-            <a:chExt cx="1350016" cy="700015"/>
+            <a:off x="2385789" y="3399989"/>
+            <a:ext cx="1350020" cy="700019"/>
+            <a:chOff x="-1" y="-1"/>
+            <a:chExt cx="1350019" cy="700018"/>
           </a:xfrm>
         </p:grpSpPr>
         <p:sp>
@@ -11227,8 +11993,8 @@
           </p:nvSpPr>
           <p:spPr>
             <a:xfrm>
-              <a:off x="-2" y="-1"/>
-              <a:ext cx="1350018" cy="700016"/>
+              <a:off x="-2" y="-2"/>
+              <a:ext cx="1350021" cy="700020"/>
             </a:xfrm>
             <a:prstGeom prst="roundRect">
               <a:avLst>
@@ -11275,8 +12041,8 @@
           </p:nvSpPr>
           <p:spPr>
             <a:xfrm>
-              <a:off x="45235" y="189980"/>
-              <a:ext cx="1259545" cy="320037"/>
+              <a:off x="45236" y="189980"/>
+              <a:ext cx="1259547" cy="320037"/>
             </a:xfrm>
             <a:prstGeom prst="rect">
               <a:avLst/>
@@ -11323,10 +12089,10 @@
         </p:nvGrpSpPr>
         <p:grpSpPr>
           <a:xfrm>
-            <a:off x="4085793" y="3399991"/>
-            <a:ext cx="1350017" cy="700017"/>
-            <a:chOff x="-1" y="0"/>
-            <a:chExt cx="1350016" cy="700015"/>
+            <a:off x="4085791" y="3399989"/>
+            <a:ext cx="1350020" cy="700019"/>
+            <a:chOff x="-1" y="-1"/>
+            <a:chExt cx="1350019" cy="700018"/>
           </a:xfrm>
         </p:grpSpPr>
         <p:sp>
@@ -11337,8 +12103,8 @@
           </p:nvSpPr>
           <p:spPr>
             <a:xfrm>
-              <a:off x="-2" y="-1"/>
-              <a:ext cx="1350018" cy="700016"/>
+              <a:off x="-2" y="-2"/>
+              <a:ext cx="1350021" cy="700020"/>
             </a:xfrm>
             <a:prstGeom prst="roundRect">
               <a:avLst>
@@ -11385,8 +12151,8 @@
           </p:nvSpPr>
           <p:spPr>
             <a:xfrm>
-              <a:off x="45235" y="189980"/>
-              <a:ext cx="1259545" cy="320037"/>
+              <a:off x="45236" y="189980"/>
+              <a:ext cx="1259547" cy="320037"/>
             </a:xfrm>
             <a:prstGeom prst="rect">
               <a:avLst/>
@@ -11433,8 +12199,8 @@
         </p:nvSpPr>
         <p:spPr>
           <a:xfrm>
-            <a:off x="685793" y="4319999"/>
-            <a:ext cx="4800012" cy="228601"/>
+            <a:off x="685792" y="4319999"/>
+            <a:ext cx="4800014" cy="228601"/>
           </a:xfrm>
           <a:prstGeom prst="rect">
             <a:avLst/>
@@ -11531,10 +12297,10 @@
         </p:nvGrpSpPr>
         <p:grpSpPr>
           <a:xfrm>
-            <a:off x="6399992" y="3259991"/>
-            <a:ext cx="1050017" cy="480017"/>
-            <a:chOff x="-1" y="-1"/>
-            <a:chExt cx="1050016" cy="480016"/>
+            <a:off x="6399990" y="3259989"/>
+            <a:ext cx="1050020" cy="480020"/>
+            <a:chOff x="0" y="0"/>
+            <a:chExt cx="1050018" cy="480019"/>
           </a:xfrm>
         </p:grpSpPr>
         <p:sp>
@@ -11545,8 +12311,8 @@
           </p:nvSpPr>
           <p:spPr>
             <a:xfrm>
-              <a:off x="-2" y="-2"/>
-              <a:ext cx="1050018" cy="480018"/>
+              <a:off x="-1" y="-1"/>
+              <a:ext cx="1050019" cy="480020"/>
             </a:xfrm>
             <a:prstGeom prst="roundRect">
               <a:avLst>
@@ -11593,8 +12359,8 @@
           </p:nvSpPr>
           <p:spPr>
             <a:xfrm>
-              <a:off x="37503" y="86333"/>
-              <a:ext cx="975010" cy="307337"/>
+              <a:off x="37504" y="86334"/>
+              <a:ext cx="975011" cy="307337"/>
             </a:xfrm>
             <a:prstGeom prst="rect">
               <a:avLst/>
@@ -11642,7 +12408,7 @@
         <p:spPr>
           <a:xfrm>
             <a:off x="7599998" y="3370000"/>
-            <a:ext cx="620007" cy="250007"/>
+            <a:ext cx="620008" cy="250008"/>
           </a:xfrm>
           <a:prstGeom prst="rightArrow">
             <a:avLst>
@@ -11683,10 +12449,10 @@
         </p:nvGrpSpPr>
         <p:grpSpPr>
           <a:xfrm>
-            <a:off x="6399992" y="3879990"/>
-            <a:ext cx="1050017" cy="480017"/>
-            <a:chOff x="-1" y="0"/>
-            <a:chExt cx="1050016" cy="480016"/>
+            <a:off x="6399990" y="3879988"/>
+            <a:ext cx="1050020" cy="480019"/>
+            <a:chOff x="0" y="-1"/>
+            <a:chExt cx="1050018" cy="480018"/>
           </a:xfrm>
         </p:grpSpPr>
         <p:sp>
@@ -11697,8 +12463,8 @@
           </p:nvSpPr>
           <p:spPr>
             <a:xfrm>
-              <a:off x="-2" y="-1"/>
-              <a:ext cx="1050018" cy="480017"/>
+              <a:off x="-1" y="-2"/>
+              <a:ext cx="1050019" cy="480020"/>
             </a:xfrm>
             <a:prstGeom prst="roundRect">
               <a:avLst>
@@ -11745,8 +12511,8 @@
           </p:nvSpPr>
           <p:spPr>
             <a:xfrm>
-              <a:off x="37503" y="86332"/>
-              <a:ext cx="975010" cy="307337"/>
+              <a:off x="37504" y="86332"/>
+              <a:ext cx="975011" cy="307337"/>
             </a:xfrm>
             <a:prstGeom prst="rect">
               <a:avLst/>
@@ -11794,7 +12560,7 @@
         <p:spPr>
           <a:xfrm>
             <a:off x="7599998" y="3989999"/>
-            <a:ext cx="620007" cy="250007"/>
+            <a:ext cx="620008" cy="250008"/>
           </a:xfrm>
           <a:prstGeom prst="rightArrow">
             <a:avLst>
@@ -11835,10 +12601,10 @@
         </p:nvGrpSpPr>
         <p:grpSpPr>
           <a:xfrm>
-            <a:off x="6399992" y="4499992"/>
-            <a:ext cx="1050017" cy="480017"/>
-            <a:chOff x="-1" y="-1"/>
-            <a:chExt cx="1050016" cy="480016"/>
+            <a:off x="6399990" y="4499990"/>
+            <a:ext cx="1050020" cy="480021"/>
+            <a:chOff x="0" y="0"/>
+            <a:chExt cx="1050018" cy="480019"/>
           </a:xfrm>
         </p:grpSpPr>
         <p:sp>
@@ -11849,8 +12615,8 @@
           </p:nvSpPr>
           <p:spPr>
             <a:xfrm>
-              <a:off x="-2" y="-2"/>
-              <a:ext cx="1050018" cy="480018"/>
+              <a:off x="-1" y="-1"/>
+              <a:ext cx="1050019" cy="480020"/>
             </a:xfrm>
             <a:prstGeom prst="roundRect">
               <a:avLst>
@@ -11897,8 +12663,8 @@
           </p:nvSpPr>
           <p:spPr>
             <a:xfrm>
-              <a:off x="37503" y="86333"/>
-              <a:ext cx="975010" cy="307337"/>
+              <a:off x="37504" y="86334"/>
+              <a:ext cx="975011" cy="307337"/>
             </a:xfrm>
             <a:prstGeom prst="rect">
               <a:avLst/>
@@ -11946,7 +12712,7 @@
         <p:spPr>
           <a:xfrm>
             <a:off x="7599998" y="4610000"/>
-            <a:ext cx="620007" cy="250002"/>
+            <a:ext cx="620008" cy="250002"/>
           </a:xfrm>
           <a:prstGeom prst="rightArrow">
             <a:avLst>
@@ -11987,10 +12753,10 @@
         </p:nvGrpSpPr>
         <p:grpSpPr>
           <a:xfrm>
-            <a:off x="8499997" y="3399991"/>
-            <a:ext cx="2792853" cy="1360018"/>
+            <a:off x="8499995" y="3399989"/>
+            <a:ext cx="2792856" cy="1360021"/>
             <a:chOff x="-1" y="0"/>
-            <a:chExt cx="2792852" cy="1360016"/>
+            <a:chExt cx="2792855" cy="1360019"/>
           </a:xfrm>
         </p:grpSpPr>
         <p:sp>
@@ -12002,7 +12768,7 @@
           <p:spPr>
             <a:xfrm>
               <a:off x="-2" y="-1"/>
-              <a:ext cx="2792854" cy="1360018"/>
+              <a:ext cx="2792857" cy="1360020"/>
             </a:xfrm>
             <a:prstGeom prst="roundRect">
               <a:avLst>
@@ -12047,7 +12813,7 @@
           <p:spPr>
             <a:xfrm>
               <a:off x="62078" y="386631"/>
-              <a:ext cx="2668694" cy="586737"/>
+              <a:ext cx="2668696" cy="586737"/>
             </a:xfrm>
             <a:prstGeom prst="rect">
               <a:avLst/>
@@ -12276,7 +13042,7 @@
         <p:spPr>
           <a:xfrm>
             <a:off x="731518" y="1691636"/>
-            <a:ext cx="10515604" cy="4206250"/>
+            <a:ext cx="10515604" cy="4206251"/>
           </a:xfrm>
           <a:prstGeom prst="rect">
             <a:avLst/>
@@ -12530,7 +13296,7 @@
         <p:spPr>
           <a:xfrm>
             <a:off x="630933" y="1911092"/>
-            <a:ext cx="5138934" cy="3252989"/>
+            <a:ext cx="5138934" cy="3252990"/>
           </a:xfrm>
           <a:prstGeom prst="rect">
             <a:avLst/>
@@ -12615,7 +13381,7 @@
         <p:spPr>
           <a:xfrm>
             <a:off x="6254496" y="1911092"/>
-            <a:ext cx="5138933" cy="3252989"/>
+            <a:ext cx="5138933" cy="3252990"/>
           </a:xfrm>
           <a:prstGeom prst="rect">
             <a:avLst/>
@@ -12973,7 +13739,7 @@
         <p:spPr>
           <a:xfrm>
             <a:off x="2743199" y="1783076"/>
-            <a:ext cx="5508562" cy="841255"/>
+            <a:ext cx="5508562" cy="841256"/>
           </a:xfrm>
           <a:prstGeom prst="rect">
             <a:avLst/>
@@ -13137,7 +13903,7 @@
         <p:spPr>
           <a:xfrm>
             <a:off x="2743199" y="2624327"/>
-            <a:ext cx="5508562" cy="841251"/>
+            <a:ext cx="5508562" cy="841252"/>
           </a:xfrm>
           <a:prstGeom prst="rect">
             <a:avLst/>
@@ -13301,7 +14067,7 @@
         <p:spPr>
           <a:xfrm>
             <a:off x="2743199" y="3465576"/>
-            <a:ext cx="5508562" cy="841253"/>
+            <a:ext cx="5508562" cy="841254"/>
           </a:xfrm>
           <a:prstGeom prst="rect">
             <a:avLst/>
@@ -13453,7 +14219,7 @@
         <p:spPr>
           <a:xfrm>
             <a:off x="2743199" y="4306823"/>
-            <a:ext cx="5508562" cy="841253"/>
+            <a:ext cx="5508562" cy="841254"/>
           </a:xfrm>
           <a:prstGeom prst="rect">
             <a:avLst/>
@@ -13550,7 +14316,7 @@
         <p:spPr>
           <a:xfrm>
             <a:off x="8447478" y="1783077"/>
-            <a:ext cx="2845367" cy="203201"/>
+            <a:ext cx="2845368" cy="203201"/>
           </a:xfrm>
           <a:prstGeom prst="rect">
             <a:avLst/>
@@ -13620,7 +14386,7 @@
         <p:spPr>
           <a:xfrm>
             <a:off x="8447478" y="2203080"/>
-            <a:ext cx="2845367" cy="203201"/>
+            <a:ext cx="2845368" cy="203201"/>
           </a:xfrm>
           <a:prstGeom prst="rect">
             <a:avLst/>
@@ -13674,7 +14440,7 @@
         <p:spPr>
           <a:xfrm>
             <a:off x="8447478" y="2624327"/>
-            <a:ext cx="2845367" cy="203201"/>
+            <a:ext cx="2845368" cy="203201"/>
           </a:xfrm>
           <a:prstGeom prst="rect">
             <a:avLst/>
@@ -13744,7 +14510,7 @@
         <p:spPr>
           <a:xfrm>
             <a:off x="8447478" y="3044326"/>
-            <a:ext cx="2845367" cy="203201"/>
+            <a:ext cx="2845368" cy="203201"/>
           </a:xfrm>
           <a:prstGeom prst="rect">
             <a:avLst/>
@@ -13798,7 +14564,7 @@
         <p:spPr>
           <a:xfrm>
             <a:off x="8447478" y="3465576"/>
-            <a:ext cx="2845367" cy="203201"/>
+            <a:ext cx="2845368" cy="203201"/>
           </a:xfrm>
           <a:prstGeom prst="rect">
             <a:avLst/>
@@ -13868,7 +14634,7 @@
         <p:spPr>
           <a:xfrm>
             <a:off x="8447478" y="3885576"/>
-            <a:ext cx="2845367" cy="203201"/>
+            <a:ext cx="2845368" cy="203201"/>
           </a:xfrm>
           <a:prstGeom prst="rect">
             <a:avLst/>
@@ -13922,7 +14688,7 @@
         <p:spPr>
           <a:xfrm>
             <a:off x="8447478" y="4306823"/>
-            <a:ext cx="2845367" cy="203201"/>
+            <a:ext cx="2845368" cy="203201"/>
           </a:xfrm>
           <a:prstGeom prst="rect">
             <a:avLst/>
@@ -13992,7 +14758,7 @@
         <p:spPr>
           <a:xfrm>
             <a:off x="8447478" y="4726823"/>
-            <a:ext cx="2845367" cy="203201"/>
+            <a:ext cx="2845368" cy="203201"/>
           </a:xfrm>
           <a:prstGeom prst="rect">
             <a:avLst/>
@@ -14167,7 +14933,7 @@
         <p:spPr>
           <a:xfrm>
             <a:off x="731518" y="1691636"/>
-            <a:ext cx="10515604" cy="4206250"/>
+            <a:ext cx="10515604" cy="4206251"/>
           </a:xfrm>
           <a:prstGeom prst="rect">
             <a:avLst/>
@@ -14491,7 +15257,7 @@
         <p:spPr>
           <a:xfrm>
             <a:off x="731518" y="2148836"/>
-            <a:ext cx="10515604" cy="4206250"/>
+            <a:ext cx="10515604" cy="4206251"/>
           </a:xfrm>
           <a:prstGeom prst="rect">
             <a:avLst/>
@@ -14669,7 +15435,7 @@
         <p:spPr>
           <a:xfrm>
             <a:off x="594359" y="5560000"/>
-            <a:ext cx="30007" cy="880000"/>
+            <a:ext cx="30008" cy="880000"/>
           </a:xfrm>
           <a:prstGeom prst="rect">
             <a:avLst/>

--- a/docs/從HTML到SaaS_AI開發技巧回顧.pptx
+++ b/docs/從HTML到SaaS_AI開發技巧回顧.pptx
@@ -35,7 +35,6 @@
     <p:sldId id="280" r:id="rId32"/>
     <p:sldId id="281" r:id="rId33"/>
     <p:sldId id="282" r:id="rId34"/>
-    <p:sldId id="283" r:id="rId35"/>
   </p:sldIdLst>
   <p:sldSz cx="12179300" cy="6858000"/>
   <p:notesSz cx="6858000" cy="9144000"/>
@@ -90,9 +89,9 @@
         </a:solidFill>
         <a:effectLst/>
         <a:uFillTx/>
-        <a:latin typeface="+mn-lt"/>
-        <a:ea typeface="+mn-ea"/>
-        <a:cs typeface="+mn-cs"/>
+        <a:latin typeface="+mj-lt"/>
+        <a:ea typeface="+mj-ea"/>
+        <a:cs typeface="+mj-cs"/>
         <a:sym typeface="Helvetica"/>
       </a:defRPr>
     </a:lvl1pPr>
@@ -120,9 +119,9 @@
         </a:solidFill>
         <a:effectLst/>
         <a:uFillTx/>
-        <a:latin typeface="+mn-lt"/>
-        <a:ea typeface="+mn-ea"/>
-        <a:cs typeface="+mn-cs"/>
+        <a:latin typeface="+mj-lt"/>
+        <a:ea typeface="+mj-ea"/>
+        <a:cs typeface="+mj-cs"/>
         <a:sym typeface="Helvetica"/>
       </a:defRPr>
     </a:lvl2pPr>
@@ -150,9 +149,9 @@
         </a:solidFill>
         <a:effectLst/>
         <a:uFillTx/>
-        <a:latin typeface="+mn-lt"/>
-        <a:ea typeface="+mn-ea"/>
-        <a:cs typeface="+mn-cs"/>
+        <a:latin typeface="+mj-lt"/>
+        <a:ea typeface="+mj-ea"/>
+        <a:cs typeface="+mj-cs"/>
         <a:sym typeface="Helvetica"/>
       </a:defRPr>
     </a:lvl3pPr>
@@ -180,9 +179,9 @@
         </a:solidFill>
         <a:effectLst/>
         <a:uFillTx/>
-        <a:latin typeface="+mn-lt"/>
-        <a:ea typeface="+mn-ea"/>
-        <a:cs typeface="+mn-cs"/>
+        <a:latin typeface="+mj-lt"/>
+        <a:ea typeface="+mj-ea"/>
+        <a:cs typeface="+mj-cs"/>
         <a:sym typeface="Helvetica"/>
       </a:defRPr>
     </a:lvl4pPr>
@@ -210,9 +209,9 @@
         </a:solidFill>
         <a:effectLst/>
         <a:uFillTx/>
-        <a:latin typeface="+mn-lt"/>
-        <a:ea typeface="+mn-ea"/>
-        <a:cs typeface="+mn-cs"/>
+        <a:latin typeface="+mj-lt"/>
+        <a:ea typeface="+mj-ea"/>
+        <a:cs typeface="+mj-cs"/>
         <a:sym typeface="Helvetica"/>
       </a:defRPr>
     </a:lvl5pPr>
@@ -240,9 +239,9 @@
         </a:solidFill>
         <a:effectLst/>
         <a:uFillTx/>
-        <a:latin typeface="+mn-lt"/>
-        <a:ea typeface="+mn-ea"/>
-        <a:cs typeface="+mn-cs"/>
+        <a:latin typeface="+mj-lt"/>
+        <a:ea typeface="+mj-ea"/>
+        <a:cs typeface="+mj-cs"/>
         <a:sym typeface="Helvetica"/>
       </a:defRPr>
     </a:lvl6pPr>
@@ -270,9 +269,9 @@
         </a:solidFill>
         <a:effectLst/>
         <a:uFillTx/>
-        <a:latin typeface="+mn-lt"/>
-        <a:ea typeface="+mn-ea"/>
-        <a:cs typeface="+mn-cs"/>
+        <a:latin typeface="+mj-lt"/>
+        <a:ea typeface="+mj-ea"/>
+        <a:cs typeface="+mj-cs"/>
         <a:sym typeface="Helvetica"/>
       </a:defRPr>
     </a:lvl7pPr>
@@ -300,9 +299,9 @@
         </a:solidFill>
         <a:effectLst/>
         <a:uFillTx/>
-        <a:latin typeface="+mn-lt"/>
-        <a:ea typeface="+mn-ea"/>
-        <a:cs typeface="+mn-cs"/>
+        <a:latin typeface="+mj-lt"/>
+        <a:ea typeface="+mj-ea"/>
+        <a:cs typeface="+mj-cs"/>
         <a:sym typeface="Helvetica"/>
       </a:defRPr>
     </a:lvl8pPr>
@@ -330,9 +329,9 @@
         </a:solidFill>
         <a:effectLst/>
         <a:uFillTx/>
-        <a:latin typeface="+mn-lt"/>
-        <a:ea typeface="+mn-ea"/>
-        <a:cs typeface="+mn-cs"/>
+        <a:latin typeface="+mj-lt"/>
+        <a:ea typeface="+mj-ea"/>
+        <a:cs typeface="+mj-cs"/>
         <a:sym typeface="Helvetica"/>
       </a:defRPr>
     </a:lvl9pPr>
@@ -417,73 +416,73 @@
   <p:notesStyle>
     <a:lvl1pPr defTabSz="457200" latinLnBrk="0">
       <a:defRPr sz="1200">
-        <a:latin typeface="+mj-lt"/>
-        <a:ea typeface="+mj-ea"/>
-        <a:cs typeface="+mj-cs"/>
+        <a:latin typeface="+mn-lt"/>
+        <a:ea typeface="+mn-ea"/>
+        <a:cs typeface="+mn-cs"/>
         <a:sym typeface="Calibri"/>
       </a:defRPr>
     </a:lvl1pPr>
     <a:lvl2pPr indent="228600" defTabSz="457200" latinLnBrk="0">
       <a:defRPr sz="1200">
-        <a:latin typeface="+mj-lt"/>
-        <a:ea typeface="+mj-ea"/>
-        <a:cs typeface="+mj-cs"/>
+        <a:latin typeface="+mn-lt"/>
+        <a:ea typeface="+mn-ea"/>
+        <a:cs typeface="+mn-cs"/>
         <a:sym typeface="Calibri"/>
       </a:defRPr>
     </a:lvl2pPr>
     <a:lvl3pPr indent="457200" defTabSz="457200" latinLnBrk="0">
       <a:defRPr sz="1200">
-        <a:latin typeface="+mj-lt"/>
-        <a:ea typeface="+mj-ea"/>
-        <a:cs typeface="+mj-cs"/>
+        <a:latin typeface="+mn-lt"/>
+        <a:ea typeface="+mn-ea"/>
+        <a:cs typeface="+mn-cs"/>
         <a:sym typeface="Calibri"/>
       </a:defRPr>
     </a:lvl3pPr>
     <a:lvl4pPr indent="685800" defTabSz="457200" latinLnBrk="0">
       <a:defRPr sz="1200">
-        <a:latin typeface="+mj-lt"/>
-        <a:ea typeface="+mj-ea"/>
-        <a:cs typeface="+mj-cs"/>
+        <a:latin typeface="+mn-lt"/>
+        <a:ea typeface="+mn-ea"/>
+        <a:cs typeface="+mn-cs"/>
         <a:sym typeface="Calibri"/>
       </a:defRPr>
     </a:lvl4pPr>
     <a:lvl5pPr indent="914400" defTabSz="457200" latinLnBrk="0">
       <a:defRPr sz="1200">
-        <a:latin typeface="+mj-lt"/>
-        <a:ea typeface="+mj-ea"/>
-        <a:cs typeface="+mj-cs"/>
+        <a:latin typeface="+mn-lt"/>
+        <a:ea typeface="+mn-ea"/>
+        <a:cs typeface="+mn-cs"/>
         <a:sym typeface="Calibri"/>
       </a:defRPr>
     </a:lvl5pPr>
     <a:lvl6pPr indent="1143000" defTabSz="457200" latinLnBrk="0">
       <a:defRPr sz="1200">
-        <a:latin typeface="+mj-lt"/>
-        <a:ea typeface="+mj-ea"/>
-        <a:cs typeface="+mj-cs"/>
+        <a:latin typeface="+mn-lt"/>
+        <a:ea typeface="+mn-ea"/>
+        <a:cs typeface="+mn-cs"/>
         <a:sym typeface="Calibri"/>
       </a:defRPr>
     </a:lvl6pPr>
     <a:lvl7pPr indent="1371600" defTabSz="457200" latinLnBrk="0">
       <a:defRPr sz="1200">
-        <a:latin typeface="+mj-lt"/>
-        <a:ea typeface="+mj-ea"/>
-        <a:cs typeface="+mj-cs"/>
+        <a:latin typeface="+mn-lt"/>
+        <a:ea typeface="+mn-ea"/>
+        <a:cs typeface="+mn-cs"/>
         <a:sym typeface="Calibri"/>
       </a:defRPr>
     </a:lvl7pPr>
     <a:lvl8pPr indent="1600200" defTabSz="457200" latinLnBrk="0">
       <a:defRPr sz="1200">
-        <a:latin typeface="+mj-lt"/>
-        <a:ea typeface="+mj-ea"/>
-        <a:cs typeface="+mj-cs"/>
+        <a:latin typeface="+mn-lt"/>
+        <a:ea typeface="+mn-ea"/>
+        <a:cs typeface="+mn-cs"/>
         <a:sym typeface="Calibri"/>
       </a:defRPr>
     </a:lvl8pPr>
     <a:lvl9pPr indent="1828800" defTabSz="457200" latinLnBrk="0">
       <a:defRPr sz="1200">
-        <a:latin typeface="+mj-lt"/>
-        <a:ea typeface="+mj-ea"/>
-        <a:cs typeface="+mj-cs"/>
+        <a:latin typeface="+mn-lt"/>
+        <a:ea typeface="+mn-ea"/>
+        <a:cs typeface="+mn-cs"/>
         <a:sym typeface="Calibri"/>
       </a:defRPr>
     </a:lvl9pPr>
@@ -850,7 +849,7 @@
         <p:spPr>
           <a:xfrm>
             <a:off x="722312" y="2906713"/>
-            <a:ext cx="7772401" cy="1500195"/>
+            <a:ext cx="7772401" cy="1500196"/>
           </a:xfrm>
           <a:prstGeom prst="rect">
             <a:avLst/>
@@ -1293,7 +1292,7 @@
         <p:spPr>
           <a:xfrm>
             <a:off x="4645025" y="1535111"/>
-            <a:ext cx="4041775" cy="639771"/>
+            <a:ext cx="4041775" cy="639772"/>
           </a:xfrm>
           <a:prstGeom prst="rect">
             <a:avLst/>
@@ -1702,7 +1701,7 @@
         <p:spPr>
           <a:xfrm>
             <a:off x="1792288" y="5367337"/>
-            <a:ext cx="5486404" cy="804870"/>
+            <a:ext cx="5486404" cy="804871"/>
           </a:xfrm>
           <a:prstGeom prst="rect">
             <a:avLst/>
@@ -1974,9 +1973,9 @@
                 <a:solidFill>
                   <a:srgbClr val="888888"/>
                 </a:solidFill>
-                <a:latin typeface="+mj-lt"/>
-                <a:ea typeface="+mj-ea"/>
-                <a:cs typeface="+mj-cs"/>
+                <a:latin typeface="+mn-lt"/>
+                <a:ea typeface="+mn-ea"/>
+                <a:cs typeface="+mn-cs"/>
                 <a:sym typeface="Calibri"/>
               </a:defRPr>
             </a:lvl1pPr>
@@ -2024,9 +2023,9 @@
             <a:srgbClr val="000000"/>
           </a:solidFill>
           <a:uFillTx/>
-          <a:latin typeface="+mj-lt"/>
-          <a:ea typeface="+mj-ea"/>
-          <a:cs typeface="+mj-cs"/>
+          <a:latin typeface="+mn-lt"/>
+          <a:ea typeface="+mn-ea"/>
+          <a:cs typeface="+mn-cs"/>
           <a:sym typeface="Calibri"/>
         </a:defRPr>
       </a:lvl1pPr>
@@ -2050,9 +2049,9 @@
             <a:srgbClr val="000000"/>
           </a:solidFill>
           <a:uFillTx/>
-          <a:latin typeface="+mj-lt"/>
-          <a:ea typeface="+mj-ea"/>
-          <a:cs typeface="+mj-cs"/>
+          <a:latin typeface="+mn-lt"/>
+          <a:ea typeface="+mn-ea"/>
+          <a:cs typeface="+mn-cs"/>
           <a:sym typeface="Calibri"/>
         </a:defRPr>
       </a:lvl2pPr>
@@ -2076,9 +2075,9 @@
             <a:srgbClr val="000000"/>
           </a:solidFill>
           <a:uFillTx/>
-          <a:latin typeface="+mj-lt"/>
-          <a:ea typeface="+mj-ea"/>
-          <a:cs typeface="+mj-cs"/>
+          <a:latin typeface="+mn-lt"/>
+          <a:ea typeface="+mn-ea"/>
+          <a:cs typeface="+mn-cs"/>
           <a:sym typeface="Calibri"/>
         </a:defRPr>
       </a:lvl3pPr>
@@ -2102,9 +2101,9 @@
             <a:srgbClr val="000000"/>
           </a:solidFill>
           <a:uFillTx/>
-          <a:latin typeface="+mj-lt"/>
-          <a:ea typeface="+mj-ea"/>
-          <a:cs typeface="+mj-cs"/>
+          <a:latin typeface="+mn-lt"/>
+          <a:ea typeface="+mn-ea"/>
+          <a:cs typeface="+mn-cs"/>
           <a:sym typeface="Calibri"/>
         </a:defRPr>
       </a:lvl4pPr>
@@ -2128,9 +2127,9 @@
             <a:srgbClr val="000000"/>
           </a:solidFill>
           <a:uFillTx/>
-          <a:latin typeface="+mj-lt"/>
-          <a:ea typeface="+mj-ea"/>
-          <a:cs typeface="+mj-cs"/>
+          <a:latin typeface="+mn-lt"/>
+          <a:ea typeface="+mn-ea"/>
+          <a:cs typeface="+mn-cs"/>
           <a:sym typeface="Calibri"/>
         </a:defRPr>
       </a:lvl5pPr>
@@ -2154,9 +2153,9 @@
             <a:srgbClr val="000000"/>
           </a:solidFill>
           <a:uFillTx/>
-          <a:latin typeface="+mj-lt"/>
-          <a:ea typeface="+mj-ea"/>
-          <a:cs typeface="+mj-cs"/>
+          <a:latin typeface="+mn-lt"/>
+          <a:ea typeface="+mn-ea"/>
+          <a:cs typeface="+mn-cs"/>
           <a:sym typeface="Calibri"/>
         </a:defRPr>
       </a:lvl6pPr>
@@ -2180,9 +2179,9 @@
             <a:srgbClr val="000000"/>
           </a:solidFill>
           <a:uFillTx/>
-          <a:latin typeface="+mj-lt"/>
-          <a:ea typeface="+mj-ea"/>
-          <a:cs typeface="+mj-cs"/>
+          <a:latin typeface="+mn-lt"/>
+          <a:ea typeface="+mn-ea"/>
+          <a:cs typeface="+mn-cs"/>
           <a:sym typeface="Calibri"/>
         </a:defRPr>
       </a:lvl7pPr>
@@ -2206,9 +2205,9 @@
             <a:srgbClr val="000000"/>
           </a:solidFill>
           <a:uFillTx/>
-          <a:latin typeface="+mj-lt"/>
-          <a:ea typeface="+mj-ea"/>
-          <a:cs typeface="+mj-cs"/>
+          <a:latin typeface="+mn-lt"/>
+          <a:ea typeface="+mn-ea"/>
+          <a:cs typeface="+mn-cs"/>
           <a:sym typeface="Calibri"/>
         </a:defRPr>
       </a:lvl8pPr>
@@ -2232,9 +2231,9 @@
             <a:srgbClr val="000000"/>
           </a:solidFill>
           <a:uFillTx/>
-          <a:latin typeface="+mj-lt"/>
-          <a:ea typeface="+mj-ea"/>
-          <a:cs typeface="+mj-cs"/>
+          <a:latin typeface="+mn-lt"/>
+          <a:ea typeface="+mn-ea"/>
+          <a:cs typeface="+mn-cs"/>
           <a:sym typeface="Calibri"/>
         </a:defRPr>
       </a:lvl9pPr>
@@ -2260,9 +2259,9 @@
             <a:srgbClr val="000000"/>
           </a:solidFill>
           <a:uFillTx/>
-          <a:latin typeface="+mj-lt"/>
-          <a:ea typeface="+mj-ea"/>
-          <a:cs typeface="+mj-cs"/>
+          <a:latin typeface="+mn-lt"/>
+          <a:ea typeface="+mn-ea"/>
+          <a:cs typeface="+mn-cs"/>
           <a:sym typeface="Calibri"/>
         </a:defRPr>
       </a:lvl1pPr>
@@ -2286,9 +2285,9 @@
             <a:srgbClr val="000000"/>
           </a:solidFill>
           <a:uFillTx/>
-          <a:latin typeface="+mj-lt"/>
-          <a:ea typeface="+mj-ea"/>
-          <a:cs typeface="+mj-cs"/>
+          <a:latin typeface="+mn-lt"/>
+          <a:ea typeface="+mn-ea"/>
+          <a:cs typeface="+mn-cs"/>
           <a:sym typeface="Calibri"/>
         </a:defRPr>
       </a:lvl2pPr>
@@ -2312,9 +2311,9 @@
             <a:srgbClr val="000000"/>
           </a:solidFill>
           <a:uFillTx/>
-          <a:latin typeface="+mj-lt"/>
-          <a:ea typeface="+mj-ea"/>
-          <a:cs typeface="+mj-cs"/>
+          <a:latin typeface="+mn-lt"/>
+          <a:ea typeface="+mn-ea"/>
+          <a:cs typeface="+mn-cs"/>
           <a:sym typeface="Calibri"/>
         </a:defRPr>
       </a:lvl3pPr>
@@ -2338,9 +2337,9 @@
             <a:srgbClr val="000000"/>
           </a:solidFill>
           <a:uFillTx/>
-          <a:latin typeface="+mj-lt"/>
-          <a:ea typeface="+mj-ea"/>
-          <a:cs typeface="+mj-cs"/>
+          <a:latin typeface="+mn-lt"/>
+          <a:ea typeface="+mn-ea"/>
+          <a:cs typeface="+mn-cs"/>
           <a:sym typeface="Calibri"/>
         </a:defRPr>
       </a:lvl4pPr>
@@ -2364,9 +2363,9 @@
             <a:srgbClr val="000000"/>
           </a:solidFill>
           <a:uFillTx/>
-          <a:latin typeface="+mj-lt"/>
-          <a:ea typeface="+mj-ea"/>
-          <a:cs typeface="+mj-cs"/>
+          <a:latin typeface="+mn-lt"/>
+          <a:ea typeface="+mn-ea"/>
+          <a:cs typeface="+mn-cs"/>
           <a:sym typeface="Calibri"/>
         </a:defRPr>
       </a:lvl5pPr>
@@ -2390,9 +2389,9 @@
             <a:srgbClr val="000000"/>
           </a:solidFill>
           <a:uFillTx/>
-          <a:latin typeface="+mj-lt"/>
-          <a:ea typeface="+mj-ea"/>
-          <a:cs typeface="+mj-cs"/>
+          <a:latin typeface="+mn-lt"/>
+          <a:ea typeface="+mn-ea"/>
+          <a:cs typeface="+mn-cs"/>
           <a:sym typeface="Calibri"/>
         </a:defRPr>
       </a:lvl6pPr>
@@ -2416,9 +2415,9 @@
             <a:srgbClr val="000000"/>
           </a:solidFill>
           <a:uFillTx/>
-          <a:latin typeface="+mj-lt"/>
-          <a:ea typeface="+mj-ea"/>
-          <a:cs typeface="+mj-cs"/>
+          <a:latin typeface="+mn-lt"/>
+          <a:ea typeface="+mn-ea"/>
+          <a:cs typeface="+mn-cs"/>
           <a:sym typeface="Calibri"/>
         </a:defRPr>
       </a:lvl7pPr>
@@ -2442,9 +2441,9 @@
             <a:srgbClr val="000000"/>
           </a:solidFill>
           <a:uFillTx/>
-          <a:latin typeface="+mj-lt"/>
-          <a:ea typeface="+mj-ea"/>
-          <a:cs typeface="+mj-cs"/>
+          <a:latin typeface="+mn-lt"/>
+          <a:ea typeface="+mn-ea"/>
+          <a:cs typeface="+mn-cs"/>
           <a:sym typeface="Calibri"/>
         </a:defRPr>
       </a:lvl8pPr>
@@ -2468,9 +2467,9 @@
             <a:srgbClr val="000000"/>
           </a:solidFill>
           <a:uFillTx/>
-          <a:latin typeface="+mj-lt"/>
-          <a:ea typeface="+mj-ea"/>
-          <a:cs typeface="+mj-cs"/>
+          <a:latin typeface="+mn-lt"/>
+          <a:ea typeface="+mn-ea"/>
+          <a:cs typeface="+mn-cs"/>
           <a:sym typeface="Calibri"/>
         </a:defRPr>
       </a:lvl9pPr>
@@ -2748,7 +2747,7 @@
         <p:spPr>
           <a:xfrm>
             <a:off x="868680" y="1920236"/>
-            <a:ext cx="10424161" cy="2377450"/>
+            <a:ext cx="10424161" cy="2377451"/>
           </a:xfrm>
           <a:prstGeom prst="rect">
             <a:avLst/>
@@ -2792,7 +2791,7 @@
         <p:spPr>
           <a:xfrm>
             <a:off x="868680" y="3886198"/>
-            <a:ext cx="9966961" cy="1097287"/>
+            <a:ext cx="9966961" cy="1097288"/>
           </a:xfrm>
           <a:prstGeom prst="rect">
             <a:avLst/>
@@ -2872,9 +2871,9 @@
             </a:r>
             <a:r>
               <a:rPr>
-                <a:latin typeface="+mn-lt"/>
-                <a:ea typeface="+mn-ea"/>
-                <a:cs typeface="+mn-cs"/>
+                <a:latin typeface="+mj-lt"/>
+                <a:ea typeface="+mj-ea"/>
+                <a:cs typeface="+mj-cs"/>
                 <a:sym typeface="Helvetica"/>
               </a:rPr>
               <a:t>及其前身專案</a:t>
@@ -3014,9 +3013,9 @@
             </a:r>
             <a:r>
               <a:rPr>
-                <a:latin typeface="+mn-lt"/>
-                <a:ea typeface="+mn-ea"/>
-                <a:cs typeface="+mn-cs"/>
+                <a:latin typeface="+mj-lt"/>
+                <a:ea typeface="+mj-ea"/>
+                <a:cs typeface="+mj-cs"/>
                 <a:sym typeface="Helvetica"/>
               </a:rPr>
               <a:t>：離線 </a:t>
@@ -3026,9 +3025,9 @@
             </a:r>
             <a:r>
               <a:rPr>
-                <a:latin typeface="+mn-lt"/>
-                <a:ea typeface="+mn-ea"/>
-                <a:cs typeface="+mn-cs"/>
+                <a:latin typeface="+mj-lt"/>
+                <a:ea typeface="+mj-ea"/>
+                <a:cs typeface="+mj-cs"/>
                 <a:sym typeface="Helvetica"/>
               </a:rPr>
               <a:t>樹狀編輯器</a:t>
@@ -3068,9 +3067,9 @@
                 <a:solidFill>
                   <a:srgbClr val="FFFFFF"/>
                 </a:solidFill>
-                <a:latin typeface="+mj-lt"/>
-                <a:ea typeface="+mj-ea"/>
-                <a:cs typeface="+mj-cs"/>
+                <a:latin typeface="+mn-lt"/>
+                <a:ea typeface="+mn-ea"/>
+                <a:cs typeface="+mn-cs"/>
                 <a:sym typeface="Calibri"/>
               </a:defRPr>
             </a:pPr>
@@ -3335,7 +3334,7 @@
         <p:spPr>
           <a:xfrm>
             <a:off x="731518" y="2148836"/>
-            <a:ext cx="10515604" cy="4206251"/>
+            <a:ext cx="10515604" cy="4206252"/>
           </a:xfrm>
           <a:prstGeom prst="rect">
             <a:avLst/>
@@ -3374,9 +3373,9 @@
             </a:r>
             <a:r>
               <a:rPr>
-                <a:latin typeface="+mn-lt"/>
-                <a:ea typeface="+mn-ea"/>
-                <a:cs typeface="+mn-cs"/>
+                <a:latin typeface="+mj-lt"/>
+                <a:ea typeface="+mj-ea"/>
+                <a:cs typeface="+mj-cs"/>
                 <a:sym typeface="Helvetica"/>
               </a:rPr>
               <a:t>從「自己電腦上的小工具」變成「打開瀏覽器就能用、資料存在同一個地方」</a:t>
@@ -3402,9 +3401,9 @@
             </a:r>
             <a:r>
               <a:rPr>
-                <a:latin typeface="+mn-lt"/>
-                <a:ea typeface="+mn-ea"/>
-                <a:cs typeface="+mn-cs"/>
+                <a:latin typeface="+mj-lt"/>
+                <a:ea typeface="+mj-ea"/>
+                <a:cs typeface="+mj-cs"/>
                 <a:sym typeface="Helvetica"/>
               </a:rPr>
               <a:t>加了登入，也把部門的界線做進去：不同科別看到的東西不一樣</a:t>
@@ -3430,9 +3429,9 @@
             </a:r>
             <a:r>
               <a:rPr>
-                <a:latin typeface="+mn-lt"/>
-                <a:ea typeface="+mn-ea"/>
-                <a:cs typeface="+mn-cs"/>
+                <a:latin typeface="+mj-lt"/>
+                <a:ea typeface="+mj-ea"/>
+                <a:cs typeface="+mj-cs"/>
                 <a:sym typeface="Helvetica"/>
               </a:rPr>
               <a:t>多人同時編輯同一張表，別人改了什麼，畫面會即時跟著動</a:t>
@@ -3458,9 +3457,9 @@
             </a:r>
             <a:r>
               <a:rPr>
-                <a:latin typeface="+mn-lt"/>
-                <a:ea typeface="+mn-ea"/>
-                <a:cs typeface="+mn-cs"/>
+                <a:latin typeface="+mj-lt"/>
+                <a:ea typeface="+mj-ea"/>
+                <a:cs typeface="+mj-cs"/>
                 <a:sym typeface="Helvetica"/>
               </a:rPr>
               <a:t>這一步是整條路上第一次真正的升級：從單機檔案變成有帳號、有資料庫的正式系統</a:t>
@@ -3600,9 +3599,9 @@
             </a:r>
             <a:r>
               <a:rPr>
-                <a:latin typeface="+mn-lt"/>
-                <a:ea typeface="+mn-ea"/>
-                <a:cs typeface="+mn-cs"/>
+                <a:latin typeface="+mj-lt"/>
+                <a:ea typeface="+mj-ea"/>
+                <a:cs typeface="+mj-cs"/>
                 <a:sym typeface="Helvetica"/>
               </a:rPr>
               <a:t>：多人版 </a:t>
@@ -3612,9 +3611,9 @@
             </a:r>
             <a:r>
               <a:rPr>
-                <a:latin typeface="+mn-lt"/>
-                <a:ea typeface="+mn-ea"/>
-                <a:cs typeface="+mn-cs"/>
+                <a:latin typeface="+mj-lt"/>
+                <a:ea typeface="+mj-ea"/>
+                <a:cs typeface="+mj-cs"/>
                 <a:sym typeface="Helvetica"/>
               </a:rPr>
               <a:t>樹狀畫面</a:t>
@@ -3654,9 +3653,9 @@
                 <a:solidFill>
                   <a:srgbClr val="FFFFFF"/>
                 </a:solidFill>
-                <a:latin typeface="+mj-lt"/>
-                <a:ea typeface="+mj-ea"/>
-                <a:cs typeface="+mj-cs"/>
+                <a:latin typeface="+mn-lt"/>
+                <a:ea typeface="+mn-ea"/>
+                <a:cs typeface="+mn-cs"/>
                 <a:sym typeface="Calibri"/>
               </a:defRPr>
             </a:pPr>
@@ -3682,7 +3681,7 @@
         <p:spPr>
           <a:xfrm>
             <a:off x="4898654" y="1965960"/>
-            <a:ext cx="2394395" cy="4145416"/>
+            <a:ext cx="2394396" cy="4145416"/>
           </a:xfrm>
           <a:prstGeom prst="rect">
             <a:avLst/>
@@ -3931,7 +3930,7 @@
         <p:spPr>
           <a:xfrm>
             <a:off x="731518" y="2148836"/>
-            <a:ext cx="10515604" cy="4206251"/>
+            <a:ext cx="10515604" cy="4206252"/>
           </a:xfrm>
           <a:prstGeom prst="rect">
             <a:avLst/>
@@ -3970,9 +3969,9 @@
             </a:r>
             <a:r>
               <a:rPr>
-                <a:latin typeface="+mn-lt"/>
-                <a:ea typeface="+mn-ea"/>
-                <a:cs typeface="+mn-cs"/>
+                <a:latin typeface="+mj-lt"/>
+                <a:ea typeface="+mj-ea"/>
+                <a:cs typeface="+mj-cs"/>
                 <a:sym typeface="Helvetica"/>
               </a:rPr>
               <a:t>畫面換成待辦／進行中／完成三欄，工作變成一張張卡片，用拖的改狀態</a:t>
@@ -3998,9 +3997,9 @@
             </a:r>
             <a:r>
               <a:rPr>
-                <a:latin typeface="+mn-lt"/>
-                <a:ea typeface="+mn-ea"/>
-                <a:cs typeface="+mn-cs"/>
+                <a:latin typeface="+mj-lt"/>
+                <a:ea typeface="+mj-ea"/>
+                <a:cs typeface="+mj-cs"/>
                 <a:sym typeface="Helvetica"/>
               </a:rPr>
               <a:t>卡片可以指派給人、設優先度跟日期，一眼看得出誰手上有什麼</a:t>
@@ -4026,9 +4025,9 @@
             </a:r>
             <a:r>
               <a:rPr>
-                <a:latin typeface="+mn-lt"/>
-                <a:ea typeface="+mn-ea"/>
-                <a:cs typeface="+mn-cs"/>
+                <a:latin typeface="+mj-lt"/>
+                <a:ea typeface="+mj-ea"/>
+                <a:cs typeface="+mj-cs"/>
                 <a:sym typeface="Helvetica"/>
               </a:rPr>
               <a:t>登入、部門權限、頁面外框直接沿用上一代，省下重新驗證的時間</a:t>
@@ -4054,9 +4053,9 @@
             </a:r>
             <a:r>
               <a:rPr>
-                <a:latin typeface="+mn-lt"/>
-                <a:ea typeface="+mn-ea"/>
-                <a:cs typeface="+mn-cs"/>
+                <a:latin typeface="+mj-lt"/>
+                <a:ea typeface="+mj-ea"/>
+                <a:cs typeface="+mj-cs"/>
                 <a:sym typeface="Helvetica"/>
               </a:rPr>
               <a:t>做完這一步，手上同時有「樹」跟「看板」兩套東西</a:t>
@@ -4066,9 +4065,9 @@
             </a:r>
             <a:r>
               <a:rPr>
-                <a:latin typeface="+mn-lt"/>
-                <a:ea typeface="+mn-ea"/>
-                <a:cs typeface="+mn-cs"/>
+                <a:latin typeface="+mj-lt"/>
+                <a:ea typeface="+mj-ea"/>
+                <a:cs typeface="+mj-cs"/>
                 <a:sym typeface="Helvetica"/>
               </a:rPr>
               <a:t>也就是後面想合併的起因</a:t>
@@ -4208,9 +4207,9 @@
             </a:r>
             <a:r>
               <a:rPr>
-                <a:latin typeface="+mn-lt"/>
-                <a:ea typeface="+mn-ea"/>
-                <a:cs typeface="+mn-cs"/>
+                <a:latin typeface="+mj-lt"/>
+                <a:ea typeface="+mj-ea"/>
+                <a:cs typeface="+mj-cs"/>
                 <a:sym typeface="Helvetica"/>
               </a:rPr>
               <a:t>：待辦／進行中／完成三欄看板</a:t>
@@ -4227,7 +4226,7 @@
         <p:spPr>
           <a:xfrm>
             <a:off x="3031663" y="1911092"/>
-            <a:ext cx="6128367" cy="4246946"/>
+            <a:ext cx="6128368" cy="4246946"/>
           </a:xfrm>
           <a:prstGeom prst="rect">
             <a:avLst/>
@@ -4250,9 +4249,9 @@
                 <a:solidFill>
                   <a:srgbClr val="FFFFFF"/>
                 </a:solidFill>
-                <a:latin typeface="+mj-lt"/>
-                <a:ea typeface="+mj-ea"/>
-                <a:cs typeface="+mj-cs"/>
+                <a:latin typeface="+mn-lt"/>
+                <a:ea typeface="+mn-ea"/>
+                <a:cs typeface="+mn-cs"/>
                 <a:sym typeface="Calibri"/>
               </a:defRPr>
             </a:pPr>
@@ -4461,7 +4460,7 @@
         </p:nvSpPr>
         <p:spPr>
           <a:xfrm>
-            <a:off x="731514" y="1691638"/>
+            <a:off x="731513" y="1691638"/>
             <a:ext cx="3660137" cy="345437"/>
           </a:xfrm>
           <a:prstGeom prst="rect">
@@ -4545,9 +4544,9 @@
             </a:r>
             <a:r>
               <a:rPr>
-                <a:latin typeface="+mn-lt"/>
-                <a:ea typeface="+mn-ea"/>
-                <a:cs typeface="+mn-cs"/>
+                <a:latin typeface="+mj-lt"/>
+                <a:ea typeface="+mj-ea"/>
+                <a:cs typeface="+mj-cs"/>
                 <a:sym typeface="Helvetica"/>
               </a:rPr>
               <a:t>／</a:t>
@@ -4557,9 +4556,9 @@
             </a:r>
             <a:r>
               <a:rPr>
-                <a:latin typeface="+mn-lt"/>
-                <a:ea typeface="+mn-ea"/>
-                <a:cs typeface="+mn-cs"/>
+                <a:latin typeface="+mj-lt"/>
+                <a:ea typeface="+mj-ea"/>
+                <a:cs typeface="+mj-cs"/>
                 <a:sym typeface="Helvetica"/>
               </a:rPr>
               <a:t>做得好的是樹狀規劃：一層層拆解工作項目</a:t>
@@ -4585,9 +4584,9 @@
             </a:r>
             <a:r>
               <a:rPr>
-                <a:latin typeface="+mn-lt"/>
-                <a:ea typeface="+mn-ea"/>
-                <a:cs typeface="+mn-cs"/>
+                <a:latin typeface="+mj-lt"/>
+                <a:ea typeface="+mj-ea"/>
+                <a:cs typeface="+mj-cs"/>
                 <a:sym typeface="Helvetica"/>
               </a:rPr>
               <a:t>做得好的是看板指派：建一張卡片就能動手，不用先想清楚屬於哪一層</a:t>
@@ -4613,9 +4612,9 @@
             </a:r>
             <a:r>
               <a:rPr>
-                <a:latin typeface="+mn-lt"/>
-                <a:ea typeface="+mn-ea"/>
-                <a:cs typeface="+mn-cs"/>
+                <a:latin typeface="+mj-lt"/>
+                <a:ea typeface="+mj-ea"/>
+                <a:cs typeface="+mj-cs"/>
                 <a:sym typeface="Helvetica"/>
               </a:rPr>
               <a:t>決定「</a:t>
@@ -4625,9 +4624,9 @@
             </a:r>
             <a:r>
               <a:rPr>
-                <a:latin typeface="+mn-lt"/>
-                <a:ea typeface="+mn-ea"/>
-                <a:cs typeface="+mn-cs"/>
+                <a:latin typeface="+mj-lt"/>
+                <a:ea typeface="+mj-ea"/>
+                <a:cs typeface="+mj-cs"/>
                 <a:sym typeface="Helvetica"/>
               </a:rPr>
               <a:t>節點即任務」把兩者合併，結果變成要先把骨架搭好，才能建立可指派的任務，兩種用法卡在一起</a:t>
@@ -4653,9 +4652,9 @@
             </a:r>
             <a:r>
               <a:rPr>
-                <a:latin typeface="+mn-lt"/>
-                <a:ea typeface="+mn-ea"/>
-                <a:cs typeface="+mn-cs"/>
+                <a:latin typeface="+mj-lt"/>
+                <a:ea typeface="+mj-ea"/>
+                <a:cs typeface="+mj-cs"/>
                 <a:sym typeface="Helvetica"/>
               </a:rPr>
               <a:t>使用者實際要的其實是先建任務、事後再歸類</a:t>
@@ -4665,9 +4664,9 @@
             </a:r>
             <a:r>
               <a:rPr>
-                <a:latin typeface="+mn-lt"/>
-                <a:ea typeface="+mn-ea"/>
-                <a:cs typeface="+mn-cs"/>
+                <a:latin typeface="+mj-lt"/>
+                <a:ea typeface="+mj-ea"/>
+                <a:cs typeface="+mj-cs"/>
                 <a:sym typeface="Helvetica"/>
               </a:rPr>
               <a:t>所以拆掉樹狀階層，任務改成天生獨立，這就是任務導向重構</a:t>
@@ -4694,7 +4693,7 @@
         <p:spPr>
           <a:xfrm>
             <a:off x="2579321" y="4150000"/>
-            <a:ext cx="1212966" cy="2100008"/>
+            <a:ext cx="1212967" cy="2100009"/>
           </a:xfrm>
           <a:prstGeom prst="rect">
             <a:avLst/>
@@ -4723,7 +4722,7 @@
         <p:spPr>
           <a:xfrm>
             <a:off x="7112840" y="4150000"/>
-            <a:ext cx="3360008" cy="2100008"/>
+            <a:ext cx="3360009" cy="2100009"/>
           </a:xfrm>
           <a:prstGeom prst="rect">
             <a:avLst/>
@@ -4742,7 +4741,7 @@
         <p:spPr>
           <a:xfrm>
             <a:off x="5785799" y="5074999"/>
-            <a:ext cx="400008" cy="250008"/>
+            <a:ext cx="400009" cy="250009"/>
           </a:xfrm>
           <a:prstGeom prst="rightArrow">
             <a:avLst>
@@ -4766,9 +4765,9 @@
                 <a:solidFill>
                   <a:srgbClr val="FFFFFF"/>
                 </a:solidFill>
-                <a:latin typeface="+mj-lt"/>
-                <a:ea typeface="+mj-ea"/>
-                <a:cs typeface="+mj-cs"/>
+                <a:latin typeface="+mn-lt"/>
+                <a:ea typeface="+mn-ea"/>
+                <a:cs typeface="+mn-cs"/>
                 <a:sym typeface="Calibri"/>
               </a:defRPr>
             </a:pPr>
@@ -4783,8 +4782,8 @@
         </p:nvSpPr>
         <p:spPr>
           <a:xfrm>
-            <a:off x="685793" y="6349998"/>
-            <a:ext cx="5000014" cy="228601"/>
+            <a:off x="685792" y="6349998"/>
+            <a:ext cx="5000016" cy="228601"/>
           </a:xfrm>
           <a:prstGeom prst="rect">
             <a:avLst/>
@@ -5020,7 +5019,7 @@
         <p:spPr>
           <a:xfrm>
             <a:off x="731518" y="1691636"/>
-            <a:ext cx="10515604" cy="4206251"/>
+            <a:ext cx="10515604" cy="4206252"/>
           </a:xfrm>
           <a:prstGeom prst="rect">
             <a:avLst/>
@@ -5059,9 +5058,9 @@
             </a:r>
             <a:r>
               <a:rPr>
-                <a:latin typeface="+mn-lt"/>
-                <a:ea typeface="+mn-ea"/>
-                <a:cs typeface="+mn-cs"/>
+                <a:latin typeface="+mj-lt"/>
+                <a:ea typeface="+mj-ea"/>
+                <a:cs typeface="+mj-cs"/>
                 <a:sym typeface="Helvetica"/>
               </a:rPr>
               <a:t>動手前，我會先讓 </a:t>
@@ -5071,9 +5070,9 @@
             </a:r>
             <a:r>
               <a:rPr>
-                <a:latin typeface="+mn-lt"/>
-                <a:ea typeface="+mn-ea"/>
-                <a:cs typeface="+mn-cs"/>
+                <a:latin typeface="+mj-lt"/>
+                <a:ea typeface="+mj-ea"/>
+                <a:cs typeface="+mj-cs"/>
                 <a:sym typeface="Helvetica"/>
               </a:rPr>
               <a:t>把舊專案的程式碼讀過一遍，比我自己憑印象猜準很多</a:t>
@@ -5099,9 +5098,9 @@
             </a:r>
             <a:r>
               <a:rPr>
-                <a:latin typeface="+mn-lt"/>
-                <a:ea typeface="+mn-ea"/>
-                <a:cs typeface="+mn-cs"/>
+                <a:latin typeface="+mj-lt"/>
+                <a:ea typeface="+mj-ea"/>
+                <a:cs typeface="+mj-cs"/>
                 <a:sym typeface="Helvetica"/>
               </a:rPr>
               <a:t>一個任務開一個新對話，不讓前面累積的雜訊影響判斷</a:t>
@@ -5127,9 +5126,9 @@
             </a:r>
             <a:r>
               <a:rPr>
-                <a:latin typeface="+mn-lt"/>
-                <a:ea typeface="+mn-ea"/>
-                <a:cs typeface="+mn-cs"/>
+                <a:latin typeface="+mj-lt"/>
+                <a:ea typeface="+mj-ea"/>
+                <a:cs typeface="+mj-cs"/>
                 <a:sym typeface="Helvetica"/>
               </a:rPr>
               <a:t>寫的跟審的分開：同一段東西，我另外開一個 </a:t>
@@ -5139,9 +5138,9 @@
             </a:r>
             <a:r>
               <a:rPr>
-                <a:latin typeface="+mn-lt"/>
-                <a:ea typeface="+mn-ea"/>
-                <a:cs typeface="+mn-cs"/>
+                <a:latin typeface="+mj-lt"/>
+                <a:ea typeface="+mj-ea"/>
+                <a:cs typeface="+mj-cs"/>
                 <a:sym typeface="Helvetica"/>
               </a:rPr>
               <a:t>來挑毛病，不讓它自己審自己</a:t>
@@ -5167,9 +5166,9 @@
             </a:r>
             <a:r>
               <a:rPr>
-                <a:latin typeface="+mn-lt"/>
-                <a:ea typeface="+mn-ea"/>
-                <a:cs typeface="+mn-cs"/>
+                <a:latin typeface="+mj-lt"/>
+                <a:ea typeface="+mj-ea"/>
+                <a:cs typeface="+mj-cs"/>
                 <a:sym typeface="Helvetica"/>
               </a:rPr>
               <a:t>簡單的抄寫用便宜快的，需要判斷的才換強的，額度留給真的難的地方</a:t>
@@ -5195,9 +5194,9 @@
             </a:r>
             <a:r>
               <a:rPr>
-                <a:latin typeface="+mn-lt"/>
-                <a:ea typeface="+mn-ea"/>
-                <a:cs typeface="+mn-cs"/>
+                <a:latin typeface="+mj-lt"/>
+                <a:ea typeface="+mj-ea"/>
+                <a:cs typeface="+mj-cs"/>
                 <a:sym typeface="Helvetica"/>
               </a:rPr>
               <a:t>進度另外記一份檔案，對話斷掉重開，看記錄就能接著做</a:t>
@@ -5214,7 +5213,7 @@
         <p:spPr>
           <a:xfrm>
             <a:off x="594359" y="4846320"/>
-            <a:ext cx="30008" cy="1280168"/>
+            <a:ext cx="30009" cy="1280169"/>
           </a:xfrm>
           <a:prstGeom prst="rect">
             <a:avLst/>
@@ -5242,9 +5241,9 @@
                 <a:solidFill>
                   <a:srgbClr val="FFFFFF"/>
                 </a:solidFill>
-                <a:latin typeface="+mj-lt"/>
-                <a:ea typeface="+mj-ea"/>
-                <a:cs typeface="+mj-cs"/>
+                <a:latin typeface="+mn-lt"/>
+                <a:ea typeface="+mn-ea"/>
+                <a:cs typeface="+mn-cs"/>
                 <a:sym typeface="Calibri"/>
               </a:defRPr>
             </a:pPr>
@@ -5260,7 +5259,7 @@
         <p:spPr>
           <a:xfrm>
             <a:off x="868677" y="4846320"/>
-            <a:ext cx="10149845" cy="1371606"/>
+            <a:ext cx="10149845" cy="1371607"/>
           </a:xfrm>
           <a:prstGeom prst="rect">
             <a:avLst/>
@@ -5425,7 +5424,7 @@
         <p:spPr>
           <a:xfrm>
             <a:off x="731518" y="1691637"/>
-            <a:ext cx="10515604" cy="1463049"/>
+            <a:ext cx="10515604" cy="1463050"/>
           </a:xfrm>
           <a:prstGeom prst="rect">
             <a:avLst/>
@@ -5464,9 +5463,9 @@
             </a:r>
             <a:r>
               <a:rPr>
-                <a:latin typeface="+mn-lt"/>
-                <a:ea typeface="+mn-ea"/>
-                <a:cs typeface="+mn-cs"/>
+                <a:latin typeface="+mj-lt"/>
+                <a:ea typeface="+mj-ea"/>
+                <a:cs typeface="+mj-cs"/>
                 <a:sym typeface="Helvetica"/>
               </a:rPr>
               <a:t>後來養成習慣：可疑的結論不聽解釋，直接要求重現一次給我看</a:t>
@@ -5492,9 +5491,9 @@
             </a:r>
             <a:r>
               <a:rPr>
-                <a:latin typeface="+mn-lt"/>
-                <a:ea typeface="+mn-ea"/>
-                <a:cs typeface="+mn-cs"/>
+                <a:latin typeface="+mj-lt"/>
+                <a:ea typeface="+mj-ea"/>
+                <a:cs typeface="+mj-cs"/>
                 <a:sym typeface="Helvetica"/>
               </a:rPr>
               <a:t>兩個印象比較深的例子：</a:t>
@@ -5510,10 +5509,10 @@
         </p:nvGrpSpPr>
         <p:grpSpPr>
           <a:xfrm>
-            <a:off x="685791" y="3246115"/>
-            <a:ext cx="5120659" cy="2834658"/>
-            <a:chOff x="-1" y="0"/>
-            <a:chExt cx="5120657" cy="2834656"/>
+            <a:off x="685790" y="3246114"/>
+            <a:ext cx="5120662" cy="2834660"/>
+            <a:chOff x="0" y="0"/>
+            <a:chExt cx="5120661" cy="2834658"/>
           </a:xfrm>
         </p:grpSpPr>
         <p:sp>
@@ -5524,8 +5523,8 @@
           </p:nvSpPr>
           <p:spPr>
             <a:xfrm>
-              <a:off x="-2" y="-1"/>
-              <a:ext cx="5120659" cy="2834657"/>
+              <a:off x="-1" y="-1"/>
+              <a:ext cx="5120662" cy="2834659"/>
             </a:xfrm>
             <a:prstGeom prst="roundRect">
               <a:avLst>
@@ -5558,9 +5557,9 @@
                   <a:solidFill>
                     <a:srgbClr val="FFFFFF"/>
                   </a:solidFill>
-                  <a:latin typeface="+mj-lt"/>
-                  <a:ea typeface="+mj-ea"/>
-                  <a:cs typeface="+mj-cs"/>
+                  <a:latin typeface="+mn-lt"/>
+                  <a:ea typeface="+mn-ea"/>
+                  <a:cs typeface="+mn-cs"/>
                   <a:sym typeface="Calibri"/>
                 </a:defRPr>
               </a:pPr>
@@ -5575,8 +5574,8 @@
           </p:nvSpPr>
           <p:spPr>
             <a:xfrm>
-              <a:off x="85277" y="39558"/>
-              <a:ext cx="4950097" cy="2755538"/>
+              <a:off x="85278" y="39558"/>
+              <a:ext cx="4950100" cy="2755540"/>
             </a:xfrm>
             <a:prstGeom prst="rect">
               <a:avLst/>
@@ -5681,10 +5680,10 @@
         </p:nvGrpSpPr>
         <p:grpSpPr>
           <a:xfrm>
-            <a:off x="6035032" y="3246115"/>
-            <a:ext cx="5394977" cy="2834658"/>
-            <a:chOff x="0" y="0"/>
-            <a:chExt cx="5394976" cy="2834656"/>
+            <a:off x="6035030" y="3246114"/>
+            <a:ext cx="5394979" cy="2834660"/>
+            <a:chOff x="-1" y="0"/>
+            <a:chExt cx="5394978" cy="2834658"/>
           </a:xfrm>
         </p:grpSpPr>
         <p:sp>
@@ -5695,8 +5694,8 @@
           </p:nvSpPr>
           <p:spPr>
             <a:xfrm>
-              <a:off x="-1" y="-1"/>
-              <a:ext cx="5394977" cy="2834657"/>
+              <a:off x="-2" y="-1"/>
+              <a:ext cx="5394979" cy="2834659"/>
             </a:xfrm>
             <a:prstGeom prst="roundRect">
               <a:avLst>
@@ -5729,9 +5728,9 @@
                   <a:solidFill>
                     <a:srgbClr val="FFFFFF"/>
                   </a:solidFill>
-                  <a:latin typeface="+mj-lt"/>
-                  <a:ea typeface="+mj-ea"/>
-                  <a:cs typeface="+mj-cs"/>
+                  <a:latin typeface="+mn-lt"/>
+                  <a:ea typeface="+mn-ea"/>
+                  <a:cs typeface="+mn-cs"/>
                   <a:sym typeface="Calibri"/>
                 </a:defRPr>
               </a:pPr>
@@ -5746,8 +5745,8 @@
           </p:nvSpPr>
           <p:spPr>
             <a:xfrm>
-              <a:off x="85277" y="39558"/>
-              <a:ext cx="5224419" cy="2755538"/>
+              <a:off x="85276" y="39558"/>
+              <a:ext cx="5224422" cy="2755540"/>
             </a:xfrm>
             <a:prstGeom prst="rect">
               <a:avLst/>
@@ -5967,7 +5966,7 @@
         <p:spPr>
           <a:xfrm>
             <a:off x="731518" y="1691636"/>
-            <a:ext cx="10515604" cy="400002"/>
+            <a:ext cx="10515604" cy="400003"/>
           </a:xfrm>
           <a:prstGeom prst="rect">
             <a:avLst/>
@@ -6018,9 +6017,9 @@
         <p:grpSpPr>
           <a:xfrm>
             <a:off x="731516" y="2149999"/>
-            <a:ext cx="10515602" cy="672117"/>
+            <a:ext cx="10515604" cy="672117"/>
             <a:chOff x="0" y="0"/>
-            <a:chExt cx="10515600" cy="672116"/>
+            <a:chExt cx="10515603" cy="672116"/>
           </a:xfrm>
         </p:grpSpPr>
         <p:sp>
@@ -6032,7 +6031,7 @@
           <p:spPr>
             <a:xfrm>
               <a:off x="0" y="0"/>
-              <a:ext cx="10515601" cy="650003"/>
+              <a:ext cx="10515604" cy="650004"/>
             </a:xfrm>
             <a:prstGeom prst="roundRect">
               <a:avLst>
@@ -6075,8 +6074,8 @@
           </p:nvSpPr>
           <p:spPr>
             <a:xfrm>
-              <a:off x="99518" y="9518"/>
-              <a:ext cx="10316565" cy="662599"/>
+              <a:off x="99517" y="9518"/>
+              <a:ext cx="10316569" cy="662599"/>
             </a:xfrm>
             <a:prstGeom prst="rect">
               <a:avLst/>
@@ -6146,9 +6145,9 @@
         <p:grpSpPr>
           <a:xfrm>
             <a:off x="731516" y="2949999"/>
-            <a:ext cx="10515602" cy="2350002"/>
+            <a:ext cx="10515604" cy="2350003"/>
             <a:chOff x="0" y="0"/>
-            <a:chExt cx="10515600" cy="2350001"/>
+            <a:chExt cx="10515603" cy="2350002"/>
           </a:xfrm>
         </p:grpSpPr>
         <p:sp>
@@ -6160,7 +6159,7 @@
           <p:spPr>
             <a:xfrm>
               <a:off x="0" y="0"/>
-              <a:ext cx="10515601" cy="2350002"/>
+              <a:ext cx="10515604" cy="2350003"/>
             </a:xfrm>
             <a:prstGeom prst="roundRect">
               <a:avLst>
@@ -6203,8 +6202,8 @@
           </p:nvSpPr>
           <p:spPr>
             <a:xfrm>
-              <a:off x="124413" y="34414"/>
-              <a:ext cx="10266774" cy="1297599"/>
+              <a:off x="124412" y="34414"/>
+              <a:ext cx="10266778" cy="1297599"/>
             </a:xfrm>
             <a:prstGeom prst="rect">
               <a:avLst/>
@@ -6285,9 +6284,9 @@
               </a:r>
               <a:r>
                 <a:rPr>
-                  <a:latin typeface="+mn-lt"/>
-                  <a:ea typeface="+mn-ea"/>
-                  <a:cs typeface="+mn-cs"/>
+                  <a:latin typeface="+mj-lt"/>
+                  <a:ea typeface="+mj-ea"/>
+                  <a:cs typeface="+mj-cs"/>
                   <a:sym typeface="Helvetica"/>
                 </a:rPr>
                 <a:t>執行任務導向重構（推薦）</a:t>
@@ -6297,9 +6296,9 @@
               </a:r>
               <a:r>
                 <a:rPr>
-                  <a:latin typeface="+mn-lt"/>
-                  <a:ea typeface="+mn-ea"/>
-                  <a:cs typeface="+mn-cs"/>
+                  <a:latin typeface="+mj-lt"/>
+                  <a:ea typeface="+mj-ea"/>
+                  <a:cs typeface="+mj-cs"/>
                   <a:sym typeface="Helvetica"/>
                 </a:rPr>
                 <a:t>看板變預設首頁，移除舊三分頁</a:t>
@@ -6325,9 +6324,9 @@
               </a:r>
               <a:r>
                 <a:rPr>
-                  <a:latin typeface="+mn-lt"/>
-                  <a:ea typeface="+mn-ea"/>
-                  <a:cs typeface="+mn-cs"/>
+                  <a:latin typeface="+mj-lt"/>
+                  <a:ea typeface="+mj-ea"/>
+                  <a:cs typeface="+mj-cs"/>
                   <a:sym typeface="Helvetica"/>
                 </a:rPr>
                 <a:t>在現有 </a:t>
@@ -6337,9 +6336,9 @@
               </a:r>
               <a:r>
                 <a:rPr>
-                  <a:latin typeface="+mn-lt"/>
-                  <a:ea typeface="+mn-ea"/>
-                  <a:cs typeface="+mn-cs"/>
+                  <a:latin typeface="+mj-lt"/>
+                  <a:ea typeface="+mj-ea"/>
+                  <a:cs typeface="+mj-cs"/>
                   <a:sym typeface="Helvetica"/>
                 </a:rPr>
                 <a:t>樹模型上補完 </a:t>
@@ -6349,9 +6348,9 @@
               </a:r>
               <a:r>
                 <a:rPr>
-                  <a:latin typeface="+mn-lt"/>
-                  <a:ea typeface="+mn-ea"/>
-                  <a:cs typeface="+mn-cs"/>
+                  <a:latin typeface="+mj-lt"/>
+                  <a:ea typeface="+mj-ea"/>
+                  <a:cs typeface="+mj-cs"/>
                   <a:sym typeface="Helvetica"/>
                 </a:rPr>
                 <a:t>樹狀模型不變，把佔位符分頁做出來</a:t>
@@ -6394,9 +6393,9 @@
                 <a:solidFill>
                   <a:srgbClr val="55596A"/>
                 </a:solidFill>
-                <a:latin typeface="+mj-lt"/>
-                <a:ea typeface="+mj-ea"/>
-                <a:cs typeface="+mj-cs"/>
+                <a:latin typeface="+mn-lt"/>
+                <a:ea typeface="+mn-ea"/>
+                <a:cs typeface="+mn-cs"/>
                 <a:sym typeface="Calibri"/>
               </a:defRPr>
             </a:pPr>
@@ -6586,7 +6585,7 @@
         <p:spPr>
           <a:xfrm>
             <a:off x="731518" y="1691636"/>
-            <a:ext cx="10515604" cy="400002"/>
+            <a:ext cx="10515604" cy="400003"/>
           </a:xfrm>
           <a:prstGeom prst="rect">
             <a:avLst/>
@@ -6637,9 +6636,9 @@
         <p:grpSpPr>
           <a:xfrm>
             <a:off x="731516" y="2149999"/>
-            <a:ext cx="10515602" cy="672117"/>
+            <a:ext cx="10515604" cy="672117"/>
             <a:chOff x="0" y="0"/>
-            <a:chExt cx="10515600" cy="672116"/>
+            <a:chExt cx="10515603" cy="672116"/>
           </a:xfrm>
         </p:grpSpPr>
         <p:sp>
@@ -6651,7 +6650,7 @@
           <p:spPr>
             <a:xfrm>
               <a:off x="0" y="0"/>
-              <a:ext cx="10515601" cy="650003"/>
+              <a:ext cx="10515604" cy="650004"/>
             </a:xfrm>
             <a:prstGeom prst="roundRect">
               <a:avLst>
@@ -6694,8 +6693,8 @@
           </p:nvSpPr>
           <p:spPr>
             <a:xfrm>
-              <a:off x="99518" y="9518"/>
-              <a:ext cx="10316565" cy="662599"/>
+              <a:off x="99517" y="9518"/>
+              <a:ext cx="10316569" cy="662599"/>
             </a:xfrm>
             <a:prstGeom prst="rect">
               <a:avLst/>
@@ -6777,9 +6776,9 @@
         <p:grpSpPr>
           <a:xfrm>
             <a:off x="731516" y="2949999"/>
-            <a:ext cx="10515602" cy="2350002"/>
+            <a:ext cx="10515604" cy="2350003"/>
             <a:chOff x="0" y="0"/>
-            <a:chExt cx="10515600" cy="2350001"/>
+            <a:chExt cx="10515603" cy="2350002"/>
           </a:xfrm>
         </p:grpSpPr>
         <p:sp>
@@ -6791,7 +6790,7 @@
           <p:spPr>
             <a:xfrm>
               <a:off x="0" y="0"/>
-              <a:ext cx="10515601" cy="2350002"/>
+              <a:ext cx="10515604" cy="2350003"/>
             </a:xfrm>
             <a:prstGeom prst="roundRect">
               <a:avLst>
@@ -6834,8 +6833,8 @@
           </p:nvSpPr>
           <p:spPr>
             <a:xfrm>
-              <a:off x="124413" y="34414"/>
-              <a:ext cx="10266774" cy="1231370"/>
+              <a:off x="124412" y="34414"/>
+              <a:ext cx="10266778" cy="1231370"/>
             </a:xfrm>
             <a:prstGeom prst="rect">
               <a:avLst/>
@@ -6895,9 +6894,9 @@
               </a:r>
               <a:r>
                 <a:rPr>
-                  <a:latin typeface="+mn-lt"/>
-                  <a:ea typeface="+mn-ea"/>
-                  <a:cs typeface="+mn-cs"/>
+                  <a:latin typeface="+mj-lt"/>
+                  <a:ea typeface="+mj-ea"/>
+                  <a:cs typeface="+mj-cs"/>
                   <a:sym typeface="Helvetica"/>
                 </a:rPr>
                 <a:t>（都是文件／測試缺口）</a:t>
@@ -7021,9 +7020,9 @@
                 <a:solidFill>
                   <a:srgbClr val="55596A"/>
                 </a:solidFill>
-                <a:latin typeface="+mj-lt"/>
-                <a:ea typeface="+mj-ea"/>
-                <a:cs typeface="+mj-cs"/>
+                <a:latin typeface="+mn-lt"/>
+                <a:ea typeface="+mn-ea"/>
+                <a:cs typeface="+mn-cs"/>
                 <a:sym typeface="Calibri"/>
               </a:defRPr>
             </a:pPr>
@@ -7126,9 +7125,9 @@
                 <a:solidFill>
                   <a:srgbClr val="FFFFFF"/>
                 </a:solidFill>
-                <a:latin typeface="+mj-lt"/>
-                <a:ea typeface="+mj-ea"/>
-                <a:cs typeface="+mj-cs"/>
+                <a:latin typeface="+mn-lt"/>
+                <a:ea typeface="+mn-ea"/>
+                <a:cs typeface="+mn-cs"/>
                 <a:sym typeface="Calibri"/>
               </a:defRPr>
             </a:pPr>
@@ -7143,10 +7142,10 @@
         </p:nvGrpSpPr>
         <p:grpSpPr>
           <a:xfrm>
-            <a:off x="685800" y="699994"/>
-            <a:ext cx="10807700" cy="750010"/>
+            <a:off x="685800" y="699993"/>
+            <a:ext cx="10807700" cy="750011"/>
             <a:chOff x="0" y="0"/>
-            <a:chExt cx="10807700" cy="750008"/>
+            <a:chExt cx="10807700" cy="750010"/>
           </a:xfrm>
         </p:grpSpPr>
         <p:sp>
@@ -7158,7 +7157,7 @@
           <p:spPr>
             <a:xfrm>
               <a:off x="0" y="-1"/>
-              <a:ext cx="10807700" cy="750009"/>
+              <a:ext cx="10807700" cy="750011"/>
             </a:xfrm>
             <a:prstGeom prst="roundRect">
               <a:avLst>
@@ -7185,9 +7184,9 @@
                   <a:solidFill>
                     <a:srgbClr val="FFFFFF"/>
                   </a:solidFill>
-                  <a:latin typeface="+mj-lt"/>
-                  <a:ea typeface="+mj-ea"/>
-                  <a:cs typeface="+mj-cs"/>
+                  <a:latin typeface="+mn-lt"/>
+                  <a:ea typeface="+mn-ea"/>
+                  <a:cs typeface="+mn-cs"/>
                   <a:sym typeface="Calibri"/>
                 </a:defRPr>
               </a:pPr>
@@ -7230,9 +7229,9 @@
                   <a:solidFill>
                     <a:srgbClr val="FFFFFF"/>
                   </a:solidFill>
-                  <a:latin typeface="+mj-lt"/>
-                  <a:ea typeface="+mj-ea"/>
-                  <a:cs typeface="+mj-cs"/>
+                  <a:latin typeface="+mn-lt"/>
+                  <a:ea typeface="+mn-ea"/>
+                  <a:cs typeface="+mn-cs"/>
                   <a:sym typeface="Calibri"/>
                 </a:defRPr>
               </a:lvl1pPr>
@@ -7708,7 +7707,7 @@
         <p:spPr>
           <a:xfrm>
             <a:off x="731518" y="1691636"/>
-            <a:ext cx="10515604" cy="4206251"/>
+            <a:ext cx="10515604" cy="4206252"/>
           </a:xfrm>
           <a:prstGeom prst="rect">
             <a:avLst/>
@@ -7747,9 +7746,9 @@
             </a:r>
             <a:r>
               <a:rPr>
-                <a:latin typeface="+mn-lt"/>
-                <a:ea typeface="+mn-ea"/>
-                <a:cs typeface="+mn-cs"/>
+                <a:latin typeface="+mj-lt"/>
+                <a:ea typeface="+mj-ea"/>
+                <a:cs typeface="+mj-cs"/>
                 <a:sym typeface="Helvetica"/>
               </a:rPr>
               <a:t>有畫面的功能，一定要截圖給我看，不接受只說「已完成」</a:t>
@@ -7775,9 +7774,9 @@
             </a:r>
             <a:r>
               <a:rPr>
-                <a:latin typeface="+mn-lt"/>
-                <a:ea typeface="+mn-ea"/>
-                <a:cs typeface="+mn-cs"/>
+                <a:latin typeface="+mj-lt"/>
+                <a:ea typeface="+mj-ea"/>
+                <a:cs typeface="+mj-cs"/>
                 <a:sym typeface="Helvetica"/>
               </a:rPr>
               <a:t>要推上遠端，一律要我親自點頭才行，</a:t>
@@ -7787,9 +7786,9 @@
             </a:r>
             <a:r>
               <a:rPr>
-                <a:latin typeface="+mn-lt"/>
-                <a:ea typeface="+mn-ea"/>
-                <a:cs typeface="+mn-cs"/>
+                <a:latin typeface="+mj-lt"/>
+                <a:ea typeface="+mj-ea"/>
+                <a:cs typeface="+mj-cs"/>
                 <a:sym typeface="Helvetica"/>
               </a:rPr>
               <a:t>不能自己決定</a:t>
@@ -7815,9 +7814,9 @@
             </a:r>
             <a:r>
               <a:rPr>
-                <a:latin typeface="+mn-lt"/>
-                <a:ea typeface="+mn-ea"/>
-                <a:cs typeface="+mn-cs"/>
+                <a:latin typeface="+mj-lt"/>
+                <a:ea typeface="+mj-ea"/>
+                <a:cs typeface="+mj-cs"/>
                 <a:sym typeface="Helvetica"/>
               </a:rPr>
               <a:t>測試沒過就是還沒做完，沒有例外</a:t>
@@ -7948,7 +7947,7 @@
         <p:spPr>
           <a:xfrm>
             <a:off x="731518" y="1691637"/>
-            <a:ext cx="10515604" cy="500003"/>
+            <a:ext cx="10515604" cy="500004"/>
           </a:xfrm>
           <a:prstGeom prst="rect">
             <a:avLst/>
@@ -7999,9 +7998,9 @@
         <p:grpSpPr>
           <a:xfrm>
             <a:off x="731516" y="2450000"/>
-            <a:ext cx="2350005" cy="1750004"/>
+            <a:ext cx="2350007" cy="1750006"/>
             <a:chOff x="0" y="0"/>
-            <a:chExt cx="2350004" cy="1750003"/>
+            <a:chExt cx="2350005" cy="1750005"/>
           </a:xfrm>
         </p:grpSpPr>
         <p:sp>
@@ -8013,7 +8012,7 @@
           <p:spPr>
             <a:xfrm>
               <a:off x="0" y="0"/>
-              <a:ext cx="2350005" cy="1750004"/>
+              <a:ext cx="2350006" cy="1750006"/>
             </a:xfrm>
             <a:prstGeom prst="roundRect">
               <a:avLst>
@@ -8043,9 +8042,9 @@
                   <a:solidFill>
                     <a:srgbClr val="FFFFFF"/>
                   </a:solidFill>
-                  <a:latin typeface="+mj-lt"/>
-                  <a:ea typeface="+mj-ea"/>
-                  <a:cs typeface="+mj-cs"/>
+                  <a:latin typeface="+mn-lt"/>
+                  <a:ea typeface="+mn-ea"/>
+                  <a:cs typeface="+mn-cs"/>
                   <a:sym typeface="Calibri"/>
                 </a:defRPr>
               </a:pPr>
@@ -8061,7 +8060,7 @@
           <p:spPr>
             <a:xfrm>
               <a:off x="60752" y="262549"/>
-              <a:ext cx="2228500" cy="1224901"/>
+              <a:ext cx="2228501" cy="1224901"/>
             </a:xfrm>
             <a:prstGeom prst="rect">
               <a:avLst/>
@@ -8089,9 +8088,9 @@
                   <a:solidFill>
                     <a:srgbClr val="FFFFFF"/>
                   </a:solidFill>
-                  <a:latin typeface="+mj-lt"/>
-                  <a:ea typeface="+mj-ea"/>
-                  <a:cs typeface="+mj-cs"/>
+                  <a:latin typeface="+mn-lt"/>
+                  <a:ea typeface="+mn-ea"/>
+                  <a:cs typeface="+mn-cs"/>
                   <a:sym typeface="Calibri"/>
                 </a:defRPr>
               </a:pPr>
@@ -8114,9 +8113,9 @@
                   <a:solidFill>
                     <a:srgbClr val="FFFFFF"/>
                   </a:solidFill>
-                  <a:latin typeface="+mj-lt"/>
-                  <a:ea typeface="+mj-ea"/>
-                  <a:cs typeface="+mj-cs"/>
+                  <a:latin typeface="+mn-lt"/>
+                  <a:ea typeface="+mn-ea"/>
+                  <a:cs typeface="+mn-cs"/>
                   <a:sym typeface="Calibri"/>
                 </a:defRPr>
               </a:pPr>
@@ -8139,9 +8138,9 @@
                   <a:solidFill>
                     <a:srgbClr val="BFDDDB"/>
                   </a:solidFill>
-                  <a:latin typeface="+mj-lt"/>
-                  <a:ea typeface="+mj-ea"/>
-                  <a:cs typeface="+mj-cs"/>
+                  <a:latin typeface="+mn-lt"/>
+                  <a:ea typeface="+mn-ea"/>
+                  <a:cs typeface="+mn-cs"/>
                   <a:sym typeface="Calibri"/>
                 </a:defRPr>
               </a:pPr>
@@ -8170,7 +8169,7 @@
         <p:spPr>
           <a:xfrm>
             <a:off x="3081515" y="3225000"/>
-            <a:ext cx="300003" cy="200003"/>
+            <a:ext cx="300004" cy="200004"/>
           </a:xfrm>
           <a:prstGeom prst="rightArrow">
             <a:avLst>
@@ -8194,9 +8193,9 @@
                 <a:solidFill>
                   <a:srgbClr val="FFFFFF"/>
                 </a:solidFill>
-                <a:latin typeface="+mj-lt"/>
-                <a:ea typeface="+mj-ea"/>
-                <a:cs typeface="+mj-cs"/>
+                <a:latin typeface="+mn-lt"/>
+                <a:ea typeface="+mn-ea"/>
+                <a:cs typeface="+mn-cs"/>
                 <a:sym typeface="Calibri"/>
               </a:defRPr>
             </a:pPr>
@@ -8212,9 +8211,9 @@
         <p:grpSpPr>
           <a:xfrm>
             <a:off x="3381518" y="2450000"/>
-            <a:ext cx="2350002" cy="1750004"/>
+            <a:ext cx="2350003" cy="1750006"/>
             <a:chOff x="0" y="0"/>
-            <a:chExt cx="2350001" cy="1750003"/>
+            <a:chExt cx="2350002" cy="1750005"/>
           </a:xfrm>
         </p:grpSpPr>
         <p:sp>
@@ -8226,7 +8225,7 @@
           <p:spPr>
             <a:xfrm>
               <a:off x="0" y="0"/>
-              <a:ext cx="2350002" cy="1750004"/>
+              <a:ext cx="2350003" cy="1750006"/>
             </a:xfrm>
             <a:prstGeom prst="roundRect">
               <a:avLst>
@@ -8256,9 +8255,9 @@
                   <a:solidFill>
                     <a:srgbClr val="FFFFFF"/>
                   </a:solidFill>
-                  <a:latin typeface="+mj-lt"/>
-                  <a:ea typeface="+mj-ea"/>
-                  <a:cs typeface="+mj-cs"/>
+                  <a:latin typeface="+mn-lt"/>
+                  <a:ea typeface="+mn-ea"/>
+                  <a:cs typeface="+mn-cs"/>
                   <a:sym typeface="Calibri"/>
                 </a:defRPr>
               </a:pPr>
@@ -8273,8 +8272,8 @@
           </p:nvSpPr>
           <p:spPr>
             <a:xfrm>
-              <a:off x="60752" y="262549"/>
-              <a:ext cx="2228498" cy="1224901"/>
+              <a:off x="60751" y="262549"/>
+              <a:ext cx="2228500" cy="1224901"/>
             </a:xfrm>
             <a:prstGeom prst="rect">
               <a:avLst/>
@@ -8302,9 +8301,9 @@
                   <a:solidFill>
                     <a:srgbClr val="FFFFFF"/>
                   </a:solidFill>
-                  <a:latin typeface="+mj-lt"/>
-                  <a:ea typeface="+mj-ea"/>
-                  <a:cs typeface="+mj-cs"/>
+                  <a:latin typeface="+mn-lt"/>
+                  <a:ea typeface="+mn-ea"/>
+                  <a:cs typeface="+mn-cs"/>
                   <a:sym typeface="Calibri"/>
                 </a:defRPr>
               </a:pPr>
@@ -8327,9 +8326,9 @@
                   <a:solidFill>
                     <a:srgbClr val="FFFFFF"/>
                   </a:solidFill>
-                  <a:latin typeface="+mj-lt"/>
-                  <a:ea typeface="+mj-ea"/>
-                  <a:cs typeface="+mj-cs"/>
+                  <a:latin typeface="+mn-lt"/>
+                  <a:ea typeface="+mn-ea"/>
+                  <a:cs typeface="+mn-cs"/>
                   <a:sym typeface="Calibri"/>
                 </a:defRPr>
               </a:pPr>
@@ -8352,9 +8351,9 @@
                   <a:solidFill>
                     <a:srgbClr val="BFDDDB"/>
                   </a:solidFill>
-                  <a:latin typeface="+mj-lt"/>
-                  <a:ea typeface="+mj-ea"/>
-                  <a:cs typeface="+mj-cs"/>
+                  <a:latin typeface="+mn-lt"/>
+                  <a:ea typeface="+mn-ea"/>
+                  <a:cs typeface="+mn-cs"/>
                   <a:sym typeface="Calibri"/>
                 </a:defRPr>
               </a:pPr>
@@ -8383,7 +8382,7 @@
         <p:spPr>
           <a:xfrm>
             <a:off x="5731516" y="3225000"/>
-            <a:ext cx="300003" cy="200003"/>
+            <a:ext cx="300004" cy="200004"/>
           </a:xfrm>
           <a:prstGeom prst="rightArrow">
             <a:avLst>
@@ -8407,9 +8406,9 @@
                 <a:solidFill>
                   <a:srgbClr val="FFFFFF"/>
                 </a:solidFill>
-                <a:latin typeface="+mj-lt"/>
-                <a:ea typeface="+mj-ea"/>
-                <a:cs typeface="+mj-cs"/>
+                <a:latin typeface="+mn-lt"/>
+                <a:ea typeface="+mn-ea"/>
+                <a:cs typeface="+mn-cs"/>
                 <a:sym typeface="Calibri"/>
               </a:defRPr>
             </a:pPr>
@@ -8425,9 +8424,9 @@
         <p:grpSpPr>
           <a:xfrm>
             <a:off x="6031517" y="2450000"/>
-            <a:ext cx="2350005" cy="1750004"/>
+            <a:ext cx="2350007" cy="1750006"/>
             <a:chOff x="0" y="0"/>
-            <a:chExt cx="2350004" cy="1750003"/>
+            <a:chExt cx="2350005" cy="1750005"/>
           </a:xfrm>
         </p:grpSpPr>
         <p:sp>
@@ -8439,7 +8438,7 @@
           <p:spPr>
             <a:xfrm>
               <a:off x="0" y="0"/>
-              <a:ext cx="2350005" cy="1750004"/>
+              <a:ext cx="2350006" cy="1750006"/>
             </a:xfrm>
             <a:prstGeom prst="roundRect">
               <a:avLst>
@@ -8469,9 +8468,9 @@
                   <a:solidFill>
                     <a:srgbClr val="FFFFFF"/>
                   </a:solidFill>
-                  <a:latin typeface="+mj-lt"/>
-                  <a:ea typeface="+mj-ea"/>
-                  <a:cs typeface="+mj-cs"/>
+                  <a:latin typeface="+mn-lt"/>
+                  <a:ea typeface="+mn-ea"/>
+                  <a:cs typeface="+mn-cs"/>
                   <a:sym typeface="Calibri"/>
                 </a:defRPr>
               </a:pPr>
@@ -8487,7 +8486,7 @@
           <p:spPr>
             <a:xfrm>
               <a:off x="60752" y="262549"/>
-              <a:ext cx="2228500" cy="1224901"/>
+              <a:ext cx="2228501" cy="1224901"/>
             </a:xfrm>
             <a:prstGeom prst="rect">
               <a:avLst/>
@@ -8515,9 +8514,9 @@
                   <a:solidFill>
                     <a:srgbClr val="FFFFFF"/>
                   </a:solidFill>
-                  <a:latin typeface="+mj-lt"/>
-                  <a:ea typeface="+mj-ea"/>
-                  <a:cs typeface="+mj-cs"/>
+                  <a:latin typeface="+mn-lt"/>
+                  <a:ea typeface="+mn-ea"/>
+                  <a:cs typeface="+mn-cs"/>
                   <a:sym typeface="Calibri"/>
                 </a:defRPr>
               </a:pPr>
@@ -8540,9 +8539,9 @@
                   <a:solidFill>
                     <a:srgbClr val="FFFFFF"/>
                   </a:solidFill>
-                  <a:latin typeface="+mj-lt"/>
-                  <a:ea typeface="+mj-ea"/>
-                  <a:cs typeface="+mj-cs"/>
+                  <a:latin typeface="+mn-lt"/>
+                  <a:ea typeface="+mn-ea"/>
+                  <a:cs typeface="+mn-cs"/>
                   <a:sym typeface="Calibri"/>
                 </a:defRPr>
               </a:pPr>
@@ -8565,9 +8564,9 @@
                   <a:solidFill>
                     <a:srgbClr val="BFDDDB"/>
                   </a:solidFill>
-                  <a:latin typeface="+mj-lt"/>
-                  <a:ea typeface="+mj-ea"/>
-                  <a:cs typeface="+mj-cs"/>
+                  <a:latin typeface="+mn-lt"/>
+                  <a:ea typeface="+mn-ea"/>
+                  <a:cs typeface="+mn-cs"/>
                   <a:sym typeface="Calibri"/>
                 </a:defRPr>
               </a:pPr>
@@ -8587,7 +8586,7 @@
         <p:spPr>
           <a:xfrm>
             <a:off x="8381517" y="3225000"/>
-            <a:ext cx="300003" cy="200003"/>
+            <a:ext cx="300004" cy="200004"/>
           </a:xfrm>
           <a:prstGeom prst="rightArrow">
             <a:avLst>
@@ -8611,9 +8610,9 @@
                 <a:solidFill>
                   <a:srgbClr val="FFFFFF"/>
                 </a:solidFill>
-                <a:latin typeface="+mj-lt"/>
-                <a:ea typeface="+mj-ea"/>
-                <a:cs typeface="+mj-cs"/>
+                <a:latin typeface="+mn-lt"/>
+                <a:ea typeface="+mn-ea"/>
+                <a:cs typeface="+mn-cs"/>
                 <a:sym typeface="Calibri"/>
               </a:defRPr>
             </a:pPr>
@@ -8629,9 +8628,9 @@
         <p:grpSpPr>
           <a:xfrm>
             <a:off x="8681518" y="2450000"/>
-            <a:ext cx="2350005" cy="1750004"/>
+            <a:ext cx="2350007" cy="1750006"/>
             <a:chOff x="0" y="0"/>
-            <a:chExt cx="2350004" cy="1750003"/>
+            <a:chExt cx="2350005" cy="1750005"/>
           </a:xfrm>
         </p:grpSpPr>
         <p:sp>
@@ -8643,7 +8642,7 @@
           <p:spPr>
             <a:xfrm>
               <a:off x="0" y="0"/>
-              <a:ext cx="2350005" cy="1750004"/>
+              <a:ext cx="2350006" cy="1750006"/>
             </a:xfrm>
             <a:prstGeom prst="roundRect">
               <a:avLst>
@@ -8673,9 +8672,9 @@
                   <a:solidFill>
                     <a:srgbClr val="FFFFFF"/>
                   </a:solidFill>
-                  <a:latin typeface="+mj-lt"/>
-                  <a:ea typeface="+mj-ea"/>
-                  <a:cs typeface="+mj-cs"/>
+                  <a:latin typeface="+mn-lt"/>
+                  <a:ea typeface="+mn-ea"/>
+                  <a:cs typeface="+mn-cs"/>
                   <a:sym typeface="Calibri"/>
                 </a:defRPr>
               </a:pPr>
@@ -8691,7 +8690,7 @@
           <p:spPr>
             <a:xfrm>
               <a:off x="60752" y="260264"/>
-              <a:ext cx="2228500" cy="1229471"/>
+              <a:ext cx="2228501" cy="1229471"/>
             </a:xfrm>
             <a:prstGeom prst="rect">
               <a:avLst/>
@@ -8719,9 +8718,9 @@
                   <a:solidFill>
                     <a:srgbClr val="FFFFFF"/>
                   </a:solidFill>
-                  <a:latin typeface="+mj-lt"/>
-                  <a:ea typeface="+mj-ea"/>
-                  <a:cs typeface="+mj-cs"/>
+                  <a:latin typeface="+mn-lt"/>
+                  <a:ea typeface="+mn-ea"/>
+                  <a:cs typeface="+mn-cs"/>
                   <a:sym typeface="Calibri"/>
                 </a:defRPr>
               </a:pPr>
@@ -8755,9 +8754,9 @@
               </a:r>
               <a:r>
                 <a:rPr>
-                  <a:latin typeface="+mj-lt"/>
-                  <a:ea typeface="+mj-ea"/>
-                  <a:cs typeface="+mj-cs"/>
+                  <a:latin typeface="+mn-lt"/>
+                  <a:ea typeface="+mn-ea"/>
+                  <a:cs typeface="+mn-cs"/>
                   <a:sym typeface="Calibri"/>
                 </a:rPr>
                 <a:t>、開發文件跟著同步更新，接手的人看得懂</a:t>
@@ -8772,9 +8771,9 @@
                   <a:solidFill>
                     <a:srgbClr val="BFDDDB"/>
                   </a:solidFill>
-                  <a:latin typeface="+mj-lt"/>
-                  <a:ea typeface="+mj-ea"/>
-                  <a:cs typeface="+mj-cs"/>
+                  <a:latin typeface="+mn-lt"/>
+                  <a:ea typeface="+mn-ea"/>
+                  <a:cs typeface="+mn-cs"/>
                   <a:sym typeface="Calibri"/>
                 </a:defRPr>
               </a:pPr>
@@ -8828,9 +8827,9 @@
                 <a:solidFill>
                   <a:srgbClr val="55596A"/>
                 </a:solidFill>
-                <a:latin typeface="+mj-lt"/>
-                <a:ea typeface="+mj-ea"/>
-                <a:cs typeface="+mj-cs"/>
+                <a:latin typeface="+mn-lt"/>
+                <a:ea typeface="+mn-ea"/>
+                <a:cs typeface="+mn-cs"/>
                 <a:sym typeface="Calibri"/>
               </a:defRPr>
             </a:pPr>
@@ -9018,7 +9017,7 @@
         <p:spPr>
           <a:xfrm>
             <a:off x="731518" y="1691636"/>
-            <a:ext cx="10515604" cy="4206251"/>
+            <a:ext cx="10515604" cy="4206252"/>
           </a:xfrm>
           <a:prstGeom prst="rect">
             <a:avLst/>
@@ -9057,9 +9056,9 @@
             </a:r>
             <a:r>
               <a:rPr>
-                <a:latin typeface="+mn-lt"/>
-                <a:ea typeface="+mn-ea"/>
-                <a:cs typeface="+mn-cs"/>
+                <a:latin typeface="+mj-lt"/>
+                <a:ea typeface="+mj-ea"/>
+                <a:cs typeface="+mj-cs"/>
                 <a:sym typeface="Helvetica"/>
               </a:rPr>
               <a:t>為了貼近實際狀況，我用現在工作上真的會遇到的情境來設計：主機申請、防火牆開通、資安檢核這類項目</a:t>
@@ -9085,9 +9084,9 @@
             </a:r>
             <a:r>
               <a:rPr>
-                <a:latin typeface="+mn-lt"/>
-                <a:ea typeface="+mn-ea"/>
-                <a:cs typeface="+mn-cs"/>
+                <a:latin typeface="+mj-lt"/>
+                <a:ea typeface="+mj-ea"/>
+                <a:cs typeface="+mj-cs"/>
                 <a:sym typeface="Helvetica"/>
               </a:rPr>
               <a:t>角色也照實際職務分：長官跨科看得到但不能改、科長科內全權、專案負責人管自己的案子、成員只看得到自己參與的</a:t>
@@ -9113,9 +9112,9 @@
             </a:r>
             <a:r>
               <a:rPr>
-                <a:latin typeface="+mn-lt"/>
-                <a:ea typeface="+mn-ea"/>
-                <a:cs typeface="+mn-cs"/>
+                <a:latin typeface="+mj-lt"/>
+                <a:ea typeface="+mj-ea"/>
+                <a:cs typeface="+mj-cs"/>
                 <a:sym typeface="Helvetica"/>
               </a:rPr>
               <a:t>科別之間互相看不到，每個動作都會再確認一次「這個人有沒有資格動這筆資料」</a:t>
@@ -9141,9 +9140,9 @@
             </a:r>
             <a:r>
               <a:rPr>
-                <a:latin typeface="+mn-lt"/>
-                <a:ea typeface="+mn-ea"/>
-                <a:cs typeface="+mn-cs"/>
+                <a:latin typeface="+mj-lt"/>
+                <a:ea typeface="+mj-ea"/>
+                <a:cs typeface="+mj-cs"/>
                 <a:sym typeface="Helvetica"/>
               </a:rPr>
               <a:t>權限畫得細，反而增加了協作的自由度：大家可以放心一起動同一份資料，不用像以前只能一個人顧著自己的 </a:t>
@@ -9153,9 +9152,9 @@
             </a:r>
             <a:r>
               <a:rPr>
-                <a:latin typeface="+mn-lt"/>
-                <a:ea typeface="+mn-ea"/>
-                <a:cs typeface="+mn-cs"/>
+                <a:latin typeface="+mj-lt"/>
+                <a:ea typeface="+mj-ea"/>
+                <a:cs typeface="+mj-cs"/>
                 <a:sym typeface="Helvetica"/>
               </a:rPr>
               <a:t>檔案</a:t>
@@ -9341,7 +9340,7 @@
         <p:spPr>
           <a:xfrm>
             <a:off x="731519" y="3063238"/>
-            <a:ext cx="3429002" cy="731527"/>
+            <a:ext cx="3429002" cy="731528"/>
           </a:xfrm>
           <a:prstGeom prst="rect">
             <a:avLst/>
@@ -9455,7 +9454,7 @@
         <p:spPr>
           <a:xfrm>
             <a:off x="4434839" y="3063238"/>
-            <a:ext cx="3429002" cy="731527"/>
+            <a:ext cx="3429002" cy="731528"/>
           </a:xfrm>
           <a:prstGeom prst="rect">
             <a:avLst/>
@@ -9569,7 +9568,7 @@
         <p:spPr>
           <a:xfrm>
             <a:off x="8138159" y="3063238"/>
-            <a:ext cx="3429006" cy="731527"/>
+            <a:ext cx="3429006" cy="731528"/>
           </a:xfrm>
           <a:prstGeom prst="rect">
             <a:avLst/>
@@ -9671,7 +9670,7 @@
         <p:spPr>
           <a:xfrm>
             <a:off x="731519" y="5166359"/>
-            <a:ext cx="3429002" cy="731526"/>
+            <a:ext cx="3429002" cy="731527"/>
           </a:xfrm>
           <a:prstGeom prst="rect">
             <a:avLst/>
@@ -9773,7 +9772,7 @@
         <p:spPr>
           <a:xfrm>
             <a:off x="4434839" y="5166359"/>
-            <a:ext cx="3429002" cy="731526"/>
+            <a:ext cx="3429002" cy="731527"/>
           </a:xfrm>
           <a:prstGeom prst="rect">
             <a:avLst/>
@@ -9865,7 +9864,7 @@
         <p:spPr>
           <a:xfrm>
             <a:off x="8138159" y="5166359"/>
-            <a:ext cx="3429006" cy="731526"/>
+            <a:ext cx="3429006" cy="731527"/>
           </a:xfrm>
           <a:prstGeom prst="rect">
             <a:avLst/>
@@ -10040,7 +10039,7 @@
         <p:spPr>
           <a:xfrm>
             <a:off x="731518" y="1691636"/>
-            <a:ext cx="10515604" cy="4206251"/>
+            <a:ext cx="10515604" cy="4206252"/>
           </a:xfrm>
           <a:prstGeom prst="rect">
             <a:avLst/>
@@ -10290,9 +10289,9 @@
                 <a:solidFill>
                   <a:srgbClr val="FFFFFF"/>
                 </a:solidFill>
-                <a:latin typeface="+mj-lt"/>
-                <a:ea typeface="+mj-ea"/>
-                <a:cs typeface="+mj-cs"/>
+                <a:latin typeface="+mn-lt"/>
+                <a:ea typeface="+mn-ea"/>
+                <a:cs typeface="+mn-cs"/>
                 <a:sym typeface="Calibri"/>
               </a:defRPr>
             </a:pPr>
@@ -10307,7 +10306,7 @@
         </p:nvSpPr>
         <p:spPr>
           <a:xfrm>
-            <a:off x="731516" y="5246370"/>
+            <a:off x="731515" y="5246370"/>
             <a:ext cx="1424937" cy="320037"/>
           </a:xfrm>
           <a:prstGeom prst="rect">
@@ -10375,9 +10374,9 @@
                 <a:solidFill>
                   <a:srgbClr val="FFFFFF"/>
                 </a:solidFill>
-                <a:latin typeface="+mj-lt"/>
-                <a:ea typeface="+mj-ea"/>
-                <a:cs typeface="+mj-cs"/>
+                <a:latin typeface="+mn-lt"/>
+                <a:ea typeface="+mn-ea"/>
+                <a:cs typeface="+mn-cs"/>
                 <a:sym typeface="Calibri"/>
               </a:defRPr>
             </a:pPr>
@@ -10402,8 +10401,8 @@
         </p:blipFill>
         <p:spPr>
           <a:xfrm>
-            <a:off x="6309359" y="2262997"/>
-            <a:ext cx="5029204" cy="2549178"/>
+            <a:off x="6309359" y="2262996"/>
+            <a:ext cx="5029204" cy="2549179"/>
           </a:xfrm>
           <a:prstGeom prst="rect">
             <a:avLst/>
@@ -10476,7 +10475,7 @@
         <p:spPr>
           <a:xfrm>
             <a:off x="685800" y="2262999"/>
-            <a:ext cx="5029200" cy="2549176"/>
+            <a:ext cx="5029200" cy="2549177"/>
           </a:xfrm>
           <a:prstGeom prst="rect">
             <a:avLst/>
@@ -10643,9 +10642,9 @@
                 <a:solidFill>
                   <a:srgbClr val="FFFFFF"/>
                 </a:solidFill>
-                <a:latin typeface="+mj-lt"/>
-                <a:ea typeface="+mj-ea"/>
-                <a:cs typeface="+mj-cs"/>
+                <a:latin typeface="+mn-lt"/>
+                <a:ea typeface="+mn-ea"/>
+                <a:cs typeface="+mn-cs"/>
                 <a:sym typeface="Calibri"/>
               </a:defRPr>
             </a:pPr>
@@ -10671,7 +10670,7 @@
         <p:spPr>
           <a:xfrm>
             <a:off x="2779516" y="2353598"/>
-            <a:ext cx="6632662" cy="3361932"/>
+            <a:ext cx="6632662" cy="3361933"/>
           </a:xfrm>
           <a:prstGeom prst="rect">
             <a:avLst/>
@@ -10797,7 +10796,7 @@
           <a:p>
             <a:pPr/>
             <a:r>
-              <a:t>做完這一輪之後</a:t>
+              <a:t>寫在最後</a:t>
             </a:r>
           </a:p>
         </p:txBody>
@@ -10841,7 +10840,7 @@
           <a:p>
             <a:pPr/>
             <a:r>
-              <a:t>接下來大概會往哪走</a:t>
+              <a:t>這次做完，我自己比較有感的幾件事</a:t>
             </a:r>
           </a:p>
         </p:txBody>
@@ -10855,7 +10854,7 @@
         <p:spPr>
           <a:xfrm>
             <a:off x="731518" y="1691636"/>
-            <a:ext cx="10515604" cy="4206251"/>
+            <a:ext cx="10515604" cy="4206252"/>
           </a:xfrm>
           <a:prstGeom prst="rect">
             <a:avLst/>
@@ -10890,16 +10889,16 @@
               </a:defRPr>
             </a:pPr>
             <a:r>
-              <a:t>—  </a:t>
+              <a:t>—  AI </a:t>
             </a:r>
             <a:r>
               <a:rPr>
-                <a:latin typeface="+mn-lt"/>
-                <a:ea typeface="+mn-ea"/>
-                <a:cs typeface="+mn-cs"/>
+                <a:latin typeface="+mj-lt"/>
+                <a:ea typeface="+mj-ea"/>
+                <a:cs typeface="+mj-cs"/>
                 <a:sym typeface="Helvetica"/>
               </a:rPr>
-              <a:t>分類管理、人員派工都做完了；甘特圖還沒，之後有空再看</a:t>
+              <a:t>省下的是打字跟查資料的時間；要做什麼、方向對不對，還是得自己判斷</a:t>
             </a:r>
           </a:p>
           <a:p>
@@ -10922,12 +10921,24 @@
             </a:r>
             <a:r>
               <a:rPr>
-                <a:latin typeface="+mn-lt"/>
-                <a:ea typeface="+mn-ea"/>
-                <a:cs typeface="+mn-cs"/>
+                <a:latin typeface="+mj-lt"/>
+                <a:ea typeface="+mj-ea"/>
+                <a:cs typeface="+mj-cs"/>
                 <a:sym typeface="Helvetica"/>
               </a:rPr>
-              <a:t>過程中用的那幾條規矩（推送要我點頭、測試要過），我打算繼續用在下一個專案</a:t>
+              <a:t>一個人開發最怕沒人幫忙看，讓另一個 </a:t>
+            </a:r>
+            <a:r>
+              <a:t>AI </a:t>
+            </a:r>
+            <a:r>
+              <a:rPr>
+                <a:latin typeface="+mj-lt"/>
+                <a:ea typeface="+mj-ea"/>
+                <a:cs typeface="+mj-cs"/>
+                <a:sym typeface="Helvetica"/>
+              </a:rPr>
+              <a:t>來挑毛病，剛好補上這塊</a:t>
             </a:r>
           </a:p>
           <a:p>
@@ -10950,165 +10961,38 @@
             </a:r>
             <a:r>
               <a:rPr>
-                <a:latin typeface="+mn-lt"/>
-                <a:ea typeface="+mn-ea"/>
-                <a:cs typeface="+mn-cs"/>
+                <a:latin typeface="+mj-lt"/>
+                <a:ea typeface="+mj-ea"/>
+                <a:cs typeface="+mj-cs"/>
                 <a:sym typeface="Helvetica"/>
               </a:rPr>
-              <a:t>文件都跟著更新了，之後接手的人看得懂</a:t>
-            </a:r>
-          </a:p>
-        </p:txBody>
-      </p:sp>
-    </p:spTree>
-  </p:cSld>
-  <p:clrMapOvr>
-    <a:masterClrMapping/>
-  </p:clrMapOvr>
-  <p:transition xmlns:p14="http://schemas.microsoft.com/office/powerpoint/2010/main" spd="med" advClick="1"/>
-</p:sld>
-</file>
-
-<file path=ppt/slides/slide28.xml><?xml version="1.0" encoding="utf-8"?>
-<p:sld xmlns:a="http://schemas.openxmlformats.org/drawingml/2006/main" xmlns:r="http://schemas.openxmlformats.org/officeDocument/2006/relationships" xmlns:p="http://schemas.openxmlformats.org/presentationml/2006/main" xmlns:m="http://schemas.openxmlformats.org/officeDocument/2006/math" xmlns:a14="http://schemas.microsoft.com/office/drawing/2010/main" showMasterSp="1" showMasterPhAnim="1">
-  <p:cSld>
-    <p:bg>
-      <p:bgPr>
-        <a:solidFill>
-          <a:srgbClr val="F2F2EC"/>
-        </a:solidFill>
-      </p:bgPr>
-    </p:bg>
-    <p:spTree>
-      <p:nvGrpSpPr>
-        <p:cNvPr id="1" name=""/>
-        <p:cNvGrpSpPr/>
-        <p:nvPr/>
-      </p:nvGrpSpPr>
-      <p:grpSpPr>
-        <a:xfrm>
-          <a:off x="0" y="0"/>
-          <a:ext cx="0" cy="0"/>
-          <a:chOff x="0" y="0"/>
-          <a:chExt cx="0" cy="0"/>
-        </a:xfrm>
-      </p:grpSpPr>
-      <p:sp>
-        <p:nvSpPr>
-          <p:cNvPr id="335" name="TextBox 1"/>
-          <p:cNvSpPr txBox="1"/>
-          <p:nvPr/>
-        </p:nvSpPr>
-        <p:spPr>
-          <a:xfrm>
-            <a:off x="731516" y="502919"/>
-            <a:ext cx="10424167" cy="320037"/>
-          </a:xfrm>
-          <a:prstGeom prst="rect">
-            <a:avLst/>
-          </a:prstGeom>
-          <a:ln w="12700">
-            <a:miter lim="400000"/>
-          </a:ln>
-          <a:extLst>
-            <a:ext uri="{C572A759-6A51-4108-AA02-DFA0A04FC94B}">
-              <ma14:wrappingTextBoxFlag xmlns:ma14="http://schemas.microsoft.com/office/mac/drawingml/2011/main" val="1"/>
-            </a:ext>
-          </a:extLst>
-        </p:spPr>
-        <p:txBody>
-          <a:bodyPr lIns="45718" tIns="45718" rIns="45718" bIns="45718">
-            <a:spAutoFit/>
-          </a:bodyPr>
-          <a:lstStyle>
-            <a:lvl1pPr>
-              <a:defRPr b="1" sz="1300">
-                <a:solidFill>
-                  <a:srgbClr val="1F6F6B"/>
-                </a:solidFill>
-              </a:defRPr>
-            </a:lvl1pPr>
-          </a:lstStyle>
-          <a:p>
-            <a:pPr/>
-            <a:r>
-              <a:t>寫在最後</a:t>
-            </a:r>
-          </a:p>
-        </p:txBody>
-      </p:sp>
-      <p:sp>
-        <p:nvSpPr>
-          <p:cNvPr id="336" name="TextBox 2"/>
-          <p:cNvSpPr txBox="1"/>
-          <p:nvPr/>
-        </p:nvSpPr>
-        <p:spPr>
-          <a:xfrm>
-            <a:off x="731519" y="914399"/>
-            <a:ext cx="10698482" cy="726437"/>
-          </a:xfrm>
-          <a:prstGeom prst="rect">
-            <a:avLst/>
-          </a:prstGeom>
-          <a:ln w="12700">
-            <a:miter lim="400000"/>
-          </a:ln>
-          <a:extLst>
-            <a:ext uri="{C572A759-6A51-4108-AA02-DFA0A04FC94B}">
-              <ma14:wrappingTextBoxFlag xmlns:ma14="http://schemas.microsoft.com/office/mac/drawingml/2011/main" val="1"/>
-            </a:ext>
-          </a:extLst>
-        </p:spPr>
-        <p:txBody>
-          <a:bodyPr lIns="45718" tIns="45718" rIns="45718" bIns="45718">
-            <a:spAutoFit/>
-          </a:bodyPr>
-          <a:lstStyle>
-            <a:lvl1pPr>
-              <a:defRPr b="1" sz="3600">
-                <a:solidFill>
-                  <a:srgbClr val="1C1F26"/>
-                </a:solidFill>
-              </a:defRPr>
-            </a:lvl1pPr>
-          </a:lstStyle>
-          <a:p>
-            <a:pPr/>
-            <a:r>
-              <a:t>這次做完，我自己比較有感的幾件事</a:t>
-            </a:r>
-          </a:p>
-        </p:txBody>
-      </p:sp>
-      <p:sp>
-        <p:nvSpPr>
-          <p:cNvPr id="337" name="TextBox 3"/>
-          <p:cNvSpPr txBox="1"/>
-          <p:nvPr/>
-        </p:nvSpPr>
-        <p:spPr>
-          <a:xfrm>
-            <a:off x="731518" y="1691636"/>
-            <a:ext cx="10515604" cy="4206251"/>
-          </a:xfrm>
-          <a:prstGeom prst="rect">
-            <a:avLst/>
-          </a:prstGeom>
-          <a:ln w="12700">
-            <a:miter lim="400000"/>
-          </a:ln>
-          <a:extLst>
-            <a:ext uri="{C572A759-6A51-4108-AA02-DFA0A04FC94B}">
-              <ma14:wrappingTextBoxFlag xmlns:ma14="http://schemas.microsoft.com/office/mac/drawingml/2011/main" val="1"/>
-            </a:ext>
-          </a:extLst>
-        </p:spPr>
-        <p:txBody>
-          <a:bodyPr lIns="45718" tIns="45718" rIns="45718" bIns="45718">
-            <a:normAutofit fontScale="100000" lnSpcReduction="0"/>
-          </a:bodyPr>
-          <a:lstStyle/>
+              <a:t>最花時間的不是寫程式，是把需求想清楚</a:t>
+            </a:r>
+            <a:r>
+              <a:t>——</a:t>
+            </a:r>
+            <a:r>
+              <a:rPr>
+                <a:latin typeface="+mj-lt"/>
+                <a:ea typeface="+mj-ea"/>
+                <a:cs typeface="+mj-cs"/>
+                <a:sym typeface="Helvetica"/>
+              </a:rPr>
+              <a:t>這件事 </a:t>
+            </a:r>
+            <a:r>
+              <a:t>AI </a:t>
+            </a:r>
+            <a:r>
+              <a:rPr>
+                <a:latin typeface="+mj-lt"/>
+                <a:ea typeface="+mj-ea"/>
+                <a:cs typeface="+mj-cs"/>
+                <a:sym typeface="Helvetica"/>
+              </a:rPr>
+              <a:t>幫不上忙</a:t>
+            </a:r>
+          </a:p>
           <a:p>
             <a:pPr>
               <a:spcBef>
@@ -11125,133 +11009,13 @@
               </a:defRPr>
             </a:pPr>
             <a:r>
-              <a:t>—  AI </a:t>
+              <a:t>—  </a:t>
             </a:r>
             <a:r>
               <a:rPr>
-                <a:latin typeface="+mn-lt"/>
-                <a:ea typeface="+mn-ea"/>
-                <a:cs typeface="+mn-cs"/>
-                <a:sym typeface="Helvetica"/>
-              </a:rPr>
-              <a:t>省下的是打字跟查資料的時間；要做什麼、方向對不對，還是得自己判斷</a:t>
-            </a:r>
-          </a:p>
-          <a:p>
-            <a:pPr>
-              <a:spcBef>
-                <a:spcPts val="1400"/>
-              </a:spcBef>
-              <a:defRPr sz="2000">
-                <a:solidFill>
-                  <a:srgbClr val="1C1F26"/>
-                </a:solidFill>
-                <a:latin typeface="Arial"/>
-                <a:ea typeface="Arial"/>
-                <a:cs typeface="Arial"/>
-                <a:sym typeface="Arial"/>
-              </a:defRPr>
-            </a:pPr>
-            <a:r>
-              <a:t>—  </a:t>
-            </a:r>
-            <a:r>
-              <a:rPr>
-                <a:latin typeface="+mn-lt"/>
-                <a:ea typeface="+mn-ea"/>
-                <a:cs typeface="+mn-cs"/>
-                <a:sym typeface="Helvetica"/>
-              </a:rPr>
-              <a:t>一個人開發最怕沒人幫忙看，讓另一個 </a:t>
-            </a:r>
-            <a:r>
-              <a:t>AI </a:t>
-            </a:r>
-            <a:r>
-              <a:rPr>
-                <a:latin typeface="+mn-lt"/>
-                <a:ea typeface="+mn-ea"/>
-                <a:cs typeface="+mn-cs"/>
-                <a:sym typeface="Helvetica"/>
-              </a:rPr>
-              <a:t>來挑毛病，剛好補上這塊</a:t>
-            </a:r>
-          </a:p>
-          <a:p>
-            <a:pPr>
-              <a:spcBef>
-                <a:spcPts val="1400"/>
-              </a:spcBef>
-              <a:defRPr sz="2000">
-                <a:solidFill>
-                  <a:srgbClr val="1C1F26"/>
-                </a:solidFill>
-                <a:latin typeface="Arial"/>
-                <a:ea typeface="Arial"/>
-                <a:cs typeface="Arial"/>
-                <a:sym typeface="Arial"/>
-              </a:defRPr>
-            </a:pPr>
-            <a:r>
-              <a:t>—  </a:t>
-            </a:r>
-            <a:r>
-              <a:rPr>
-                <a:latin typeface="+mn-lt"/>
-                <a:ea typeface="+mn-ea"/>
-                <a:cs typeface="+mn-cs"/>
-                <a:sym typeface="Helvetica"/>
-              </a:rPr>
-              <a:t>最花時間的不是寫程式，是把需求想清楚</a:t>
-            </a:r>
-            <a:r>
-              <a:t>——</a:t>
-            </a:r>
-            <a:r>
-              <a:rPr>
-                <a:latin typeface="+mn-lt"/>
-                <a:ea typeface="+mn-ea"/>
-                <a:cs typeface="+mn-cs"/>
-                <a:sym typeface="Helvetica"/>
-              </a:rPr>
-              <a:t>這件事 </a:t>
-            </a:r>
-            <a:r>
-              <a:t>AI </a:t>
-            </a:r>
-            <a:r>
-              <a:rPr>
-                <a:latin typeface="+mn-lt"/>
-                <a:ea typeface="+mn-ea"/>
-                <a:cs typeface="+mn-cs"/>
-                <a:sym typeface="Helvetica"/>
-              </a:rPr>
-              <a:t>幫不上忙</a:t>
-            </a:r>
-          </a:p>
-          <a:p>
-            <a:pPr>
-              <a:spcBef>
-                <a:spcPts val="1400"/>
-              </a:spcBef>
-              <a:defRPr sz="2000">
-                <a:solidFill>
-                  <a:srgbClr val="1C1F26"/>
-                </a:solidFill>
-                <a:latin typeface="Arial"/>
-                <a:ea typeface="Arial"/>
-                <a:cs typeface="Arial"/>
-                <a:sym typeface="Arial"/>
-              </a:defRPr>
-            </a:pPr>
-            <a:r>
-              <a:t>—  </a:t>
-            </a:r>
-            <a:r>
-              <a:rPr>
-                <a:latin typeface="+mn-lt"/>
-                <a:ea typeface="+mn-ea"/>
-                <a:cs typeface="+mn-cs"/>
+                <a:latin typeface="+mj-lt"/>
+                <a:ea typeface="+mj-ea"/>
+                <a:cs typeface="+mj-cs"/>
                 <a:sym typeface="Helvetica"/>
               </a:rPr>
               <a:t>兩個月做了四個世代，走的冤枉路比想像多，但每次砍掉重來都比硬撐下去快</a:t>
@@ -11389,7 +11153,7 @@
         <p:spPr>
           <a:xfrm>
             <a:off x="731518" y="1691636"/>
-            <a:ext cx="10515604" cy="4206251"/>
+            <a:ext cx="10515604" cy="4206252"/>
           </a:xfrm>
           <a:prstGeom prst="rect">
             <a:avLst/>
@@ -11428,9 +11192,9 @@
             </a:r>
             <a:r>
               <a:rPr>
-                <a:latin typeface="+mn-lt"/>
-                <a:ea typeface="+mn-ea"/>
-                <a:cs typeface="+mn-cs"/>
+                <a:latin typeface="+mj-lt"/>
+                <a:ea typeface="+mj-ea"/>
+                <a:cs typeface="+mj-cs"/>
                 <a:sym typeface="Helvetica"/>
               </a:rPr>
               <a:t>身為一個 </a:t>
@@ -11440,9 +11204,9 @@
             </a:r>
             <a:r>
               <a:rPr>
-                <a:latin typeface="+mn-lt"/>
-                <a:ea typeface="+mn-ea"/>
-                <a:cs typeface="+mn-cs"/>
+                <a:latin typeface="+mj-lt"/>
+                <a:ea typeface="+mj-ea"/>
+                <a:cs typeface="+mj-cs"/>
                 <a:sym typeface="Helvetica"/>
               </a:rPr>
               <a:t>，開發本身不是最花時間的，最花時間的是每次開會都要重新對一次文件，格式不對齊、資訊分散</a:t>
@@ -11468,9 +11232,9 @@
             </a:r>
             <a:r>
               <a:rPr>
-                <a:latin typeface="+mn-lt"/>
-                <a:ea typeface="+mn-ea"/>
-                <a:cs typeface="+mn-cs"/>
+                <a:latin typeface="+mj-lt"/>
+                <a:ea typeface="+mj-ea"/>
+                <a:cs typeface="+mj-cs"/>
                 <a:sym typeface="Helvetica"/>
               </a:rPr>
               <a:t>換算一下：每週簡報，一人約 </a:t>
@@ -11480,9 +11244,9 @@
             </a:r>
             <a:r>
               <a:rPr>
-                <a:latin typeface="+mn-lt"/>
-                <a:ea typeface="+mn-ea"/>
-                <a:cs typeface="+mn-cs"/>
+                <a:latin typeface="+mj-lt"/>
+                <a:ea typeface="+mj-ea"/>
+                <a:cs typeface="+mj-cs"/>
                 <a:sym typeface="Helvetica"/>
               </a:rPr>
               <a:t>，</a:t>
@@ -11492,9 +11256,9 @@
             </a:r>
             <a:r>
               <a:rPr>
-                <a:latin typeface="+mn-lt"/>
-                <a:ea typeface="+mn-ea"/>
-                <a:cs typeface="+mn-cs"/>
+                <a:latin typeface="+mj-lt"/>
+                <a:ea typeface="+mj-ea"/>
+                <a:cs typeface="+mj-cs"/>
                 <a:sym typeface="Helvetica"/>
               </a:rPr>
               <a:t>人一週約 </a:t>
@@ -11504,9 +11268,9 @@
             </a:r>
             <a:r>
               <a:rPr>
-                <a:latin typeface="+mn-lt"/>
-                <a:ea typeface="+mn-ea"/>
-                <a:cs typeface="+mn-cs"/>
+                <a:latin typeface="+mj-lt"/>
+                <a:ea typeface="+mj-ea"/>
+                <a:cs typeface="+mj-cs"/>
                 <a:sym typeface="Helvetica"/>
               </a:rPr>
               <a:t>；一年 </a:t>
@@ -11516,9 +11280,9 @@
             </a:r>
             <a:r>
               <a:rPr>
-                <a:latin typeface="+mn-lt"/>
-                <a:ea typeface="+mn-ea"/>
-                <a:cs typeface="+mn-cs"/>
+                <a:latin typeface="+mj-lt"/>
+                <a:ea typeface="+mj-ea"/>
+                <a:cs typeface="+mj-cs"/>
                 <a:sym typeface="Helvetica"/>
               </a:rPr>
               <a:t>週下來，約 </a:t>
@@ -11528,9 +11292,9 @@
             </a:r>
             <a:r>
               <a:rPr>
-                <a:latin typeface="+mn-lt"/>
-                <a:ea typeface="+mn-ea"/>
-                <a:cs typeface="+mn-cs"/>
+                <a:latin typeface="+mj-lt"/>
+                <a:ea typeface="+mj-ea"/>
+                <a:cs typeface="+mj-cs"/>
                 <a:sym typeface="Helvetica"/>
               </a:rPr>
               <a:t>（</a:t>
@@ -11540,9 +11304,9 @@
             </a:r>
             <a:r>
               <a:rPr>
-                <a:latin typeface="+mn-lt"/>
-                <a:ea typeface="+mn-ea"/>
-                <a:cs typeface="+mn-cs"/>
+                <a:latin typeface="+mj-lt"/>
+                <a:ea typeface="+mj-ea"/>
+                <a:cs typeface="+mj-cs"/>
                 <a:sym typeface="Helvetica"/>
               </a:rPr>
               <a:t>）在四處流通、重複對稿</a:t>
@@ -11568,9 +11332,9 @@
             </a:r>
             <a:r>
               <a:rPr>
-                <a:latin typeface="+mn-lt"/>
-                <a:ea typeface="+mn-ea"/>
-                <a:cs typeface="+mn-cs"/>
+                <a:latin typeface="+mj-lt"/>
+                <a:ea typeface="+mj-ea"/>
+                <a:cs typeface="+mj-cs"/>
                 <a:sym typeface="Helvetica"/>
               </a:rPr>
               <a:t>想法很單純：能不能用 </a:t>
@@ -11580,9 +11344,9 @@
             </a:r>
             <a:r>
               <a:rPr>
-                <a:latin typeface="+mn-lt"/>
-                <a:ea typeface="+mn-ea"/>
-                <a:cs typeface="+mn-cs"/>
+                <a:latin typeface="+mj-lt"/>
+                <a:ea typeface="+mj-ea"/>
+                <a:cs typeface="+mj-cs"/>
                 <a:sym typeface="Helvetica"/>
               </a:rPr>
               <a:t>幫忙，把「做文件、對文件」這件事變輕鬆一點？</a:t>
@@ -11608,9 +11372,9 @@
             </a:r>
             <a:r>
               <a:rPr>
-                <a:latin typeface="+mn-lt"/>
-                <a:ea typeface="+mn-ea"/>
-                <a:cs typeface="+mn-cs"/>
+                <a:latin typeface="+mj-lt"/>
+                <a:ea typeface="+mj-ea"/>
+                <a:cs typeface="+mj-cs"/>
                 <a:sym typeface="Helvetica"/>
               </a:rPr>
               <a:t>所以就動手做了 </a:t>
@@ -11758,7 +11522,7 @@
         <p:spPr>
           <a:xfrm>
             <a:off x="731518" y="1691636"/>
-            <a:ext cx="10515604" cy="4206251"/>
+            <a:ext cx="10515604" cy="4206252"/>
           </a:xfrm>
           <a:prstGeom prst="rect">
             <a:avLst/>
@@ -11797,9 +11561,9 @@
             </a:r>
             <a:r>
               <a:rPr>
-                <a:latin typeface="+mn-lt"/>
-                <a:ea typeface="+mn-ea"/>
-                <a:cs typeface="+mn-cs"/>
+                <a:latin typeface="+mj-lt"/>
+                <a:ea typeface="+mj-ea"/>
+                <a:cs typeface="+mj-cs"/>
                 <a:sym typeface="Helvetica"/>
               </a:rPr>
               <a:t>東西放在同一個地方，大家連上去看到的都是同一份、也都是最新的</a:t>
@@ -11816,7 +11580,7 @@
         <p:spPr>
           <a:xfrm>
             <a:off x="685792" y="2860000"/>
-            <a:ext cx="4800014" cy="266701"/>
+            <a:ext cx="4800015" cy="266701"/>
           </a:xfrm>
           <a:prstGeom prst="rect">
             <a:avLst/>
@@ -11869,10 +11633,10 @@
         </p:nvGrpSpPr>
         <p:grpSpPr>
           <a:xfrm>
-            <a:off x="685789" y="3399989"/>
-            <a:ext cx="1350021" cy="700019"/>
-            <a:chOff x="-1" y="-1"/>
-            <a:chExt cx="1350020" cy="700018"/>
+            <a:off x="685787" y="3399987"/>
+            <a:ext cx="1350025" cy="700022"/>
+            <a:chOff x="-1" y="0"/>
+            <a:chExt cx="1350023" cy="700020"/>
           </a:xfrm>
         </p:grpSpPr>
         <p:sp>
@@ -11883,8 +11647,8 @@
           </p:nvSpPr>
           <p:spPr>
             <a:xfrm>
-              <a:off x="-2" y="-2"/>
-              <a:ext cx="1350022" cy="700020"/>
+              <a:off x="-2" y="-1"/>
+              <a:ext cx="1350025" cy="700021"/>
             </a:xfrm>
             <a:prstGeom prst="roundRect">
               <a:avLst>
@@ -11914,9 +11678,9 @@
                   <a:solidFill>
                     <a:srgbClr val="FFFFFF"/>
                   </a:solidFill>
-                  <a:latin typeface="+mj-lt"/>
-                  <a:ea typeface="+mj-ea"/>
-                  <a:cs typeface="+mj-cs"/>
+                  <a:latin typeface="+mn-lt"/>
+                  <a:ea typeface="+mn-ea"/>
+                  <a:cs typeface="+mn-cs"/>
                   <a:sym typeface="Calibri"/>
                 </a:defRPr>
               </a:pPr>
@@ -11931,8 +11695,8 @@
           </p:nvSpPr>
           <p:spPr>
             <a:xfrm>
-              <a:off x="45236" y="189980"/>
-              <a:ext cx="1259547" cy="320037"/>
+              <a:off x="45237" y="189981"/>
+              <a:ext cx="1259548" cy="320037"/>
             </a:xfrm>
             <a:prstGeom prst="rect">
               <a:avLst/>
@@ -11979,10 +11743,10 @@
         </p:nvGrpSpPr>
         <p:grpSpPr>
           <a:xfrm>
-            <a:off x="2385789" y="3399989"/>
-            <a:ext cx="1350020" cy="700019"/>
-            <a:chOff x="-1" y="-1"/>
-            <a:chExt cx="1350019" cy="700018"/>
+            <a:off x="2385788" y="3399987"/>
+            <a:ext cx="1350023" cy="700022"/>
+            <a:chOff x="-1" y="0"/>
+            <a:chExt cx="1350022" cy="700020"/>
           </a:xfrm>
         </p:grpSpPr>
         <p:sp>
@@ -11993,8 +11757,8 @@
           </p:nvSpPr>
           <p:spPr>
             <a:xfrm>
-              <a:off x="-2" y="-2"/>
-              <a:ext cx="1350021" cy="700020"/>
+              <a:off x="-2" y="-1"/>
+              <a:ext cx="1350024" cy="700021"/>
             </a:xfrm>
             <a:prstGeom prst="roundRect">
               <a:avLst>
@@ -12024,9 +11788,9 @@
                   <a:solidFill>
                     <a:srgbClr val="FFFFFF"/>
                   </a:solidFill>
-                  <a:latin typeface="+mj-lt"/>
-                  <a:ea typeface="+mj-ea"/>
-                  <a:cs typeface="+mj-cs"/>
+                  <a:latin typeface="+mn-lt"/>
+                  <a:ea typeface="+mn-ea"/>
+                  <a:cs typeface="+mn-cs"/>
                   <a:sym typeface="Calibri"/>
                 </a:defRPr>
               </a:pPr>
@@ -12041,8 +11805,8 @@
           </p:nvSpPr>
           <p:spPr>
             <a:xfrm>
-              <a:off x="45236" y="189980"/>
-              <a:ext cx="1259547" cy="320037"/>
+              <a:off x="45237" y="189981"/>
+              <a:ext cx="1259548" cy="320037"/>
             </a:xfrm>
             <a:prstGeom prst="rect">
               <a:avLst/>
@@ -12089,10 +11853,10 @@
         </p:nvGrpSpPr>
         <p:grpSpPr>
           <a:xfrm>
-            <a:off x="4085791" y="3399989"/>
-            <a:ext cx="1350020" cy="700019"/>
-            <a:chOff x="-1" y="-1"/>
-            <a:chExt cx="1350019" cy="700018"/>
+            <a:off x="4085789" y="3399987"/>
+            <a:ext cx="1350023" cy="700022"/>
+            <a:chOff x="-1" y="0"/>
+            <a:chExt cx="1350022" cy="700020"/>
           </a:xfrm>
         </p:grpSpPr>
         <p:sp>
@@ -12103,8 +11867,8 @@
           </p:nvSpPr>
           <p:spPr>
             <a:xfrm>
-              <a:off x="-2" y="-2"/>
-              <a:ext cx="1350021" cy="700020"/>
+              <a:off x="-2" y="-1"/>
+              <a:ext cx="1350024" cy="700021"/>
             </a:xfrm>
             <a:prstGeom prst="roundRect">
               <a:avLst>
@@ -12134,9 +11898,9 @@
                   <a:solidFill>
                     <a:srgbClr val="FFFFFF"/>
                   </a:solidFill>
-                  <a:latin typeface="+mj-lt"/>
-                  <a:ea typeface="+mj-ea"/>
-                  <a:cs typeface="+mj-cs"/>
+                  <a:latin typeface="+mn-lt"/>
+                  <a:ea typeface="+mn-ea"/>
+                  <a:cs typeface="+mn-cs"/>
                   <a:sym typeface="Calibri"/>
                 </a:defRPr>
               </a:pPr>
@@ -12151,8 +11915,8 @@
           </p:nvSpPr>
           <p:spPr>
             <a:xfrm>
-              <a:off x="45236" y="189980"/>
-              <a:ext cx="1259547" cy="320037"/>
+              <a:off x="45237" y="189981"/>
+              <a:ext cx="1259548" cy="320037"/>
             </a:xfrm>
             <a:prstGeom prst="rect">
               <a:avLst/>
@@ -12200,7 +11964,7 @@
         <p:spPr>
           <a:xfrm>
             <a:off x="685792" y="4319999"/>
-            <a:ext cx="4800014" cy="228601"/>
+            <a:ext cx="4800015" cy="228601"/>
           </a:xfrm>
           <a:prstGeom prst="rect">
             <a:avLst/>
@@ -12297,10 +12061,10 @@
         </p:nvGrpSpPr>
         <p:grpSpPr>
           <a:xfrm>
-            <a:off x="6399990" y="3259989"/>
-            <a:ext cx="1050020" cy="480020"/>
-            <a:chOff x="0" y="0"/>
-            <a:chExt cx="1050018" cy="480019"/>
+            <a:off x="6399988" y="3259987"/>
+            <a:ext cx="1050023" cy="480023"/>
+            <a:chOff x="-1" y="-1"/>
+            <a:chExt cx="1050021" cy="480021"/>
           </a:xfrm>
         </p:grpSpPr>
         <p:sp>
@@ -12311,8 +12075,8 @@
           </p:nvSpPr>
           <p:spPr>
             <a:xfrm>
-              <a:off x="-1" y="-1"/>
-              <a:ext cx="1050019" cy="480020"/>
+              <a:off x="-2" y="-2"/>
+              <a:ext cx="1050023" cy="480023"/>
             </a:xfrm>
             <a:prstGeom prst="roundRect">
               <a:avLst>
@@ -12342,9 +12106,9 @@
                   <a:solidFill>
                     <a:srgbClr val="FFFFFF"/>
                   </a:solidFill>
-                  <a:latin typeface="+mj-lt"/>
-                  <a:ea typeface="+mj-ea"/>
-                  <a:cs typeface="+mj-cs"/>
+                  <a:latin typeface="+mn-lt"/>
+                  <a:ea typeface="+mn-ea"/>
+                  <a:cs typeface="+mn-cs"/>
                   <a:sym typeface="Calibri"/>
                 </a:defRPr>
               </a:pPr>
@@ -12360,7 +12124,7 @@
           <p:spPr>
             <a:xfrm>
               <a:off x="37504" y="86334"/>
-              <a:ext cx="975011" cy="307337"/>
+              <a:ext cx="975013" cy="307337"/>
             </a:xfrm>
             <a:prstGeom prst="rect">
               <a:avLst/>
@@ -12408,7 +12172,7 @@
         <p:spPr>
           <a:xfrm>
             <a:off x="7599998" y="3370000"/>
-            <a:ext cx="620008" cy="250008"/>
+            <a:ext cx="620009" cy="250009"/>
           </a:xfrm>
           <a:prstGeom prst="rightArrow">
             <a:avLst>
@@ -12432,9 +12196,9 @@
                 <a:solidFill>
                   <a:srgbClr val="FFFFFF"/>
                 </a:solidFill>
-                <a:latin typeface="+mj-lt"/>
-                <a:ea typeface="+mj-ea"/>
-                <a:cs typeface="+mj-cs"/>
+                <a:latin typeface="+mn-lt"/>
+                <a:ea typeface="+mn-ea"/>
+                <a:cs typeface="+mn-cs"/>
                 <a:sym typeface="Calibri"/>
               </a:defRPr>
             </a:pPr>
@@ -12449,10 +12213,10 @@
         </p:nvGrpSpPr>
         <p:grpSpPr>
           <a:xfrm>
-            <a:off x="6399990" y="3879988"/>
-            <a:ext cx="1050020" cy="480019"/>
-            <a:chOff x="0" y="-1"/>
-            <a:chExt cx="1050018" cy="480018"/>
+            <a:off x="6399988" y="3879986"/>
+            <a:ext cx="1050023" cy="480022"/>
+            <a:chOff x="-1" y="0"/>
+            <a:chExt cx="1050021" cy="480020"/>
           </a:xfrm>
         </p:grpSpPr>
         <p:sp>
@@ -12463,8 +12227,8 @@
           </p:nvSpPr>
           <p:spPr>
             <a:xfrm>
-              <a:off x="-1" y="-2"/>
-              <a:ext cx="1050019" cy="480020"/>
+              <a:off x="-2" y="-1"/>
+              <a:ext cx="1050023" cy="480021"/>
             </a:xfrm>
             <a:prstGeom prst="roundRect">
               <a:avLst>
@@ -12494,9 +12258,9 @@
                   <a:solidFill>
                     <a:srgbClr val="FFFFFF"/>
                   </a:solidFill>
-                  <a:latin typeface="+mj-lt"/>
-                  <a:ea typeface="+mj-ea"/>
-                  <a:cs typeface="+mj-cs"/>
+                  <a:latin typeface="+mn-lt"/>
+                  <a:ea typeface="+mn-ea"/>
+                  <a:cs typeface="+mn-cs"/>
                   <a:sym typeface="Calibri"/>
                 </a:defRPr>
               </a:pPr>
@@ -12511,8 +12275,8 @@
           </p:nvSpPr>
           <p:spPr>
             <a:xfrm>
-              <a:off x="37504" y="86332"/>
-              <a:ext cx="975011" cy="307337"/>
+              <a:off x="37504" y="86333"/>
+              <a:ext cx="975013" cy="307337"/>
             </a:xfrm>
             <a:prstGeom prst="rect">
               <a:avLst/>
@@ -12560,7 +12324,7 @@
         <p:spPr>
           <a:xfrm>
             <a:off x="7599998" y="3989999"/>
-            <a:ext cx="620008" cy="250008"/>
+            <a:ext cx="620009" cy="250009"/>
           </a:xfrm>
           <a:prstGeom prst="rightArrow">
             <a:avLst>
@@ -12584,9 +12348,9 @@
                 <a:solidFill>
                   <a:srgbClr val="FFFFFF"/>
                 </a:solidFill>
-                <a:latin typeface="+mj-lt"/>
-                <a:ea typeface="+mj-ea"/>
-                <a:cs typeface="+mj-cs"/>
+                <a:latin typeface="+mn-lt"/>
+                <a:ea typeface="+mn-ea"/>
+                <a:cs typeface="+mn-cs"/>
                 <a:sym typeface="Calibri"/>
               </a:defRPr>
             </a:pPr>
@@ -12601,10 +12365,10 @@
         </p:nvGrpSpPr>
         <p:grpSpPr>
           <a:xfrm>
-            <a:off x="6399990" y="4499990"/>
-            <a:ext cx="1050020" cy="480021"/>
-            <a:chOff x="0" y="0"/>
-            <a:chExt cx="1050018" cy="480019"/>
+            <a:off x="6399988" y="4499989"/>
+            <a:ext cx="1050023" cy="480023"/>
+            <a:chOff x="-1" y="-1"/>
+            <a:chExt cx="1050021" cy="480022"/>
           </a:xfrm>
         </p:grpSpPr>
         <p:sp>
@@ -12615,8 +12379,8 @@
           </p:nvSpPr>
           <p:spPr>
             <a:xfrm>
-              <a:off x="-1" y="-1"/>
-              <a:ext cx="1050019" cy="480020"/>
+              <a:off x="-2" y="-2"/>
+              <a:ext cx="1050023" cy="480023"/>
             </a:xfrm>
             <a:prstGeom prst="roundRect">
               <a:avLst>
@@ -12646,9 +12410,9 @@
                   <a:solidFill>
                     <a:srgbClr val="FFFFFF"/>
                   </a:solidFill>
-                  <a:latin typeface="+mj-lt"/>
-                  <a:ea typeface="+mj-ea"/>
-                  <a:cs typeface="+mj-cs"/>
+                  <a:latin typeface="+mn-lt"/>
+                  <a:ea typeface="+mn-ea"/>
+                  <a:cs typeface="+mn-cs"/>
                   <a:sym typeface="Calibri"/>
                 </a:defRPr>
               </a:pPr>
@@ -12664,7 +12428,7 @@
           <p:spPr>
             <a:xfrm>
               <a:off x="37504" y="86334"/>
-              <a:ext cx="975011" cy="307337"/>
+              <a:ext cx="975013" cy="307337"/>
             </a:xfrm>
             <a:prstGeom prst="rect">
               <a:avLst/>
@@ -12712,7 +12476,7 @@
         <p:spPr>
           <a:xfrm>
             <a:off x="7599998" y="4610000"/>
-            <a:ext cx="620008" cy="250002"/>
+            <a:ext cx="620009" cy="250002"/>
           </a:xfrm>
           <a:prstGeom prst="rightArrow">
             <a:avLst>
@@ -12736,9 +12500,9 @@
                 <a:solidFill>
                   <a:srgbClr val="FFFFFF"/>
                 </a:solidFill>
-                <a:latin typeface="+mj-lt"/>
-                <a:ea typeface="+mj-ea"/>
-                <a:cs typeface="+mj-cs"/>
+                <a:latin typeface="+mn-lt"/>
+                <a:ea typeface="+mn-ea"/>
+                <a:cs typeface="+mn-cs"/>
                 <a:sym typeface="Calibri"/>
               </a:defRPr>
             </a:pPr>
@@ -12753,10 +12517,10 @@
         </p:nvGrpSpPr>
         <p:grpSpPr>
           <a:xfrm>
-            <a:off x="8499995" y="3399989"/>
-            <a:ext cx="2792856" cy="1360021"/>
-            <a:chOff x="-1" y="0"/>
-            <a:chExt cx="2792855" cy="1360019"/>
+            <a:off x="8499994" y="3399987"/>
+            <a:ext cx="2792859" cy="1360023"/>
+            <a:chOff x="0" y="0"/>
+            <a:chExt cx="2792858" cy="1360021"/>
           </a:xfrm>
         </p:grpSpPr>
         <p:sp>
@@ -12767,8 +12531,8 @@
           </p:nvSpPr>
           <p:spPr>
             <a:xfrm>
-              <a:off x="-2" y="-1"/>
-              <a:ext cx="2792857" cy="1360020"/>
+              <a:off x="-1" y="-1"/>
+              <a:ext cx="2792859" cy="1360022"/>
             </a:xfrm>
             <a:prstGeom prst="roundRect">
               <a:avLst>
@@ -12795,9 +12559,9 @@
                   <a:solidFill>
                     <a:srgbClr val="FFFFFF"/>
                   </a:solidFill>
-                  <a:latin typeface="+mj-lt"/>
-                  <a:ea typeface="+mj-ea"/>
-                  <a:cs typeface="+mj-cs"/>
+                  <a:latin typeface="+mn-lt"/>
+                  <a:ea typeface="+mn-ea"/>
+                  <a:cs typeface="+mn-cs"/>
                   <a:sym typeface="Calibri"/>
                 </a:defRPr>
               </a:pPr>
@@ -12812,8 +12576,8 @@
           </p:nvSpPr>
           <p:spPr>
             <a:xfrm>
-              <a:off x="62078" y="386631"/>
-              <a:ext cx="2668696" cy="586737"/>
+              <a:off x="62079" y="386631"/>
+              <a:ext cx="2668698" cy="586737"/>
             </a:xfrm>
             <a:prstGeom prst="rect">
               <a:avLst/>
@@ -13042,7 +12806,7 @@
         <p:spPr>
           <a:xfrm>
             <a:off x="731518" y="1691636"/>
-            <a:ext cx="10515604" cy="4206251"/>
+            <a:ext cx="10515604" cy="4206252"/>
           </a:xfrm>
           <a:prstGeom prst="rect">
             <a:avLst/>
@@ -13081,9 +12845,9 @@
             </a:r>
             <a:r>
               <a:rPr>
-                <a:latin typeface="+mn-lt"/>
-                <a:ea typeface="+mn-ea"/>
-                <a:cs typeface="+mn-cs"/>
+                <a:latin typeface="+mj-lt"/>
+                <a:ea typeface="+mj-ea"/>
+                <a:cs typeface="+mj-cs"/>
                 <a:sym typeface="Helvetica"/>
               </a:rPr>
               <a:t>先從一支單一 </a:t>
@@ -13093,9 +12857,9 @@
             </a:r>
             <a:r>
               <a:rPr>
-                <a:latin typeface="+mn-lt"/>
-                <a:ea typeface="+mn-ea"/>
-                <a:cs typeface="+mn-cs"/>
+                <a:latin typeface="+mj-lt"/>
+                <a:ea typeface="+mj-ea"/>
+                <a:cs typeface="+mj-cs"/>
                 <a:sym typeface="Helvetica"/>
               </a:rPr>
               <a:t>檔開始，一個人就能做完，快速驗證想法可不可行，不做過度設計</a:t>
@@ -13121,9 +12885,9 @@
             </a:r>
             <a:r>
               <a:rPr>
-                <a:latin typeface="+mn-lt"/>
-                <a:ea typeface="+mn-ea"/>
-                <a:cs typeface="+mn-cs"/>
+                <a:latin typeface="+mj-lt"/>
+                <a:ea typeface="+mj-ea"/>
+                <a:cs typeface="+mj-cs"/>
                 <a:sym typeface="Helvetica"/>
               </a:rPr>
               <a:t>確定方向對了，才往剛剛講的那種「大家連同一個地方」的系統走</a:t>
@@ -13149,9 +12913,9 @@
             </a:r>
             <a:r>
               <a:rPr>
-                <a:latin typeface="+mn-lt"/>
-                <a:ea typeface="+mn-ea"/>
-                <a:cs typeface="+mn-cs"/>
+                <a:latin typeface="+mj-lt"/>
+                <a:ea typeface="+mj-ea"/>
+                <a:cs typeface="+mj-cs"/>
                 <a:sym typeface="Helvetica"/>
               </a:rPr>
               <a:t>過程就是做出來、自己用用看，好用的留下、不好用的直接砍掉</a:t>
@@ -13319,9 +13083,9 @@
                 <a:solidFill>
                   <a:srgbClr val="FFFFFF"/>
                 </a:solidFill>
-                <a:latin typeface="+mj-lt"/>
-                <a:ea typeface="+mj-ea"/>
-                <a:cs typeface="+mj-cs"/>
+                <a:latin typeface="+mn-lt"/>
+                <a:ea typeface="+mn-ea"/>
+                <a:cs typeface="+mn-cs"/>
                 <a:sym typeface="Calibri"/>
               </a:defRPr>
             </a:pPr>
@@ -13404,9 +13168,9 @@
                 <a:solidFill>
                   <a:srgbClr val="FFFFFF"/>
                 </a:solidFill>
-                <a:latin typeface="+mj-lt"/>
-                <a:ea typeface="+mj-ea"/>
-                <a:cs typeface="+mj-cs"/>
+                <a:latin typeface="+mn-lt"/>
+                <a:ea typeface="+mn-ea"/>
+                <a:cs typeface="+mn-cs"/>
                 <a:sym typeface="Calibri"/>
               </a:defRPr>
             </a:pPr>
@@ -13721,9 +13485,9 @@
                 <a:solidFill>
                   <a:srgbClr val="FFFFFF"/>
                 </a:solidFill>
-                <a:latin typeface="+mj-lt"/>
-                <a:ea typeface="+mj-ea"/>
-                <a:cs typeface="+mj-cs"/>
+                <a:latin typeface="+mn-lt"/>
+                <a:ea typeface="+mn-ea"/>
+                <a:cs typeface="+mn-cs"/>
                 <a:sym typeface="Calibri"/>
               </a:defRPr>
             </a:pPr>
@@ -13739,7 +13503,7 @@
         <p:spPr>
           <a:xfrm>
             <a:off x="2743199" y="1783076"/>
-            <a:ext cx="5508562" cy="841256"/>
+            <a:ext cx="5508562" cy="841257"/>
           </a:xfrm>
           <a:prstGeom prst="rect">
             <a:avLst/>
@@ -13885,9 +13649,9 @@
                 <a:solidFill>
                   <a:srgbClr val="FFFFFF"/>
                 </a:solidFill>
-                <a:latin typeface="+mj-lt"/>
-                <a:ea typeface="+mj-ea"/>
-                <a:cs typeface="+mj-cs"/>
+                <a:latin typeface="+mn-lt"/>
+                <a:ea typeface="+mn-ea"/>
+                <a:cs typeface="+mn-cs"/>
                 <a:sym typeface="Calibri"/>
               </a:defRPr>
             </a:pPr>
@@ -13903,7 +13667,7 @@
         <p:spPr>
           <a:xfrm>
             <a:off x="2743199" y="2624327"/>
-            <a:ext cx="5508562" cy="841252"/>
+            <a:ext cx="5508562" cy="841253"/>
           </a:xfrm>
           <a:prstGeom prst="rect">
             <a:avLst/>
@@ -14049,9 +13813,9 @@
                 <a:solidFill>
                   <a:srgbClr val="FFFFFF"/>
                 </a:solidFill>
-                <a:latin typeface="+mj-lt"/>
-                <a:ea typeface="+mj-ea"/>
-                <a:cs typeface="+mj-cs"/>
+                <a:latin typeface="+mn-lt"/>
+                <a:ea typeface="+mn-ea"/>
+                <a:cs typeface="+mn-cs"/>
                 <a:sym typeface="Calibri"/>
               </a:defRPr>
             </a:pPr>
@@ -14067,7 +13831,7 @@
         <p:spPr>
           <a:xfrm>
             <a:off x="2743199" y="3465576"/>
-            <a:ext cx="5508562" cy="841254"/>
+            <a:ext cx="5508562" cy="841255"/>
           </a:xfrm>
           <a:prstGeom prst="rect">
             <a:avLst/>
@@ -14201,9 +13965,9 @@
                 <a:solidFill>
                   <a:srgbClr val="FFFFFF"/>
                 </a:solidFill>
-                <a:latin typeface="+mj-lt"/>
-                <a:ea typeface="+mj-ea"/>
-                <a:cs typeface="+mj-cs"/>
+                <a:latin typeface="+mn-lt"/>
+                <a:ea typeface="+mn-ea"/>
+                <a:cs typeface="+mn-cs"/>
                 <a:sym typeface="Calibri"/>
               </a:defRPr>
             </a:pPr>
@@ -14219,7 +13983,7 @@
         <p:spPr>
           <a:xfrm>
             <a:off x="2743199" y="4306823"/>
-            <a:ext cx="5508562" cy="841254"/>
+            <a:ext cx="5508562" cy="841255"/>
           </a:xfrm>
           <a:prstGeom prst="rect">
             <a:avLst/>
@@ -14255,17 +14019,17 @@
             </a:r>
             <a:r>
               <a:rPr>
-                <a:latin typeface="+mn-lt"/>
-                <a:ea typeface="+mn-ea"/>
-                <a:cs typeface="+mn-cs"/>
+                <a:latin typeface="+mj-lt"/>
+                <a:ea typeface="+mj-ea"/>
+                <a:cs typeface="+mj-cs"/>
                 <a:sym typeface="Helvetica"/>
               </a:rPr>
               <a:t>：任務導向重構</a:t>
             </a:r>
             <a:endParaRPr>
-              <a:latin typeface="+mn-lt"/>
-              <a:ea typeface="+mn-ea"/>
-              <a:cs typeface="+mn-cs"/>
+              <a:latin typeface="+mj-lt"/>
+              <a:ea typeface="+mj-ea"/>
+              <a:cs typeface="+mj-cs"/>
               <a:sym typeface="Helvetica"/>
             </a:endParaRPr>
           </a:p>
@@ -14316,7 +14080,7 @@
         <p:spPr>
           <a:xfrm>
             <a:off x="8447478" y="1783077"/>
-            <a:ext cx="2845368" cy="203201"/>
+            <a:ext cx="2845369" cy="203201"/>
           </a:xfrm>
           <a:prstGeom prst="rect">
             <a:avLst/>
@@ -14352,9 +14116,9 @@
             </a:r>
             <a:r>
               <a:rPr>
-                <a:latin typeface="+mn-lt"/>
-                <a:ea typeface="+mn-ea"/>
-                <a:cs typeface="+mn-cs"/>
+                <a:latin typeface="+mj-lt"/>
+                <a:ea typeface="+mj-ea"/>
+                <a:cs typeface="+mj-cs"/>
                 <a:sym typeface="Helvetica"/>
               </a:rPr>
               <a:t>・ </a:t>
@@ -14364,9 +14128,9 @@
             </a:r>
             <a:r>
               <a:rPr>
-                <a:latin typeface="+mn-lt"/>
-                <a:ea typeface="+mn-ea"/>
-                <a:cs typeface="+mn-cs"/>
+                <a:latin typeface="+mj-lt"/>
+                <a:ea typeface="+mj-ea"/>
+                <a:cs typeface="+mj-cs"/>
                 <a:sym typeface="Helvetica"/>
               </a:rPr>
               <a:t>檔 ・ </a:t>
@@ -14386,7 +14150,7 @@
         <p:spPr>
           <a:xfrm>
             <a:off x="8447478" y="2203080"/>
-            <a:ext cx="2845368" cy="203201"/>
+            <a:ext cx="2845369" cy="203201"/>
           </a:xfrm>
           <a:prstGeom prst="rect">
             <a:avLst/>
@@ -14440,7 +14204,7 @@
         <p:spPr>
           <a:xfrm>
             <a:off x="8447478" y="2624327"/>
-            <a:ext cx="2845368" cy="203201"/>
+            <a:ext cx="2845369" cy="203201"/>
           </a:xfrm>
           <a:prstGeom prst="rect">
             <a:avLst/>
@@ -14476,9 +14240,9 @@
             </a:r>
             <a:r>
               <a:rPr>
-                <a:latin typeface="+mn-lt"/>
-                <a:ea typeface="+mn-ea"/>
-                <a:cs typeface="+mn-cs"/>
+                <a:latin typeface="+mj-lt"/>
+                <a:ea typeface="+mj-ea"/>
+                <a:cs typeface="+mj-cs"/>
                 <a:sym typeface="Helvetica"/>
               </a:rPr>
               <a:t>・ </a:t>
@@ -14488,9 +14252,9 @@
             </a:r>
             <a:r>
               <a:rPr>
-                <a:latin typeface="+mn-lt"/>
-                <a:ea typeface="+mn-ea"/>
-                <a:cs typeface="+mn-cs"/>
+                <a:latin typeface="+mj-lt"/>
+                <a:ea typeface="+mj-ea"/>
+                <a:cs typeface="+mj-cs"/>
                 <a:sym typeface="Helvetica"/>
               </a:rPr>
               <a:t>檔 ・ </a:t>
@@ -14510,7 +14274,7 @@
         <p:spPr>
           <a:xfrm>
             <a:off x="8447478" y="3044326"/>
-            <a:ext cx="2845368" cy="203201"/>
+            <a:ext cx="2845369" cy="203201"/>
           </a:xfrm>
           <a:prstGeom prst="rect">
             <a:avLst/>
@@ -14564,7 +14328,7 @@
         <p:spPr>
           <a:xfrm>
             <a:off x="8447478" y="3465576"/>
-            <a:ext cx="2845368" cy="203201"/>
+            <a:ext cx="2845369" cy="203201"/>
           </a:xfrm>
           <a:prstGeom prst="rect">
             <a:avLst/>
@@ -14600,9 +14364,9 @@
             </a:r>
             <a:r>
               <a:rPr>
-                <a:latin typeface="+mn-lt"/>
-                <a:ea typeface="+mn-ea"/>
-                <a:cs typeface="+mn-cs"/>
+                <a:latin typeface="+mj-lt"/>
+                <a:ea typeface="+mj-ea"/>
+                <a:cs typeface="+mj-cs"/>
                 <a:sym typeface="Helvetica"/>
               </a:rPr>
               <a:t>・ </a:t>
@@ -14612,9 +14376,9 @@
             </a:r>
             <a:r>
               <a:rPr>
-                <a:latin typeface="+mn-lt"/>
-                <a:ea typeface="+mn-ea"/>
-                <a:cs typeface="+mn-cs"/>
+                <a:latin typeface="+mj-lt"/>
+                <a:ea typeface="+mj-ea"/>
+                <a:cs typeface="+mj-cs"/>
                 <a:sym typeface="Helvetica"/>
               </a:rPr>
               <a:t>檔 ・ </a:t>
@@ -14634,7 +14398,7 @@
         <p:spPr>
           <a:xfrm>
             <a:off x="8447478" y="3885576"/>
-            <a:ext cx="2845368" cy="203201"/>
+            <a:ext cx="2845369" cy="203201"/>
           </a:xfrm>
           <a:prstGeom prst="rect">
             <a:avLst/>
@@ -14688,7 +14452,7 @@
         <p:spPr>
           <a:xfrm>
             <a:off x="8447478" y="4306823"/>
-            <a:ext cx="2845368" cy="203201"/>
+            <a:ext cx="2845369" cy="203201"/>
           </a:xfrm>
           <a:prstGeom prst="rect">
             <a:avLst/>
@@ -14724,9 +14488,9 @@
             </a:r>
             <a:r>
               <a:rPr>
-                <a:latin typeface="+mn-lt"/>
-                <a:ea typeface="+mn-ea"/>
-                <a:cs typeface="+mn-cs"/>
+                <a:latin typeface="+mj-lt"/>
+                <a:ea typeface="+mj-ea"/>
+                <a:cs typeface="+mj-cs"/>
                 <a:sym typeface="Helvetica"/>
               </a:rPr>
               <a:t>・ </a:t>
@@ -14736,9 +14500,9 @@
             </a:r>
             <a:r>
               <a:rPr>
-                <a:latin typeface="+mn-lt"/>
-                <a:ea typeface="+mn-ea"/>
-                <a:cs typeface="+mn-cs"/>
+                <a:latin typeface="+mj-lt"/>
+                <a:ea typeface="+mj-ea"/>
+                <a:cs typeface="+mj-cs"/>
                 <a:sym typeface="Helvetica"/>
               </a:rPr>
               <a:t>檔 ・ </a:t>
@@ -14758,7 +14522,7 @@
         <p:spPr>
           <a:xfrm>
             <a:off x="8447478" y="4726823"/>
-            <a:ext cx="2845368" cy="203201"/>
+            <a:ext cx="2845369" cy="203201"/>
           </a:xfrm>
           <a:prstGeom prst="rect">
             <a:avLst/>
@@ -14933,7 +14697,7 @@
         <p:spPr>
           <a:xfrm>
             <a:off x="731518" y="1691636"/>
-            <a:ext cx="10515604" cy="4206251"/>
+            <a:ext cx="10515604" cy="4206252"/>
           </a:xfrm>
           <a:prstGeom prst="rect">
             <a:avLst/>
@@ -14972,9 +14736,9 @@
             </a:r>
             <a:r>
               <a:rPr>
-                <a:latin typeface="+mn-lt"/>
-                <a:ea typeface="+mn-ea"/>
-                <a:cs typeface="+mn-cs"/>
+                <a:latin typeface="+mj-lt"/>
+                <a:ea typeface="+mj-ea"/>
+                <a:cs typeface="+mj-cs"/>
                 <a:sym typeface="Helvetica"/>
               </a:rPr>
               <a:t>：從一支單機 </a:t>
@@ -14984,9 +14748,9 @@
             </a:r>
             <a:r>
               <a:rPr>
-                <a:latin typeface="+mn-lt"/>
-                <a:ea typeface="+mn-ea"/>
-                <a:cs typeface="+mn-cs"/>
+                <a:latin typeface="+mj-lt"/>
+                <a:ea typeface="+mj-ea"/>
+                <a:cs typeface="+mj-cs"/>
                 <a:sym typeface="Helvetica"/>
               </a:rPr>
               <a:t>，變成大家連得上、資料存得住的系統</a:t>
@@ -15012,9 +14776,9 @@
             </a:r>
             <a:r>
               <a:rPr>
-                <a:latin typeface="+mn-lt"/>
-                <a:ea typeface="+mn-ea"/>
-                <a:cs typeface="+mn-cs"/>
+                <a:latin typeface="+mj-lt"/>
+                <a:ea typeface="+mj-ea"/>
+                <a:cs typeface="+mj-cs"/>
                 <a:sym typeface="Helvetica"/>
               </a:rPr>
               <a:t>：把看板做起來，也把開發流程順出來，後面要長新東西就快很多</a:t>
@@ -15040,9 +14804,9 @@
             </a:r>
             <a:r>
               <a:rPr>
-                <a:latin typeface="+mn-lt"/>
-                <a:ea typeface="+mn-ea"/>
-                <a:cs typeface="+mn-cs"/>
+                <a:latin typeface="+mj-lt"/>
+                <a:ea typeface="+mj-ea"/>
+                <a:cs typeface="+mj-cs"/>
                 <a:sym typeface="Helvetica"/>
               </a:rPr>
               <a:t>：想把兩套的特色合在一起時卡住了，目標互相打架，乾脆重新確立方向</a:t>
@@ -15052,9 +14816,9 @@
             </a:r>
             <a:r>
               <a:rPr>
-                <a:latin typeface="+mn-lt"/>
-                <a:ea typeface="+mn-ea"/>
-                <a:cs typeface="+mn-cs"/>
+                <a:latin typeface="+mj-lt"/>
+                <a:ea typeface="+mj-ea"/>
+                <a:cs typeface="+mj-cs"/>
                 <a:sym typeface="Helvetica"/>
               </a:rPr>
               <a:t>任務導向</a:t>
@@ -15257,7 +15021,7 @@
         <p:spPr>
           <a:xfrm>
             <a:off x="731518" y="2148836"/>
-            <a:ext cx="10515604" cy="4206251"/>
+            <a:ext cx="10515604" cy="4206252"/>
           </a:xfrm>
           <a:prstGeom prst="rect">
             <a:avLst/>
@@ -15296,9 +15060,9 @@
             </a:r>
             <a:r>
               <a:rPr>
-                <a:latin typeface="+mn-lt"/>
-                <a:ea typeface="+mn-ea"/>
-                <a:cs typeface="+mn-cs"/>
+                <a:latin typeface="+mj-lt"/>
+                <a:ea typeface="+mj-ea"/>
+                <a:cs typeface="+mj-cs"/>
                 <a:sym typeface="Helvetica"/>
               </a:rPr>
               <a:t>不用安裝、不用連網路，檔案傳給誰都能直接打開來用</a:t>
@@ -15324,9 +15088,9 @@
             </a:r>
             <a:r>
               <a:rPr>
-                <a:latin typeface="+mn-lt"/>
-                <a:ea typeface="+mn-ea"/>
-                <a:cs typeface="+mn-cs"/>
+                <a:latin typeface="+mj-lt"/>
+                <a:ea typeface="+mj-ea"/>
+                <a:cs typeface="+mj-cs"/>
                 <a:sym typeface="Helvetica"/>
               </a:rPr>
               <a:t>用樹狀結構把工作拆項目，最多五層，雙擊就能改標題，也能直接拖曳搬位置</a:t>
@@ -15352,9 +15116,9 @@
             </a:r>
             <a:r>
               <a:rPr>
-                <a:latin typeface="+mn-lt"/>
-                <a:ea typeface="+mn-ea"/>
-                <a:cs typeface="+mn-cs"/>
+                <a:latin typeface="+mj-lt"/>
+                <a:ea typeface="+mj-ea"/>
+                <a:cs typeface="+mj-cs"/>
                 <a:sym typeface="Helvetica"/>
               </a:rPr>
               <a:t>上層的完成狀態由下層自動算出來，不能手動亂填</a:t>
@@ -15364,9 +15128,9 @@
             </a:r>
             <a:r>
               <a:rPr>
-                <a:latin typeface="+mn-lt"/>
-                <a:ea typeface="+mn-ea"/>
-                <a:cs typeface="+mn-cs"/>
+                <a:latin typeface="+mj-lt"/>
+                <a:ea typeface="+mj-ea"/>
+                <a:cs typeface="+mj-cs"/>
                 <a:sym typeface="Helvetica"/>
               </a:rPr>
               <a:t>這個設計後來每一代都留著</a:t>
@@ -15392,9 +15156,9 @@
             </a:r>
             <a:r>
               <a:rPr>
-                <a:latin typeface="+mn-lt"/>
-                <a:ea typeface="+mn-ea"/>
-                <a:cs typeface="+mn-cs"/>
+                <a:latin typeface="+mj-lt"/>
+                <a:ea typeface="+mj-ea"/>
+                <a:cs typeface="+mj-cs"/>
                 <a:sym typeface="Helvetica"/>
               </a:rPr>
               <a:t>可以匯出入 </a:t>
@@ -15404,9 +15168,9 @@
             </a:r>
             <a:r>
               <a:rPr>
-                <a:latin typeface="+mn-lt"/>
-                <a:ea typeface="+mn-ea"/>
-                <a:cs typeface="+mn-cs"/>
+                <a:latin typeface="+mj-lt"/>
+                <a:ea typeface="+mj-ea"/>
+                <a:cs typeface="+mj-cs"/>
                 <a:sym typeface="Helvetica"/>
               </a:rPr>
               <a:t>／</a:t>
@@ -15416,9 +15180,9 @@
             </a:r>
             <a:r>
               <a:rPr>
-                <a:latin typeface="+mn-lt"/>
-                <a:ea typeface="+mn-ea"/>
-                <a:cs typeface="+mn-cs"/>
+                <a:latin typeface="+mj-lt"/>
+                <a:ea typeface="+mj-ea"/>
+                <a:cs typeface="+mj-cs"/>
                 <a:sym typeface="Helvetica"/>
               </a:rPr>
               <a:t>，銜接大家原本就在用的檔案流程</a:t>
@@ -15435,7 +15199,7 @@
         <p:spPr>
           <a:xfrm>
             <a:off x="594359" y="5560000"/>
-            <a:ext cx="30008" cy="880000"/>
+            <a:ext cx="30009" cy="880000"/>
           </a:xfrm>
           <a:prstGeom prst="rect">
             <a:avLst/>
@@ -15456,9 +15220,9 @@
                 <a:solidFill>
                   <a:srgbClr val="FFFFFF"/>
                 </a:solidFill>
-                <a:latin typeface="+mj-lt"/>
-                <a:ea typeface="+mj-ea"/>
-                <a:cs typeface="+mj-cs"/>
+                <a:latin typeface="+mn-lt"/>
+                <a:ea typeface="+mn-ea"/>
+                <a:cs typeface="+mn-cs"/>
                 <a:sym typeface="Calibri"/>
               </a:defRPr>
             </a:pPr>
@@ -15609,14 +15373,14 @@
     </a:clrScheme>
     <a:fontScheme name="Office Theme">
       <a:majorFont>
+        <a:latin typeface="Helvetica"/>
+        <a:ea typeface="Helvetica"/>
+        <a:cs typeface="Helvetica"/>
+      </a:majorFont>
+      <a:minorFont>
         <a:latin typeface="Calibri"/>
         <a:ea typeface="Calibri"/>
         <a:cs typeface="Calibri"/>
-      </a:majorFont>
-      <a:minorFont>
-        <a:latin typeface="Helvetica"/>
-        <a:ea typeface="Helvetica"/>
-        <a:cs typeface="Helvetica"/>
       </a:minorFont>
     </a:fontScheme>
     <a:fmtScheme name="Office Theme">
@@ -15821,9 +15585,9 @@
             </a:solidFill>
             <a:effectLst/>
             <a:uFillTx/>
-            <a:latin typeface="+mn-lt"/>
-            <a:ea typeface="+mn-ea"/>
-            <a:cs typeface="+mn-cs"/>
+            <a:latin typeface="+mj-lt"/>
+            <a:ea typeface="+mj-ea"/>
+            <a:cs typeface="+mj-cs"/>
             <a:sym typeface="Helvetica"/>
           </a:defRPr>
         </a:defPPr>
@@ -16398,9 +16162,9 @@
             </a:solidFill>
             <a:effectLst/>
             <a:uFillTx/>
-            <a:latin typeface="+mn-lt"/>
-            <a:ea typeface="+mn-ea"/>
-            <a:cs typeface="+mn-cs"/>
+            <a:latin typeface="+mj-lt"/>
+            <a:ea typeface="+mj-ea"/>
+            <a:cs typeface="+mj-cs"/>
             <a:sym typeface="Helvetica"/>
           </a:defRPr>
         </a:defPPr>
@@ -16693,14 +16457,14 @@
     </a:clrScheme>
     <a:fontScheme name="Office Theme">
       <a:majorFont>
+        <a:latin typeface="Helvetica"/>
+        <a:ea typeface="Helvetica"/>
+        <a:cs typeface="Helvetica"/>
+      </a:majorFont>
+      <a:minorFont>
         <a:latin typeface="Calibri"/>
         <a:ea typeface="Calibri"/>
         <a:cs typeface="Calibri"/>
-      </a:majorFont>
-      <a:minorFont>
-        <a:latin typeface="Helvetica"/>
-        <a:ea typeface="Helvetica"/>
-        <a:cs typeface="Helvetica"/>
       </a:minorFont>
     </a:fontScheme>
     <a:fmtScheme name="Office Theme">
@@ -16905,9 +16669,9 @@
             </a:solidFill>
             <a:effectLst/>
             <a:uFillTx/>
-            <a:latin typeface="+mn-lt"/>
-            <a:ea typeface="+mn-ea"/>
-            <a:cs typeface="+mn-cs"/>
+            <a:latin typeface="+mj-lt"/>
+            <a:ea typeface="+mj-ea"/>
+            <a:cs typeface="+mj-cs"/>
             <a:sym typeface="Helvetica"/>
           </a:defRPr>
         </a:defPPr>
@@ -17482,9 +17246,9 @@
             </a:solidFill>
             <a:effectLst/>
             <a:uFillTx/>
-            <a:latin typeface="+mn-lt"/>
-            <a:ea typeface="+mn-ea"/>
-            <a:cs typeface="+mn-cs"/>
+            <a:latin typeface="+mj-lt"/>
+            <a:ea typeface="+mj-ea"/>
+            <a:cs typeface="+mj-cs"/>
             <a:sym typeface="Helvetica"/>
           </a:defRPr>
         </a:defPPr>
